--- a/docs/theme-preview/pptx/neomorphism.pptx
+++ b/docs/theme-preview/pptx/neomorphism.pptx
@@ -366,7 +366,7 @@
             <a:pPr>
               <a:defRPr sz="1100" b="0" i="0" u="none" strike="noStrike">
                 <a:solidFill>
-                  <a:srgbClr val="243041"/>
+                  <a:srgbClr val="111111"/>
                 </a:solidFill>
                 <a:latin typeface="Pretendard"/>
               </a:defRPr>
@@ -418,7 +418,7 @@
             <a:pPr>
               <a:defRPr sz="1100" b="0" i="0" u="none" strike="noStrike">
                 <a:solidFill>
-                  <a:srgbClr val="526579"/>
+                  <a:srgbClr val="8C8C8C"/>
                 </a:solidFill>
                 <a:latin typeface="Pretendard"/>
               </a:defRPr>
@@ -448,7 +448,7 @@
           <a:pPr>
             <a:defRPr sz="1100">
               <a:solidFill>
-                <a:srgbClr val="526579"/>
+                <a:srgbClr val="8C8C8C"/>
               </a:solidFill>
               <a:latin typeface="Pretendard"/>
               <a:cs typeface="Pretendard"/>
@@ -626,7 +626,7 @@
             <a:pPr>
               <a:defRPr sz="1100" b="0" i="0" u="none" strike="noStrike">
                 <a:solidFill>
-                  <a:srgbClr val="243041"/>
+                  <a:srgbClr val="111111"/>
                 </a:solidFill>
                 <a:latin typeface="Pretendard"/>
               </a:defRPr>
@@ -678,7 +678,7 @@
             <a:pPr>
               <a:defRPr sz="1100" b="0" i="0" u="none" strike="noStrike">
                 <a:solidFill>
-                  <a:srgbClr val="526579"/>
+                  <a:srgbClr val="8C8C8C"/>
                 </a:solidFill>
                 <a:latin typeface="Pretendard"/>
               </a:defRPr>
@@ -4064,7 +4064,7 @@
             <a:r>
               <a:rPr lang="en-US" sz="3400" b="1" dirty="0">
                 <a:solidFill>
-                  <a:srgbClr val="243041"/>
+                  <a:srgbClr val="111111"/>
                 </a:solidFill>
                 <a:latin typeface="Pretendard" pitchFamily="34" charset="0"/>
                 <a:ea typeface="Pretendard" pitchFamily="34" charset="-122"/>
@@ -4123,7 +4123,7 @@
             <a:r>
               <a:rPr lang="en-US" sz="2200" dirty="0">
                 <a:solidFill>
-                  <a:srgbClr val="243041"/>
+                  <a:srgbClr val="111111"/>
                 </a:solidFill>
                 <a:latin typeface="Pretendard" pitchFamily="34" charset="0"/>
                 <a:ea typeface="Pretendard" pitchFamily="34" charset="-122"/>
@@ -4182,7 +4182,7 @@
             <a:r>
               <a:rPr lang="en-US" sz="2200" dirty="0">
                 <a:solidFill>
-                  <a:srgbClr val="243041"/>
+                  <a:srgbClr val="111111"/>
                 </a:solidFill>
                 <a:latin typeface="Pretendard" pitchFamily="34" charset="0"/>
                 <a:ea typeface="Pretendard" pitchFamily="34" charset="-122"/>
@@ -4384,7 +4384,7 @@
             <a:r>
               <a:rPr lang="en-US" sz="3400" b="1" dirty="0">
                 <a:solidFill>
-                  <a:srgbClr val="243041"/>
+                  <a:srgbClr val="111111"/>
                 </a:solidFill>
                 <a:latin typeface="Pretendard" pitchFamily="34" charset="0"/>
                 <a:ea typeface="Pretendard" pitchFamily="34" charset="-122"/>
@@ -4680,7 +4680,7 @@
             <a:r>
               <a:rPr lang="en-US" sz="1600" dirty="0">
                 <a:solidFill>
-                  <a:srgbClr val="243041"/>
+                  <a:srgbClr val="111111"/>
                 </a:solidFill>
                 <a:latin typeface="Pretendard" pitchFamily="34" charset="0"/>
                 <a:ea typeface="Pretendard" pitchFamily="34" charset="-122"/>
@@ -4856,7 +4856,7 @@
             <a:r>
               <a:rPr lang="en-US" sz="1600" dirty="0">
                 <a:solidFill>
-                  <a:srgbClr val="243041"/>
+                  <a:srgbClr val="111111"/>
                 </a:solidFill>
                 <a:latin typeface="Pretendard" pitchFamily="34" charset="0"/>
                 <a:ea typeface="Pretendard" pitchFamily="34" charset="-122"/>
@@ -5032,7 +5032,7 @@
             <a:r>
               <a:rPr lang="en-US" sz="1600" dirty="0">
                 <a:solidFill>
-                  <a:srgbClr val="243041"/>
+                  <a:srgbClr val="111111"/>
                 </a:solidFill>
                 <a:latin typeface="Pretendard" pitchFamily="34" charset="0"/>
                 <a:ea typeface="Pretendard" pitchFamily="34" charset="-122"/>
@@ -5208,7 +5208,7 @@
             <a:r>
               <a:rPr lang="en-US" sz="1600" dirty="0">
                 <a:solidFill>
-                  <a:srgbClr val="243041"/>
+                  <a:srgbClr val="111111"/>
                 </a:solidFill>
                 <a:latin typeface="Pretendard" pitchFamily="34" charset="0"/>
                 <a:ea typeface="Pretendard" pitchFamily="34" charset="-122"/>
@@ -5384,7 +5384,7 @@
             <a:r>
               <a:rPr lang="en-US" sz="1600" dirty="0">
                 <a:solidFill>
-                  <a:srgbClr val="243041"/>
+                  <a:srgbClr val="111111"/>
                 </a:solidFill>
                 <a:latin typeface="Pretendard" pitchFamily="34" charset="0"/>
                 <a:ea typeface="Pretendard" pitchFamily="34" charset="-122"/>
@@ -5560,7 +5560,7 @@
             <a:r>
               <a:rPr lang="en-US" sz="1600" dirty="0">
                 <a:solidFill>
-                  <a:srgbClr val="243041"/>
+                  <a:srgbClr val="111111"/>
                 </a:solidFill>
                 <a:latin typeface="Pretendard" pitchFamily="34" charset="0"/>
                 <a:ea typeface="Pretendard" pitchFamily="34" charset="-122"/>
@@ -6418,7 +6418,7 @@
             <a:r>
               <a:rPr lang="en-US" sz="3400" b="1" dirty="0">
                 <a:solidFill>
-                  <a:srgbClr val="243041"/>
+                  <a:srgbClr val="111111"/>
                 </a:solidFill>
                 <a:latin typeface="Pretendard" pitchFamily="34" charset="0"/>
                 <a:ea typeface="Pretendard" pitchFamily="34" charset="-122"/>
@@ -6534,7 +6534,7 @@
             <a:r>
               <a:rPr lang="en-US" sz="2200" dirty="0">
                 <a:solidFill>
-                  <a:srgbClr val="243041"/>
+                  <a:srgbClr val="111111"/>
                 </a:solidFill>
                 <a:latin typeface="Pretendard" pitchFamily="34" charset="0"/>
                 <a:ea typeface="Pretendard" pitchFamily="34" charset="-122"/>
@@ -6650,7 +6650,7 @@
             <a:r>
               <a:rPr lang="en-US" sz="2200" dirty="0">
                 <a:solidFill>
-                  <a:srgbClr val="243041"/>
+                  <a:srgbClr val="111111"/>
                 </a:solidFill>
                 <a:latin typeface="Pretendard" pitchFamily="34" charset="0"/>
                 <a:ea typeface="Pretendard" pitchFamily="34" charset="-122"/>
@@ -6766,7 +6766,7 @@
             <a:r>
               <a:rPr lang="en-US" sz="2200" dirty="0">
                 <a:solidFill>
-                  <a:srgbClr val="243041"/>
+                  <a:srgbClr val="111111"/>
                 </a:solidFill>
                 <a:latin typeface="Pretendard" pitchFamily="34" charset="0"/>
                 <a:ea typeface="Pretendard" pitchFamily="34" charset="-122"/>
@@ -6882,7 +6882,7 @@
             <a:r>
               <a:rPr lang="en-US" sz="2200" dirty="0">
                 <a:solidFill>
-                  <a:srgbClr val="243041"/>
+                  <a:srgbClr val="111111"/>
                 </a:solidFill>
                 <a:latin typeface="Pretendard" pitchFamily="34" charset="0"/>
                 <a:ea typeface="Pretendard" pitchFamily="34" charset="-122"/>
@@ -7138,7 +7138,7 @@
             <a:r>
               <a:rPr lang="en-US" sz="3400" b="1" dirty="0">
                 <a:solidFill>
-                  <a:srgbClr val="243041"/>
+                  <a:srgbClr val="111111"/>
                 </a:solidFill>
                 <a:latin typeface="Pretendard" pitchFamily="34" charset="0"/>
                 <a:ea typeface="Pretendard" pitchFamily="34" charset="-122"/>
@@ -7197,7 +7197,7 @@
             <a:r>
               <a:rPr lang="en-US" sz="2200" dirty="0">
                 <a:solidFill>
-                  <a:srgbClr val="243041"/>
+                  <a:srgbClr val="111111"/>
                 </a:solidFill>
                 <a:latin typeface="Pretendard" pitchFamily="34" charset="0"/>
                 <a:ea typeface="Pretendard" pitchFamily="34" charset="-122"/>
@@ -7256,7 +7256,7 @@
             <a:r>
               <a:rPr lang="en-US" sz="2200" dirty="0">
                 <a:solidFill>
-                  <a:srgbClr val="243041"/>
+                  <a:srgbClr val="111111"/>
                 </a:solidFill>
                 <a:latin typeface="Pretendard" pitchFamily="34" charset="0"/>
                 <a:ea typeface="Pretendard" pitchFamily="34" charset="-122"/>
@@ -7595,7 +7595,7 @@
             <a:r>
               <a:rPr lang="en-US" sz="3400" b="1" dirty="0">
                 <a:solidFill>
-                  <a:srgbClr val="243041"/>
+                  <a:srgbClr val="111111"/>
                 </a:solidFill>
                 <a:latin typeface="Pretendard" pitchFamily="34" charset="0"/>
                 <a:ea typeface="Pretendard" pitchFamily="34" charset="-122"/>
@@ -7852,7 +7852,7 @@
                       <a:r>
                         <a:rPr lang="en-US" sz="1800" b="1" dirty="0">
                           <a:solidFill>
-                            <a:srgbClr val="243041"/>
+                            <a:srgbClr val="111111"/>
                           </a:solidFill>
                           <a:latin typeface="Pretendard" pitchFamily="34" charset="0"/>
                           <a:ea typeface="Pretendard" pitchFamily="34" charset="-122"/>
@@ -7917,7 +7917,7 @@
                       <a:r>
                         <a:rPr lang="en-US" sz="1800" dirty="0">
                           <a:solidFill>
-                            <a:srgbClr val="243041"/>
+                            <a:srgbClr val="111111"/>
                           </a:solidFill>
                           <a:latin typeface="Pretendard" pitchFamily="34" charset="0"/>
                           <a:ea typeface="Pretendard" pitchFamily="34" charset="-122"/>
@@ -7982,7 +7982,7 @@
                       <a:r>
                         <a:rPr lang="en-US" sz="1800" dirty="0">
                           <a:solidFill>
-                            <a:srgbClr val="243041"/>
+                            <a:srgbClr val="111111"/>
                           </a:solidFill>
                           <a:latin typeface="Pretendard" pitchFamily="34" charset="0"/>
                           <a:ea typeface="Pretendard" pitchFamily="34" charset="-122"/>
@@ -8049,7 +8049,7 @@
                       <a:r>
                         <a:rPr lang="en-US" sz="1800" b="1" dirty="0">
                           <a:solidFill>
-                            <a:srgbClr val="243041"/>
+                            <a:srgbClr val="111111"/>
                           </a:solidFill>
                           <a:latin typeface="Pretendard" pitchFamily="34" charset="0"/>
                           <a:ea typeface="Pretendard" pitchFamily="34" charset="-122"/>
@@ -8119,7 +8119,7 @@
                       <a:r>
                         <a:rPr lang="en-US" sz="1800" dirty="0">
                           <a:solidFill>
-                            <a:srgbClr val="243041"/>
+                            <a:srgbClr val="111111"/>
                           </a:solidFill>
                           <a:latin typeface="Pretendard" pitchFamily="34" charset="0"/>
                           <a:ea typeface="Pretendard" pitchFamily="34" charset="-122"/>
@@ -8189,7 +8189,7 @@
                       <a:r>
                         <a:rPr lang="en-US" sz="1800" dirty="0">
                           <a:solidFill>
-                            <a:srgbClr val="243041"/>
+                            <a:srgbClr val="111111"/>
                           </a:solidFill>
                           <a:latin typeface="Pretendard" pitchFamily="34" charset="0"/>
                           <a:ea typeface="Pretendard" pitchFamily="34" charset="-122"/>
@@ -8261,7 +8261,7 @@
                       <a:r>
                         <a:rPr lang="en-US" sz="1800" b="1" dirty="0">
                           <a:solidFill>
-                            <a:srgbClr val="243041"/>
+                            <a:srgbClr val="111111"/>
                           </a:solidFill>
                           <a:latin typeface="Pretendard" pitchFamily="34" charset="0"/>
                           <a:ea typeface="Pretendard" pitchFamily="34" charset="-122"/>
@@ -8326,7 +8326,7 @@
                       <a:r>
                         <a:rPr lang="en-US" sz="1800" dirty="0">
                           <a:solidFill>
-                            <a:srgbClr val="243041"/>
+                            <a:srgbClr val="111111"/>
                           </a:solidFill>
                           <a:latin typeface="Pretendard" pitchFamily="34" charset="0"/>
                           <a:ea typeface="Pretendard" pitchFamily="34" charset="-122"/>
@@ -8391,7 +8391,7 @@
                       <a:r>
                         <a:rPr lang="en-US" sz="1800" dirty="0">
                           <a:solidFill>
-                            <a:srgbClr val="243041"/>
+                            <a:srgbClr val="111111"/>
                           </a:solidFill>
                           <a:latin typeface="Pretendard" pitchFamily="34" charset="0"/>
                           <a:ea typeface="Pretendard" pitchFamily="34" charset="-122"/>
@@ -8458,7 +8458,7 @@
                       <a:r>
                         <a:rPr lang="en-US" sz="1800" b="1" dirty="0">
                           <a:solidFill>
-                            <a:srgbClr val="243041"/>
+                            <a:srgbClr val="111111"/>
                           </a:solidFill>
                           <a:latin typeface="Pretendard" pitchFamily="34" charset="0"/>
                           <a:ea typeface="Pretendard" pitchFamily="34" charset="-122"/>
@@ -8528,7 +8528,7 @@
                       <a:r>
                         <a:rPr lang="en-US" sz="1800" dirty="0">
                           <a:solidFill>
-                            <a:srgbClr val="243041"/>
+                            <a:srgbClr val="111111"/>
                           </a:solidFill>
                           <a:latin typeface="Pretendard" pitchFamily="34" charset="0"/>
                           <a:ea typeface="Pretendard" pitchFamily="34" charset="-122"/>
@@ -8598,7 +8598,7 @@
                       <a:r>
                         <a:rPr lang="en-US" sz="1800" dirty="0">
                           <a:solidFill>
-                            <a:srgbClr val="243041"/>
+                            <a:srgbClr val="111111"/>
                           </a:solidFill>
                           <a:latin typeface="Pretendard" pitchFamily="34" charset="0"/>
                           <a:ea typeface="Pretendard" pitchFamily="34" charset="-122"/>
@@ -9016,7 +9016,7 @@
             <a:r>
               <a:rPr lang="en-US" sz="3400" b="1" dirty="0">
                 <a:solidFill>
-                  <a:srgbClr val="243041"/>
+                  <a:srgbClr val="111111"/>
                 </a:solidFill>
                 <a:latin typeface="Pretendard" pitchFamily="34" charset="0"/>
                 <a:ea typeface="Pretendard" pitchFamily="34" charset="-122"/>
@@ -9075,7 +9075,7 @@
             <a:r>
               <a:rPr lang="en-US" sz="2200" dirty="0">
                 <a:solidFill>
-                  <a:srgbClr val="243041"/>
+                  <a:srgbClr val="111111"/>
                 </a:solidFill>
                 <a:latin typeface="Pretendard" pitchFamily="34" charset="0"/>
                 <a:ea typeface="Pretendard" pitchFamily="34" charset="-122"/>
@@ -9115,7 +9115,7 @@
             <a:r>
               <a:rPr lang="en-US" sz="2200" dirty="0">
                 <a:solidFill>
-                  <a:srgbClr val="243041"/>
+                  <a:srgbClr val="111111"/>
                 </a:solidFill>
                 <a:latin typeface="Pretendard" pitchFamily="34" charset="0"/>
                 <a:ea typeface="Pretendard" pitchFamily="34" charset="-122"/>
@@ -9155,7 +9155,7 @@
             <a:r>
               <a:rPr lang="en-US" sz="2200" dirty="0">
                 <a:solidFill>
-                  <a:srgbClr val="243041"/>
+                  <a:srgbClr val="111111"/>
                 </a:solidFill>
                 <a:latin typeface="Pretendard" pitchFamily="34" charset="0"/>
                 <a:ea typeface="Pretendard" pitchFamily="34" charset="-122"/>
@@ -9510,7 +9510,7 @@
             <a:r>
               <a:rPr lang="en-US" sz="3400" b="1" dirty="0">
                 <a:solidFill>
-                  <a:srgbClr val="243041"/>
+                  <a:srgbClr val="111111"/>
                 </a:solidFill>
                 <a:latin typeface="Pretendard" pitchFamily="34" charset="0"/>
                 <a:ea typeface="Pretendard" pitchFamily="34" charset="-122"/>
@@ -9767,7 +9767,7 @@
                       <a:r>
                         <a:rPr lang="en-US" sz="1800" b="1" dirty="0">
                           <a:solidFill>
-                            <a:srgbClr val="243041"/>
+                            <a:srgbClr val="111111"/>
                           </a:solidFill>
                           <a:latin typeface="Pretendard" pitchFamily="34" charset="0"/>
                           <a:ea typeface="Pretendard" pitchFamily="34" charset="-122"/>
@@ -9832,7 +9832,7 @@
                       <a:r>
                         <a:rPr lang="en-US" sz="1800" dirty="0">
                           <a:solidFill>
-                            <a:srgbClr val="243041"/>
+                            <a:srgbClr val="111111"/>
                           </a:solidFill>
                           <a:latin typeface="Pretendard" pitchFamily="34" charset="0"/>
                           <a:ea typeface="Pretendard" pitchFamily="34" charset="-122"/>
@@ -9897,7 +9897,7 @@
                       <a:r>
                         <a:rPr lang="en-US" sz="1800" dirty="0">
                           <a:solidFill>
-                            <a:srgbClr val="243041"/>
+                            <a:srgbClr val="111111"/>
                           </a:solidFill>
                           <a:latin typeface="Pretendard" pitchFamily="34" charset="0"/>
                           <a:ea typeface="Pretendard" pitchFamily="34" charset="-122"/>
@@ -9964,7 +9964,7 @@
                       <a:r>
                         <a:rPr lang="en-US" sz="1800" b="1" dirty="0">
                           <a:solidFill>
-                            <a:srgbClr val="243041"/>
+                            <a:srgbClr val="111111"/>
                           </a:solidFill>
                           <a:latin typeface="Pretendard" pitchFamily="34" charset="0"/>
                           <a:ea typeface="Pretendard" pitchFamily="34" charset="-122"/>
@@ -10034,7 +10034,7 @@
                       <a:r>
                         <a:rPr lang="en-US" sz="1800" dirty="0">
                           <a:solidFill>
-                            <a:srgbClr val="243041"/>
+                            <a:srgbClr val="111111"/>
                           </a:solidFill>
                           <a:latin typeface="Pretendard" pitchFamily="34" charset="0"/>
                           <a:ea typeface="Pretendard" pitchFamily="34" charset="-122"/>
@@ -10104,7 +10104,7 @@
                       <a:r>
                         <a:rPr lang="en-US" sz="1800" dirty="0">
                           <a:solidFill>
-                            <a:srgbClr val="243041"/>
+                            <a:srgbClr val="111111"/>
                           </a:solidFill>
                           <a:latin typeface="Pretendard" pitchFamily="34" charset="0"/>
                           <a:ea typeface="Pretendard" pitchFamily="34" charset="-122"/>
@@ -10176,7 +10176,7 @@
                       <a:r>
                         <a:rPr lang="en-US" sz="1800" b="1" dirty="0">
                           <a:solidFill>
-                            <a:srgbClr val="243041"/>
+                            <a:srgbClr val="111111"/>
                           </a:solidFill>
                           <a:latin typeface="Pretendard" pitchFamily="34" charset="0"/>
                           <a:ea typeface="Pretendard" pitchFamily="34" charset="-122"/>
@@ -10241,7 +10241,7 @@
                       <a:r>
                         <a:rPr lang="en-US" sz="1800" dirty="0">
                           <a:solidFill>
-                            <a:srgbClr val="243041"/>
+                            <a:srgbClr val="111111"/>
                           </a:solidFill>
                           <a:latin typeface="Pretendard" pitchFamily="34" charset="0"/>
                           <a:ea typeface="Pretendard" pitchFamily="34" charset="-122"/>
@@ -10306,7 +10306,7 @@
                       <a:r>
                         <a:rPr lang="en-US" sz="1800" dirty="0">
                           <a:solidFill>
-                            <a:srgbClr val="243041"/>
+                            <a:srgbClr val="111111"/>
                           </a:solidFill>
                           <a:latin typeface="Pretendard" pitchFamily="34" charset="0"/>
                           <a:ea typeface="Pretendard" pitchFamily="34" charset="-122"/>
@@ -10692,7 +10692,7 @@
             <a:r>
               <a:rPr lang="en-US" sz="3400" b="1" dirty="0">
                 <a:solidFill>
-                  <a:srgbClr val="243041"/>
+                  <a:srgbClr val="111111"/>
                 </a:solidFill>
                 <a:latin typeface="Pretendard" pitchFamily="34" charset="0"/>
                 <a:ea typeface="Pretendard" pitchFamily="34" charset="-122"/>
@@ -10883,7 +10883,7 @@
             <a:r>
               <a:rPr lang="en-US" sz="3000" b="1" dirty="0">
                 <a:solidFill>
-                  <a:srgbClr val="243041"/>
+                  <a:srgbClr val="111111"/>
                 </a:solidFill>
                 <a:latin typeface="Pretendard" pitchFamily="34" charset="0"/>
                 <a:ea typeface="Pretendard" pitchFamily="34" charset="-122"/>
@@ -10925,7 +10925,7 @@
             <a:r>
               <a:rPr lang="en-US" sz="1600" dirty="0">
                 <a:solidFill>
-                  <a:srgbClr val="526579"/>
+                  <a:srgbClr val="8C8C8C"/>
                 </a:solidFill>
                 <a:latin typeface="Pretendard" pitchFamily="34" charset="0"/>
                 <a:ea typeface="Pretendard" pitchFamily="34" charset="-122"/>
@@ -10996,7 +10996,7 @@
             <a:r>
               <a:rPr lang="en-US" sz="1600" b="1" dirty="0">
                 <a:solidFill>
-                  <a:srgbClr val="243041"/>
+                  <a:srgbClr val="111111"/>
                 </a:solidFill>
                 <a:latin typeface="Pretendard" pitchFamily="34" charset="0"/>
                 <a:ea typeface="Pretendard" pitchFamily="34" charset="-122"/>
@@ -11067,7 +11067,7 @@
             <a:r>
               <a:rPr lang="en-US" sz="1600" dirty="0">
                 <a:solidFill>
-                  <a:srgbClr val="526579"/>
+                  <a:srgbClr val="8C8C8C"/>
                 </a:solidFill>
                 <a:latin typeface="Pretendard" pitchFamily="34" charset="0"/>
                 <a:ea typeface="Pretendard" pitchFamily="34" charset="-122"/>
@@ -11156,7 +11156,7 @@
           <a:noFill/>
           <a:ln w="12700">
             <a:solidFill>
-              <a:srgbClr val="243041"/>
+              <a:srgbClr val="111111"/>
             </a:solidFill>
             <a:prstDash val="solid"/>
           </a:ln>
@@ -11269,7 +11269,7 @@
             <a:r>
               <a:rPr lang="en-US" sz="3200" b="1" dirty="0">
                 <a:solidFill>
-                  <a:srgbClr val="243041"/>
+                  <a:srgbClr val="111111"/>
                 </a:solidFill>
                 <a:latin typeface="Pretendard" pitchFamily="34" charset="0"/>
                 <a:ea typeface="Pretendard" pitchFamily="34" charset="-122"/>
@@ -11311,7 +11311,7 @@
             <a:r>
               <a:rPr lang="en-US" sz="1700" dirty="0">
                 <a:solidFill>
-                  <a:srgbClr val="526579"/>
+                  <a:srgbClr val="8C8C8C"/>
                 </a:solidFill>
                 <a:latin typeface="Pretendard" pitchFamily="34" charset="0"/>
                 <a:ea typeface="Pretendard" pitchFamily="34" charset="-122"/>
@@ -11353,7 +11353,7 @@
             <a:r>
               <a:rPr lang="en-US" sz="1400" dirty="0">
                 <a:solidFill>
-                  <a:srgbClr val="526579"/>
+                  <a:srgbClr val="8C8C8C"/>
                 </a:solidFill>
                 <a:latin typeface="Pretendard" pitchFamily="34" charset="0"/>
                 <a:ea typeface="Pretendard" pitchFamily="34" charset="-122"/>
@@ -11395,7 +11395,7 @@
             <a:r>
               <a:rPr lang="en-US" sz="1400" dirty="0">
                 <a:solidFill>
-                  <a:srgbClr val="526579"/>
+                  <a:srgbClr val="8C8C8C"/>
                 </a:solidFill>
                 <a:latin typeface="Pretendard" pitchFamily="34" charset="0"/>
                 <a:ea typeface="Pretendard" pitchFamily="34" charset="-122"/>
@@ -11734,7 +11734,7 @@
             <a:r>
               <a:rPr lang="en-US" sz="3400" b="1" dirty="0">
                 <a:solidFill>
-                  <a:srgbClr val="243041"/>
+                  <a:srgbClr val="111111"/>
                 </a:solidFill>
                 <a:latin typeface="Pretendard" pitchFamily="34" charset="0"/>
                 <a:ea typeface="Pretendard" pitchFamily="34" charset="-122"/>
@@ -11832,7 +11832,7 @@
             <a:r>
               <a:rPr lang="en-US" sz="1800" b="1" dirty="0">
                 <a:solidFill>
-                  <a:srgbClr val="243041"/>
+                  <a:srgbClr val="111111"/>
                 </a:solidFill>
                 <a:latin typeface="Pretendard" pitchFamily="34" charset="0"/>
                 <a:ea typeface="Pretendard" pitchFamily="34" charset="-122"/>
@@ -11974,7 +11974,7 @@
             <a:r>
               <a:rPr lang="en-US" sz="1800" b="1" dirty="0">
                 <a:solidFill>
-                  <a:srgbClr val="243041"/>
+                  <a:srgbClr val="111111"/>
                 </a:solidFill>
                 <a:latin typeface="Pretendard" pitchFamily="34" charset="0"/>
                 <a:ea typeface="Pretendard" pitchFamily="34" charset="-122"/>
@@ -12116,7 +12116,7 @@
             <a:r>
               <a:rPr lang="en-US" sz="1800" b="1" dirty="0">
                 <a:solidFill>
-                  <a:srgbClr val="243041"/>
+                  <a:srgbClr val="111111"/>
                 </a:solidFill>
                 <a:latin typeface="Pretendard" pitchFamily="34" charset="0"/>
                 <a:ea typeface="Pretendard" pitchFamily="34" charset="-122"/>
@@ -12258,7 +12258,7 @@
             <a:r>
               <a:rPr lang="en-US" sz="1800" b="1" dirty="0">
                 <a:solidFill>
-                  <a:srgbClr val="243041"/>
+                  <a:srgbClr val="111111"/>
                 </a:solidFill>
                 <a:latin typeface="Pretendard" pitchFamily="34" charset="0"/>
                 <a:ea typeface="Pretendard" pitchFamily="34" charset="-122"/>
@@ -13097,7 +13097,7 @@
             <a:r>
               <a:rPr lang="en-US" sz="3400" b="1" dirty="0">
                 <a:solidFill>
-                  <a:srgbClr val="243041"/>
+                  <a:srgbClr val="111111"/>
                 </a:solidFill>
                 <a:latin typeface="Pretendard" pitchFamily="34" charset="0"/>
                 <a:ea typeface="Pretendard" pitchFamily="34" charset="-122"/>
@@ -13213,7 +13213,7 @@
             <a:r>
               <a:rPr lang="en-US" sz="2200" dirty="0">
                 <a:solidFill>
-                  <a:srgbClr val="243041"/>
+                  <a:srgbClr val="111111"/>
                 </a:solidFill>
                 <a:latin typeface="Pretendard" pitchFamily="34" charset="0"/>
                 <a:ea typeface="Pretendard" pitchFamily="34" charset="-122"/>
@@ -13329,7 +13329,7 @@
             <a:r>
               <a:rPr lang="en-US" sz="2200" dirty="0">
                 <a:solidFill>
-                  <a:srgbClr val="243041"/>
+                  <a:srgbClr val="111111"/>
                 </a:solidFill>
                 <a:latin typeface="Pretendard" pitchFamily="34" charset="0"/>
                 <a:ea typeface="Pretendard" pitchFamily="34" charset="-122"/>
@@ -13445,7 +13445,7 @@
             <a:r>
               <a:rPr lang="en-US" sz="2200" dirty="0">
                 <a:solidFill>
-                  <a:srgbClr val="243041"/>
+                  <a:srgbClr val="111111"/>
                 </a:solidFill>
                 <a:latin typeface="Pretendard" pitchFamily="34" charset="0"/>
                 <a:ea typeface="Pretendard" pitchFamily="34" charset="-122"/>
@@ -14108,7 +14108,7 @@
             <a:r>
               <a:rPr lang="en-US" sz="3800" b="1" dirty="0">
                 <a:solidFill>
-                  <a:srgbClr val="243041"/>
+                  <a:srgbClr val="111111"/>
                 </a:solidFill>
                 <a:latin typeface="Pretendard" pitchFamily="34" charset="0"/>
                 <a:ea typeface="Pretendard" pitchFamily="34" charset="-122"/>
@@ -14150,7 +14150,7 @@
             <a:r>
               <a:rPr lang="en-US" sz="1800" dirty="0">
                 <a:solidFill>
-                  <a:srgbClr val="243041"/>
+                  <a:srgbClr val="111111"/>
                 </a:solidFill>
                 <a:latin typeface="Pretendard" pitchFamily="34" charset="0"/>
                 <a:ea typeface="Pretendard" pitchFamily="34" charset="-122"/>
@@ -14192,7 +14192,7 @@
             <a:r>
               <a:rPr lang="en-US" sz="1800" dirty="0">
                 <a:solidFill>
-                  <a:srgbClr val="243041"/>
+                  <a:srgbClr val="111111"/>
                 </a:solidFill>
                 <a:latin typeface="Pretendard" pitchFamily="34" charset="0"/>
                 <a:ea typeface="Pretendard" pitchFamily="34" charset="-122"/>
@@ -14234,7 +14234,7 @@
             <a:r>
               <a:rPr lang="en-US" sz="1800" dirty="0">
                 <a:solidFill>
-                  <a:srgbClr val="243041"/>
+                  <a:srgbClr val="111111"/>
                 </a:solidFill>
                 <a:latin typeface="Pretendard" pitchFamily="34" charset="0"/>
                 <a:ea typeface="Pretendard" pitchFamily="34" charset="-122"/>
@@ -14276,7 +14276,7 @@
             <a:r>
               <a:rPr lang="en-US" sz="1800" dirty="0">
                 <a:solidFill>
-                  <a:srgbClr val="243041"/>
+                  <a:srgbClr val="111111"/>
                 </a:solidFill>
                 <a:latin typeface="Pretendard" pitchFamily="34" charset="0"/>
                 <a:ea typeface="Pretendard" pitchFamily="34" charset="-122"/>
@@ -14318,7 +14318,7 @@
             <a:r>
               <a:rPr lang="en-US" sz="1800" dirty="0">
                 <a:solidFill>
-                  <a:srgbClr val="243041"/>
+                  <a:srgbClr val="111111"/>
                 </a:solidFill>
                 <a:latin typeface="Pretendard" pitchFamily="34" charset="0"/>
                 <a:ea typeface="Pretendard" pitchFamily="34" charset="-122"/>
@@ -14360,7 +14360,7 @@
             <a:r>
               <a:rPr lang="en-US" sz="1800" dirty="0">
                 <a:solidFill>
-                  <a:srgbClr val="243041"/>
+                  <a:srgbClr val="111111"/>
                 </a:solidFill>
                 <a:latin typeface="Pretendard" pitchFamily="34" charset="0"/>
                 <a:ea typeface="Pretendard" pitchFamily="34" charset="-122"/>
@@ -14402,7 +14402,7 @@
             <a:r>
               <a:rPr lang="en-US" sz="1800" dirty="0">
                 <a:solidFill>
-                  <a:srgbClr val="243041"/>
+                  <a:srgbClr val="111111"/>
                 </a:solidFill>
                 <a:latin typeface="Pretendard" pitchFamily="34" charset="0"/>
                 <a:ea typeface="Pretendard" pitchFamily="34" charset="-122"/>
@@ -14444,7 +14444,7 @@
             <a:r>
               <a:rPr lang="en-US" sz="1800" dirty="0">
                 <a:solidFill>
-                  <a:srgbClr val="243041"/>
+                  <a:srgbClr val="111111"/>
                 </a:solidFill>
                 <a:latin typeface="Pretendard" pitchFamily="34" charset="0"/>
                 <a:ea typeface="Pretendard" pitchFamily="34" charset="-122"/>
@@ -14486,7 +14486,7 @@
             <a:r>
               <a:rPr lang="en-US" sz="1800" dirty="0">
                 <a:solidFill>
-                  <a:srgbClr val="243041"/>
+                  <a:srgbClr val="111111"/>
                 </a:solidFill>
                 <a:latin typeface="Pretendard" pitchFamily="34" charset="0"/>
                 <a:ea typeface="Pretendard" pitchFamily="34" charset="-122"/>
@@ -14528,7 +14528,7 @@
             <a:r>
               <a:rPr lang="en-US" sz="1800" dirty="0">
                 <a:solidFill>
-                  <a:srgbClr val="243041"/>
+                  <a:srgbClr val="111111"/>
                 </a:solidFill>
                 <a:latin typeface="Pretendard" pitchFamily="34" charset="0"/>
                 <a:ea typeface="Pretendard" pitchFamily="34" charset="-122"/>
@@ -14570,7 +14570,7 @@
             <a:r>
               <a:rPr lang="en-US" sz="1800" dirty="0">
                 <a:solidFill>
-                  <a:srgbClr val="243041"/>
+                  <a:srgbClr val="111111"/>
                 </a:solidFill>
                 <a:latin typeface="Pretendard" pitchFamily="34" charset="0"/>
                 <a:ea typeface="Pretendard" pitchFamily="34" charset="-122"/>
@@ -14612,7 +14612,7 @@
             <a:r>
               <a:rPr lang="en-US" sz="1800" dirty="0">
                 <a:solidFill>
-                  <a:srgbClr val="243041"/>
+                  <a:srgbClr val="111111"/>
                 </a:solidFill>
                 <a:latin typeface="Pretendard" pitchFamily="34" charset="0"/>
                 <a:ea typeface="Pretendard" pitchFamily="34" charset="-122"/>
@@ -14654,7 +14654,7 @@
             <a:r>
               <a:rPr lang="en-US" sz="1800" dirty="0">
                 <a:solidFill>
-                  <a:srgbClr val="243041"/>
+                  <a:srgbClr val="111111"/>
                 </a:solidFill>
                 <a:latin typeface="Pretendard" pitchFamily="34" charset="0"/>
                 <a:ea typeface="Pretendard" pitchFamily="34" charset="-122"/>
@@ -14696,7 +14696,7 @@
             <a:r>
               <a:rPr lang="en-US" sz="1800" dirty="0">
                 <a:solidFill>
-                  <a:srgbClr val="243041"/>
+                  <a:srgbClr val="111111"/>
                 </a:solidFill>
                 <a:latin typeface="Pretendard" pitchFamily="34" charset="0"/>
                 <a:ea typeface="Pretendard" pitchFamily="34" charset="-122"/>
@@ -14952,7 +14952,7 @@
             <a:r>
               <a:rPr lang="en-US" sz="3400" b="1" dirty="0">
                 <a:solidFill>
-                  <a:srgbClr val="243041"/>
+                  <a:srgbClr val="111111"/>
                 </a:solidFill>
                 <a:latin typeface="Pretendard" pitchFamily="34" charset="0"/>
                 <a:ea typeface="Pretendard" pitchFamily="34" charset="-122"/>
@@ -15011,7 +15011,7 @@
             <a:r>
               <a:rPr lang="en-US" sz="2200" dirty="0">
                 <a:solidFill>
-                  <a:srgbClr val="243041"/>
+                  <a:srgbClr val="111111"/>
                 </a:solidFill>
                 <a:latin typeface="Pretendard" pitchFamily="34" charset="0"/>
                 <a:ea typeface="Pretendard" pitchFamily="34" charset="-122"/>
@@ -15070,7 +15070,7 @@
             <a:r>
               <a:rPr lang="en-US" sz="2200" dirty="0">
                 <a:solidFill>
-                  <a:srgbClr val="243041"/>
+                  <a:srgbClr val="111111"/>
                 </a:solidFill>
                 <a:latin typeface="Pretendard" pitchFamily="34" charset="0"/>
                 <a:ea typeface="Pretendard" pitchFamily="34" charset="-122"/>
@@ -15928,7 +15928,7 @@
             <a:r>
               <a:rPr lang="en-US" sz="3400" b="1" dirty="0">
                 <a:solidFill>
-                  <a:srgbClr val="243041"/>
+                  <a:srgbClr val="111111"/>
                 </a:solidFill>
                 <a:latin typeface="Pretendard" pitchFamily="34" charset="0"/>
                 <a:ea typeface="Pretendard" pitchFamily="34" charset="-122"/>
@@ -16044,7 +16044,7 @@
             <a:r>
               <a:rPr lang="en-US" sz="2200" dirty="0">
                 <a:solidFill>
-                  <a:srgbClr val="243041"/>
+                  <a:srgbClr val="111111"/>
                 </a:solidFill>
                 <a:latin typeface="Pretendard" pitchFamily="34" charset="0"/>
                 <a:ea typeface="Pretendard" pitchFamily="34" charset="-122"/>
@@ -16160,7 +16160,7 @@
             <a:r>
               <a:rPr lang="en-US" sz="2200" dirty="0">
                 <a:solidFill>
-                  <a:srgbClr val="243041"/>
+                  <a:srgbClr val="111111"/>
                 </a:solidFill>
                 <a:latin typeface="Pretendard" pitchFamily="34" charset="0"/>
                 <a:ea typeface="Pretendard" pitchFamily="34" charset="-122"/>
@@ -16276,7 +16276,7 @@
             <a:r>
               <a:rPr lang="en-US" sz="2200" dirty="0">
                 <a:solidFill>
-                  <a:srgbClr val="243041"/>
+                  <a:srgbClr val="111111"/>
                 </a:solidFill>
                 <a:latin typeface="Pretendard" pitchFamily="34" charset="0"/>
                 <a:ea typeface="Pretendard" pitchFamily="34" charset="-122"/>
@@ -16392,7 +16392,7 @@
             <a:r>
               <a:rPr lang="en-US" sz="2200" dirty="0">
                 <a:solidFill>
-                  <a:srgbClr val="243041"/>
+                  <a:srgbClr val="111111"/>
                 </a:solidFill>
                 <a:latin typeface="Pretendard" pitchFamily="34" charset="0"/>
                 <a:ea typeface="Pretendard" pitchFamily="34" charset="-122"/>
@@ -17250,7 +17250,7 @@
             <a:r>
               <a:rPr lang="en-US" sz="3400" b="1" dirty="0">
                 <a:solidFill>
-                  <a:srgbClr val="243041"/>
+                  <a:srgbClr val="111111"/>
                 </a:solidFill>
                 <a:latin typeface="Pretendard" pitchFamily="34" charset="0"/>
                 <a:ea typeface="Pretendard" pitchFamily="34" charset="-122"/>
@@ -17366,7 +17366,7 @@
             <a:r>
               <a:rPr lang="en-US" sz="2200" dirty="0">
                 <a:solidFill>
-                  <a:srgbClr val="243041"/>
+                  <a:srgbClr val="111111"/>
                 </a:solidFill>
                 <a:latin typeface="Pretendard" pitchFamily="34" charset="0"/>
                 <a:ea typeface="Pretendard" pitchFamily="34" charset="-122"/>
@@ -17482,7 +17482,7 @@
             <a:r>
               <a:rPr lang="en-US" sz="2200" dirty="0">
                 <a:solidFill>
-                  <a:srgbClr val="243041"/>
+                  <a:srgbClr val="111111"/>
                 </a:solidFill>
                 <a:latin typeface="Pretendard" pitchFamily="34" charset="0"/>
                 <a:ea typeface="Pretendard" pitchFamily="34" charset="-122"/>
@@ -17598,7 +17598,7 @@
             <a:r>
               <a:rPr lang="en-US" sz="2200" dirty="0">
                 <a:solidFill>
-                  <a:srgbClr val="243041"/>
+                  <a:srgbClr val="111111"/>
                 </a:solidFill>
                 <a:latin typeface="Pretendard" pitchFamily="34" charset="0"/>
                 <a:ea typeface="Pretendard" pitchFamily="34" charset="-122"/>
@@ -17714,7 +17714,7 @@
             <a:r>
               <a:rPr lang="en-US" sz="2200" dirty="0">
                 <a:solidFill>
-                  <a:srgbClr val="243041"/>
+                  <a:srgbClr val="111111"/>
                 </a:solidFill>
                 <a:latin typeface="Pretendard" pitchFamily="34" charset="0"/>
                 <a:ea typeface="Pretendard" pitchFamily="34" charset="-122"/>
@@ -18080,7 +18080,7 @@
             <a:r>
               <a:rPr lang="en-US" sz="3400" b="1" dirty="0">
                 <a:solidFill>
-                  <a:srgbClr val="243041"/>
+                  <a:srgbClr val="111111"/>
                 </a:solidFill>
                 <a:latin typeface="Pretendard" pitchFamily="34" charset="0"/>
                 <a:ea typeface="Pretendard" pitchFamily="34" charset="-122"/>
@@ -18139,7 +18139,7 @@
             <a:r>
               <a:rPr lang="en-US" sz="2200" dirty="0">
                 <a:solidFill>
-                  <a:srgbClr val="243041"/>
+                  <a:srgbClr val="111111"/>
                 </a:solidFill>
                 <a:latin typeface="Pretendard" pitchFamily="34" charset="0"/>
                 <a:ea typeface="Pretendard" pitchFamily="34" charset="-122"/>
@@ -18179,7 +18179,7 @@
             <a:r>
               <a:rPr lang="en-US" sz="2200" dirty="0">
                 <a:solidFill>
-                  <a:srgbClr val="243041"/>
+                  <a:srgbClr val="111111"/>
                 </a:solidFill>
                 <a:latin typeface="Pretendard" pitchFamily="34" charset="0"/>
                 <a:ea typeface="Pretendard" pitchFamily="34" charset="-122"/>
@@ -18219,7 +18219,7 @@
             <a:r>
               <a:rPr lang="en-US" sz="2200" dirty="0">
                 <a:solidFill>
-                  <a:srgbClr val="243041"/>
+                  <a:srgbClr val="111111"/>
                 </a:solidFill>
                 <a:latin typeface="Pretendard" pitchFamily="34" charset="0"/>
                 <a:ea typeface="Pretendard" pitchFamily="34" charset="-122"/>
@@ -18889,7 +18889,7 @@
             <a:r>
               <a:rPr lang="en-US" sz="3400" b="1" dirty="0">
                 <a:solidFill>
-                  <a:srgbClr val="243041"/>
+                  <a:srgbClr val="111111"/>
                 </a:solidFill>
                 <a:latin typeface="Pretendard" pitchFamily="34" charset="0"/>
                 <a:ea typeface="Pretendard" pitchFamily="34" charset="-122"/>
@@ -19093,7 +19093,7 @@
                       <a:r>
                         <a:rPr lang="en-US" sz="1800" b="1" dirty="0">
                           <a:solidFill>
-                            <a:srgbClr val="243041"/>
+                            <a:srgbClr val="111111"/>
                           </a:solidFill>
                           <a:latin typeface="Pretendard" pitchFamily="34" charset="0"/>
                           <a:ea typeface="Pretendard" pitchFamily="34" charset="-122"/>
@@ -19158,7 +19158,7 @@
                       <a:r>
                         <a:rPr lang="en-US" sz="1800" dirty="0">
                           <a:solidFill>
-                            <a:srgbClr val="243041"/>
+                            <a:srgbClr val="111111"/>
                           </a:solidFill>
                           <a:latin typeface="Pretendard" pitchFamily="34" charset="0"/>
                           <a:ea typeface="Pretendard" pitchFamily="34" charset="-122"/>
@@ -19225,7 +19225,7 @@
                       <a:r>
                         <a:rPr lang="en-US" sz="1800" b="1" dirty="0">
                           <a:solidFill>
-                            <a:srgbClr val="243041"/>
+                            <a:srgbClr val="111111"/>
                           </a:solidFill>
                           <a:latin typeface="Pretendard" pitchFamily="34" charset="0"/>
                           <a:ea typeface="Pretendard" pitchFamily="34" charset="-122"/>
@@ -19295,7 +19295,7 @@
                       <a:r>
                         <a:rPr lang="en-US" sz="1800" dirty="0">
                           <a:solidFill>
-                            <a:srgbClr val="243041"/>
+                            <a:srgbClr val="111111"/>
                           </a:solidFill>
                           <a:latin typeface="Pretendard" pitchFamily="34" charset="0"/>
                           <a:ea typeface="Pretendard" pitchFamily="34" charset="-122"/>
@@ -19406,7 +19406,7 @@
             <a:r>
               <a:rPr lang="en-US" sz="1800" dirty="0">
                 <a:solidFill>
-                  <a:srgbClr val="243041"/>
+                  <a:srgbClr val="111111"/>
                 </a:solidFill>
                 <a:latin typeface="Pretendard" pitchFamily="34" charset="0"/>
                 <a:ea typeface="Pretendard" pitchFamily="34" charset="-122"/>
@@ -19446,7 +19446,7 @@
             <a:r>
               <a:rPr lang="en-US" sz="1800" dirty="0">
                 <a:solidFill>
-                  <a:srgbClr val="243041"/>
+                  <a:srgbClr val="111111"/>
                 </a:solidFill>
                 <a:latin typeface="Pretendard" pitchFamily="34" charset="0"/>
                 <a:ea typeface="Pretendard" pitchFamily="34" charset="-122"/>
@@ -20199,7 +20199,7 @@
             <a:r>
               <a:rPr lang="en-US" sz="3400" b="1" dirty="0">
                 <a:solidFill>
-                  <a:srgbClr val="243041"/>
+                  <a:srgbClr val="111111"/>
                 </a:solidFill>
                 <a:latin typeface="Pretendard" pitchFamily="34" charset="0"/>
                 <a:ea typeface="Pretendard" pitchFamily="34" charset="-122"/>
@@ -20315,7 +20315,7 @@
             <a:r>
               <a:rPr lang="en-US" sz="2200" dirty="0">
                 <a:solidFill>
-                  <a:srgbClr val="243041"/>
+                  <a:srgbClr val="111111"/>
                 </a:solidFill>
                 <a:latin typeface="Pretendard" pitchFamily="34" charset="0"/>
                 <a:ea typeface="Pretendard" pitchFamily="34" charset="-122"/>
@@ -20431,7 +20431,7 @@
             <a:r>
               <a:rPr lang="en-US" sz="2200" dirty="0">
                 <a:solidFill>
-                  <a:srgbClr val="243041"/>
+                  <a:srgbClr val="111111"/>
                 </a:solidFill>
                 <a:latin typeface="Pretendard" pitchFamily="34" charset="0"/>
                 <a:ea typeface="Pretendard" pitchFamily="34" charset="-122"/>
@@ -20547,7 +20547,7 @@
             <a:r>
               <a:rPr lang="en-US" sz="2200" dirty="0">
                 <a:solidFill>
-                  <a:srgbClr val="243041"/>
+                  <a:srgbClr val="111111"/>
                 </a:solidFill>
                 <a:latin typeface="Pretendard" pitchFamily="34" charset="0"/>
                 <a:ea typeface="Pretendard" pitchFamily="34" charset="-122"/>
@@ -20830,7 +20830,7 @@
             <a:r>
               <a:rPr lang="en-US" sz="3800" b="1" dirty="0">
                 <a:solidFill>
-                  <a:srgbClr val="243041"/>
+                  <a:srgbClr val="111111"/>
                 </a:solidFill>
                 <a:latin typeface="Pretendard" pitchFamily="34" charset="0"/>
                 <a:ea typeface="Pretendard" pitchFamily="34" charset="-122"/>
@@ -20872,7 +20872,7 @@
             <a:r>
               <a:rPr lang="en-US" sz="2200" dirty="0">
                 <a:solidFill>
-                  <a:srgbClr val="243041"/>
+                  <a:srgbClr val="111111"/>
                 </a:solidFill>
                 <a:latin typeface="Pretendard" pitchFamily="34" charset="0"/>
                 <a:ea typeface="Pretendard" pitchFamily="34" charset="-122"/>
@@ -21267,7 +21267,7 @@
             <a:r>
               <a:rPr lang="en-US" sz="3400" b="1" dirty="0">
                 <a:solidFill>
-                  <a:srgbClr val="243041"/>
+                  <a:srgbClr val="111111"/>
                 </a:solidFill>
                 <a:latin typeface="Pretendard" pitchFamily="34" charset="0"/>
                 <a:ea typeface="Pretendard" pitchFamily="34" charset="-122"/>
@@ -21309,7 +21309,7 @@
             <a:r>
               <a:rPr lang="en-US" sz="2200" b="1" dirty="0">
                 <a:solidFill>
-                  <a:srgbClr val="243041"/>
+                  <a:srgbClr val="111111"/>
                 </a:solidFill>
                 <a:latin typeface="Pretendard" pitchFamily="34" charset="0"/>
                 <a:ea typeface="Pretendard" pitchFamily="34" charset="-122"/>
@@ -21368,7 +21368,7 @@
             <a:r>
               <a:rPr lang="en-US" sz="2200" dirty="0">
                 <a:solidFill>
-                  <a:srgbClr val="243041"/>
+                  <a:srgbClr val="111111"/>
                 </a:solidFill>
                 <a:latin typeface="Pretendard" pitchFamily="34" charset="0"/>
                 <a:ea typeface="Pretendard" pitchFamily="34" charset="-122"/>
@@ -21408,7 +21408,7 @@
             <a:r>
               <a:rPr lang="en-US" sz="2200" dirty="0">
                 <a:solidFill>
-                  <a:srgbClr val="243041"/>
+                  <a:srgbClr val="111111"/>
                 </a:solidFill>
                 <a:latin typeface="Pretendard" pitchFamily="34" charset="0"/>
                 <a:ea typeface="Pretendard" pitchFamily="34" charset="-122"/>
@@ -21448,7 +21448,7 @@
             <a:r>
               <a:rPr lang="en-US" sz="2200" dirty="0">
                 <a:solidFill>
-                  <a:srgbClr val="243041"/>
+                  <a:srgbClr val="111111"/>
                 </a:solidFill>
                 <a:latin typeface="Pretendard" pitchFamily="34" charset="0"/>
                 <a:ea typeface="Pretendard" pitchFamily="34" charset="-122"/>
@@ -21488,7 +21488,7 @@
             <a:r>
               <a:rPr lang="en-US" sz="2200" dirty="0">
                 <a:solidFill>
-                  <a:srgbClr val="243041"/>
+                  <a:srgbClr val="111111"/>
                 </a:solidFill>
                 <a:latin typeface="Pretendard" pitchFamily="34" charset="0"/>
                 <a:ea typeface="Pretendard" pitchFamily="34" charset="-122"/>
@@ -22211,7 +22211,7 @@
             <a:r>
               <a:rPr lang="en-US" sz="3400" b="1" dirty="0">
                 <a:solidFill>
-                  <a:srgbClr val="243041"/>
+                  <a:srgbClr val="111111"/>
                 </a:solidFill>
                 <a:latin typeface="Pretendard" pitchFamily="34" charset="0"/>
                 <a:ea typeface="Pretendard" pitchFamily="34" charset="-122"/>
@@ -22327,7 +22327,7 @@
             <a:r>
               <a:rPr lang="en-US" sz="2200" dirty="0">
                 <a:solidFill>
-                  <a:srgbClr val="243041"/>
+                  <a:srgbClr val="111111"/>
                 </a:solidFill>
                 <a:latin typeface="Pretendard" pitchFamily="34" charset="0"/>
                 <a:ea typeface="Pretendard" pitchFamily="34" charset="-122"/>
@@ -22443,7 +22443,7 @@
             <a:r>
               <a:rPr lang="en-US" sz="2200" dirty="0">
                 <a:solidFill>
-                  <a:srgbClr val="243041"/>
+                  <a:srgbClr val="111111"/>
                 </a:solidFill>
                 <a:latin typeface="Pretendard" pitchFamily="34" charset="0"/>
                 <a:ea typeface="Pretendard" pitchFamily="34" charset="-122"/>
@@ -22559,7 +22559,7 @@
             <a:r>
               <a:rPr lang="en-US" sz="2200" dirty="0">
                 <a:solidFill>
-                  <a:srgbClr val="243041"/>
+                  <a:srgbClr val="111111"/>
                 </a:solidFill>
                 <a:latin typeface="Pretendard" pitchFamily="34" charset="0"/>
                 <a:ea typeface="Pretendard" pitchFamily="34" charset="-122"/>
@@ -22815,7 +22815,7 @@
             <a:r>
               <a:rPr lang="en-US" sz="3400" b="1" dirty="0">
                 <a:solidFill>
-                  <a:srgbClr val="243041"/>
+                  <a:srgbClr val="111111"/>
                 </a:solidFill>
                 <a:latin typeface="Pretendard" pitchFamily="34" charset="0"/>
                 <a:ea typeface="Pretendard" pitchFamily="34" charset="-122"/>
@@ -22874,7 +22874,7 @@
             <a:r>
               <a:rPr lang="en-US" sz="2200" dirty="0">
                 <a:solidFill>
-                  <a:srgbClr val="243041"/>
+                  <a:srgbClr val="111111"/>
                 </a:solidFill>
                 <a:latin typeface="Pretendard" pitchFamily="34" charset="0"/>
                 <a:ea typeface="Pretendard" pitchFamily="34" charset="-122"/>
@@ -22933,7 +22933,7 @@
             <a:r>
               <a:rPr lang="en-US" sz="2200" dirty="0">
                 <a:solidFill>
-                  <a:srgbClr val="243041"/>
+                  <a:srgbClr val="111111"/>
                 </a:solidFill>
                 <a:latin typeface="Pretendard" pitchFamily="34" charset="0"/>
                 <a:ea typeface="Pretendard" pitchFamily="34" charset="-122"/>
@@ -23656,7 +23656,7 @@
             <a:r>
               <a:rPr lang="en-US" sz="3400" b="1" dirty="0">
                 <a:solidFill>
-                  <a:srgbClr val="243041"/>
+                  <a:srgbClr val="111111"/>
                 </a:solidFill>
                 <a:latin typeface="Pretendard" pitchFamily="34" charset="0"/>
                 <a:ea typeface="Pretendard" pitchFamily="34" charset="-122"/>
@@ -23772,7 +23772,7 @@
             <a:r>
               <a:rPr lang="en-US" sz="2200" dirty="0">
                 <a:solidFill>
-                  <a:srgbClr val="243041"/>
+                  <a:srgbClr val="111111"/>
                 </a:solidFill>
                 <a:latin typeface="Pretendard" pitchFamily="34" charset="0"/>
                 <a:ea typeface="Pretendard" pitchFamily="34" charset="-122"/>
@@ -23888,7 +23888,7 @@
             <a:r>
               <a:rPr lang="en-US" sz="2200" dirty="0">
                 <a:solidFill>
-                  <a:srgbClr val="243041"/>
+                  <a:srgbClr val="111111"/>
                 </a:solidFill>
                 <a:latin typeface="Pretendard" pitchFamily="34" charset="0"/>
                 <a:ea typeface="Pretendard" pitchFamily="34" charset="-122"/>
@@ -24004,7 +24004,7 @@
             <a:r>
               <a:rPr lang="en-US" sz="2200" dirty="0">
                 <a:solidFill>
-                  <a:srgbClr val="243041"/>
+                  <a:srgbClr val="111111"/>
                 </a:solidFill>
                 <a:latin typeface="Pretendard" pitchFamily="34" charset="0"/>
                 <a:ea typeface="Pretendard" pitchFamily="34" charset="-122"/>
@@ -24260,7 +24260,7 @@
             <a:r>
               <a:rPr lang="en-US" sz="3400" b="1" dirty="0">
                 <a:solidFill>
-                  <a:srgbClr val="243041"/>
+                  <a:srgbClr val="111111"/>
                 </a:solidFill>
                 <a:latin typeface="Pretendard" pitchFamily="34" charset="0"/>
                 <a:ea typeface="Pretendard" pitchFamily="34" charset="-122"/>
@@ -24319,7 +24319,7 @@
             <a:r>
               <a:rPr lang="en-US" sz="2200" dirty="0">
                 <a:solidFill>
-                  <a:srgbClr val="243041"/>
+                  <a:srgbClr val="111111"/>
                 </a:solidFill>
                 <a:latin typeface="Pretendard" pitchFamily="34" charset="0"/>
                 <a:ea typeface="Pretendard" pitchFamily="34" charset="-122"/>
@@ -24378,7 +24378,7 @@
             <a:r>
               <a:rPr lang="en-US" sz="2200" dirty="0">
                 <a:solidFill>
-                  <a:srgbClr val="243041"/>
+                  <a:srgbClr val="111111"/>
                 </a:solidFill>
                 <a:latin typeface="Pretendard" pitchFamily="34" charset="0"/>
                 <a:ea typeface="Pretendard" pitchFamily="34" charset="-122"/>
@@ -24634,7 +24634,7 @@
             <a:r>
               <a:rPr lang="en-US" sz="3400" b="1" dirty="0">
                 <a:solidFill>
-                  <a:srgbClr val="243041"/>
+                  <a:srgbClr val="111111"/>
                 </a:solidFill>
                 <a:latin typeface="Pretendard" pitchFamily="34" charset="0"/>
                 <a:ea typeface="Pretendard" pitchFamily="34" charset="-122"/>
@@ -24693,7 +24693,7 @@
             <a:r>
               <a:rPr lang="en-US" sz="2200" dirty="0">
                 <a:solidFill>
-                  <a:srgbClr val="243041"/>
+                  <a:srgbClr val="111111"/>
                 </a:solidFill>
                 <a:latin typeface="Pretendard" pitchFamily="34" charset="0"/>
                 <a:ea typeface="Pretendard" pitchFamily="34" charset="-122"/>
@@ -24752,7 +24752,7 @@
             <a:r>
               <a:rPr lang="en-US" sz="2200" dirty="0">
                 <a:solidFill>
-                  <a:srgbClr val="243041"/>
+                  <a:srgbClr val="111111"/>
                 </a:solidFill>
                 <a:latin typeface="Pretendard" pitchFamily="34" charset="0"/>
                 <a:ea typeface="Pretendard" pitchFamily="34" charset="-122"/>
@@ -24777,13 +24777,13 @@
   <a:themeElements>
     <a:clrScheme name="Office">
       <a:dk1>
-        <a:srgbClr val="243041"/>
+        <a:srgbClr val="111111"/>
       </a:dk1>
       <a:lt1>
         <a:srgbClr val="EEF3F8"/>
       </a:lt1>
       <a:dk2>
-        <a:srgbClr val="526579"/>
+        <a:srgbClr val="8C8C8C"/>
       </a:dk2>
       <a:lt2>
         <a:srgbClr val="EEF3F8"/>
@@ -24798,13 +24798,13 @@
         <a:srgbClr val="5D7FA4"/>
       </a:accent3>
       <a:accent4>
-        <a:srgbClr val="526579"/>
+        <a:srgbClr val="8C8C8C"/>
       </a:accent4>
       <a:accent5>
         <a:srgbClr val="D1DAE7"/>
       </a:accent5>
       <a:accent6>
-        <a:srgbClr val="243041"/>
+        <a:srgbClr val="111111"/>
       </a:accent6>
       <a:hlink>
         <a:srgbClr val="5D7FA4"/>

--- a/docs/theme-preview/pptx/neomorphism.pptx
+++ b/docs/theme-preview/pptx/neomorphism.pptx
@@ -3602,29 +3602,31 @@
         </p:nvSpPr>
         <p:spPr>
           <a:xfrm>
-            <a:off x="10362895" y="502920"/>
-            <a:ext cx="822960" cy="822960"/>
-          </a:xfrm>
-          <a:prstGeom prst="ellipse">
-            <a:avLst/>
-          </a:prstGeom>
-          <a:solidFill>
-            <a:srgbClr val="F7FAFC">
-              <a:alpha val="92000"/>
+            <a:off x="493776" y="5852160"/>
+            <a:ext cx="11204143" cy="420624"/>
+          </a:xfrm>
+          <a:prstGeom prst="roundRect">
+            <a:avLst>
+              <a:gd name="adj" fmla="val 17391"/>
+            </a:avLst>
+          </a:prstGeom>
+          <a:solidFill>
+            <a:srgbClr val="DDE8F2">
+              <a:alpha val="62000"/>
             </a:srgbClr>
           </a:solidFill>
           <a:ln w="12700">
             <a:solidFill>
               <a:srgbClr val="FFFFFF">
-                <a:alpha val="0"/>
+                <a:alpha val="32000"/>
               </a:srgbClr>
             </a:solidFill>
             <a:prstDash val="solid"/>
           </a:ln>
           <a:effectLst>
-            <a:outerShdw sx="100000" sy="100000" kx="0" ky="0" algn="bl" rotWithShape="0" blurRad="15240" dist="50800" dir="2700000">
-              <a:srgbClr val="C7D0DE">
-                <a:alpha val="22000"/>
+            <a:outerShdw sx="100000" sy="100000" kx="0" ky="0" algn="bl" rotWithShape="0" blurRad="8890" dist="50800" dir="2700000">
+              <a:srgbClr val="A8B6C8">
+                <a:alpha val="8000"/>
               </a:srgbClr>
             </a:outerShdw>
           </a:effectLst>
@@ -3638,27 +3640,60 @@
         </p:nvSpPr>
         <p:spPr>
           <a:xfrm>
-            <a:off x="530352" y="5687568"/>
-            <a:ext cx="658368" cy="658368"/>
+            <a:off x="749808" y="5980176"/>
+            <a:ext cx="2103120" cy="146304"/>
+          </a:xfrm>
+          <a:prstGeom prst="roundRect">
+            <a:avLst>
+              <a:gd name="adj" fmla="val 25000"/>
+            </a:avLst>
+          </a:prstGeom>
+          <a:solidFill>
+            <a:srgbClr val="5D7FA4">
+              <a:alpha val="44000"/>
+            </a:srgbClr>
+          </a:solidFill>
+          <a:ln w="12700">
+            <a:solidFill>
+              <a:srgbClr val="5D7FA4">
+                <a:alpha val="0"/>
+              </a:srgbClr>
+            </a:solidFill>
+            <a:prstDash val="solid"/>
+          </a:ln>
+        </p:spPr>
+      </p:sp>
+      <p:sp>
+        <p:nvSpPr>
+          <p:cNvPr id="4" name="Shape 2"/>
+          <p:cNvSpPr/>
+          <p:nvPr/>
+        </p:nvSpPr>
+        <p:spPr>
+          <a:xfrm>
+            <a:off x="10710367" y="512064"/>
+            <a:ext cx="493776" cy="493776"/>
           </a:xfrm>
           <a:prstGeom prst="ellipse">
             <a:avLst/>
           </a:prstGeom>
           <a:solidFill>
-            <a:srgbClr val="EEF3F8"/>
-          </a:solidFill>
-          <a:ln w="12700">
-            <a:solidFill>
-              <a:srgbClr val="FFFFFF">
-                <a:alpha val="42000"/>
+            <a:srgbClr val="FFFFFF">
+              <a:alpha val="88000"/>
+            </a:srgbClr>
+          </a:solidFill>
+          <a:ln w="12700">
+            <a:solidFill>
+              <a:srgbClr val="CBD7E4">
+                <a:alpha val="50000"/>
               </a:srgbClr>
             </a:solidFill>
             <a:prstDash val="solid"/>
           </a:ln>
           <a:effectLst>
-            <a:outerShdw sx="100000" sy="100000" kx="0" ky="0" algn="bl" rotWithShape="0" blurRad="12700" dist="50800" dir="2700000">
-              <a:srgbClr val="B8C3D2">
-                <a:alpha val="18000"/>
+            <a:outerShdw sx="100000" sy="100000" kx="0" ky="0" algn="bl" rotWithShape="0" blurRad="11430" dist="50800" dir="2700000">
+              <a:srgbClr val="A8B6C8">
+                <a:alpha val="14000"/>
               </a:srgbClr>
             </a:outerShdw>
           </a:effectLst>
@@ -3666,38 +3701,57 @@
       </p:sp>
       <p:sp>
         <p:nvSpPr>
-          <p:cNvPr id="4" name="Shape 2"/>
-          <p:cNvSpPr/>
-          <p:nvPr/>
-        </p:nvSpPr>
-        <p:spPr>
-          <a:xfrm>
-            <a:off x="9357055" y="5907024"/>
-            <a:ext cx="2057400" cy="164592"/>
-          </a:xfrm>
-          <a:prstGeom prst="roundRect">
-            <a:avLst>
-              <a:gd name="adj" fmla="val 22222"/>
-            </a:avLst>
-          </a:prstGeom>
-          <a:solidFill>
-            <a:srgbClr val="FFFFFF">
-              <a:alpha val="72000"/>
-            </a:srgbClr>
-          </a:solidFill>
+          <p:cNvPr id="5" name="Shape 3"/>
+          <p:cNvSpPr/>
+          <p:nvPr/>
+        </p:nvSpPr>
+        <p:spPr>
+          <a:xfrm>
+            <a:off x="749808" y="749808"/>
+            <a:ext cx="1353312" cy="0"/>
+          </a:xfrm>
+          <a:prstGeom prst="line">
+            <a:avLst/>
+          </a:prstGeom>
+          <a:noFill/>
+          <a:ln w="12700">
+            <a:solidFill>
+              <a:srgbClr val="5D7FA4">
+                <a:alpha val="84000"/>
+              </a:srgbClr>
+            </a:solidFill>
+            <a:prstDash val="solid"/>
+          </a:ln>
+        </p:spPr>
+      </p:sp>
+      <p:sp>
+        <p:nvSpPr>
+          <p:cNvPr id="6" name="Shape 4"/>
+          <p:cNvSpPr/>
+          <p:nvPr/>
+        </p:nvSpPr>
+        <p:spPr>
+          <a:xfrm>
+            <a:off x="10088575" y="6144768"/>
+            <a:ext cx="1188720" cy="0"/>
+          </a:xfrm>
+          <a:prstGeom prst="line">
+            <a:avLst/>
+          </a:prstGeom>
+          <a:noFill/>
           <a:ln w="12700">
             <a:solidFill>
               <a:srgbClr val="FFFFFF">
-                <a:alpha val="0"/>
-              </a:srgbClr>
-            </a:solidFill>
-            <a:prstDash val="solid"/>
-          </a:ln>
-        </p:spPr>
-      </p:sp>
-      <p:sp>
-        <p:nvSpPr>
-          <p:cNvPr id="5" name="Shape 3"/>
+                <a:alpha val="82000"/>
+              </a:srgbClr>
+            </a:solidFill>
+            <a:prstDash val="solid"/>
+          </a:ln>
+        </p:spPr>
+      </p:sp>
+      <p:sp>
+        <p:nvSpPr>
+          <p:cNvPr id="7" name="Shape 5"/>
           <p:cNvSpPr/>
           <p:nvPr/>
         </p:nvSpPr>
@@ -3724,7 +3778,7 @@
       </p:sp>
       <p:sp>
         <p:nvSpPr>
-          <p:cNvPr id="6" name="Shape 4"/>
+          <p:cNvPr id="8" name="Shape 6"/>
           <p:cNvSpPr/>
           <p:nvPr/>
         </p:nvSpPr>
@@ -3751,7 +3805,7 @@
       </p:sp>
       <p:sp>
         <p:nvSpPr>
-          <p:cNvPr id="7" name="Shape 5"/>
+          <p:cNvPr id="9" name="Shape 7"/>
           <p:cNvSpPr/>
           <p:nvPr/>
         </p:nvSpPr>
@@ -3780,7 +3834,7 @@
       </p:sp>
       <p:sp>
         <p:nvSpPr>
-          <p:cNvPr id="8" name="mdpr:mdpr-design-grammar-b3a462:title:__title:mdpr-design-grammar-b3a462"/>
+          <p:cNvPr id="10" name="mdpr:mdpr-design-grammar-b3a462:title:__title:mdpr-design-grammar-b3a462"/>
           <p:cNvSpPr txBox="1"/>
           <p:nvPr/>
         </p:nvSpPr>
@@ -3860,29 +3914,31 @@
         </p:nvSpPr>
         <p:spPr>
           <a:xfrm>
-            <a:off x="10362895" y="502920"/>
-            <a:ext cx="822960" cy="822960"/>
-          </a:xfrm>
-          <a:prstGeom prst="ellipse">
-            <a:avLst/>
-          </a:prstGeom>
-          <a:solidFill>
-            <a:srgbClr val="F7FAFC">
-              <a:alpha val="92000"/>
+            <a:off x="493776" y="5852160"/>
+            <a:ext cx="11204143" cy="420624"/>
+          </a:xfrm>
+          <a:prstGeom prst="roundRect">
+            <a:avLst>
+              <a:gd name="adj" fmla="val 17391"/>
+            </a:avLst>
+          </a:prstGeom>
+          <a:solidFill>
+            <a:srgbClr val="DDE8F2">
+              <a:alpha val="62000"/>
             </a:srgbClr>
           </a:solidFill>
           <a:ln w="12700">
             <a:solidFill>
               <a:srgbClr val="FFFFFF">
-                <a:alpha val="0"/>
+                <a:alpha val="32000"/>
               </a:srgbClr>
             </a:solidFill>
             <a:prstDash val="solid"/>
           </a:ln>
           <a:effectLst>
-            <a:outerShdw sx="100000" sy="100000" kx="0" ky="0" algn="bl" rotWithShape="0" blurRad="15240" dist="50800" dir="2700000">
-              <a:srgbClr val="C7D0DE">
-                <a:alpha val="22000"/>
+            <a:outerShdw sx="100000" sy="100000" kx="0" ky="0" algn="bl" rotWithShape="0" blurRad="8890" dist="50800" dir="2700000">
+              <a:srgbClr val="A8B6C8">
+                <a:alpha val="8000"/>
               </a:srgbClr>
             </a:outerShdw>
           </a:effectLst>
@@ -3896,27 +3952,60 @@
         </p:nvSpPr>
         <p:spPr>
           <a:xfrm>
-            <a:off x="530352" y="5687568"/>
-            <a:ext cx="658368" cy="658368"/>
+            <a:off x="749808" y="5980176"/>
+            <a:ext cx="2103120" cy="146304"/>
+          </a:xfrm>
+          <a:prstGeom prst="roundRect">
+            <a:avLst>
+              <a:gd name="adj" fmla="val 25000"/>
+            </a:avLst>
+          </a:prstGeom>
+          <a:solidFill>
+            <a:srgbClr val="5D7FA4">
+              <a:alpha val="44000"/>
+            </a:srgbClr>
+          </a:solidFill>
+          <a:ln w="12700">
+            <a:solidFill>
+              <a:srgbClr val="5D7FA4">
+                <a:alpha val="0"/>
+              </a:srgbClr>
+            </a:solidFill>
+            <a:prstDash val="solid"/>
+          </a:ln>
+        </p:spPr>
+      </p:sp>
+      <p:sp>
+        <p:nvSpPr>
+          <p:cNvPr id="4" name="Shape 2"/>
+          <p:cNvSpPr/>
+          <p:nvPr/>
+        </p:nvSpPr>
+        <p:spPr>
+          <a:xfrm>
+            <a:off x="10710367" y="512064"/>
+            <a:ext cx="493776" cy="493776"/>
           </a:xfrm>
           <a:prstGeom prst="ellipse">
             <a:avLst/>
           </a:prstGeom>
           <a:solidFill>
-            <a:srgbClr val="EEF3F8"/>
-          </a:solidFill>
-          <a:ln w="12700">
-            <a:solidFill>
-              <a:srgbClr val="FFFFFF">
-                <a:alpha val="42000"/>
+            <a:srgbClr val="FFFFFF">
+              <a:alpha val="88000"/>
+            </a:srgbClr>
+          </a:solidFill>
+          <a:ln w="12700">
+            <a:solidFill>
+              <a:srgbClr val="CBD7E4">
+                <a:alpha val="50000"/>
               </a:srgbClr>
             </a:solidFill>
             <a:prstDash val="solid"/>
           </a:ln>
           <a:effectLst>
-            <a:outerShdw sx="100000" sy="100000" kx="0" ky="0" algn="bl" rotWithShape="0" blurRad="12700" dist="50800" dir="2700000">
-              <a:srgbClr val="B8C3D2">
-                <a:alpha val="18000"/>
+            <a:outerShdw sx="100000" sy="100000" kx="0" ky="0" algn="bl" rotWithShape="0" blurRad="11430" dist="50800" dir="2700000">
+              <a:srgbClr val="A8B6C8">
+                <a:alpha val="14000"/>
               </a:srgbClr>
             </a:outerShdw>
           </a:effectLst>
@@ -3924,38 +4013,57 @@
       </p:sp>
       <p:sp>
         <p:nvSpPr>
-          <p:cNvPr id="4" name="Shape 2"/>
-          <p:cNvSpPr/>
-          <p:nvPr/>
-        </p:nvSpPr>
-        <p:spPr>
-          <a:xfrm>
-            <a:off x="9357055" y="5907024"/>
-            <a:ext cx="2057400" cy="164592"/>
-          </a:xfrm>
-          <a:prstGeom prst="roundRect">
-            <a:avLst>
-              <a:gd name="adj" fmla="val 22222"/>
-            </a:avLst>
-          </a:prstGeom>
-          <a:solidFill>
-            <a:srgbClr val="FFFFFF">
-              <a:alpha val="72000"/>
-            </a:srgbClr>
-          </a:solidFill>
+          <p:cNvPr id="5" name="Shape 3"/>
+          <p:cNvSpPr/>
+          <p:nvPr/>
+        </p:nvSpPr>
+        <p:spPr>
+          <a:xfrm>
+            <a:off x="749808" y="749808"/>
+            <a:ext cx="1353312" cy="0"/>
+          </a:xfrm>
+          <a:prstGeom prst="line">
+            <a:avLst/>
+          </a:prstGeom>
+          <a:noFill/>
+          <a:ln w="12700">
+            <a:solidFill>
+              <a:srgbClr val="5D7FA4">
+                <a:alpha val="84000"/>
+              </a:srgbClr>
+            </a:solidFill>
+            <a:prstDash val="solid"/>
+          </a:ln>
+        </p:spPr>
+      </p:sp>
+      <p:sp>
+        <p:nvSpPr>
+          <p:cNvPr id="6" name="Shape 4"/>
+          <p:cNvSpPr/>
+          <p:nvPr/>
+        </p:nvSpPr>
+        <p:spPr>
+          <a:xfrm>
+            <a:off x="10088575" y="6144768"/>
+            <a:ext cx="1188720" cy="0"/>
+          </a:xfrm>
+          <a:prstGeom prst="line">
+            <a:avLst/>
+          </a:prstGeom>
+          <a:noFill/>
           <a:ln w="12700">
             <a:solidFill>
               <a:srgbClr val="FFFFFF">
-                <a:alpha val="0"/>
-              </a:srgbClr>
-            </a:solidFill>
-            <a:prstDash val="solid"/>
-          </a:ln>
-        </p:spPr>
-      </p:sp>
-      <p:sp>
-        <p:nvSpPr>
-          <p:cNvPr id="5" name="Shape 3"/>
+                <a:alpha val="82000"/>
+              </a:srgbClr>
+            </a:solidFill>
+            <a:prstDash val="solid"/>
+          </a:ln>
+        </p:spPr>
+      </p:sp>
+      <p:sp>
+        <p:nvSpPr>
+          <p:cNvPr id="7" name="Shape 5"/>
           <p:cNvSpPr/>
           <p:nvPr/>
         </p:nvSpPr>
@@ -3982,7 +4090,7 @@
       </p:sp>
       <p:sp>
         <p:nvSpPr>
-          <p:cNvPr id="6" name="Shape 4"/>
+          <p:cNvPr id="8" name="Shape 6"/>
           <p:cNvSpPr/>
           <p:nvPr/>
         </p:nvSpPr>
@@ -4009,7 +4117,7 @@
       </p:sp>
       <p:sp>
         <p:nvSpPr>
-          <p:cNvPr id="7" name="Shape 5"/>
+          <p:cNvPr id="9" name="Shape 7"/>
           <p:cNvSpPr/>
           <p:nvPr/>
         </p:nvSpPr>
@@ -4036,7 +4144,7 @@
       </p:sp>
       <p:sp>
         <p:nvSpPr>
-          <p:cNvPr id="8" name="mdpr:2-2-a9df10:title:__title:2-2-a9df10"/>
+          <p:cNvPr id="10" name="mdpr:2-2-a9df10:title:__title:2-2-a9df10"/>
           <p:cNvSpPr txBox="1"/>
           <p:nvPr/>
         </p:nvSpPr>
@@ -4078,7 +4186,7 @@
       </p:sp>
       <p:sp>
         <p:nvSpPr>
-          <p:cNvPr id="9" name="mdpr:2-2-a9df10:left:block-10-chunk-2"/>
+          <p:cNvPr id="11" name="mdpr:2-2-a9df10:left:block-10-chunk-2"/>
           <p:cNvSpPr txBox="1"/>
           <p:nvPr/>
         </p:nvSpPr>
@@ -4137,7 +4245,7 @@
       </p:sp>
       <p:sp>
         <p:nvSpPr>
-          <p:cNvPr id="10" name="mdpr:2-2-a9df10:right:block-10-chunk-2"/>
+          <p:cNvPr id="12" name="mdpr:2-2-a9df10:right:block-10-chunk-2"/>
           <p:cNvSpPr txBox="1"/>
           <p:nvPr/>
         </p:nvSpPr>
@@ -4234,29 +4342,31 @@
         </p:nvSpPr>
         <p:spPr>
           <a:xfrm>
-            <a:off x="10362895" y="502920"/>
-            <a:ext cx="822960" cy="822960"/>
-          </a:xfrm>
-          <a:prstGeom prst="ellipse">
-            <a:avLst/>
-          </a:prstGeom>
-          <a:solidFill>
-            <a:srgbClr val="F7FAFC">
-              <a:alpha val="92000"/>
+            <a:off x="493776" y="5852160"/>
+            <a:ext cx="11204143" cy="420624"/>
+          </a:xfrm>
+          <a:prstGeom prst="roundRect">
+            <a:avLst>
+              <a:gd name="adj" fmla="val 17391"/>
+            </a:avLst>
+          </a:prstGeom>
+          <a:solidFill>
+            <a:srgbClr val="DDE8F2">
+              <a:alpha val="62000"/>
             </a:srgbClr>
           </a:solidFill>
           <a:ln w="12700">
             <a:solidFill>
               <a:srgbClr val="FFFFFF">
-                <a:alpha val="0"/>
+                <a:alpha val="32000"/>
               </a:srgbClr>
             </a:solidFill>
             <a:prstDash val="solid"/>
           </a:ln>
           <a:effectLst>
-            <a:outerShdw sx="100000" sy="100000" kx="0" ky="0" algn="bl" rotWithShape="0" blurRad="15240" dist="50800" dir="2700000">
-              <a:srgbClr val="C7D0DE">
-                <a:alpha val="22000"/>
+            <a:outerShdw sx="100000" sy="100000" kx="0" ky="0" algn="bl" rotWithShape="0" blurRad="8890" dist="50800" dir="2700000">
+              <a:srgbClr val="A8B6C8">
+                <a:alpha val="8000"/>
               </a:srgbClr>
             </a:outerShdw>
           </a:effectLst>
@@ -4270,27 +4380,60 @@
         </p:nvSpPr>
         <p:spPr>
           <a:xfrm>
-            <a:off x="530352" y="5687568"/>
-            <a:ext cx="658368" cy="658368"/>
+            <a:off x="749808" y="5980176"/>
+            <a:ext cx="2103120" cy="146304"/>
+          </a:xfrm>
+          <a:prstGeom prst="roundRect">
+            <a:avLst>
+              <a:gd name="adj" fmla="val 25000"/>
+            </a:avLst>
+          </a:prstGeom>
+          <a:solidFill>
+            <a:srgbClr val="5D7FA4">
+              <a:alpha val="44000"/>
+            </a:srgbClr>
+          </a:solidFill>
+          <a:ln w="12700">
+            <a:solidFill>
+              <a:srgbClr val="5D7FA4">
+                <a:alpha val="0"/>
+              </a:srgbClr>
+            </a:solidFill>
+            <a:prstDash val="solid"/>
+          </a:ln>
+        </p:spPr>
+      </p:sp>
+      <p:sp>
+        <p:nvSpPr>
+          <p:cNvPr id="4" name="Shape 2"/>
+          <p:cNvSpPr/>
+          <p:nvPr/>
+        </p:nvSpPr>
+        <p:spPr>
+          <a:xfrm>
+            <a:off x="10710367" y="512064"/>
+            <a:ext cx="493776" cy="493776"/>
           </a:xfrm>
           <a:prstGeom prst="ellipse">
             <a:avLst/>
           </a:prstGeom>
           <a:solidFill>
-            <a:srgbClr val="EEF3F8"/>
-          </a:solidFill>
-          <a:ln w="12700">
-            <a:solidFill>
-              <a:srgbClr val="FFFFFF">
-                <a:alpha val="42000"/>
+            <a:srgbClr val="FFFFFF">
+              <a:alpha val="88000"/>
+            </a:srgbClr>
+          </a:solidFill>
+          <a:ln w="12700">
+            <a:solidFill>
+              <a:srgbClr val="CBD7E4">
+                <a:alpha val="50000"/>
               </a:srgbClr>
             </a:solidFill>
             <a:prstDash val="solid"/>
           </a:ln>
           <a:effectLst>
-            <a:outerShdw sx="100000" sy="100000" kx="0" ky="0" algn="bl" rotWithShape="0" blurRad="12700" dist="50800" dir="2700000">
-              <a:srgbClr val="B8C3D2">
-                <a:alpha val="18000"/>
+            <a:outerShdw sx="100000" sy="100000" kx="0" ky="0" algn="bl" rotWithShape="0" blurRad="11430" dist="50800" dir="2700000">
+              <a:srgbClr val="A8B6C8">
+                <a:alpha val="14000"/>
               </a:srgbClr>
             </a:outerShdw>
           </a:effectLst>
@@ -4298,38 +4441,57 @@
       </p:sp>
       <p:sp>
         <p:nvSpPr>
-          <p:cNvPr id="4" name="Shape 2"/>
-          <p:cNvSpPr/>
-          <p:nvPr/>
-        </p:nvSpPr>
-        <p:spPr>
-          <a:xfrm>
-            <a:off x="9357055" y="5907024"/>
-            <a:ext cx="2057400" cy="164592"/>
-          </a:xfrm>
-          <a:prstGeom prst="roundRect">
-            <a:avLst>
-              <a:gd name="adj" fmla="val 22222"/>
-            </a:avLst>
-          </a:prstGeom>
-          <a:solidFill>
-            <a:srgbClr val="FFFFFF">
-              <a:alpha val="72000"/>
-            </a:srgbClr>
-          </a:solidFill>
+          <p:cNvPr id="5" name="Shape 3"/>
+          <p:cNvSpPr/>
+          <p:nvPr/>
+        </p:nvSpPr>
+        <p:spPr>
+          <a:xfrm>
+            <a:off x="749808" y="749808"/>
+            <a:ext cx="1353312" cy="0"/>
+          </a:xfrm>
+          <a:prstGeom prst="line">
+            <a:avLst/>
+          </a:prstGeom>
+          <a:noFill/>
+          <a:ln w="12700">
+            <a:solidFill>
+              <a:srgbClr val="5D7FA4">
+                <a:alpha val="84000"/>
+              </a:srgbClr>
+            </a:solidFill>
+            <a:prstDash val="solid"/>
+          </a:ln>
+        </p:spPr>
+      </p:sp>
+      <p:sp>
+        <p:nvSpPr>
+          <p:cNvPr id="6" name="Shape 4"/>
+          <p:cNvSpPr/>
+          <p:nvPr/>
+        </p:nvSpPr>
+        <p:spPr>
+          <a:xfrm>
+            <a:off x="10088575" y="6144768"/>
+            <a:ext cx="1188720" cy="0"/>
+          </a:xfrm>
+          <a:prstGeom prst="line">
+            <a:avLst/>
+          </a:prstGeom>
+          <a:noFill/>
           <a:ln w="12700">
             <a:solidFill>
               <a:srgbClr val="FFFFFF">
-                <a:alpha val="0"/>
-              </a:srgbClr>
-            </a:solidFill>
-            <a:prstDash val="solid"/>
-          </a:ln>
-        </p:spPr>
-      </p:sp>
-      <p:sp>
-        <p:nvSpPr>
-          <p:cNvPr id="5" name="Shape 3"/>
+                <a:alpha val="82000"/>
+              </a:srgbClr>
+            </a:solidFill>
+            <a:prstDash val="solid"/>
+          </a:ln>
+        </p:spPr>
+      </p:sp>
+      <p:sp>
+        <p:nvSpPr>
+          <p:cNvPr id="7" name="Shape 5"/>
           <p:cNvSpPr/>
           <p:nvPr/>
         </p:nvSpPr>
@@ -4356,7 +4518,7 @@
       </p:sp>
       <p:sp>
         <p:nvSpPr>
-          <p:cNvPr id="6" name="mdpr:pipeline-diagram-51792c:title:__title:pipeline-diagram-51792c"/>
+          <p:cNvPr id="8" name="mdpr:pipeline-diagram-51792c:title:__title:pipeline-diagram-51792c"/>
           <p:cNvSpPr txBox="1"/>
           <p:nvPr/>
         </p:nvSpPr>
@@ -4398,7 +4560,7 @@
       </p:sp>
       <p:sp>
         <p:nvSpPr>
-          <p:cNvPr id="7" name="Shape 5"/>
+          <p:cNvPr id="9" name="Shape 7"/>
           <p:cNvSpPr/>
           <p:nvPr/>
         </p:nvSpPr>
@@ -4422,7 +4584,7 @@
       </p:sp>
       <p:sp>
         <p:nvSpPr>
-          <p:cNvPr id="8" name="Shape 6"/>
+          <p:cNvPr id="10" name="Shape 8"/>
           <p:cNvSpPr/>
           <p:nvPr/>
         </p:nvSpPr>
@@ -4446,7 +4608,7 @@
       </p:sp>
       <p:sp>
         <p:nvSpPr>
-          <p:cNvPr id="9" name="Shape 7"/>
+          <p:cNvPr id="11" name="Shape 9"/>
           <p:cNvSpPr/>
           <p:nvPr/>
         </p:nvSpPr>
@@ -4470,7 +4632,7 @@
       </p:sp>
       <p:sp>
         <p:nvSpPr>
-          <p:cNvPr id="10" name="Shape 8"/>
+          <p:cNvPr id="12" name="Shape 10"/>
           <p:cNvSpPr/>
           <p:nvPr/>
         </p:nvSpPr>
@@ -4494,7 +4656,7 @@
       </p:sp>
       <p:sp>
         <p:nvSpPr>
-          <p:cNvPr id="11" name="Shape 9"/>
+          <p:cNvPr id="13" name="Shape 11"/>
           <p:cNvSpPr/>
           <p:nvPr/>
         </p:nvSpPr>
@@ -4518,7 +4680,7 @@
       </p:sp>
       <p:sp>
         <p:nvSpPr>
-          <p:cNvPr id="12" name="Shape 10"/>
+          <p:cNvPr id="14" name="Shape 12"/>
           <p:cNvSpPr/>
           <p:nvPr/>
         </p:nvSpPr>
@@ -4552,7 +4714,7 @@
       </p:sp>
       <p:sp>
         <p:nvSpPr>
-          <p:cNvPr id="13" name="Shape 11"/>
+          <p:cNvPr id="15" name="Shape 13"/>
           <p:cNvSpPr/>
           <p:nvPr/>
         </p:nvSpPr>
@@ -4579,7 +4741,7 @@
       </p:sp>
       <p:sp>
         <p:nvSpPr>
-          <p:cNvPr id="14" name="Shape 12"/>
+          <p:cNvPr id="16" name="Shape 14"/>
           <p:cNvSpPr/>
           <p:nvPr/>
         </p:nvSpPr>
@@ -4606,7 +4768,7 @@
       </p:sp>
       <p:sp>
         <p:nvSpPr>
-          <p:cNvPr id="15" name="Text 13"/>
+          <p:cNvPr id="17" name="Text 15"/>
           <p:cNvSpPr txBox="1"/>
           <p:nvPr/>
         </p:nvSpPr>
@@ -4650,7 +4812,7 @@
       </p:sp>
       <p:sp>
         <p:nvSpPr>
-          <p:cNvPr id="16" name="Text 14"/>
+          <p:cNvPr id="18" name="Text 16"/>
           <p:cNvSpPr txBox="1"/>
           <p:nvPr/>
         </p:nvSpPr>
@@ -4694,7 +4856,7 @@
       </p:sp>
       <p:sp>
         <p:nvSpPr>
-          <p:cNvPr id="17" name="Shape 15"/>
+          <p:cNvPr id="19" name="Shape 17"/>
           <p:cNvSpPr/>
           <p:nvPr/>
         </p:nvSpPr>
@@ -4728,7 +4890,7 @@
       </p:sp>
       <p:sp>
         <p:nvSpPr>
-          <p:cNvPr id="18" name="Shape 16"/>
+          <p:cNvPr id="20" name="Shape 18"/>
           <p:cNvSpPr/>
           <p:nvPr/>
         </p:nvSpPr>
@@ -4755,7 +4917,7 @@
       </p:sp>
       <p:sp>
         <p:nvSpPr>
-          <p:cNvPr id="19" name="Shape 17"/>
+          <p:cNvPr id="21" name="Shape 19"/>
           <p:cNvSpPr/>
           <p:nvPr/>
         </p:nvSpPr>
@@ -4782,7 +4944,7 @@
       </p:sp>
       <p:sp>
         <p:nvSpPr>
-          <p:cNvPr id="20" name="Text 18"/>
+          <p:cNvPr id="22" name="Text 20"/>
           <p:cNvSpPr txBox="1"/>
           <p:nvPr/>
         </p:nvSpPr>
@@ -4826,7 +4988,7 @@
       </p:sp>
       <p:sp>
         <p:nvSpPr>
-          <p:cNvPr id="21" name="Text 19"/>
+          <p:cNvPr id="23" name="Text 21"/>
           <p:cNvSpPr txBox="1"/>
           <p:nvPr/>
         </p:nvSpPr>
@@ -4870,7 +5032,7 @@
       </p:sp>
       <p:sp>
         <p:nvSpPr>
-          <p:cNvPr id="22" name="Shape 20"/>
+          <p:cNvPr id="24" name="Shape 22"/>
           <p:cNvSpPr/>
           <p:nvPr/>
         </p:nvSpPr>
@@ -4904,7 +5066,7 @@
       </p:sp>
       <p:sp>
         <p:nvSpPr>
-          <p:cNvPr id="23" name="Shape 21"/>
+          <p:cNvPr id="25" name="Shape 23"/>
           <p:cNvSpPr/>
           <p:nvPr/>
         </p:nvSpPr>
@@ -4931,7 +5093,7 @@
       </p:sp>
       <p:sp>
         <p:nvSpPr>
-          <p:cNvPr id="24" name="Shape 22"/>
+          <p:cNvPr id="26" name="Shape 24"/>
           <p:cNvSpPr/>
           <p:nvPr/>
         </p:nvSpPr>
@@ -4958,7 +5120,7 @@
       </p:sp>
       <p:sp>
         <p:nvSpPr>
-          <p:cNvPr id="25" name="Text 23"/>
+          <p:cNvPr id="27" name="Text 25"/>
           <p:cNvSpPr txBox="1"/>
           <p:nvPr/>
         </p:nvSpPr>
@@ -5002,7 +5164,7 @@
       </p:sp>
       <p:sp>
         <p:nvSpPr>
-          <p:cNvPr id="26" name="Text 24"/>
+          <p:cNvPr id="28" name="Text 26"/>
           <p:cNvSpPr txBox="1"/>
           <p:nvPr/>
         </p:nvSpPr>
@@ -5046,7 +5208,7 @@
       </p:sp>
       <p:sp>
         <p:nvSpPr>
-          <p:cNvPr id="27" name="Shape 25"/>
+          <p:cNvPr id="29" name="Shape 27"/>
           <p:cNvSpPr/>
           <p:nvPr/>
         </p:nvSpPr>
@@ -5080,7 +5242,7 @@
       </p:sp>
       <p:sp>
         <p:nvSpPr>
-          <p:cNvPr id="28" name="Shape 26"/>
+          <p:cNvPr id="30" name="Shape 28"/>
           <p:cNvSpPr/>
           <p:nvPr/>
         </p:nvSpPr>
@@ -5107,7 +5269,7 @@
       </p:sp>
       <p:sp>
         <p:nvSpPr>
-          <p:cNvPr id="29" name="Shape 27"/>
+          <p:cNvPr id="31" name="Shape 29"/>
           <p:cNvSpPr/>
           <p:nvPr/>
         </p:nvSpPr>
@@ -5134,7 +5296,7 @@
       </p:sp>
       <p:sp>
         <p:nvSpPr>
-          <p:cNvPr id="30" name="Text 28"/>
+          <p:cNvPr id="32" name="Text 30"/>
           <p:cNvSpPr txBox="1"/>
           <p:nvPr/>
         </p:nvSpPr>
@@ -5178,7 +5340,7 @@
       </p:sp>
       <p:sp>
         <p:nvSpPr>
-          <p:cNvPr id="31" name="Text 29"/>
+          <p:cNvPr id="33" name="Text 31"/>
           <p:cNvSpPr txBox="1"/>
           <p:nvPr/>
         </p:nvSpPr>
@@ -5222,7 +5384,7 @@
       </p:sp>
       <p:sp>
         <p:nvSpPr>
-          <p:cNvPr id="32" name="Shape 30"/>
+          <p:cNvPr id="34" name="Shape 32"/>
           <p:cNvSpPr/>
           <p:nvPr/>
         </p:nvSpPr>
@@ -5256,7 +5418,7 @@
       </p:sp>
       <p:sp>
         <p:nvSpPr>
-          <p:cNvPr id="33" name="Shape 31"/>
+          <p:cNvPr id="35" name="Shape 33"/>
           <p:cNvSpPr/>
           <p:nvPr/>
         </p:nvSpPr>
@@ -5283,7 +5445,7 @@
       </p:sp>
       <p:sp>
         <p:nvSpPr>
-          <p:cNvPr id="34" name="Shape 32"/>
+          <p:cNvPr id="36" name="Shape 34"/>
           <p:cNvSpPr/>
           <p:nvPr/>
         </p:nvSpPr>
@@ -5310,7 +5472,7 @@
       </p:sp>
       <p:sp>
         <p:nvSpPr>
-          <p:cNvPr id="35" name="Text 33"/>
+          <p:cNvPr id="37" name="Text 35"/>
           <p:cNvSpPr txBox="1"/>
           <p:nvPr/>
         </p:nvSpPr>
@@ -5354,7 +5516,7 @@
       </p:sp>
       <p:sp>
         <p:nvSpPr>
-          <p:cNvPr id="36" name="Text 34"/>
+          <p:cNvPr id="38" name="Text 36"/>
           <p:cNvSpPr txBox="1"/>
           <p:nvPr/>
         </p:nvSpPr>
@@ -5398,7 +5560,7 @@
       </p:sp>
       <p:sp>
         <p:nvSpPr>
-          <p:cNvPr id="37" name="Shape 35"/>
+          <p:cNvPr id="39" name="Shape 37"/>
           <p:cNvSpPr/>
           <p:nvPr/>
         </p:nvSpPr>
@@ -5432,7 +5594,7 @@
       </p:sp>
       <p:sp>
         <p:nvSpPr>
-          <p:cNvPr id="38" name="Shape 36"/>
+          <p:cNvPr id="40" name="Shape 38"/>
           <p:cNvSpPr/>
           <p:nvPr/>
         </p:nvSpPr>
@@ -5459,7 +5621,7 @@
       </p:sp>
       <p:sp>
         <p:nvSpPr>
-          <p:cNvPr id="39" name="Shape 37"/>
+          <p:cNvPr id="41" name="Shape 39"/>
           <p:cNvSpPr/>
           <p:nvPr/>
         </p:nvSpPr>
@@ -5486,7 +5648,7 @@
       </p:sp>
       <p:sp>
         <p:nvSpPr>
-          <p:cNvPr id="40" name="Text 38"/>
+          <p:cNvPr id="42" name="Text 40"/>
           <p:cNvSpPr txBox="1"/>
           <p:nvPr/>
         </p:nvSpPr>
@@ -5530,7 +5692,7 @@
       </p:sp>
       <p:sp>
         <p:nvSpPr>
-          <p:cNvPr id="41" name="Text 39"/>
+          <p:cNvPr id="43" name="Text 41"/>
           <p:cNvSpPr txBox="1"/>
           <p:nvPr/>
         </p:nvSpPr>
@@ -5612,29 +5774,31 @@
         </p:nvSpPr>
         <p:spPr>
           <a:xfrm>
-            <a:off x="10362895" y="502920"/>
-            <a:ext cx="822960" cy="822960"/>
-          </a:xfrm>
-          <a:prstGeom prst="ellipse">
-            <a:avLst/>
-          </a:prstGeom>
-          <a:solidFill>
-            <a:srgbClr val="F7FAFC">
-              <a:alpha val="92000"/>
+            <a:off x="493776" y="5852160"/>
+            <a:ext cx="11204143" cy="420624"/>
+          </a:xfrm>
+          <a:prstGeom prst="roundRect">
+            <a:avLst>
+              <a:gd name="adj" fmla="val 17391"/>
+            </a:avLst>
+          </a:prstGeom>
+          <a:solidFill>
+            <a:srgbClr val="DDE8F2">
+              <a:alpha val="62000"/>
             </a:srgbClr>
           </a:solidFill>
           <a:ln w="12700">
             <a:solidFill>
               <a:srgbClr val="FFFFFF">
-                <a:alpha val="0"/>
+                <a:alpha val="32000"/>
               </a:srgbClr>
             </a:solidFill>
             <a:prstDash val="solid"/>
           </a:ln>
           <a:effectLst>
-            <a:outerShdw sx="100000" sy="100000" kx="0" ky="0" algn="bl" rotWithShape="0" blurRad="15240" dist="50800" dir="2700000">
-              <a:srgbClr val="C7D0DE">
-                <a:alpha val="22000"/>
+            <a:outerShdw sx="100000" sy="100000" kx="0" ky="0" algn="bl" rotWithShape="0" blurRad="8890" dist="50800" dir="2700000">
+              <a:srgbClr val="A8B6C8">
+                <a:alpha val="8000"/>
               </a:srgbClr>
             </a:outerShdw>
           </a:effectLst>
@@ -5648,27 +5812,60 @@
         </p:nvSpPr>
         <p:spPr>
           <a:xfrm>
-            <a:off x="530352" y="5687568"/>
-            <a:ext cx="658368" cy="658368"/>
+            <a:off x="749808" y="5980176"/>
+            <a:ext cx="2103120" cy="146304"/>
+          </a:xfrm>
+          <a:prstGeom prst="roundRect">
+            <a:avLst>
+              <a:gd name="adj" fmla="val 25000"/>
+            </a:avLst>
+          </a:prstGeom>
+          <a:solidFill>
+            <a:srgbClr val="5D7FA4">
+              <a:alpha val="44000"/>
+            </a:srgbClr>
+          </a:solidFill>
+          <a:ln w="12700">
+            <a:solidFill>
+              <a:srgbClr val="5D7FA4">
+                <a:alpha val="0"/>
+              </a:srgbClr>
+            </a:solidFill>
+            <a:prstDash val="solid"/>
+          </a:ln>
+        </p:spPr>
+      </p:sp>
+      <p:sp>
+        <p:nvSpPr>
+          <p:cNvPr id="4" name="Shape 2"/>
+          <p:cNvSpPr/>
+          <p:nvPr/>
+        </p:nvSpPr>
+        <p:spPr>
+          <a:xfrm>
+            <a:off x="10710367" y="512064"/>
+            <a:ext cx="493776" cy="493776"/>
           </a:xfrm>
           <a:prstGeom prst="ellipse">
             <a:avLst/>
           </a:prstGeom>
           <a:solidFill>
-            <a:srgbClr val="EEF3F8"/>
-          </a:solidFill>
-          <a:ln w="12700">
-            <a:solidFill>
-              <a:srgbClr val="FFFFFF">
-                <a:alpha val="42000"/>
+            <a:srgbClr val="FFFFFF">
+              <a:alpha val="88000"/>
+            </a:srgbClr>
+          </a:solidFill>
+          <a:ln w="12700">
+            <a:solidFill>
+              <a:srgbClr val="CBD7E4">
+                <a:alpha val="50000"/>
               </a:srgbClr>
             </a:solidFill>
             <a:prstDash val="solid"/>
           </a:ln>
           <a:effectLst>
-            <a:outerShdw sx="100000" sy="100000" kx="0" ky="0" algn="bl" rotWithShape="0" blurRad="12700" dist="50800" dir="2700000">
-              <a:srgbClr val="B8C3D2">
-                <a:alpha val="18000"/>
+            <a:outerShdw sx="100000" sy="100000" kx="0" ky="0" algn="bl" rotWithShape="0" blurRad="11430" dist="50800" dir="2700000">
+              <a:srgbClr val="A8B6C8">
+                <a:alpha val="14000"/>
               </a:srgbClr>
             </a:outerShdw>
           </a:effectLst>
@@ -5676,38 +5873,57 @@
       </p:sp>
       <p:sp>
         <p:nvSpPr>
-          <p:cNvPr id="4" name="Shape 2"/>
-          <p:cNvSpPr/>
-          <p:nvPr/>
-        </p:nvSpPr>
-        <p:spPr>
-          <a:xfrm>
-            <a:off x="9357055" y="5907024"/>
-            <a:ext cx="2057400" cy="164592"/>
-          </a:xfrm>
-          <a:prstGeom prst="roundRect">
-            <a:avLst>
-              <a:gd name="adj" fmla="val 22222"/>
-            </a:avLst>
-          </a:prstGeom>
-          <a:solidFill>
-            <a:srgbClr val="FFFFFF">
-              <a:alpha val="72000"/>
-            </a:srgbClr>
-          </a:solidFill>
+          <p:cNvPr id="5" name="Shape 3"/>
+          <p:cNvSpPr/>
+          <p:nvPr/>
+        </p:nvSpPr>
+        <p:spPr>
+          <a:xfrm>
+            <a:off x="749808" y="749808"/>
+            <a:ext cx="1353312" cy="0"/>
+          </a:xfrm>
+          <a:prstGeom prst="line">
+            <a:avLst/>
+          </a:prstGeom>
+          <a:noFill/>
+          <a:ln w="12700">
+            <a:solidFill>
+              <a:srgbClr val="5D7FA4">
+                <a:alpha val="84000"/>
+              </a:srgbClr>
+            </a:solidFill>
+            <a:prstDash val="solid"/>
+          </a:ln>
+        </p:spPr>
+      </p:sp>
+      <p:sp>
+        <p:nvSpPr>
+          <p:cNvPr id="6" name="Shape 4"/>
+          <p:cNvSpPr/>
+          <p:nvPr/>
+        </p:nvSpPr>
+        <p:spPr>
+          <a:xfrm>
+            <a:off x="10088575" y="6144768"/>
+            <a:ext cx="1188720" cy="0"/>
+          </a:xfrm>
+          <a:prstGeom prst="line">
+            <a:avLst/>
+          </a:prstGeom>
+          <a:noFill/>
           <a:ln w="12700">
             <a:solidFill>
               <a:srgbClr val="FFFFFF">
-                <a:alpha val="0"/>
-              </a:srgbClr>
-            </a:solidFill>
-            <a:prstDash val="solid"/>
-          </a:ln>
-        </p:spPr>
-      </p:sp>
-      <p:sp>
-        <p:nvSpPr>
-          <p:cNvPr id="5" name="Shape 3"/>
+                <a:alpha val="82000"/>
+              </a:srgbClr>
+            </a:solidFill>
+            <a:prstDash val="solid"/>
+          </a:ln>
+        </p:spPr>
+      </p:sp>
+      <p:sp>
+        <p:nvSpPr>
+          <p:cNvPr id="7" name="Shape 5"/>
           <p:cNvSpPr/>
           <p:nvPr/>
         </p:nvSpPr>
@@ -5734,7 +5950,7 @@
       </p:sp>
       <p:sp>
         <p:nvSpPr>
-          <p:cNvPr id="6" name="Shape 4"/>
+          <p:cNvPr id="8" name="Shape 6"/>
           <p:cNvSpPr/>
           <p:nvPr/>
         </p:nvSpPr>
@@ -5772,7 +5988,7 @@
       </p:sp>
       <p:sp>
         <p:nvSpPr>
-          <p:cNvPr id="7" name="Shape 5"/>
+          <p:cNvPr id="9" name="Shape 7"/>
           <p:cNvSpPr/>
           <p:nvPr/>
         </p:nvSpPr>
@@ -5810,7 +6026,7 @@
       </p:sp>
       <p:sp>
         <p:nvSpPr>
-          <p:cNvPr id="8" name="Shape 6"/>
+          <p:cNvPr id="10" name="Shape 8"/>
           <p:cNvSpPr/>
           <p:nvPr/>
         </p:nvSpPr>
@@ -5841,7 +6057,7 @@
       </p:sp>
       <p:pic>
         <p:nvPicPr>
-          <p:cNvPr id="9" name="Image 0" descr="preencoded.png">    </p:cNvPr>
+          <p:cNvPr id="11" name="Image 0" descr="preencoded.png">    </p:cNvPr>
           <p:cNvPicPr>
             <a:picLocks noChangeAspect="1"/>
           </p:cNvPicPr>
@@ -5871,7 +6087,7 @@
       </p:pic>
       <p:sp>
         <p:nvSpPr>
-          <p:cNvPr id="10" name="Shape 7"/>
+          <p:cNvPr id="12" name="Shape 9"/>
           <p:cNvSpPr/>
           <p:nvPr/>
         </p:nvSpPr>
@@ -5909,7 +6125,7 @@
       </p:sp>
       <p:sp>
         <p:nvSpPr>
-          <p:cNvPr id="11" name="Shape 8"/>
+          <p:cNvPr id="13" name="Shape 10"/>
           <p:cNvSpPr/>
           <p:nvPr/>
         </p:nvSpPr>
@@ -5947,7 +6163,7 @@
       </p:sp>
       <p:sp>
         <p:nvSpPr>
-          <p:cNvPr id="12" name="Shape 9"/>
+          <p:cNvPr id="14" name="Shape 11"/>
           <p:cNvSpPr/>
           <p:nvPr/>
         </p:nvSpPr>
@@ -5978,7 +6194,7 @@
       </p:sp>
       <p:pic>
         <p:nvPicPr>
-          <p:cNvPr id="13" name="Image 1" descr="preencoded.png">    </p:cNvPr>
+          <p:cNvPr id="15" name="Image 1" descr="preencoded.png">    </p:cNvPr>
           <p:cNvPicPr>
             <a:picLocks noChangeAspect="1"/>
           </p:cNvPicPr>
@@ -6008,7 +6224,7 @@
       </p:pic>
       <p:sp>
         <p:nvSpPr>
-          <p:cNvPr id="14" name="Shape 10"/>
+          <p:cNvPr id="16" name="Shape 12"/>
           <p:cNvSpPr/>
           <p:nvPr/>
         </p:nvSpPr>
@@ -6046,7 +6262,7 @@
       </p:sp>
       <p:sp>
         <p:nvSpPr>
-          <p:cNvPr id="15" name="Shape 11"/>
+          <p:cNvPr id="17" name="Shape 13"/>
           <p:cNvSpPr/>
           <p:nvPr/>
         </p:nvSpPr>
@@ -6084,7 +6300,7 @@
       </p:sp>
       <p:sp>
         <p:nvSpPr>
-          <p:cNvPr id="16" name="Shape 12"/>
+          <p:cNvPr id="18" name="Shape 14"/>
           <p:cNvSpPr/>
           <p:nvPr/>
         </p:nvSpPr>
@@ -6115,7 +6331,7 @@
       </p:sp>
       <p:pic>
         <p:nvPicPr>
-          <p:cNvPr id="17" name="Image 2" descr="preencoded.png">    </p:cNvPr>
+          <p:cNvPr id="19" name="Image 2" descr="preencoded.png">    </p:cNvPr>
           <p:cNvPicPr>
             <a:picLocks noChangeAspect="1"/>
           </p:cNvPicPr>
@@ -6145,7 +6361,7 @@
       </p:pic>
       <p:sp>
         <p:nvSpPr>
-          <p:cNvPr id="18" name="Shape 13"/>
+          <p:cNvPr id="20" name="Shape 15"/>
           <p:cNvSpPr/>
           <p:nvPr/>
         </p:nvSpPr>
@@ -6183,7 +6399,7 @@
       </p:sp>
       <p:sp>
         <p:nvSpPr>
-          <p:cNvPr id="19" name="Shape 14"/>
+          <p:cNvPr id="21" name="Shape 16"/>
           <p:cNvSpPr/>
           <p:nvPr/>
         </p:nvSpPr>
@@ -6221,7 +6437,7 @@
       </p:sp>
       <p:sp>
         <p:nvSpPr>
-          <p:cNvPr id="20" name="Shape 15"/>
+          <p:cNvPr id="22" name="Shape 17"/>
           <p:cNvSpPr/>
           <p:nvPr/>
         </p:nvSpPr>
@@ -6252,7 +6468,7 @@
       </p:sp>
       <p:pic>
         <p:nvPicPr>
-          <p:cNvPr id="21" name="Image 3" descr="preencoded.png">    </p:cNvPr>
+          <p:cNvPr id="23" name="Image 3" descr="preencoded.png">    </p:cNvPr>
           <p:cNvPicPr>
             <a:picLocks noChangeAspect="1"/>
           </p:cNvPicPr>
@@ -6282,7 +6498,7 @@
       </p:pic>
       <p:sp>
         <p:nvSpPr>
-          <p:cNvPr id="22" name="Shape 16"/>
+          <p:cNvPr id="24" name="Shape 18"/>
           <p:cNvSpPr/>
           <p:nvPr/>
         </p:nvSpPr>
@@ -6309,7 +6525,7 @@
       </p:sp>
       <p:sp>
         <p:nvSpPr>
-          <p:cNvPr id="23" name="Shape 17"/>
+          <p:cNvPr id="25" name="Shape 19"/>
           <p:cNvSpPr/>
           <p:nvPr/>
         </p:nvSpPr>
@@ -6336,7 +6552,7 @@
       </p:sp>
       <p:sp>
         <p:nvSpPr>
-          <p:cNvPr id="24" name="Shape 18"/>
+          <p:cNvPr id="26" name="Shape 20"/>
           <p:cNvSpPr/>
           <p:nvPr/>
         </p:nvSpPr>
@@ -6363,7 +6579,7 @@
       </p:sp>
       <p:sp>
         <p:nvSpPr>
-          <p:cNvPr id="25" name="Shape 19"/>
+          <p:cNvPr id="27" name="Shape 21"/>
           <p:cNvSpPr/>
           <p:nvPr/>
         </p:nvSpPr>
@@ -6390,7 +6606,7 @@
       </p:sp>
       <p:sp>
         <p:nvSpPr>
-          <p:cNvPr id="26" name="mdpr:1-2-e3669a:title:__title:1-2-e3669a"/>
+          <p:cNvPr id="28" name="mdpr:1-2-e3669a:title:__title:1-2-e3669a"/>
           <p:cNvSpPr txBox="1"/>
           <p:nvPr/>
         </p:nvSpPr>
@@ -6432,7 +6648,7 @@
       </p:sp>
       <p:sp>
         <p:nvSpPr>
-          <p:cNvPr id="27" name="Shape 21"/>
+          <p:cNvPr id="29" name="Shape 23"/>
           <p:cNvSpPr/>
           <p:nvPr/>
         </p:nvSpPr>
@@ -6459,7 +6675,7 @@
       </p:sp>
       <p:pic>
         <p:nvPicPr>
-          <p:cNvPr id="28" name="Image 4" descr="article icon from tabler-icons (MIT)">    </p:cNvPr>
+          <p:cNvPr id="30" name="Image 4" descr="article icon from tabler-icons (MIT)">    </p:cNvPr>
           <p:cNvPicPr>
             <a:picLocks noChangeAspect="1"/>
           </p:cNvPicPr>
@@ -6489,7 +6705,7 @@
       </p:pic>
       <p:sp>
         <p:nvSpPr>
-          <p:cNvPr id="29" name="mdpr:1-2-e3669a:item-1:block-15-chunk-1"/>
+          <p:cNvPr id="31" name="mdpr:1-2-e3669a:item-1:block-15-chunk-1"/>
           <p:cNvSpPr txBox="1"/>
           <p:nvPr/>
         </p:nvSpPr>
@@ -6548,7 +6764,7 @@
       </p:sp>
       <p:sp>
         <p:nvSpPr>
-          <p:cNvPr id="30" name="Shape 23"/>
+          <p:cNvPr id="32" name="Shape 25"/>
           <p:cNvSpPr/>
           <p:nvPr/>
         </p:nvSpPr>
@@ -6575,7 +6791,7 @@
       </p:sp>
       <p:pic>
         <p:nvPicPr>
-          <p:cNvPr id="31" name="Image 5" descr="table icon from tabler-icons (MIT)">    </p:cNvPr>
+          <p:cNvPr id="33" name="Image 5" descr="table icon from tabler-icons (MIT)">    </p:cNvPr>
           <p:cNvPicPr>
             <a:picLocks noChangeAspect="1"/>
           </p:cNvPicPr>
@@ -6605,7 +6821,7 @@
       </p:pic>
       <p:sp>
         <p:nvSpPr>
-          <p:cNvPr id="32" name="mdpr:1-2-e3669a:item-2:block-15-chunk-1"/>
+          <p:cNvPr id="34" name="mdpr:1-2-e3669a:item-2:block-15-chunk-1"/>
           <p:cNvSpPr txBox="1"/>
           <p:nvPr/>
         </p:nvSpPr>
@@ -6664,7 +6880,7 @@
       </p:sp>
       <p:sp>
         <p:nvSpPr>
-          <p:cNvPr id="33" name="Shape 25"/>
+          <p:cNvPr id="35" name="Shape 27"/>
           <p:cNvSpPr/>
           <p:nvPr/>
         </p:nvSpPr>
@@ -6691,7 +6907,7 @@
       </p:sp>
       <p:pic>
         <p:nvPicPr>
-          <p:cNvPr id="34" name="Image 6" descr="chart icon from tabler-icons (MIT)">    </p:cNvPr>
+          <p:cNvPr id="36" name="Image 6" descr="chart icon from tabler-icons (MIT)">    </p:cNvPr>
           <p:cNvPicPr>
             <a:picLocks noChangeAspect="1"/>
           </p:cNvPicPr>
@@ -6721,7 +6937,7 @@
       </p:pic>
       <p:sp>
         <p:nvSpPr>
-          <p:cNvPr id="35" name="mdpr:1-2-e3669a:item-3:block-15-chunk-1"/>
+          <p:cNvPr id="37" name="mdpr:1-2-e3669a:item-3:block-15-chunk-1"/>
           <p:cNvSpPr txBox="1"/>
           <p:nvPr/>
         </p:nvSpPr>
@@ -6780,7 +6996,7 @@
       </p:sp>
       <p:sp>
         <p:nvSpPr>
-          <p:cNvPr id="36" name="Shape 27"/>
+          <p:cNvPr id="38" name="Shape 29"/>
           <p:cNvSpPr/>
           <p:nvPr/>
         </p:nvSpPr>
@@ -6807,7 +7023,7 @@
       </p:sp>
       <p:pic>
         <p:nvPicPr>
-          <p:cNvPr id="37" name="Image 7" descr="flow icon from tabler-icons (MIT)">    </p:cNvPr>
+          <p:cNvPr id="39" name="Image 7" descr="flow icon from tabler-icons (MIT)">    </p:cNvPr>
           <p:cNvPicPr>
             <a:picLocks noChangeAspect="1"/>
           </p:cNvPicPr>
@@ -6837,7 +7053,7 @@
       </p:pic>
       <p:sp>
         <p:nvSpPr>
-          <p:cNvPr id="38" name="mdpr:1-2-e3669a:item-4:block-15-chunk-1"/>
+          <p:cNvPr id="40" name="mdpr:1-2-e3669a:item-4:block-15-chunk-1"/>
           <p:cNvSpPr txBox="1"/>
           <p:nvPr/>
         </p:nvSpPr>
@@ -6934,29 +7150,31 @@
         </p:nvSpPr>
         <p:spPr>
           <a:xfrm>
-            <a:off x="10362895" y="502920"/>
-            <a:ext cx="822960" cy="822960"/>
-          </a:xfrm>
-          <a:prstGeom prst="ellipse">
-            <a:avLst/>
-          </a:prstGeom>
-          <a:solidFill>
-            <a:srgbClr val="F7FAFC">
-              <a:alpha val="92000"/>
+            <a:off x="493776" y="5852160"/>
+            <a:ext cx="11204143" cy="420624"/>
+          </a:xfrm>
+          <a:prstGeom prst="roundRect">
+            <a:avLst>
+              <a:gd name="adj" fmla="val 17391"/>
+            </a:avLst>
+          </a:prstGeom>
+          <a:solidFill>
+            <a:srgbClr val="DDE8F2">
+              <a:alpha val="62000"/>
             </a:srgbClr>
           </a:solidFill>
           <a:ln w="12700">
             <a:solidFill>
               <a:srgbClr val="FFFFFF">
-                <a:alpha val="0"/>
+                <a:alpha val="32000"/>
               </a:srgbClr>
             </a:solidFill>
             <a:prstDash val="solid"/>
           </a:ln>
           <a:effectLst>
-            <a:outerShdw sx="100000" sy="100000" kx="0" ky="0" algn="bl" rotWithShape="0" blurRad="15240" dist="50800" dir="2700000">
-              <a:srgbClr val="C7D0DE">
-                <a:alpha val="22000"/>
+            <a:outerShdw sx="100000" sy="100000" kx="0" ky="0" algn="bl" rotWithShape="0" blurRad="8890" dist="50800" dir="2700000">
+              <a:srgbClr val="A8B6C8">
+                <a:alpha val="8000"/>
               </a:srgbClr>
             </a:outerShdw>
           </a:effectLst>
@@ -6970,27 +7188,60 @@
         </p:nvSpPr>
         <p:spPr>
           <a:xfrm>
-            <a:off x="530352" y="5687568"/>
-            <a:ext cx="658368" cy="658368"/>
+            <a:off x="749808" y="5980176"/>
+            <a:ext cx="2103120" cy="146304"/>
+          </a:xfrm>
+          <a:prstGeom prst="roundRect">
+            <a:avLst>
+              <a:gd name="adj" fmla="val 25000"/>
+            </a:avLst>
+          </a:prstGeom>
+          <a:solidFill>
+            <a:srgbClr val="5D7FA4">
+              <a:alpha val="44000"/>
+            </a:srgbClr>
+          </a:solidFill>
+          <a:ln w="12700">
+            <a:solidFill>
+              <a:srgbClr val="5D7FA4">
+                <a:alpha val="0"/>
+              </a:srgbClr>
+            </a:solidFill>
+            <a:prstDash val="solid"/>
+          </a:ln>
+        </p:spPr>
+      </p:sp>
+      <p:sp>
+        <p:nvSpPr>
+          <p:cNvPr id="4" name="Shape 2"/>
+          <p:cNvSpPr/>
+          <p:nvPr/>
+        </p:nvSpPr>
+        <p:spPr>
+          <a:xfrm>
+            <a:off x="10710367" y="512064"/>
+            <a:ext cx="493776" cy="493776"/>
           </a:xfrm>
           <a:prstGeom prst="ellipse">
             <a:avLst/>
           </a:prstGeom>
           <a:solidFill>
-            <a:srgbClr val="EEF3F8"/>
-          </a:solidFill>
-          <a:ln w="12700">
-            <a:solidFill>
-              <a:srgbClr val="FFFFFF">
-                <a:alpha val="42000"/>
+            <a:srgbClr val="FFFFFF">
+              <a:alpha val="88000"/>
+            </a:srgbClr>
+          </a:solidFill>
+          <a:ln w="12700">
+            <a:solidFill>
+              <a:srgbClr val="CBD7E4">
+                <a:alpha val="50000"/>
               </a:srgbClr>
             </a:solidFill>
             <a:prstDash val="solid"/>
           </a:ln>
           <a:effectLst>
-            <a:outerShdw sx="100000" sy="100000" kx="0" ky="0" algn="bl" rotWithShape="0" blurRad="12700" dist="50800" dir="2700000">
-              <a:srgbClr val="B8C3D2">
-                <a:alpha val="18000"/>
+            <a:outerShdw sx="100000" sy="100000" kx="0" ky="0" algn="bl" rotWithShape="0" blurRad="11430" dist="50800" dir="2700000">
+              <a:srgbClr val="A8B6C8">
+                <a:alpha val="14000"/>
               </a:srgbClr>
             </a:outerShdw>
           </a:effectLst>
@@ -6998,38 +7249,57 @@
       </p:sp>
       <p:sp>
         <p:nvSpPr>
-          <p:cNvPr id="4" name="Shape 2"/>
-          <p:cNvSpPr/>
-          <p:nvPr/>
-        </p:nvSpPr>
-        <p:spPr>
-          <a:xfrm>
-            <a:off x="9357055" y="5907024"/>
-            <a:ext cx="2057400" cy="164592"/>
-          </a:xfrm>
-          <a:prstGeom prst="roundRect">
-            <a:avLst>
-              <a:gd name="adj" fmla="val 22222"/>
-            </a:avLst>
-          </a:prstGeom>
-          <a:solidFill>
-            <a:srgbClr val="FFFFFF">
-              <a:alpha val="72000"/>
-            </a:srgbClr>
-          </a:solidFill>
+          <p:cNvPr id="5" name="Shape 3"/>
+          <p:cNvSpPr/>
+          <p:nvPr/>
+        </p:nvSpPr>
+        <p:spPr>
+          <a:xfrm>
+            <a:off x="749808" y="749808"/>
+            <a:ext cx="1353312" cy="0"/>
+          </a:xfrm>
+          <a:prstGeom prst="line">
+            <a:avLst/>
+          </a:prstGeom>
+          <a:noFill/>
+          <a:ln w="12700">
+            <a:solidFill>
+              <a:srgbClr val="5D7FA4">
+                <a:alpha val="84000"/>
+              </a:srgbClr>
+            </a:solidFill>
+            <a:prstDash val="solid"/>
+          </a:ln>
+        </p:spPr>
+      </p:sp>
+      <p:sp>
+        <p:nvSpPr>
+          <p:cNvPr id="6" name="Shape 4"/>
+          <p:cNvSpPr/>
+          <p:nvPr/>
+        </p:nvSpPr>
+        <p:spPr>
+          <a:xfrm>
+            <a:off x="10088575" y="6144768"/>
+            <a:ext cx="1188720" cy="0"/>
+          </a:xfrm>
+          <a:prstGeom prst="line">
+            <a:avLst/>
+          </a:prstGeom>
+          <a:noFill/>
           <a:ln w="12700">
             <a:solidFill>
               <a:srgbClr val="FFFFFF">
-                <a:alpha val="0"/>
-              </a:srgbClr>
-            </a:solidFill>
-            <a:prstDash val="solid"/>
-          </a:ln>
-        </p:spPr>
-      </p:sp>
-      <p:sp>
-        <p:nvSpPr>
-          <p:cNvPr id="5" name="Shape 3"/>
+                <a:alpha val="82000"/>
+              </a:srgbClr>
+            </a:solidFill>
+            <a:prstDash val="solid"/>
+          </a:ln>
+        </p:spPr>
+      </p:sp>
+      <p:sp>
+        <p:nvSpPr>
+          <p:cNvPr id="7" name="Shape 5"/>
           <p:cNvSpPr/>
           <p:nvPr/>
         </p:nvSpPr>
@@ -7056,7 +7326,7 @@
       </p:sp>
       <p:sp>
         <p:nvSpPr>
-          <p:cNvPr id="6" name="Shape 4"/>
+          <p:cNvPr id="8" name="Shape 6"/>
           <p:cNvSpPr/>
           <p:nvPr/>
         </p:nvSpPr>
@@ -7083,7 +7353,7 @@
       </p:sp>
       <p:sp>
         <p:nvSpPr>
-          <p:cNvPr id="7" name="Shape 5"/>
+          <p:cNvPr id="9" name="Shape 7"/>
           <p:cNvSpPr/>
           <p:nvPr/>
         </p:nvSpPr>
@@ -7110,7 +7380,7 @@
       </p:sp>
       <p:sp>
         <p:nvSpPr>
-          <p:cNvPr id="8" name="mdpr:2-2-c23e9b:title:__title:2-2-c23e9b"/>
+          <p:cNvPr id="10" name="mdpr:2-2-c23e9b:title:__title:2-2-c23e9b"/>
           <p:cNvSpPr txBox="1"/>
           <p:nvPr/>
         </p:nvSpPr>
@@ -7152,7 +7422,7 @@
       </p:sp>
       <p:sp>
         <p:nvSpPr>
-          <p:cNvPr id="9" name="mdpr:2-2-c23e9b:left:block-15-chunk-2"/>
+          <p:cNvPr id="11" name="mdpr:2-2-c23e9b:left:block-15-chunk-2"/>
           <p:cNvSpPr txBox="1"/>
           <p:nvPr/>
         </p:nvSpPr>
@@ -7211,7 +7481,7 @@
       </p:sp>
       <p:sp>
         <p:nvSpPr>
-          <p:cNvPr id="10" name="mdpr:2-2-c23e9b:right:block-15-chunk-2"/>
+          <p:cNvPr id="12" name="mdpr:2-2-c23e9b:right:block-15-chunk-2"/>
           <p:cNvSpPr txBox="1"/>
           <p:nvPr/>
         </p:nvSpPr>
@@ -7308,29 +7578,31 @@
         </p:nvSpPr>
         <p:spPr>
           <a:xfrm>
-            <a:off x="10362895" y="502920"/>
-            <a:ext cx="822960" cy="822960"/>
-          </a:xfrm>
-          <a:prstGeom prst="ellipse">
-            <a:avLst/>
-          </a:prstGeom>
-          <a:solidFill>
-            <a:srgbClr val="F7FAFC">
-              <a:alpha val="92000"/>
+            <a:off x="493776" y="5852160"/>
+            <a:ext cx="11204143" cy="420624"/>
+          </a:xfrm>
+          <a:prstGeom prst="roundRect">
+            <a:avLst>
+              <a:gd name="adj" fmla="val 17391"/>
+            </a:avLst>
+          </a:prstGeom>
+          <a:solidFill>
+            <a:srgbClr val="DDE8F2">
+              <a:alpha val="62000"/>
             </a:srgbClr>
           </a:solidFill>
           <a:ln w="12700">
             <a:solidFill>
               <a:srgbClr val="FFFFFF">
-                <a:alpha val="0"/>
+                <a:alpha val="32000"/>
               </a:srgbClr>
             </a:solidFill>
             <a:prstDash val="solid"/>
           </a:ln>
           <a:effectLst>
-            <a:outerShdw sx="100000" sy="100000" kx="0" ky="0" algn="bl" rotWithShape="0" blurRad="15240" dist="50800" dir="2700000">
-              <a:srgbClr val="C7D0DE">
-                <a:alpha val="22000"/>
+            <a:outerShdw sx="100000" sy="100000" kx="0" ky="0" algn="bl" rotWithShape="0" blurRad="8890" dist="50800" dir="2700000">
+              <a:srgbClr val="A8B6C8">
+                <a:alpha val="8000"/>
               </a:srgbClr>
             </a:outerShdw>
           </a:effectLst>
@@ -7344,27 +7616,60 @@
         </p:nvSpPr>
         <p:spPr>
           <a:xfrm>
-            <a:off x="530352" y="5687568"/>
-            <a:ext cx="658368" cy="658368"/>
+            <a:off x="749808" y="5980176"/>
+            <a:ext cx="2103120" cy="146304"/>
+          </a:xfrm>
+          <a:prstGeom prst="roundRect">
+            <a:avLst>
+              <a:gd name="adj" fmla="val 25000"/>
+            </a:avLst>
+          </a:prstGeom>
+          <a:solidFill>
+            <a:srgbClr val="5D7FA4">
+              <a:alpha val="44000"/>
+            </a:srgbClr>
+          </a:solidFill>
+          <a:ln w="12700">
+            <a:solidFill>
+              <a:srgbClr val="5D7FA4">
+                <a:alpha val="0"/>
+              </a:srgbClr>
+            </a:solidFill>
+            <a:prstDash val="solid"/>
+          </a:ln>
+        </p:spPr>
+      </p:sp>
+      <p:sp>
+        <p:nvSpPr>
+          <p:cNvPr id="4" name="Shape 2"/>
+          <p:cNvSpPr/>
+          <p:nvPr/>
+        </p:nvSpPr>
+        <p:spPr>
+          <a:xfrm>
+            <a:off x="10710367" y="512064"/>
+            <a:ext cx="493776" cy="493776"/>
           </a:xfrm>
           <a:prstGeom prst="ellipse">
             <a:avLst/>
           </a:prstGeom>
           <a:solidFill>
-            <a:srgbClr val="EEF3F8"/>
-          </a:solidFill>
-          <a:ln w="12700">
-            <a:solidFill>
-              <a:srgbClr val="FFFFFF">
-                <a:alpha val="42000"/>
+            <a:srgbClr val="FFFFFF">
+              <a:alpha val="88000"/>
+            </a:srgbClr>
+          </a:solidFill>
+          <a:ln w="12700">
+            <a:solidFill>
+              <a:srgbClr val="CBD7E4">
+                <a:alpha val="50000"/>
               </a:srgbClr>
             </a:solidFill>
             <a:prstDash val="solid"/>
           </a:ln>
           <a:effectLst>
-            <a:outerShdw sx="100000" sy="100000" kx="0" ky="0" algn="bl" rotWithShape="0" blurRad="12700" dist="50800" dir="2700000">
-              <a:srgbClr val="B8C3D2">
-                <a:alpha val="18000"/>
+            <a:outerShdw sx="100000" sy="100000" kx="0" ky="0" algn="bl" rotWithShape="0" blurRad="11430" dist="50800" dir="2700000">
+              <a:srgbClr val="A8B6C8">
+                <a:alpha val="14000"/>
               </a:srgbClr>
             </a:outerShdw>
           </a:effectLst>
@@ -7372,38 +7677,57 @@
       </p:sp>
       <p:sp>
         <p:nvSpPr>
-          <p:cNvPr id="4" name="Shape 2"/>
-          <p:cNvSpPr/>
-          <p:nvPr/>
-        </p:nvSpPr>
-        <p:spPr>
-          <a:xfrm>
-            <a:off x="9357055" y="5907024"/>
-            <a:ext cx="2057400" cy="164592"/>
-          </a:xfrm>
-          <a:prstGeom prst="roundRect">
-            <a:avLst>
-              <a:gd name="adj" fmla="val 22222"/>
-            </a:avLst>
-          </a:prstGeom>
-          <a:solidFill>
-            <a:srgbClr val="FFFFFF">
-              <a:alpha val="72000"/>
-            </a:srgbClr>
-          </a:solidFill>
+          <p:cNvPr id="5" name="Shape 3"/>
+          <p:cNvSpPr/>
+          <p:nvPr/>
+        </p:nvSpPr>
+        <p:spPr>
+          <a:xfrm>
+            <a:off x="749808" y="749808"/>
+            <a:ext cx="1353312" cy="0"/>
+          </a:xfrm>
+          <a:prstGeom prst="line">
+            <a:avLst/>
+          </a:prstGeom>
+          <a:noFill/>
+          <a:ln w="12700">
+            <a:solidFill>
+              <a:srgbClr val="5D7FA4">
+                <a:alpha val="84000"/>
+              </a:srgbClr>
+            </a:solidFill>
+            <a:prstDash val="solid"/>
+          </a:ln>
+        </p:spPr>
+      </p:sp>
+      <p:sp>
+        <p:nvSpPr>
+          <p:cNvPr id="6" name="Shape 4"/>
+          <p:cNvSpPr/>
+          <p:nvPr/>
+        </p:nvSpPr>
+        <p:spPr>
+          <a:xfrm>
+            <a:off x="10088575" y="6144768"/>
+            <a:ext cx="1188720" cy="0"/>
+          </a:xfrm>
+          <a:prstGeom prst="line">
+            <a:avLst/>
+          </a:prstGeom>
+          <a:noFill/>
           <a:ln w="12700">
             <a:solidFill>
               <a:srgbClr val="FFFFFF">
-                <a:alpha val="0"/>
-              </a:srgbClr>
-            </a:solidFill>
-            <a:prstDash val="solid"/>
-          </a:ln>
-        </p:spPr>
-      </p:sp>
-      <p:sp>
-        <p:nvSpPr>
-          <p:cNvPr id="5" name="Shape 3"/>
+                <a:alpha val="82000"/>
+              </a:srgbClr>
+            </a:solidFill>
+            <a:prstDash val="solid"/>
+          </a:ln>
+        </p:spPr>
+      </p:sp>
+      <p:sp>
+        <p:nvSpPr>
+          <p:cNvPr id="7" name="Shape 5"/>
           <p:cNvSpPr/>
           <p:nvPr/>
         </p:nvSpPr>
@@ -7430,7 +7754,7 @@
       </p:sp>
       <p:sp>
         <p:nvSpPr>
-          <p:cNvPr id="6" name="Shape 4"/>
+          <p:cNvPr id="8" name="Shape 6"/>
           <p:cNvSpPr/>
           <p:nvPr/>
         </p:nvSpPr>
@@ -7468,7 +7792,7 @@
       </p:sp>
       <p:sp>
         <p:nvSpPr>
-          <p:cNvPr id="7" name="Shape 5"/>
+          <p:cNvPr id="9" name="Shape 7"/>
           <p:cNvSpPr/>
           <p:nvPr/>
         </p:nvSpPr>
@@ -7506,7 +7830,7 @@
       </p:sp>
       <p:sp>
         <p:nvSpPr>
-          <p:cNvPr id="8" name="Shape 6"/>
+          <p:cNvPr id="10" name="Shape 8"/>
           <p:cNvSpPr/>
           <p:nvPr/>
         </p:nvSpPr>
@@ -7537,7 +7861,7 @@
       </p:sp>
       <p:pic>
         <p:nvPicPr>
-          <p:cNvPr id="9" name="Image 0" descr="preencoded.png">    </p:cNvPr>
+          <p:cNvPr id="11" name="Image 0" descr="preencoded.png">    </p:cNvPr>
           <p:cNvPicPr>
             <a:picLocks noChangeAspect="1"/>
           </p:cNvPicPr>
@@ -7567,7 +7891,7 @@
       </p:pic>
       <p:sp>
         <p:nvSpPr>
-          <p:cNvPr id="10" name="mdpr:table-coherence-2f9a7b:title:__title:table-coherence-2f9a7b"/>
+          <p:cNvPr id="12" name="mdpr:table-coherence-2f9a7b:title:__title:table-coherence-2f9a7b"/>
           <p:cNvSpPr txBox="1"/>
           <p:nvPr/>
         </p:nvSpPr>
@@ -8702,29 +9026,31 @@
         </p:nvSpPr>
         <p:spPr>
           <a:xfrm>
-            <a:off x="10362895" y="502920"/>
-            <a:ext cx="822960" cy="822960"/>
-          </a:xfrm>
-          <a:prstGeom prst="ellipse">
-            <a:avLst/>
-          </a:prstGeom>
-          <a:solidFill>
-            <a:srgbClr val="F7FAFC">
-              <a:alpha val="92000"/>
+            <a:off x="493776" y="5852160"/>
+            <a:ext cx="11204143" cy="420624"/>
+          </a:xfrm>
+          <a:prstGeom prst="roundRect">
+            <a:avLst>
+              <a:gd name="adj" fmla="val 17391"/>
+            </a:avLst>
+          </a:prstGeom>
+          <a:solidFill>
+            <a:srgbClr val="DDE8F2">
+              <a:alpha val="62000"/>
             </a:srgbClr>
           </a:solidFill>
           <a:ln w="12700">
             <a:solidFill>
               <a:srgbClr val="FFFFFF">
-                <a:alpha val="0"/>
+                <a:alpha val="32000"/>
               </a:srgbClr>
             </a:solidFill>
             <a:prstDash val="solid"/>
           </a:ln>
           <a:effectLst>
-            <a:outerShdw sx="100000" sy="100000" kx="0" ky="0" algn="bl" rotWithShape="0" blurRad="15240" dist="50800" dir="2700000">
-              <a:srgbClr val="C7D0DE">
-                <a:alpha val="22000"/>
+            <a:outerShdw sx="100000" sy="100000" kx="0" ky="0" algn="bl" rotWithShape="0" blurRad="8890" dist="50800" dir="2700000">
+              <a:srgbClr val="A8B6C8">
+                <a:alpha val="8000"/>
               </a:srgbClr>
             </a:outerShdw>
           </a:effectLst>
@@ -8738,27 +9064,60 @@
         </p:nvSpPr>
         <p:spPr>
           <a:xfrm>
-            <a:off x="530352" y="5687568"/>
-            <a:ext cx="658368" cy="658368"/>
+            <a:off x="749808" y="5980176"/>
+            <a:ext cx="2103120" cy="146304"/>
+          </a:xfrm>
+          <a:prstGeom prst="roundRect">
+            <a:avLst>
+              <a:gd name="adj" fmla="val 25000"/>
+            </a:avLst>
+          </a:prstGeom>
+          <a:solidFill>
+            <a:srgbClr val="5D7FA4">
+              <a:alpha val="44000"/>
+            </a:srgbClr>
+          </a:solidFill>
+          <a:ln w="12700">
+            <a:solidFill>
+              <a:srgbClr val="5D7FA4">
+                <a:alpha val="0"/>
+              </a:srgbClr>
+            </a:solidFill>
+            <a:prstDash val="solid"/>
+          </a:ln>
+        </p:spPr>
+      </p:sp>
+      <p:sp>
+        <p:nvSpPr>
+          <p:cNvPr id="4" name="Shape 2"/>
+          <p:cNvSpPr/>
+          <p:nvPr/>
+        </p:nvSpPr>
+        <p:spPr>
+          <a:xfrm>
+            <a:off x="10710367" y="512064"/>
+            <a:ext cx="493776" cy="493776"/>
           </a:xfrm>
           <a:prstGeom prst="ellipse">
             <a:avLst/>
           </a:prstGeom>
           <a:solidFill>
-            <a:srgbClr val="EEF3F8"/>
-          </a:solidFill>
-          <a:ln w="12700">
-            <a:solidFill>
-              <a:srgbClr val="FFFFFF">
-                <a:alpha val="42000"/>
+            <a:srgbClr val="FFFFFF">
+              <a:alpha val="88000"/>
+            </a:srgbClr>
+          </a:solidFill>
+          <a:ln w="12700">
+            <a:solidFill>
+              <a:srgbClr val="CBD7E4">
+                <a:alpha val="50000"/>
               </a:srgbClr>
             </a:solidFill>
             <a:prstDash val="solid"/>
           </a:ln>
           <a:effectLst>
-            <a:outerShdw sx="100000" sy="100000" kx="0" ky="0" algn="bl" rotWithShape="0" blurRad="12700" dist="50800" dir="2700000">
-              <a:srgbClr val="B8C3D2">
-                <a:alpha val="18000"/>
+            <a:outerShdw sx="100000" sy="100000" kx="0" ky="0" algn="bl" rotWithShape="0" blurRad="11430" dist="50800" dir="2700000">
+              <a:srgbClr val="A8B6C8">
+                <a:alpha val="14000"/>
               </a:srgbClr>
             </a:outerShdw>
           </a:effectLst>
@@ -8766,38 +9125,57 @@
       </p:sp>
       <p:sp>
         <p:nvSpPr>
-          <p:cNvPr id="4" name="Shape 2"/>
-          <p:cNvSpPr/>
-          <p:nvPr/>
-        </p:nvSpPr>
-        <p:spPr>
-          <a:xfrm>
-            <a:off x="9357055" y="5907024"/>
-            <a:ext cx="2057400" cy="164592"/>
-          </a:xfrm>
-          <a:prstGeom prst="roundRect">
-            <a:avLst>
-              <a:gd name="adj" fmla="val 22222"/>
-            </a:avLst>
-          </a:prstGeom>
-          <a:solidFill>
-            <a:srgbClr val="FFFFFF">
-              <a:alpha val="72000"/>
-            </a:srgbClr>
-          </a:solidFill>
+          <p:cNvPr id="5" name="Shape 3"/>
+          <p:cNvSpPr/>
+          <p:nvPr/>
+        </p:nvSpPr>
+        <p:spPr>
+          <a:xfrm>
+            <a:off x="749808" y="749808"/>
+            <a:ext cx="1353312" cy="0"/>
+          </a:xfrm>
+          <a:prstGeom prst="line">
+            <a:avLst/>
+          </a:prstGeom>
+          <a:noFill/>
+          <a:ln w="12700">
+            <a:solidFill>
+              <a:srgbClr val="5D7FA4">
+                <a:alpha val="84000"/>
+              </a:srgbClr>
+            </a:solidFill>
+            <a:prstDash val="solid"/>
+          </a:ln>
+        </p:spPr>
+      </p:sp>
+      <p:sp>
+        <p:nvSpPr>
+          <p:cNvPr id="6" name="Shape 4"/>
+          <p:cNvSpPr/>
+          <p:nvPr/>
+        </p:nvSpPr>
+        <p:spPr>
+          <a:xfrm>
+            <a:off x="10088575" y="6144768"/>
+            <a:ext cx="1188720" cy="0"/>
+          </a:xfrm>
+          <a:prstGeom prst="line">
+            <a:avLst/>
+          </a:prstGeom>
+          <a:noFill/>
           <a:ln w="12700">
             <a:solidFill>
               <a:srgbClr val="FFFFFF">
-                <a:alpha val="0"/>
-              </a:srgbClr>
-            </a:solidFill>
-            <a:prstDash val="solid"/>
-          </a:ln>
-        </p:spPr>
-      </p:sp>
-      <p:sp>
-        <p:nvSpPr>
-          <p:cNvPr id="5" name="Shape 3"/>
+                <a:alpha val="82000"/>
+              </a:srgbClr>
+            </a:solidFill>
+            <a:prstDash val="solid"/>
+          </a:ln>
+        </p:spPr>
+      </p:sp>
+      <p:sp>
+        <p:nvSpPr>
+          <p:cNvPr id="7" name="Shape 5"/>
           <p:cNvSpPr/>
           <p:nvPr/>
         </p:nvSpPr>
@@ -8824,7 +9202,7 @@
       </p:sp>
       <p:sp>
         <p:nvSpPr>
-          <p:cNvPr id="6" name="Shape 4"/>
+          <p:cNvPr id="8" name="Shape 6"/>
           <p:cNvSpPr/>
           <p:nvPr/>
         </p:nvSpPr>
@@ -8862,7 +9240,7 @@
       </p:sp>
       <p:sp>
         <p:nvSpPr>
-          <p:cNvPr id="7" name="Shape 5"/>
+          <p:cNvPr id="9" name="Shape 7"/>
           <p:cNvSpPr/>
           <p:nvPr/>
         </p:nvSpPr>
@@ -8900,7 +9278,7 @@
       </p:sp>
       <p:sp>
         <p:nvSpPr>
-          <p:cNvPr id="8" name="Shape 6"/>
+          <p:cNvPr id="10" name="Shape 8"/>
           <p:cNvSpPr/>
           <p:nvPr/>
         </p:nvSpPr>
@@ -8931,7 +9309,7 @@
       </p:sp>
       <p:pic>
         <p:nvPicPr>
-          <p:cNvPr id="9" name="Image 0" descr="preencoded.png">    </p:cNvPr>
+          <p:cNvPr id="11" name="Image 0" descr="preencoded.png">    </p:cNvPr>
           <p:cNvPicPr>
             <a:picLocks noChangeAspect="1"/>
           </p:cNvPicPr>
@@ -8961,7 +9339,7 @@
       </p:pic>
       <p:sp>
         <p:nvSpPr>
-          <p:cNvPr id="10" name="Shape 7"/>
+          <p:cNvPr id="12" name="Shape 9"/>
           <p:cNvSpPr/>
           <p:nvPr/>
         </p:nvSpPr>
@@ -8988,7 +9366,7 @@
       </p:sp>
       <p:sp>
         <p:nvSpPr>
-          <p:cNvPr id="11" name="mdpr:1-2-2ff3f0:title:__title:1-2-2ff3f0"/>
+          <p:cNvPr id="13" name="mdpr:1-2-2ff3f0:title:__title:1-2-2ff3f0"/>
           <p:cNvSpPr txBox="1"/>
           <p:nvPr/>
         </p:nvSpPr>
@@ -9030,7 +9408,7 @@
       </p:sp>
       <p:sp>
         <p:nvSpPr>
-          <p:cNvPr id="12" name="mdpr:1-2-2ff3f0:body:block-19"/>
+          <p:cNvPr id="14" name="mdpr:1-2-2ff3f0:body:block-19"/>
           <p:cNvSpPr txBox="1"/>
           <p:nvPr/>
         </p:nvSpPr>
@@ -9169,7 +9547,7 @@
       </p:sp>
       <p:graphicFrame>
         <p:nvGraphicFramePr>
-          <p:cNvPr id="13" name="Chart 0" descr=""/>
+          <p:cNvPr id="15" name="Chart 0" descr=""/>
           <p:cNvGraphicFramePr/>
           <p:nvPr/>
         </p:nvGraphicFramePr>
@@ -9223,29 +9601,31 @@
         </p:nvSpPr>
         <p:spPr>
           <a:xfrm>
-            <a:off x="10362895" y="502920"/>
-            <a:ext cx="822960" cy="822960"/>
-          </a:xfrm>
-          <a:prstGeom prst="ellipse">
-            <a:avLst/>
-          </a:prstGeom>
-          <a:solidFill>
-            <a:srgbClr val="F7FAFC">
-              <a:alpha val="92000"/>
+            <a:off x="493776" y="5852160"/>
+            <a:ext cx="11204143" cy="420624"/>
+          </a:xfrm>
+          <a:prstGeom prst="roundRect">
+            <a:avLst>
+              <a:gd name="adj" fmla="val 17391"/>
+            </a:avLst>
+          </a:prstGeom>
+          <a:solidFill>
+            <a:srgbClr val="DDE8F2">
+              <a:alpha val="62000"/>
             </a:srgbClr>
           </a:solidFill>
           <a:ln w="12700">
             <a:solidFill>
               <a:srgbClr val="FFFFFF">
-                <a:alpha val="0"/>
+                <a:alpha val="32000"/>
               </a:srgbClr>
             </a:solidFill>
             <a:prstDash val="solid"/>
           </a:ln>
           <a:effectLst>
-            <a:outerShdw sx="100000" sy="100000" kx="0" ky="0" algn="bl" rotWithShape="0" blurRad="15240" dist="50800" dir="2700000">
-              <a:srgbClr val="C7D0DE">
-                <a:alpha val="22000"/>
+            <a:outerShdw sx="100000" sy="100000" kx="0" ky="0" algn="bl" rotWithShape="0" blurRad="8890" dist="50800" dir="2700000">
+              <a:srgbClr val="A8B6C8">
+                <a:alpha val="8000"/>
               </a:srgbClr>
             </a:outerShdw>
           </a:effectLst>
@@ -9259,27 +9639,60 @@
         </p:nvSpPr>
         <p:spPr>
           <a:xfrm>
-            <a:off x="530352" y="5687568"/>
-            <a:ext cx="658368" cy="658368"/>
+            <a:off x="749808" y="5980176"/>
+            <a:ext cx="2103120" cy="146304"/>
+          </a:xfrm>
+          <a:prstGeom prst="roundRect">
+            <a:avLst>
+              <a:gd name="adj" fmla="val 25000"/>
+            </a:avLst>
+          </a:prstGeom>
+          <a:solidFill>
+            <a:srgbClr val="5D7FA4">
+              <a:alpha val="44000"/>
+            </a:srgbClr>
+          </a:solidFill>
+          <a:ln w="12700">
+            <a:solidFill>
+              <a:srgbClr val="5D7FA4">
+                <a:alpha val="0"/>
+              </a:srgbClr>
+            </a:solidFill>
+            <a:prstDash val="solid"/>
+          </a:ln>
+        </p:spPr>
+      </p:sp>
+      <p:sp>
+        <p:nvSpPr>
+          <p:cNvPr id="4" name="Shape 2"/>
+          <p:cNvSpPr/>
+          <p:nvPr/>
+        </p:nvSpPr>
+        <p:spPr>
+          <a:xfrm>
+            <a:off x="10710367" y="512064"/>
+            <a:ext cx="493776" cy="493776"/>
           </a:xfrm>
           <a:prstGeom prst="ellipse">
             <a:avLst/>
           </a:prstGeom>
           <a:solidFill>
-            <a:srgbClr val="EEF3F8"/>
-          </a:solidFill>
-          <a:ln w="12700">
-            <a:solidFill>
-              <a:srgbClr val="FFFFFF">
-                <a:alpha val="42000"/>
+            <a:srgbClr val="FFFFFF">
+              <a:alpha val="88000"/>
+            </a:srgbClr>
+          </a:solidFill>
+          <a:ln w="12700">
+            <a:solidFill>
+              <a:srgbClr val="CBD7E4">
+                <a:alpha val="50000"/>
               </a:srgbClr>
             </a:solidFill>
             <a:prstDash val="solid"/>
           </a:ln>
           <a:effectLst>
-            <a:outerShdw sx="100000" sy="100000" kx="0" ky="0" algn="bl" rotWithShape="0" blurRad="12700" dist="50800" dir="2700000">
-              <a:srgbClr val="B8C3D2">
-                <a:alpha val="18000"/>
+            <a:outerShdw sx="100000" sy="100000" kx="0" ky="0" algn="bl" rotWithShape="0" blurRad="11430" dist="50800" dir="2700000">
+              <a:srgbClr val="A8B6C8">
+                <a:alpha val="14000"/>
               </a:srgbClr>
             </a:outerShdw>
           </a:effectLst>
@@ -9287,38 +9700,57 @@
       </p:sp>
       <p:sp>
         <p:nvSpPr>
-          <p:cNvPr id="4" name="Shape 2"/>
-          <p:cNvSpPr/>
-          <p:nvPr/>
-        </p:nvSpPr>
-        <p:spPr>
-          <a:xfrm>
-            <a:off x="9357055" y="5907024"/>
-            <a:ext cx="2057400" cy="164592"/>
-          </a:xfrm>
-          <a:prstGeom prst="roundRect">
-            <a:avLst>
-              <a:gd name="adj" fmla="val 22222"/>
-            </a:avLst>
-          </a:prstGeom>
-          <a:solidFill>
-            <a:srgbClr val="FFFFFF">
-              <a:alpha val="72000"/>
-            </a:srgbClr>
-          </a:solidFill>
+          <p:cNvPr id="5" name="Shape 3"/>
+          <p:cNvSpPr/>
+          <p:nvPr/>
+        </p:nvSpPr>
+        <p:spPr>
+          <a:xfrm>
+            <a:off x="749808" y="749808"/>
+            <a:ext cx="1353312" cy="0"/>
+          </a:xfrm>
+          <a:prstGeom prst="line">
+            <a:avLst/>
+          </a:prstGeom>
+          <a:noFill/>
+          <a:ln w="12700">
+            <a:solidFill>
+              <a:srgbClr val="5D7FA4">
+                <a:alpha val="84000"/>
+              </a:srgbClr>
+            </a:solidFill>
+            <a:prstDash val="solid"/>
+          </a:ln>
+        </p:spPr>
+      </p:sp>
+      <p:sp>
+        <p:nvSpPr>
+          <p:cNvPr id="6" name="Shape 4"/>
+          <p:cNvSpPr/>
+          <p:nvPr/>
+        </p:nvSpPr>
+        <p:spPr>
+          <a:xfrm>
+            <a:off x="10088575" y="6144768"/>
+            <a:ext cx="1188720" cy="0"/>
+          </a:xfrm>
+          <a:prstGeom prst="line">
+            <a:avLst/>
+          </a:prstGeom>
+          <a:noFill/>
           <a:ln w="12700">
             <a:solidFill>
               <a:srgbClr val="FFFFFF">
-                <a:alpha val="0"/>
-              </a:srgbClr>
-            </a:solidFill>
-            <a:prstDash val="solid"/>
-          </a:ln>
-        </p:spPr>
-      </p:sp>
-      <p:sp>
-        <p:nvSpPr>
-          <p:cNvPr id="5" name="Shape 3"/>
+                <a:alpha val="82000"/>
+              </a:srgbClr>
+            </a:solidFill>
+            <a:prstDash val="solid"/>
+          </a:ln>
+        </p:spPr>
+      </p:sp>
+      <p:sp>
+        <p:nvSpPr>
+          <p:cNvPr id="7" name="Shape 5"/>
           <p:cNvSpPr/>
           <p:nvPr/>
         </p:nvSpPr>
@@ -9345,7 +9777,7 @@
       </p:sp>
       <p:sp>
         <p:nvSpPr>
-          <p:cNvPr id="6" name="Shape 4"/>
+          <p:cNvPr id="8" name="Shape 6"/>
           <p:cNvSpPr/>
           <p:nvPr/>
         </p:nvSpPr>
@@ -9383,7 +9815,7 @@
       </p:sp>
       <p:sp>
         <p:nvSpPr>
-          <p:cNvPr id="7" name="Shape 5"/>
+          <p:cNvPr id="9" name="Shape 7"/>
           <p:cNvSpPr/>
           <p:nvPr/>
         </p:nvSpPr>
@@ -9421,7 +9853,7 @@
       </p:sp>
       <p:sp>
         <p:nvSpPr>
-          <p:cNvPr id="8" name="Shape 6"/>
+          <p:cNvPr id="10" name="Shape 8"/>
           <p:cNvSpPr/>
           <p:nvPr/>
         </p:nvSpPr>
@@ -9452,7 +9884,7 @@
       </p:sp>
       <p:pic>
         <p:nvPicPr>
-          <p:cNvPr id="9" name="Image 0" descr="preencoded.png">    </p:cNvPr>
+          <p:cNvPr id="11" name="Image 0" descr="preencoded.png">    </p:cNvPr>
           <p:cNvPicPr>
             <a:picLocks noChangeAspect="1"/>
           </p:cNvPicPr>
@@ -9482,7 +9914,7 @@
       </p:pic>
       <p:sp>
         <p:nvSpPr>
-          <p:cNvPr id="10" name="mdpr:2-2-542095:title:__title:2-2-542095"/>
+          <p:cNvPr id="12" name="mdpr:2-2-542095:title:__title:2-2-542095"/>
           <p:cNvSpPr txBox="1"/>
           <p:nvPr/>
         </p:nvSpPr>
@@ -10405,29 +10837,31 @@
         </p:nvSpPr>
         <p:spPr>
           <a:xfrm>
-            <a:off x="10362895" y="502920"/>
-            <a:ext cx="822960" cy="822960"/>
-          </a:xfrm>
-          <a:prstGeom prst="ellipse">
-            <a:avLst/>
-          </a:prstGeom>
-          <a:solidFill>
-            <a:srgbClr val="F7FAFC">
-              <a:alpha val="92000"/>
+            <a:off x="493776" y="5852160"/>
+            <a:ext cx="11204143" cy="420624"/>
+          </a:xfrm>
+          <a:prstGeom prst="roundRect">
+            <a:avLst>
+              <a:gd name="adj" fmla="val 17391"/>
+            </a:avLst>
+          </a:prstGeom>
+          <a:solidFill>
+            <a:srgbClr val="DDE8F2">
+              <a:alpha val="62000"/>
             </a:srgbClr>
           </a:solidFill>
           <a:ln w="12700">
             <a:solidFill>
               <a:srgbClr val="FFFFFF">
-                <a:alpha val="0"/>
+                <a:alpha val="32000"/>
               </a:srgbClr>
             </a:solidFill>
             <a:prstDash val="solid"/>
           </a:ln>
           <a:effectLst>
-            <a:outerShdw sx="100000" sy="100000" kx="0" ky="0" algn="bl" rotWithShape="0" blurRad="15240" dist="50800" dir="2700000">
-              <a:srgbClr val="C7D0DE">
-                <a:alpha val="22000"/>
+            <a:outerShdw sx="100000" sy="100000" kx="0" ky="0" algn="bl" rotWithShape="0" blurRad="8890" dist="50800" dir="2700000">
+              <a:srgbClr val="A8B6C8">
+                <a:alpha val="8000"/>
               </a:srgbClr>
             </a:outerShdw>
           </a:effectLst>
@@ -10441,27 +10875,60 @@
         </p:nvSpPr>
         <p:spPr>
           <a:xfrm>
-            <a:off x="530352" y="5687568"/>
-            <a:ext cx="658368" cy="658368"/>
+            <a:off x="749808" y="5980176"/>
+            <a:ext cx="2103120" cy="146304"/>
+          </a:xfrm>
+          <a:prstGeom prst="roundRect">
+            <a:avLst>
+              <a:gd name="adj" fmla="val 25000"/>
+            </a:avLst>
+          </a:prstGeom>
+          <a:solidFill>
+            <a:srgbClr val="5D7FA4">
+              <a:alpha val="44000"/>
+            </a:srgbClr>
+          </a:solidFill>
+          <a:ln w="12700">
+            <a:solidFill>
+              <a:srgbClr val="5D7FA4">
+                <a:alpha val="0"/>
+              </a:srgbClr>
+            </a:solidFill>
+            <a:prstDash val="solid"/>
+          </a:ln>
+        </p:spPr>
+      </p:sp>
+      <p:sp>
+        <p:nvSpPr>
+          <p:cNvPr id="4" name="Shape 2"/>
+          <p:cNvSpPr/>
+          <p:nvPr/>
+        </p:nvSpPr>
+        <p:spPr>
+          <a:xfrm>
+            <a:off x="10710367" y="512064"/>
+            <a:ext cx="493776" cy="493776"/>
           </a:xfrm>
           <a:prstGeom prst="ellipse">
             <a:avLst/>
           </a:prstGeom>
           <a:solidFill>
-            <a:srgbClr val="EEF3F8"/>
-          </a:solidFill>
-          <a:ln w="12700">
-            <a:solidFill>
-              <a:srgbClr val="FFFFFF">
-                <a:alpha val="42000"/>
+            <a:srgbClr val="FFFFFF">
+              <a:alpha val="88000"/>
+            </a:srgbClr>
+          </a:solidFill>
+          <a:ln w="12700">
+            <a:solidFill>
+              <a:srgbClr val="CBD7E4">
+                <a:alpha val="50000"/>
               </a:srgbClr>
             </a:solidFill>
             <a:prstDash val="solid"/>
           </a:ln>
           <a:effectLst>
-            <a:outerShdw sx="100000" sy="100000" kx="0" ky="0" algn="bl" rotWithShape="0" blurRad="12700" dist="50800" dir="2700000">
-              <a:srgbClr val="B8C3D2">
-                <a:alpha val="18000"/>
+            <a:outerShdw sx="100000" sy="100000" kx="0" ky="0" algn="bl" rotWithShape="0" blurRad="11430" dist="50800" dir="2700000">
+              <a:srgbClr val="A8B6C8">
+                <a:alpha val="14000"/>
               </a:srgbClr>
             </a:outerShdw>
           </a:effectLst>
@@ -10469,38 +10936,57 @@
       </p:sp>
       <p:sp>
         <p:nvSpPr>
-          <p:cNvPr id="4" name="Shape 2"/>
-          <p:cNvSpPr/>
-          <p:nvPr/>
-        </p:nvSpPr>
-        <p:spPr>
-          <a:xfrm>
-            <a:off x="9357055" y="5907024"/>
-            <a:ext cx="2057400" cy="164592"/>
-          </a:xfrm>
-          <a:prstGeom prst="roundRect">
-            <a:avLst>
-              <a:gd name="adj" fmla="val 22222"/>
-            </a:avLst>
-          </a:prstGeom>
-          <a:solidFill>
-            <a:srgbClr val="FFFFFF">
-              <a:alpha val="72000"/>
-            </a:srgbClr>
-          </a:solidFill>
+          <p:cNvPr id="5" name="Shape 3"/>
+          <p:cNvSpPr/>
+          <p:nvPr/>
+        </p:nvSpPr>
+        <p:spPr>
+          <a:xfrm>
+            <a:off x="749808" y="749808"/>
+            <a:ext cx="1353312" cy="0"/>
+          </a:xfrm>
+          <a:prstGeom prst="line">
+            <a:avLst/>
+          </a:prstGeom>
+          <a:noFill/>
+          <a:ln w="12700">
+            <a:solidFill>
+              <a:srgbClr val="5D7FA4">
+                <a:alpha val="84000"/>
+              </a:srgbClr>
+            </a:solidFill>
+            <a:prstDash val="solid"/>
+          </a:ln>
+        </p:spPr>
+      </p:sp>
+      <p:sp>
+        <p:nvSpPr>
+          <p:cNvPr id="6" name="Shape 4"/>
+          <p:cNvSpPr/>
+          <p:nvPr/>
+        </p:nvSpPr>
+        <p:spPr>
+          <a:xfrm>
+            <a:off x="10088575" y="6144768"/>
+            <a:ext cx="1188720" cy="0"/>
+          </a:xfrm>
+          <a:prstGeom prst="line">
+            <a:avLst/>
+          </a:prstGeom>
+          <a:noFill/>
           <a:ln w="12700">
             <a:solidFill>
               <a:srgbClr val="FFFFFF">
-                <a:alpha val="0"/>
-              </a:srgbClr>
-            </a:solidFill>
-            <a:prstDash val="solid"/>
-          </a:ln>
-        </p:spPr>
-      </p:sp>
-      <p:sp>
-        <p:nvSpPr>
-          <p:cNvPr id="5" name="Shape 3"/>
+                <a:alpha val="82000"/>
+              </a:srgbClr>
+            </a:solidFill>
+            <a:prstDash val="solid"/>
+          </a:ln>
+        </p:spPr>
+      </p:sp>
+      <p:sp>
+        <p:nvSpPr>
+          <p:cNvPr id="7" name="Shape 5"/>
           <p:cNvSpPr/>
           <p:nvPr/>
         </p:nvSpPr>
@@ -10527,7 +11013,7 @@
       </p:sp>
       <p:sp>
         <p:nvSpPr>
-          <p:cNvPr id="6" name="Shape 4"/>
+          <p:cNvPr id="8" name="Shape 6"/>
           <p:cNvSpPr/>
           <p:nvPr/>
         </p:nvSpPr>
@@ -10565,7 +11051,7 @@
       </p:sp>
       <p:sp>
         <p:nvSpPr>
-          <p:cNvPr id="7" name="Shape 5"/>
+          <p:cNvPr id="9" name="Shape 7"/>
           <p:cNvSpPr/>
           <p:nvPr/>
         </p:nvSpPr>
@@ -10603,7 +11089,7 @@
       </p:sp>
       <p:sp>
         <p:nvSpPr>
-          <p:cNvPr id="8" name="Shape 6"/>
+          <p:cNvPr id="10" name="Shape 8"/>
           <p:cNvSpPr/>
           <p:nvPr/>
         </p:nvSpPr>
@@ -10634,7 +11120,7 @@
       </p:sp>
       <p:pic>
         <p:nvPicPr>
-          <p:cNvPr id="9" name="Image 0" descr="preencoded.png">    </p:cNvPr>
+          <p:cNvPr id="11" name="Image 0" descr="preencoded.png">    </p:cNvPr>
           <p:cNvPicPr>
             <a:picLocks noChangeAspect="1"/>
           </p:cNvPicPr>
@@ -10664,7 +11150,7 @@
       </p:pic>
       <p:sp>
         <p:nvSpPr>
-          <p:cNvPr id="10" name="mdpr:1-2-b8955f:title:__title:1-2-b8955f"/>
+          <p:cNvPr id="12" name="mdpr:1-2-b8955f:title:__title:1-2-b8955f"/>
           <p:cNvSpPr txBox="1"/>
           <p:nvPr/>
         </p:nvSpPr>
@@ -10706,7 +11192,7 @@
       </p:sp>
       <p:sp>
         <p:nvSpPr>
-          <p:cNvPr id="11" name="Shape 8"/>
+          <p:cNvPr id="13" name="Shape 10"/>
           <p:cNvSpPr/>
           <p:nvPr/>
         </p:nvSpPr>
@@ -10739,7 +11225,7 @@
       </p:sp>
       <p:sp>
         <p:nvSpPr>
-          <p:cNvPr id="12" name="Shape 9"/>
+          <p:cNvPr id="14" name="Shape 11"/>
           <p:cNvSpPr/>
           <p:nvPr/>
         </p:nvSpPr>
@@ -10770,7 +11256,7 @@
       </p:sp>
       <p:sp>
         <p:nvSpPr>
-          <p:cNvPr id="13" name="Shape 10"/>
+          <p:cNvPr id="15" name="Shape 12"/>
           <p:cNvSpPr/>
           <p:nvPr/>
         </p:nvSpPr>
@@ -10801,7 +11287,7 @@
       </p:sp>
       <p:sp>
         <p:nvSpPr>
-          <p:cNvPr id="14" name="Shape 11"/>
+          <p:cNvPr id="16" name="Shape 13"/>
           <p:cNvSpPr/>
           <p:nvPr/>
         </p:nvSpPr>
@@ -10826,7 +11312,7 @@
       </p:sp>
       <p:sp>
         <p:nvSpPr>
-          <p:cNvPr id="15" name="Shape 12"/>
+          <p:cNvPr id="17" name="Shape 14"/>
           <p:cNvSpPr/>
           <p:nvPr/>
         </p:nvSpPr>
@@ -10853,7 +11339,7 @@
       </p:sp>
       <p:sp>
         <p:nvSpPr>
-          <p:cNvPr id="16" name="Text 13"/>
+          <p:cNvPr id="18" name="Text 15"/>
           <p:cNvSpPr txBox="1"/>
           <p:nvPr/>
         </p:nvSpPr>
@@ -10897,7 +11383,7 @@
       </p:sp>
       <p:sp>
         <p:nvSpPr>
-          <p:cNvPr id="17" name="Text 14"/>
+          <p:cNvPr id="19" name="Text 16"/>
           <p:cNvSpPr txBox="1"/>
           <p:nvPr/>
         </p:nvSpPr>
@@ -10939,7 +11425,7 @@
       </p:sp>
       <p:sp>
         <p:nvSpPr>
-          <p:cNvPr id="18" name="Shape 15"/>
+          <p:cNvPr id="20" name="Shape 17"/>
           <p:cNvSpPr/>
           <p:nvPr/>
         </p:nvSpPr>
@@ -10966,7 +11452,7 @@
       </p:sp>
       <p:sp>
         <p:nvSpPr>
-          <p:cNvPr id="19" name="Text 16"/>
+          <p:cNvPr id="21" name="Text 18"/>
           <p:cNvSpPr txBox="1"/>
           <p:nvPr/>
         </p:nvSpPr>
@@ -11010,7 +11496,7 @@
       </p:sp>
       <p:sp>
         <p:nvSpPr>
-          <p:cNvPr id="20" name="Shape 17"/>
+          <p:cNvPr id="22" name="Shape 19"/>
           <p:cNvSpPr/>
           <p:nvPr/>
         </p:nvSpPr>
@@ -11037,7 +11523,7 @@
       </p:sp>
       <p:sp>
         <p:nvSpPr>
-          <p:cNvPr id="21" name="Text 18"/>
+          <p:cNvPr id="23" name="Text 20"/>
           <p:cNvSpPr txBox="1"/>
           <p:nvPr/>
         </p:nvSpPr>
@@ -11081,7 +11567,7 @@
       </p:sp>
       <p:sp>
         <p:nvSpPr>
-          <p:cNvPr id="22" name="Shape 19"/>
+          <p:cNvPr id="24" name="Shape 21"/>
           <p:cNvSpPr/>
           <p:nvPr/>
         </p:nvSpPr>
@@ -11112,7 +11598,7 @@
       </p:sp>
       <p:sp>
         <p:nvSpPr>
-          <p:cNvPr id="23" name="Shape 20"/>
+          <p:cNvPr id="25" name="Shape 22"/>
           <p:cNvSpPr/>
           <p:nvPr/>
         </p:nvSpPr>
@@ -11141,7 +11627,7 @@
       </p:sp>
       <p:sp>
         <p:nvSpPr>
-          <p:cNvPr id="24" name="Shape 21"/>
+          <p:cNvPr id="26" name="Shape 23"/>
           <p:cNvSpPr/>
           <p:nvPr/>
         </p:nvSpPr>
@@ -11164,7 +11650,7 @@
       </p:sp>
       <p:sp>
         <p:nvSpPr>
-          <p:cNvPr id="25" name="Shape 22"/>
+          <p:cNvPr id="27" name="Shape 24"/>
           <p:cNvSpPr/>
           <p:nvPr/>
         </p:nvSpPr>
@@ -11189,7 +11675,7 @@
       </p:sp>
       <p:sp>
         <p:nvSpPr>
-          <p:cNvPr id="26" name="Shape 23"/>
+          <p:cNvPr id="28" name="Shape 25"/>
           <p:cNvSpPr/>
           <p:nvPr/>
         </p:nvSpPr>
@@ -11214,7 +11700,7 @@
       </p:sp>
       <p:sp>
         <p:nvSpPr>
-          <p:cNvPr id="27" name="Shape 24"/>
+          <p:cNvPr id="29" name="Shape 26"/>
           <p:cNvSpPr/>
           <p:nvPr/>
         </p:nvSpPr>
@@ -11239,7 +11725,7 @@
       </p:sp>
       <p:sp>
         <p:nvSpPr>
-          <p:cNvPr id="28" name="Text 25"/>
+          <p:cNvPr id="30" name="Text 27"/>
           <p:cNvSpPr txBox="1"/>
           <p:nvPr/>
         </p:nvSpPr>
@@ -11283,7 +11769,7 @@
       </p:sp>
       <p:sp>
         <p:nvSpPr>
-          <p:cNvPr id="29" name="Text 26"/>
+          <p:cNvPr id="31" name="Text 28"/>
           <p:cNvSpPr txBox="1"/>
           <p:nvPr/>
         </p:nvSpPr>
@@ -11325,7 +11811,7 @@
       </p:sp>
       <p:sp>
         <p:nvSpPr>
-          <p:cNvPr id="30" name="Text 27"/>
+          <p:cNvPr id="32" name="Text 29"/>
           <p:cNvSpPr txBox="1"/>
           <p:nvPr/>
         </p:nvSpPr>
@@ -11367,7 +11853,7 @@
       </p:sp>
       <p:sp>
         <p:nvSpPr>
-          <p:cNvPr id="31" name="Text 28"/>
+          <p:cNvPr id="33" name="Text 30"/>
           <p:cNvSpPr txBox="1"/>
           <p:nvPr/>
         </p:nvSpPr>
@@ -11447,29 +11933,31 @@
         </p:nvSpPr>
         <p:spPr>
           <a:xfrm>
-            <a:off x="10362895" y="502920"/>
-            <a:ext cx="822960" cy="822960"/>
-          </a:xfrm>
-          <a:prstGeom prst="ellipse">
-            <a:avLst/>
-          </a:prstGeom>
-          <a:solidFill>
-            <a:srgbClr val="F7FAFC">
-              <a:alpha val="92000"/>
+            <a:off x="493776" y="5852160"/>
+            <a:ext cx="11204143" cy="420624"/>
+          </a:xfrm>
+          <a:prstGeom prst="roundRect">
+            <a:avLst>
+              <a:gd name="adj" fmla="val 17391"/>
+            </a:avLst>
+          </a:prstGeom>
+          <a:solidFill>
+            <a:srgbClr val="DDE8F2">
+              <a:alpha val="62000"/>
             </a:srgbClr>
           </a:solidFill>
           <a:ln w="12700">
             <a:solidFill>
               <a:srgbClr val="FFFFFF">
-                <a:alpha val="0"/>
+                <a:alpha val="32000"/>
               </a:srgbClr>
             </a:solidFill>
             <a:prstDash val="solid"/>
           </a:ln>
           <a:effectLst>
-            <a:outerShdw sx="100000" sy="100000" kx="0" ky="0" algn="bl" rotWithShape="0" blurRad="15240" dist="50800" dir="2700000">
-              <a:srgbClr val="C7D0DE">
-                <a:alpha val="22000"/>
+            <a:outerShdw sx="100000" sy="100000" kx="0" ky="0" algn="bl" rotWithShape="0" blurRad="8890" dist="50800" dir="2700000">
+              <a:srgbClr val="A8B6C8">
+                <a:alpha val="8000"/>
               </a:srgbClr>
             </a:outerShdw>
           </a:effectLst>
@@ -11483,27 +11971,60 @@
         </p:nvSpPr>
         <p:spPr>
           <a:xfrm>
-            <a:off x="530352" y="5687568"/>
-            <a:ext cx="658368" cy="658368"/>
+            <a:off x="749808" y="5980176"/>
+            <a:ext cx="2103120" cy="146304"/>
+          </a:xfrm>
+          <a:prstGeom prst="roundRect">
+            <a:avLst>
+              <a:gd name="adj" fmla="val 25000"/>
+            </a:avLst>
+          </a:prstGeom>
+          <a:solidFill>
+            <a:srgbClr val="5D7FA4">
+              <a:alpha val="44000"/>
+            </a:srgbClr>
+          </a:solidFill>
+          <a:ln w="12700">
+            <a:solidFill>
+              <a:srgbClr val="5D7FA4">
+                <a:alpha val="0"/>
+              </a:srgbClr>
+            </a:solidFill>
+            <a:prstDash val="solid"/>
+          </a:ln>
+        </p:spPr>
+      </p:sp>
+      <p:sp>
+        <p:nvSpPr>
+          <p:cNvPr id="4" name="Shape 2"/>
+          <p:cNvSpPr/>
+          <p:nvPr/>
+        </p:nvSpPr>
+        <p:spPr>
+          <a:xfrm>
+            <a:off x="10710367" y="512064"/>
+            <a:ext cx="493776" cy="493776"/>
           </a:xfrm>
           <a:prstGeom prst="ellipse">
             <a:avLst/>
           </a:prstGeom>
           <a:solidFill>
-            <a:srgbClr val="EEF3F8"/>
-          </a:solidFill>
-          <a:ln w="12700">
-            <a:solidFill>
-              <a:srgbClr val="FFFFFF">
-                <a:alpha val="42000"/>
+            <a:srgbClr val="FFFFFF">
+              <a:alpha val="88000"/>
+            </a:srgbClr>
+          </a:solidFill>
+          <a:ln w="12700">
+            <a:solidFill>
+              <a:srgbClr val="CBD7E4">
+                <a:alpha val="50000"/>
               </a:srgbClr>
             </a:solidFill>
             <a:prstDash val="solid"/>
           </a:ln>
           <a:effectLst>
-            <a:outerShdw sx="100000" sy="100000" kx="0" ky="0" algn="bl" rotWithShape="0" blurRad="12700" dist="50800" dir="2700000">
-              <a:srgbClr val="B8C3D2">
-                <a:alpha val="18000"/>
+            <a:outerShdw sx="100000" sy="100000" kx="0" ky="0" algn="bl" rotWithShape="0" blurRad="11430" dist="50800" dir="2700000">
+              <a:srgbClr val="A8B6C8">
+                <a:alpha val="14000"/>
               </a:srgbClr>
             </a:outerShdw>
           </a:effectLst>
@@ -11511,38 +12032,57 @@
       </p:sp>
       <p:sp>
         <p:nvSpPr>
-          <p:cNvPr id="4" name="Shape 2"/>
-          <p:cNvSpPr/>
-          <p:nvPr/>
-        </p:nvSpPr>
-        <p:spPr>
-          <a:xfrm>
-            <a:off x="9357055" y="5907024"/>
-            <a:ext cx="2057400" cy="164592"/>
-          </a:xfrm>
-          <a:prstGeom prst="roundRect">
-            <a:avLst>
-              <a:gd name="adj" fmla="val 22222"/>
-            </a:avLst>
-          </a:prstGeom>
-          <a:solidFill>
-            <a:srgbClr val="FFFFFF">
-              <a:alpha val="72000"/>
-            </a:srgbClr>
-          </a:solidFill>
+          <p:cNvPr id="5" name="Shape 3"/>
+          <p:cNvSpPr/>
+          <p:nvPr/>
+        </p:nvSpPr>
+        <p:spPr>
+          <a:xfrm>
+            <a:off x="749808" y="749808"/>
+            <a:ext cx="1353312" cy="0"/>
+          </a:xfrm>
+          <a:prstGeom prst="line">
+            <a:avLst/>
+          </a:prstGeom>
+          <a:noFill/>
+          <a:ln w="12700">
+            <a:solidFill>
+              <a:srgbClr val="5D7FA4">
+                <a:alpha val="84000"/>
+              </a:srgbClr>
+            </a:solidFill>
+            <a:prstDash val="solid"/>
+          </a:ln>
+        </p:spPr>
+      </p:sp>
+      <p:sp>
+        <p:nvSpPr>
+          <p:cNvPr id="6" name="Shape 4"/>
+          <p:cNvSpPr/>
+          <p:nvPr/>
+        </p:nvSpPr>
+        <p:spPr>
+          <a:xfrm>
+            <a:off x="10088575" y="6144768"/>
+            <a:ext cx="1188720" cy="0"/>
+          </a:xfrm>
+          <a:prstGeom prst="line">
+            <a:avLst/>
+          </a:prstGeom>
+          <a:noFill/>
           <a:ln w="12700">
             <a:solidFill>
               <a:srgbClr val="FFFFFF">
-                <a:alpha val="0"/>
-              </a:srgbClr>
-            </a:solidFill>
-            <a:prstDash val="solid"/>
-          </a:ln>
-        </p:spPr>
-      </p:sp>
-      <p:sp>
-        <p:nvSpPr>
-          <p:cNvPr id="5" name="Shape 3"/>
+                <a:alpha val="82000"/>
+              </a:srgbClr>
+            </a:solidFill>
+            <a:prstDash val="solid"/>
+          </a:ln>
+        </p:spPr>
+      </p:sp>
+      <p:sp>
+        <p:nvSpPr>
+          <p:cNvPr id="7" name="Shape 5"/>
           <p:cNvSpPr/>
           <p:nvPr/>
         </p:nvSpPr>
@@ -11569,7 +12109,7 @@
       </p:sp>
       <p:sp>
         <p:nvSpPr>
-          <p:cNvPr id="6" name="Shape 4"/>
+          <p:cNvPr id="8" name="Shape 6"/>
           <p:cNvSpPr/>
           <p:nvPr/>
         </p:nvSpPr>
@@ -11607,7 +12147,7 @@
       </p:sp>
       <p:sp>
         <p:nvSpPr>
-          <p:cNvPr id="7" name="Shape 5"/>
+          <p:cNvPr id="9" name="Shape 7"/>
           <p:cNvSpPr/>
           <p:nvPr/>
         </p:nvSpPr>
@@ -11645,7 +12185,7 @@
       </p:sp>
       <p:sp>
         <p:nvSpPr>
-          <p:cNvPr id="8" name="Shape 6"/>
+          <p:cNvPr id="10" name="Shape 8"/>
           <p:cNvSpPr/>
           <p:nvPr/>
         </p:nvSpPr>
@@ -11676,7 +12216,7 @@
       </p:sp>
       <p:pic>
         <p:nvPicPr>
-          <p:cNvPr id="9" name="Image 0" descr="preencoded.png">    </p:cNvPr>
+          <p:cNvPr id="11" name="Image 0" descr="preencoded.png">    </p:cNvPr>
           <p:cNvPicPr>
             <a:picLocks noChangeAspect="1"/>
           </p:cNvPicPr>
@@ -11706,7 +12246,7 @@
       </p:pic>
       <p:sp>
         <p:nvSpPr>
-          <p:cNvPr id="10" name="mdpr:2-2-4dc4c1:title:__title:2-2-4dc4c1"/>
+          <p:cNvPr id="12" name="mdpr:2-2-4dc4c1:title:__title:2-2-4dc4c1"/>
           <p:cNvSpPr txBox="1"/>
           <p:nvPr/>
         </p:nvSpPr>
@@ -11748,7 +12288,7 @@
       </p:sp>
       <p:sp>
         <p:nvSpPr>
-          <p:cNvPr id="11" name="Shape 8"/>
+          <p:cNvPr id="13" name="Shape 10"/>
           <p:cNvSpPr/>
           <p:nvPr/>
         </p:nvSpPr>
@@ -11775,7 +12315,7 @@
       </p:sp>
       <p:sp>
         <p:nvSpPr>
-          <p:cNvPr id="12" name="Shape 9"/>
+          <p:cNvPr id="14" name="Shape 11"/>
           <p:cNvSpPr/>
           <p:nvPr/>
         </p:nvSpPr>
@@ -11802,7 +12342,7 @@
       </p:sp>
       <p:sp>
         <p:nvSpPr>
-          <p:cNvPr id="13" name="Text 10"/>
+          <p:cNvPr id="15" name="Text 12"/>
           <p:cNvSpPr txBox="1"/>
           <p:nvPr/>
         </p:nvSpPr>
@@ -11846,7 +12386,7 @@
       </p:sp>
       <p:sp>
         <p:nvSpPr>
-          <p:cNvPr id="14" name="Text 11"/>
+          <p:cNvPr id="16" name="Text 13"/>
           <p:cNvSpPr txBox="1"/>
           <p:nvPr/>
         </p:nvSpPr>
@@ -11890,7 +12430,7 @@
       </p:sp>
       <p:sp>
         <p:nvSpPr>
-          <p:cNvPr id="15" name="Shape 12"/>
+          <p:cNvPr id="17" name="Shape 14"/>
           <p:cNvSpPr/>
           <p:nvPr/>
         </p:nvSpPr>
@@ -11917,7 +12457,7 @@
       </p:sp>
       <p:sp>
         <p:nvSpPr>
-          <p:cNvPr id="16" name="Shape 13"/>
+          <p:cNvPr id="18" name="Shape 15"/>
           <p:cNvSpPr/>
           <p:nvPr/>
         </p:nvSpPr>
@@ -11944,7 +12484,7 @@
       </p:sp>
       <p:sp>
         <p:nvSpPr>
-          <p:cNvPr id="17" name="Text 14"/>
+          <p:cNvPr id="19" name="Text 16"/>
           <p:cNvSpPr txBox="1"/>
           <p:nvPr/>
         </p:nvSpPr>
@@ -11988,7 +12528,7 @@
       </p:sp>
       <p:sp>
         <p:nvSpPr>
-          <p:cNvPr id="18" name="Text 15"/>
+          <p:cNvPr id="20" name="Text 17"/>
           <p:cNvSpPr txBox="1"/>
           <p:nvPr/>
         </p:nvSpPr>
@@ -12032,7 +12572,7 @@
       </p:sp>
       <p:sp>
         <p:nvSpPr>
-          <p:cNvPr id="19" name="Shape 16"/>
+          <p:cNvPr id="21" name="Shape 18"/>
           <p:cNvSpPr/>
           <p:nvPr/>
         </p:nvSpPr>
@@ -12059,7 +12599,7 @@
       </p:sp>
       <p:sp>
         <p:nvSpPr>
-          <p:cNvPr id="20" name="Shape 17"/>
+          <p:cNvPr id="22" name="Shape 19"/>
           <p:cNvSpPr/>
           <p:nvPr/>
         </p:nvSpPr>
@@ -12086,7 +12626,7 @@
       </p:sp>
       <p:sp>
         <p:nvSpPr>
-          <p:cNvPr id="21" name="Text 18"/>
+          <p:cNvPr id="23" name="Text 20"/>
           <p:cNvSpPr txBox="1"/>
           <p:nvPr/>
         </p:nvSpPr>
@@ -12130,7 +12670,7 @@
       </p:sp>
       <p:sp>
         <p:nvSpPr>
-          <p:cNvPr id="22" name="Text 19"/>
+          <p:cNvPr id="24" name="Text 21"/>
           <p:cNvSpPr txBox="1"/>
           <p:nvPr/>
         </p:nvSpPr>
@@ -12174,7 +12714,7 @@
       </p:sp>
       <p:sp>
         <p:nvSpPr>
-          <p:cNvPr id="23" name="Shape 20"/>
+          <p:cNvPr id="25" name="Shape 22"/>
           <p:cNvSpPr/>
           <p:nvPr/>
         </p:nvSpPr>
@@ -12201,7 +12741,7 @@
       </p:sp>
       <p:sp>
         <p:nvSpPr>
-          <p:cNvPr id="24" name="Shape 21"/>
+          <p:cNvPr id="26" name="Shape 23"/>
           <p:cNvSpPr/>
           <p:nvPr/>
         </p:nvSpPr>
@@ -12228,7 +12768,7 @@
       </p:sp>
       <p:sp>
         <p:nvSpPr>
-          <p:cNvPr id="25" name="Text 22"/>
+          <p:cNvPr id="27" name="Text 24"/>
           <p:cNvSpPr txBox="1"/>
           <p:nvPr/>
         </p:nvSpPr>
@@ -12272,7 +12812,7 @@
       </p:sp>
       <p:sp>
         <p:nvSpPr>
-          <p:cNvPr id="26" name="Text 23"/>
+          <p:cNvPr id="28" name="Text 25"/>
           <p:cNvSpPr txBox="1"/>
           <p:nvPr/>
         </p:nvSpPr>
@@ -12316,7 +12856,7 @@
       </p:sp>
       <p:sp>
         <p:nvSpPr>
-          <p:cNvPr id="27" name="Shape 24"/>
+          <p:cNvPr id="29" name="Shape 26"/>
           <p:cNvSpPr/>
           <p:nvPr/>
         </p:nvSpPr>
@@ -12340,7 +12880,7 @@
       </p:sp>
       <p:sp>
         <p:nvSpPr>
-          <p:cNvPr id="28" name="Shape 25"/>
+          <p:cNvPr id="30" name="Shape 27"/>
           <p:cNvSpPr/>
           <p:nvPr/>
         </p:nvSpPr>
@@ -12364,7 +12904,7 @@
       </p:sp>
       <p:sp>
         <p:nvSpPr>
-          <p:cNvPr id="29" name="Shape 26"/>
+          <p:cNvPr id="31" name="Shape 28"/>
           <p:cNvSpPr/>
           <p:nvPr/>
         </p:nvSpPr>
@@ -12426,29 +12966,31 @@
         </p:nvSpPr>
         <p:spPr>
           <a:xfrm>
-            <a:off x="10362895" y="502920"/>
-            <a:ext cx="822960" cy="822960"/>
-          </a:xfrm>
-          <a:prstGeom prst="ellipse">
-            <a:avLst/>
-          </a:prstGeom>
-          <a:solidFill>
-            <a:srgbClr val="F7FAFC">
-              <a:alpha val="92000"/>
+            <a:off x="493776" y="5852160"/>
+            <a:ext cx="11204143" cy="420624"/>
+          </a:xfrm>
+          <a:prstGeom prst="roundRect">
+            <a:avLst>
+              <a:gd name="adj" fmla="val 17391"/>
+            </a:avLst>
+          </a:prstGeom>
+          <a:solidFill>
+            <a:srgbClr val="DDE8F2">
+              <a:alpha val="62000"/>
             </a:srgbClr>
           </a:solidFill>
           <a:ln w="12700">
             <a:solidFill>
               <a:srgbClr val="FFFFFF">
-                <a:alpha val="0"/>
+                <a:alpha val="32000"/>
               </a:srgbClr>
             </a:solidFill>
             <a:prstDash val="solid"/>
           </a:ln>
           <a:effectLst>
-            <a:outerShdw sx="100000" sy="100000" kx="0" ky="0" algn="bl" rotWithShape="0" blurRad="15240" dist="50800" dir="2700000">
-              <a:srgbClr val="C7D0DE">
-                <a:alpha val="22000"/>
+            <a:outerShdw sx="100000" sy="100000" kx="0" ky="0" algn="bl" rotWithShape="0" blurRad="8890" dist="50800" dir="2700000">
+              <a:srgbClr val="A8B6C8">
+                <a:alpha val="8000"/>
               </a:srgbClr>
             </a:outerShdw>
           </a:effectLst>
@@ -12462,27 +13004,60 @@
         </p:nvSpPr>
         <p:spPr>
           <a:xfrm>
-            <a:off x="530352" y="5687568"/>
-            <a:ext cx="658368" cy="658368"/>
+            <a:off x="749808" y="5980176"/>
+            <a:ext cx="2103120" cy="146304"/>
+          </a:xfrm>
+          <a:prstGeom prst="roundRect">
+            <a:avLst>
+              <a:gd name="adj" fmla="val 25000"/>
+            </a:avLst>
+          </a:prstGeom>
+          <a:solidFill>
+            <a:srgbClr val="5D7FA4">
+              <a:alpha val="44000"/>
+            </a:srgbClr>
+          </a:solidFill>
+          <a:ln w="12700">
+            <a:solidFill>
+              <a:srgbClr val="5D7FA4">
+                <a:alpha val="0"/>
+              </a:srgbClr>
+            </a:solidFill>
+            <a:prstDash val="solid"/>
+          </a:ln>
+        </p:spPr>
+      </p:sp>
+      <p:sp>
+        <p:nvSpPr>
+          <p:cNvPr id="4" name="Shape 2"/>
+          <p:cNvSpPr/>
+          <p:nvPr/>
+        </p:nvSpPr>
+        <p:spPr>
+          <a:xfrm>
+            <a:off x="10710367" y="512064"/>
+            <a:ext cx="493776" cy="493776"/>
           </a:xfrm>
           <a:prstGeom prst="ellipse">
             <a:avLst/>
           </a:prstGeom>
           <a:solidFill>
-            <a:srgbClr val="EEF3F8"/>
-          </a:solidFill>
-          <a:ln w="12700">
-            <a:solidFill>
-              <a:srgbClr val="FFFFFF">
-                <a:alpha val="42000"/>
+            <a:srgbClr val="FFFFFF">
+              <a:alpha val="88000"/>
+            </a:srgbClr>
+          </a:solidFill>
+          <a:ln w="12700">
+            <a:solidFill>
+              <a:srgbClr val="CBD7E4">
+                <a:alpha val="50000"/>
               </a:srgbClr>
             </a:solidFill>
             <a:prstDash val="solid"/>
           </a:ln>
           <a:effectLst>
-            <a:outerShdw sx="100000" sy="100000" kx="0" ky="0" algn="bl" rotWithShape="0" blurRad="12700" dist="50800" dir="2700000">
-              <a:srgbClr val="B8C3D2">
-                <a:alpha val="18000"/>
+            <a:outerShdw sx="100000" sy="100000" kx="0" ky="0" algn="bl" rotWithShape="0" blurRad="11430" dist="50800" dir="2700000">
+              <a:srgbClr val="A8B6C8">
+                <a:alpha val="14000"/>
               </a:srgbClr>
             </a:outerShdw>
           </a:effectLst>
@@ -12490,38 +13065,57 @@
       </p:sp>
       <p:sp>
         <p:nvSpPr>
-          <p:cNvPr id="4" name="Shape 2"/>
-          <p:cNvSpPr/>
-          <p:nvPr/>
-        </p:nvSpPr>
-        <p:spPr>
-          <a:xfrm>
-            <a:off x="9357055" y="5907024"/>
-            <a:ext cx="2057400" cy="164592"/>
-          </a:xfrm>
-          <a:prstGeom prst="roundRect">
-            <a:avLst>
-              <a:gd name="adj" fmla="val 22222"/>
-            </a:avLst>
-          </a:prstGeom>
-          <a:solidFill>
-            <a:srgbClr val="FFFFFF">
-              <a:alpha val="72000"/>
-            </a:srgbClr>
-          </a:solidFill>
+          <p:cNvPr id="5" name="Shape 3"/>
+          <p:cNvSpPr/>
+          <p:nvPr/>
+        </p:nvSpPr>
+        <p:spPr>
+          <a:xfrm>
+            <a:off x="749808" y="749808"/>
+            <a:ext cx="1353312" cy="0"/>
+          </a:xfrm>
+          <a:prstGeom prst="line">
+            <a:avLst/>
+          </a:prstGeom>
+          <a:noFill/>
+          <a:ln w="12700">
+            <a:solidFill>
+              <a:srgbClr val="5D7FA4">
+                <a:alpha val="84000"/>
+              </a:srgbClr>
+            </a:solidFill>
+            <a:prstDash val="solid"/>
+          </a:ln>
+        </p:spPr>
+      </p:sp>
+      <p:sp>
+        <p:nvSpPr>
+          <p:cNvPr id="6" name="Shape 4"/>
+          <p:cNvSpPr/>
+          <p:nvPr/>
+        </p:nvSpPr>
+        <p:spPr>
+          <a:xfrm>
+            <a:off x="10088575" y="6144768"/>
+            <a:ext cx="1188720" cy="0"/>
+          </a:xfrm>
+          <a:prstGeom prst="line">
+            <a:avLst/>
+          </a:prstGeom>
+          <a:noFill/>
           <a:ln w="12700">
             <a:solidFill>
               <a:srgbClr val="FFFFFF">
-                <a:alpha val="0"/>
-              </a:srgbClr>
-            </a:solidFill>
-            <a:prstDash val="solid"/>
-          </a:ln>
-        </p:spPr>
-      </p:sp>
-      <p:sp>
-        <p:nvSpPr>
-          <p:cNvPr id="5" name="Shape 3"/>
+                <a:alpha val="82000"/>
+              </a:srgbClr>
+            </a:solidFill>
+            <a:prstDash val="solid"/>
+          </a:ln>
+        </p:spPr>
+      </p:sp>
+      <p:sp>
+        <p:nvSpPr>
+          <p:cNvPr id="7" name="Shape 5"/>
           <p:cNvSpPr/>
           <p:nvPr/>
         </p:nvSpPr>
@@ -12548,7 +13142,7 @@
       </p:sp>
       <p:sp>
         <p:nvSpPr>
-          <p:cNvPr id="6" name="Shape 4"/>
+          <p:cNvPr id="8" name="Shape 6"/>
           <p:cNvSpPr/>
           <p:nvPr/>
         </p:nvSpPr>
@@ -12586,7 +13180,7 @@
       </p:sp>
       <p:sp>
         <p:nvSpPr>
-          <p:cNvPr id="7" name="Shape 5"/>
+          <p:cNvPr id="9" name="Shape 7"/>
           <p:cNvSpPr/>
           <p:nvPr/>
         </p:nvSpPr>
@@ -12624,7 +13218,7 @@
       </p:sp>
       <p:sp>
         <p:nvSpPr>
-          <p:cNvPr id="8" name="Shape 6"/>
+          <p:cNvPr id="10" name="Shape 8"/>
           <p:cNvSpPr/>
           <p:nvPr/>
         </p:nvSpPr>
@@ -12655,7 +13249,7 @@
       </p:sp>
       <p:pic>
         <p:nvPicPr>
-          <p:cNvPr id="9" name="Image 0" descr="preencoded.png">    </p:cNvPr>
+          <p:cNvPr id="11" name="Image 0" descr="preencoded.png">    </p:cNvPr>
           <p:cNvPicPr>
             <a:picLocks noChangeAspect="1"/>
           </p:cNvPicPr>
@@ -12685,7 +13279,7 @@
       </p:pic>
       <p:sp>
         <p:nvSpPr>
-          <p:cNvPr id="10" name="Shape 7"/>
+          <p:cNvPr id="12" name="Shape 9"/>
           <p:cNvSpPr/>
           <p:nvPr/>
         </p:nvSpPr>
@@ -12723,7 +13317,7 @@
       </p:sp>
       <p:sp>
         <p:nvSpPr>
-          <p:cNvPr id="11" name="Shape 8"/>
+          <p:cNvPr id="13" name="Shape 10"/>
           <p:cNvSpPr/>
           <p:nvPr/>
         </p:nvSpPr>
@@ -12761,7 +13355,7 @@
       </p:sp>
       <p:sp>
         <p:nvSpPr>
-          <p:cNvPr id="12" name="Shape 9"/>
+          <p:cNvPr id="14" name="Shape 11"/>
           <p:cNvSpPr/>
           <p:nvPr/>
         </p:nvSpPr>
@@ -12792,7 +13386,7 @@
       </p:sp>
       <p:pic>
         <p:nvPicPr>
-          <p:cNvPr id="13" name="Image 1" descr="preencoded.png">    </p:cNvPr>
+          <p:cNvPr id="15" name="Image 1" descr="preencoded.png">    </p:cNvPr>
           <p:cNvPicPr>
             <a:picLocks noChangeAspect="1"/>
           </p:cNvPicPr>
@@ -12822,7 +13416,7 @@
       </p:pic>
       <p:sp>
         <p:nvSpPr>
-          <p:cNvPr id="14" name="Shape 10"/>
+          <p:cNvPr id="16" name="Shape 12"/>
           <p:cNvSpPr/>
           <p:nvPr/>
         </p:nvSpPr>
@@ -12860,7 +13454,7 @@
       </p:sp>
       <p:sp>
         <p:nvSpPr>
-          <p:cNvPr id="15" name="Shape 11"/>
+          <p:cNvPr id="17" name="Shape 13"/>
           <p:cNvSpPr/>
           <p:nvPr/>
         </p:nvSpPr>
@@ -12898,7 +13492,7 @@
       </p:sp>
       <p:sp>
         <p:nvSpPr>
-          <p:cNvPr id="16" name="Shape 12"/>
+          <p:cNvPr id="18" name="Shape 14"/>
           <p:cNvSpPr/>
           <p:nvPr/>
         </p:nvSpPr>
@@ -12929,7 +13523,7 @@
       </p:sp>
       <p:pic>
         <p:nvPicPr>
-          <p:cNvPr id="17" name="Image 2" descr="preencoded.png">    </p:cNvPr>
+          <p:cNvPr id="19" name="Image 2" descr="preencoded.png">    </p:cNvPr>
           <p:cNvPicPr>
             <a:picLocks noChangeAspect="1"/>
           </p:cNvPicPr>
@@ -12959,7 +13553,7 @@
       </p:pic>
       <p:sp>
         <p:nvSpPr>
-          <p:cNvPr id="18" name="Shape 13"/>
+          <p:cNvPr id="20" name="Shape 15"/>
           <p:cNvSpPr/>
           <p:nvPr/>
         </p:nvSpPr>
@@ -12988,7 +13582,7 @@
       </p:sp>
       <p:sp>
         <p:nvSpPr>
-          <p:cNvPr id="19" name="Shape 14"/>
+          <p:cNvPr id="21" name="Shape 16"/>
           <p:cNvSpPr/>
           <p:nvPr/>
         </p:nvSpPr>
@@ -13015,7 +13609,7 @@
       </p:sp>
       <p:sp>
         <p:nvSpPr>
-          <p:cNvPr id="20" name="Shape 15"/>
+          <p:cNvPr id="22" name="Shape 17"/>
           <p:cNvSpPr/>
           <p:nvPr/>
         </p:nvSpPr>
@@ -13042,7 +13636,7 @@
       </p:sp>
       <p:sp>
         <p:nvSpPr>
-          <p:cNvPr id="21" name="Shape 16"/>
+          <p:cNvPr id="23" name="Shape 18"/>
           <p:cNvSpPr/>
           <p:nvPr/>
         </p:nvSpPr>
@@ -13069,7 +13663,7 @@
       </p:sp>
       <p:sp>
         <p:nvSpPr>
-          <p:cNvPr id="22" name="mdpr:1-2-ea42c8:title:__title:1-2-ea42c8"/>
+          <p:cNvPr id="24" name="mdpr:1-2-ea42c8:title:__title:1-2-ea42c8"/>
           <p:cNvSpPr txBox="1"/>
           <p:nvPr/>
         </p:nvSpPr>
@@ -13111,7 +13705,7 @@
       </p:sp>
       <p:sp>
         <p:nvSpPr>
-          <p:cNvPr id="23" name="Shape 18"/>
+          <p:cNvPr id="25" name="Shape 20"/>
           <p:cNvSpPr/>
           <p:nvPr/>
         </p:nvSpPr>
@@ -13138,7 +13732,7 @@
       </p:sp>
       <p:pic>
         <p:nvPicPr>
-          <p:cNvPr id="24" name="Image 3" descr="article icon from tabler-icons (MIT)">    </p:cNvPr>
+          <p:cNvPr id="26" name="Image 3" descr="article icon from tabler-icons (MIT)">    </p:cNvPr>
           <p:cNvPicPr>
             <a:picLocks noChangeAspect="1"/>
           </p:cNvPicPr>
@@ -13168,7 +13762,7 @@
       </p:pic>
       <p:sp>
         <p:nvSpPr>
-          <p:cNvPr id="25" name="mdpr:1-2-ea42c8:item-1:block-27-chunk-1"/>
+          <p:cNvPr id="27" name="mdpr:1-2-ea42c8:item-1:block-27-chunk-1"/>
           <p:cNvSpPr txBox="1"/>
           <p:nvPr/>
         </p:nvSpPr>
@@ -13227,7 +13821,7 @@
       </p:sp>
       <p:sp>
         <p:nvSpPr>
-          <p:cNvPr id="26" name="Shape 20"/>
+          <p:cNvPr id="28" name="Shape 22"/>
           <p:cNvSpPr/>
           <p:nvPr/>
         </p:nvSpPr>
@@ -13254,7 +13848,7 @@
       </p:sp>
       <p:pic>
         <p:nvPicPr>
-          <p:cNvPr id="27" name="Image 4" descr="article icon from tabler-icons (MIT)">    </p:cNvPr>
+          <p:cNvPr id="29" name="Image 4" descr="article icon from tabler-icons (MIT)">    </p:cNvPr>
           <p:cNvPicPr>
             <a:picLocks noChangeAspect="1"/>
           </p:cNvPicPr>
@@ -13284,7 +13878,7 @@
       </p:pic>
       <p:sp>
         <p:nvSpPr>
-          <p:cNvPr id="28" name="mdpr:1-2-ea42c8:item-2:block-27-chunk-1"/>
+          <p:cNvPr id="30" name="mdpr:1-2-ea42c8:item-2:block-27-chunk-1"/>
           <p:cNvSpPr txBox="1"/>
           <p:nvPr/>
         </p:nvSpPr>
@@ -13343,7 +13937,7 @@
       </p:sp>
       <p:sp>
         <p:nvSpPr>
-          <p:cNvPr id="29" name="Shape 22"/>
+          <p:cNvPr id="31" name="Shape 24"/>
           <p:cNvSpPr/>
           <p:nvPr/>
         </p:nvSpPr>
@@ -13370,7 +13964,7 @@
       </p:sp>
       <p:pic>
         <p:nvPicPr>
-          <p:cNvPr id="30" name="Image 5" descr="article icon from tabler-icons (MIT)">    </p:cNvPr>
+          <p:cNvPr id="32" name="Image 5" descr="article icon from tabler-icons (MIT)">    </p:cNvPr>
           <p:cNvPicPr>
             <a:picLocks noChangeAspect="1"/>
           </p:cNvPicPr>
@@ -13400,7 +13994,7 @@
       </p:pic>
       <p:sp>
         <p:nvSpPr>
-          <p:cNvPr id="31" name="mdpr:1-2-ea42c8:item-3:block-27-chunk-1"/>
+          <p:cNvPr id="33" name="mdpr:1-2-ea42c8:item-3:block-27-chunk-1"/>
           <p:cNvSpPr txBox="1"/>
           <p:nvPr/>
         </p:nvSpPr>
@@ -13497,29 +14091,31 @@
         </p:nvSpPr>
         <p:spPr>
           <a:xfrm>
-            <a:off x="10362895" y="502920"/>
-            <a:ext cx="822960" cy="822960"/>
-          </a:xfrm>
-          <a:prstGeom prst="ellipse">
-            <a:avLst/>
-          </a:prstGeom>
-          <a:solidFill>
-            <a:srgbClr val="F7FAFC">
-              <a:alpha val="92000"/>
+            <a:off x="493776" y="5852160"/>
+            <a:ext cx="11204143" cy="420624"/>
+          </a:xfrm>
+          <a:prstGeom prst="roundRect">
+            <a:avLst>
+              <a:gd name="adj" fmla="val 17391"/>
+            </a:avLst>
+          </a:prstGeom>
+          <a:solidFill>
+            <a:srgbClr val="DDE8F2">
+              <a:alpha val="62000"/>
             </a:srgbClr>
           </a:solidFill>
           <a:ln w="12700">
             <a:solidFill>
               <a:srgbClr val="FFFFFF">
-                <a:alpha val="0"/>
+                <a:alpha val="32000"/>
               </a:srgbClr>
             </a:solidFill>
             <a:prstDash val="solid"/>
           </a:ln>
           <a:effectLst>
-            <a:outerShdw sx="100000" sy="100000" kx="0" ky="0" algn="bl" rotWithShape="0" blurRad="15240" dist="50800" dir="2700000">
-              <a:srgbClr val="C7D0DE">
-                <a:alpha val="22000"/>
+            <a:outerShdw sx="100000" sy="100000" kx="0" ky="0" algn="bl" rotWithShape="0" blurRad="8890" dist="50800" dir="2700000">
+              <a:srgbClr val="A8B6C8">
+                <a:alpha val="8000"/>
               </a:srgbClr>
             </a:outerShdw>
           </a:effectLst>
@@ -13533,27 +14129,60 @@
         </p:nvSpPr>
         <p:spPr>
           <a:xfrm>
-            <a:off x="530352" y="5687568"/>
-            <a:ext cx="658368" cy="658368"/>
+            <a:off x="749808" y="5980176"/>
+            <a:ext cx="2103120" cy="146304"/>
+          </a:xfrm>
+          <a:prstGeom prst="roundRect">
+            <a:avLst>
+              <a:gd name="adj" fmla="val 25000"/>
+            </a:avLst>
+          </a:prstGeom>
+          <a:solidFill>
+            <a:srgbClr val="5D7FA4">
+              <a:alpha val="44000"/>
+            </a:srgbClr>
+          </a:solidFill>
+          <a:ln w="12700">
+            <a:solidFill>
+              <a:srgbClr val="5D7FA4">
+                <a:alpha val="0"/>
+              </a:srgbClr>
+            </a:solidFill>
+            <a:prstDash val="solid"/>
+          </a:ln>
+        </p:spPr>
+      </p:sp>
+      <p:sp>
+        <p:nvSpPr>
+          <p:cNvPr id="4" name="Shape 2"/>
+          <p:cNvSpPr/>
+          <p:nvPr/>
+        </p:nvSpPr>
+        <p:spPr>
+          <a:xfrm>
+            <a:off x="10710367" y="512064"/>
+            <a:ext cx="493776" cy="493776"/>
           </a:xfrm>
           <a:prstGeom prst="ellipse">
             <a:avLst/>
           </a:prstGeom>
           <a:solidFill>
-            <a:srgbClr val="EEF3F8"/>
-          </a:solidFill>
-          <a:ln w="12700">
-            <a:solidFill>
-              <a:srgbClr val="FFFFFF">
-                <a:alpha val="42000"/>
+            <a:srgbClr val="FFFFFF">
+              <a:alpha val="88000"/>
+            </a:srgbClr>
+          </a:solidFill>
+          <a:ln w="12700">
+            <a:solidFill>
+              <a:srgbClr val="CBD7E4">
+                <a:alpha val="50000"/>
               </a:srgbClr>
             </a:solidFill>
             <a:prstDash val="solid"/>
           </a:ln>
           <a:effectLst>
-            <a:outerShdw sx="100000" sy="100000" kx="0" ky="0" algn="bl" rotWithShape="0" blurRad="12700" dist="50800" dir="2700000">
-              <a:srgbClr val="B8C3D2">
-                <a:alpha val="18000"/>
+            <a:outerShdw sx="100000" sy="100000" kx="0" ky="0" algn="bl" rotWithShape="0" blurRad="11430" dist="50800" dir="2700000">
+              <a:srgbClr val="A8B6C8">
+                <a:alpha val="14000"/>
               </a:srgbClr>
             </a:outerShdw>
           </a:effectLst>
@@ -13561,38 +14190,57 @@
       </p:sp>
       <p:sp>
         <p:nvSpPr>
-          <p:cNvPr id="4" name="Shape 2"/>
-          <p:cNvSpPr/>
-          <p:nvPr/>
-        </p:nvSpPr>
-        <p:spPr>
-          <a:xfrm>
-            <a:off x="9357055" y="5907024"/>
-            <a:ext cx="2057400" cy="164592"/>
-          </a:xfrm>
-          <a:prstGeom prst="roundRect">
-            <a:avLst>
-              <a:gd name="adj" fmla="val 22222"/>
-            </a:avLst>
-          </a:prstGeom>
-          <a:solidFill>
-            <a:srgbClr val="FFFFFF">
-              <a:alpha val="72000"/>
-            </a:srgbClr>
-          </a:solidFill>
+          <p:cNvPr id="5" name="Shape 3"/>
+          <p:cNvSpPr/>
+          <p:nvPr/>
+        </p:nvSpPr>
+        <p:spPr>
+          <a:xfrm>
+            <a:off x="749808" y="749808"/>
+            <a:ext cx="1353312" cy="0"/>
+          </a:xfrm>
+          <a:prstGeom prst="line">
+            <a:avLst/>
+          </a:prstGeom>
+          <a:noFill/>
+          <a:ln w="12700">
+            <a:solidFill>
+              <a:srgbClr val="5D7FA4">
+                <a:alpha val="84000"/>
+              </a:srgbClr>
+            </a:solidFill>
+            <a:prstDash val="solid"/>
+          </a:ln>
+        </p:spPr>
+      </p:sp>
+      <p:sp>
+        <p:nvSpPr>
+          <p:cNvPr id="6" name="Shape 4"/>
+          <p:cNvSpPr/>
+          <p:nvPr/>
+        </p:nvSpPr>
+        <p:spPr>
+          <a:xfrm>
+            <a:off x="10088575" y="6144768"/>
+            <a:ext cx="1188720" cy="0"/>
+          </a:xfrm>
+          <a:prstGeom prst="line">
+            <a:avLst/>
+          </a:prstGeom>
+          <a:noFill/>
           <a:ln w="12700">
             <a:solidFill>
               <a:srgbClr val="FFFFFF">
-                <a:alpha val="0"/>
-              </a:srgbClr>
-            </a:solidFill>
-            <a:prstDash val="solid"/>
-          </a:ln>
-        </p:spPr>
-      </p:sp>
-      <p:sp>
-        <p:nvSpPr>
-          <p:cNvPr id="5" name="Shape 3"/>
+                <a:alpha val="82000"/>
+              </a:srgbClr>
+            </a:solidFill>
+            <a:prstDash val="solid"/>
+          </a:ln>
+        </p:spPr>
+      </p:sp>
+      <p:sp>
+        <p:nvSpPr>
+          <p:cNvPr id="7" name="Shape 5"/>
           <p:cNvSpPr/>
           <p:nvPr/>
         </p:nvSpPr>
@@ -13619,7 +14267,7 @@
       </p:sp>
       <p:sp>
         <p:nvSpPr>
-          <p:cNvPr id="6" name="Shape 4"/>
+          <p:cNvPr id="8" name="Shape 6"/>
           <p:cNvSpPr/>
           <p:nvPr/>
         </p:nvSpPr>
@@ -13646,7 +14294,7 @@
       </p:sp>
       <p:sp>
         <p:nvSpPr>
-          <p:cNvPr id="7" name="Shape 5"/>
+          <p:cNvPr id="9" name="Shape 7"/>
           <p:cNvSpPr/>
           <p:nvPr/>
         </p:nvSpPr>
@@ -13673,7 +14321,7 @@
       </p:sp>
       <p:sp>
         <p:nvSpPr>
-          <p:cNvPr id="8" name="Shape 6"/>
+          <p:cNvPr id="10" name="Shape 8"/>
           <p:cNvSpPr/>
           <p:nvPr/>
         </p:nvSpPr>
@@ -13702,7 +14350,7 @@
       </p:sp>
       <p:sp>
         <p:nvSpPr>
-          <p:cNvPr id="9" name="Shape 7"/>
+          <p:cNvPr id="11" name="Shape 9"/>
           <p:cNvSpPr/>
           <p:nvPr/>
         </p:nvSpPr>
@@ -13729,7 +14377,7 @@
       </p:sp>
       <p:sp>
         <p:nvSpPr>
-          <p:cNvPr id="10" name="Shape 8"/>
+          <p:cNvPr id="12" name="Shape 10"/>
           <p:cNvSpPr/>
           <p:nvPr/>
         </p:nvSpPr>
@@ -13756,7 +14404,7 @@
       </p:sp>
       <p:sp>
         <p:nvSpPr>
-          <p:cNvPr id="11" name="Shape 9"/>
+          <p:cNvPr id="13" name="Shape 11"/>
           <p:cNvSpPr/>
           <p:nvPr/>
         </p:nvSpPr>
@@ -13783,7 +14431,7 @@
       </p:sp>
       <p:sp>
         <p:nvSpPr>
-          <p:cNvPr id="12" name="Shape 10"/>
+          <p:cNvPr id="14" name="Shape 12"/>
           <p:cNvSpPr/>
           <p:nvPr/>
         </p:nvSpPr>
@@ -13810,7 +14458,7 @@
       </p:sp>
       <p:sp>
         <p:nvSpPr>
-          <p:cNvPr id="13" name="Shape 11"/>
+          <p:cNvPr id="15" name="Shape 13"/>
           <p:cNvSpPr/>
           <p:nvPr/>
         </p:nvSpPr>
@@ -13837,7 +14485,7 @@
       </p:sp>
       <p:sp>
         <p:nvSpPr>
-          <p:cNvPr id="14" name="Shape 12"/>
+          <p:cNvPr id="16" name="Shape 14"/>
           <p:cNvSpPr/>
           <p:nvPr/>
         </p:nvSpPr>
@@ -13864,7 +14512,7 @@
       </p:sp>
       <p:sp>
         <p:nvSpPr>
-          <p:cNvPr id="15" name="Shape 13"/>
+          <p:cNvPr id="17" name="Shape 15"/>
           <p:cNvSpPr/>
           <p:nvPr/>
         </p:nvSpPr>
@@ -13891,7 +14539,7 @@
       </p:sp>
       <p:sp>
         <p:nvSpPr>
-          <p:cNvPr id="16" name="Shape 14"/>
+          <p:cNvPr id="18" name="Shape 16"/>
           <p:cNvSpPr/>
           <p:nvPr/>
         </p:nvSpPr>
@@ -13918,7 +14566,7 @@
       </p:sp>
       <p:sp>
         <p:nvSpPr>
-          <p:cNvPr id="17" name="Shape 15"/>
+          <p:cNvPr id="19" name="Shape 17"/>
           <p:cNvSpPr/>
           <p:nvPr/>
         </p:nvSpPr>
@@ -13945,7 +14593,7 @@
       </p:sp>
       <p:sp>
         <p:nvSpPr>
-          <p:cNvPr id="18" name="Shape 16"/>
+          <p:cNvPr id="20" name="Shape 18"/>
           <p:cNvSpPr/>
           <p:nvPr/>
         </p:nvSpPr>
@@ -13972,7 +14620,7 @@
       </p:sp>
       <p:sp>
         <p:nvSpPr>
-          <p:cNvPr id="19" name="Shape 17"/>
+          <p:cNvPr id="21" name="Shape 19"/>
           <p:cNvSpPr/>
           <p:nvPr/>
         </p:nvSpPr>
@@ -13999,7 +14647,7 @@
       </p:sp>
       <p:sp>
         <p:nvSpPr>
-          <p:cNvPr id="20" name="Shape 18"/>
+          <p:cNvPr id="22" name="Shape 20"/>
           <p:cNvSpPr/>
           <p:nvPr/>
         </p:nvSpPr>
@@ -14026,7 +14674,7 @@
       </p:sp>
       <p:sp>
         <p:nvSpPr>
-          <p:cNvPr id="21" name="Shape 19"/>
+          <p:cNvPr id="23" name="Shape 21"/>
           <p:cNvSpPr/>
           <p:nvPr/>
         </p:nvSpPr>
@@ -14053,7 +14701,7 @@
       </p:sp>
       <p:sp>
         <p:nvSpPr>
-          <p:cNvPr id="22" name="Shape 20"/>
+          <p:cNvPr id="24" name="Shape 22"/>
           <p:cNvSpPr/>
           <p:nvPr/>
         </p:nvSpPr>
@@ -14080,7 +14728,7 @@
       </p:sp>
       <p:sp>
         <p:nvSpPr>
-          <p:cNvPr id="23" name="mdpr:1-2-0772f8:title:__title:1-2-0772f8"/>
+          <p:cNvPr id="25" name="mdpr:1-2-0772f8:title:__title:1-2-0772f8"/>
           <p:cNvSpPr txBox="1"/>
           <p:nvPr/>
         </p:nvSpPr>
@@ -14122,7 +14770,7 @@
       </p:sp>
       <p:sp>
         <p:nvSpPr>
-          <p:cNvPr id="24" name="mdpr:1-2-0772f8:toc-item-1:toc-item-1"/>
+          <p:cNvPr id="26" name="mdpr:1-2-0772f8:toc-item-1:toc-item-1"/>
           <p:cNvSpPr txBox="1"/>
           <p:nvPr/>
         </p:nvSpPr>
@@ -14164,7 +14812,7 @@
       </p:sp>
       <p:sp>
         <p:nvSpPr>
-          <p:cNvPr id="25" name="mdpr:1-2-0772f8:toc-item-2:toc-item-2"/>
+          <p:cNvPr id="27" name="mdpr:1-2-0772f8:toc-item-2:toc-item-2"/>
           <p:cNvSpPr txBox="1"/>
           <p:nvPr/>
         </p:nvSpPr>
@@ -14206,7 +14854,7 @@
       </p:sp>
       <p:sp>
         <p:nvSpPr>
-          <p:cNvPr id="26" name="mdpr:1-2-0772f8:toc-item-3:toc-item-3"/>
+          <p:cNvPr id="28" name="mdpr:1-2-0772f8:toc-item-3:toc-item-3"/>
           <p:cNvSpPr txBox="1"/>
           <p:nvPr/>
         </p:nvSpPr>
@@ -14248,7 +14896,7 @@
       </p:sp>
       <p:sp>
         <p:nvSpPr>
-          <p:cNvPr id="27" name="mdpr:1-2-0772f8:toc-item-4:toc-item-4"/>
+          <p:cNvPr id="29" name="mdpr:1-2-0772f8:toc-item-4:toc-item-4"/>
           <p:cNvSpPr txBox="1"/>
           <p:nvPr/>
         </p:nvSpPr>
@@ -14290,7 +14938,7 @@
       </p:sp>
       <p:sp>
         <p:nvSpPr>
-          <p:cNvPr id="28" name="mdpr:1-2-0772f8:toc-item-5:toc-item-5"/>
+          <p:cNvPr id="30" name="mdpr:1-2-0772f8:toc-item-5:toc-item-5"/>
           <p:cNvSpPr txBox="1"/>
           <p:nvPr/>
         </p:nvSpPr>
@@ -14332,7 +14980,7 @@
       </p:sp>
       <p:sp>
         <p:nvSpPr>
-          <p:cNvPr id="29" name="mdpr:1-2-0772f8:toc-item-6:toc-item-6"/>
+          <p:cNvPr id="31" name="mdpr:1-2-0772f8:toc-item-6:toc-item-6"/>
           <p:cNvSpPr txBox="1"/>
           <p:nvPr/>
         </p:nvSpPr>
@@ -14374,7 +15022,7 @@
       </p:sp>
       <p:sp>
         <p:nvSpPr>
-          <p:cNvPr id="30" name="mdpr:1-2-0772f8:toc-item-7:toc-item-7"/>
+          <p:cNvPr id="32" name="mdpr:1-2-0772f8:toc-item-7:toc-item-7"/>
           <p:cNvSpPr txBox="1"/>
           <p:nvPr/>
         </p:nvSpPr>
@@ -14416,7 +15064,7 @@
       </p:sp>
       <p:sp>
         <p:nvSpPr>
-          <p:cNvPr id="31" name="mdpr:1-2-0772f8:toc-item-8:toc-item-8"/>
+          <p:cNvPr id="33" name="mdpr:1-2-0772f8:toc-item-8:toc-item-8"/>
           <p:cNvSpPr txBox="1"/>
           <p:nvPr/>
         </p:nvSpPr>
@@ -14458,7 +15106,7 @@
       </p:sp>
       <p:sp>
         <p:nvSpPr>
-          <p:cNvPr id="32" name="mdpr:1-2-0772f8:toc-item-9:toc-item-9"/>
+          <p:cNvPr id="34" name="mdpr:1-2-0772f8:toc-item-9:toc-item-9"/>
           <p:cNvSpPr txBox="1"/>
           <p:nvPr/>
         </p:nvSpPr>
@@ -14500,7 +15148,7 @@
       </p:sp>
       <p:sp>
         <p:nvSpPr>
-          <p:cNvPr id="33" name="mdpr:1-2-0772f8:toc-item-10:toc-item-10"/>
+          <p:cNvPr id="35" name="mdpr:1-2-0772f8:toc-item-10:toc-item-10"/>
           <p:cNvSpPr txBox="1"/>
           <p:nvPr/>
         </p:nvSpPr>
@@ -14542,7 +15190,7 @@
       </p:sp>
       <p:sp>
         <p:nvSpPr>
-          <p:cNvPr id="34" name="mdpr:1-2-0772f8:toc-item-11:toc-item-11"/>
+          <p:cNvPr id="36" name="mdpr:1-2-0772f8:toc-item-11:toc-item-11"/>
           <p:cNvSpPr txBox="1"/>
           <p:nvPr/>
         </p:nvSpPr>
@@ -14584,7 +15232,7 @@
       </p:sp>
       <p:sp>
         <p:nvSpPr>
-          <p:cNvPr id="35" name="mdpr:1-2-0772f8:toc-item-12:toc-item-12"/>
+          <p:cNvPr id="37" name="mdpr:1-2-0772f8:toc-item-12:toc-item-12"/>
           <p:cNvSpPr txBox="1"/>
           <p:nvPr/>
         </p:nvSpPr>
@@ -14626,7 +15274,7 @@
       </p:sp>
       <p:sp>
         <p:nvSpPr>
-          <p:cNvPr id="36" name="mdpr:1-2-0772f8:toc-item-13:toc-item-13"/>
+          <p:cNvPr id="38" name="mdpr:1-2-0772f8:toc-item-13:toc-item-13"/>
           <p:cNvSpPr txBox="1"/>
           <p:nvPr/>
         </p:nvSpPr>
@@ -14668,7 +15316,7 @@
       </p:sp>
       <p:sp>
         <p:nvSpPr>
-          <p:cNvPr id="37" name="mdpr:1-2-0772f8:toc-item-14:toc-item-14"/>
+          <p:cNvPr id="39" name="mdpr:1-2-0772f8:toc-item-14:toc-item-14"/>
           <p:cNvSpPr txBox="1"/>
           <p:nvPr/>
         </p:nvSpPr>
@@ -14748,29 +15396,31 @@
         </p:nvSpPr>
         <p:spPr>
           <a:xfrm>
-            <a:off x="10362895" y="502920"/>
-            <a:ext cx="822960" cy="822960"/>
-          </a:xfrm>
-          <a:prstGeom prst="ellipse">
-            <a:avLst/>
-          </a:prstGeom>
-          <a:solidFill>
-            <a:srgbClr val="F7FAFC">
-              <a:alpha val="92000"/>
+            <a:off x="493776" y="5852160"/>
+            <a:ext cx="11204143" cy="420624"/>
+          </a:xfrm>
+          <a:prstGeom prst="roundRect">
+            <a:avLst>
+              <a:gd name="adj" fmla="val 17391"/>
+            </a:avLst>
+          </a:prstGeom>
+          <a:solidFill>
+            <a:srgbClr val="DDE8F2">
+              <a:alpha val="62000"/>
             </a:srgbClr>
           </a:solidFill>
           <a:ln w="12700">
             <a:solidFill>
               <a:srgbClr val="FFFFFF">
-                <a:alpha val="0"/>
+                <a:alpha val="32000"/>
               </a:srgbClr>
             </a:solidFill>
             <a:prstDash val="solid"/>
           </a:ln>
           <a:effectLst>
-            <a:outerShdw sx="100000" sy="100000" kx="0" ky="0" algn="bl" rotWithShape="0" blurRad="15240" dist="50800" dir="2700000">
-              <a:srgbClr val="C7D0DE">
-                <a:alpha val="22000"/>
+            <a:outerShdw sx="100000" sy="100000" kx="0" ky="0" algn="bl" rotWithShape="0" blurRad="8890" dist="50800" dir="2700000">
+              <a:srgbClr val="A8B6C8">
+                <a:alpha val="8000"/>
               </a:srgbClr>
             </a:outerShdw>
           </a:effectLst>
@@ -14784,27 +15434,60 @@
         </p:nvSpPr>
         <p:spPr>
           <a:xfrm>
-            <a:off x="530352" y="5687568"/>
-            <a:ext cx="658368" cy="658368"/>
+            <a:off x="749808" y="5980176"/>
+            <a:ext cx="2103120" cy="146304"/>
+          </a:xfrm>
+          <a:prstGeom prst="roundRect">
+            <a:avLst>
+              <a:gd name="adj" fmla="val 25000"/>
+            </a:avLst>
+          </a:prstGeom>
+          <a:solidFill>
+            <a:srgbClr val="5D7FA4">
+              <a:alpha val="44000"/>
+            </a:srgbClr>
+          </a:solidFill>
+          <a:ln w="12700">
+            <a:solidFill>
+              <a:srgbClr val="5D7FA4">
+                <a:alpha val="0"/>
+              </a:srgbClr>
+            </a:solidFill>
+            <a:prstDash val="solid"/>
+          </a:ln>
+        </p:spPr>
+      </p:sp>
+      <p:sp>
+        <p:nvSpPr>
+          <p:cNvPr id="4" name="Shape 2"/>
+          <p:cNvSpPr/>
+          <p:nvPr/>
+        </p:nvSpPr>
+        <p:spPr>
+          <a:xfrm>
+            <a:off x="10710367" y="512064"/>
+            <a:ext cx="493776" cy="493776"/>
           </a:xfrm>
           <a:prstGeom prst="ellipse">
             <a:avLst/>
           </a:prstGeom>
           <a:solidFill>
-            <a:srgbClr val="EEF3F8"/>
-          </a:solidFill>
-          <a:ln w="12700">
-            <a:solidFill>
-              <a:srgbClr val="FFFFFF">
-                <a:alpha val="42000"/>
+            <a:srgbClr val="FFFFFF">
+              <a:alpha val="88000"/>
+            </a:srgbClr>
+          </a:solidFill>
+          <a:ln w="12700">
+            <a:solidFill>
+              <a:srgbClr val="CBD7E4">
+                <a:alpha val="50000"/>
               </a:srgbClr>
             </a:solidFill>
             <a:prstDash val="solid"/>
           </a:ln>
           <a:effectLst>
-            <a:outerShdw sx="100000" sy="100000" kx="0" ky="0" algn="bl" rotWithShape="0" blurRad="12700" dist="50800" dir="2700000">
-              <a:srgbClr val="B8C3D2">
-                <a:alpha val="18000"/>
+            <a:outerShdw sx="100000" sy="100000" kx="0" ky="0" algn="bl" rotWithShape="0" blurRad="11430" dist="50800" dir="2700000">
+              <a:srgbClr val="A8B6C8">
+                <a:alpha val="14000"/>
               </a:srgbClr>
             </a:outerShdw>
           </a:effectLst>
@@ -14812,38 +15495,57 @@
       </p:sp>
       <p:sp>
         <p:nvSpPr>
-          <p:cNvPr id="4" name="Shape 2"/>
-          <p:cNvSpPr/>
-          <p:nvPr/>
-        </p:nvSpPr>
-        <p:spPr>
-          <a:xfrm>
-            <a:off x="9357055" y="5907024"/>
-            <a:ext cx="2057400" cy="164592"/>
-          </a:xfrm>
-          <a:prstGeom prst="roundRect">
-            <a:avLst>
-              <a:gd name="adj" fmla="val 22222"/>
-            </a:avLst>
-          </a:prstGeom>
-          <a:solidFill>
-            <a:srgbClr val="FFFFFF">
-              <a:alpha val="72000"/>
-            </a:srgbClr>
-          </a:solidFill>
+          <p:cNvPr id="5" name="Shape 3"/>
+          <p:cNvSpPr/>
+          <p:nvPr/>
+        </p:nvSpPr>
+        <p:spPr>
+          <a:xfrm>
+            <a:off x="749808" y="749808"/>
+            <a:ext cx="1353312" cy="0"/>
+          </a:xfrm>
+          <a:prstGeom prst="line">
+            <a:avLst/>
+          </a:prstGeom>
+          <a:noFill/>
+          <a:ln w="12700">
+            <a:solidFill>
+              <a:srgbClr val="5D7FA4">
+                <a:alpha val="84000"/>
+              </a:srgbClr>
+            </a:solidFill>
+            <a:prstDash val="solid"/>
+          </a:ln>
+        </p:spPr>
+      </p:sp>
+      <p:sp>
+        <p:nvSpPr>
+          <p:cNvPr id="6" name="Shape 4"/>
+          <p:cNvSpPr/>
+          <p:nvPr/>
+        </p:nvSpPr>
+        <p:spPr>
+          <a:xfrm>
+            <a:off x="10088575" y="6144768"/>
+            <a:ext cx="1188720" cy="0"/>
+          </a:xfrm>
+          <a:prstGeom prst="line">
+            <a:avLst/>
+          </a:prstGeom>
+          <a:noFill/>
           <a:ln w="12700">
             <a:solidFill>
               <a:srgbClr val="FFFFFF">
-                <a:alpha val="0"/>
-              </a:srgbClr>
-            </a:solidFill>
-            <a:prstDash val="solid"/>
-          </a:ln>
-        </p:spPr>
-      </p:sp>
-      <p:sp>
-        <p:nvSpPr>
-          <p:cNvPr id="5" name="Shape 3"/>
+                <a:alpha val="82000"/>
+              </a:srgbClr>
+            </a:solidFill>
+            <a:prstDash val="solid"/>
+          </a:ln>
+        </p:spPr>
+      </p:sp>
+      <p:sp>
+        <p:nvSpPr>
+          <p:cNvPr id="7" name="Shape 5"/>
           <p:cNvSpPr/>
           <p:nvPr/>
         </p:nvSpPr>
@@ -14870,7 +15572,7 @@
       </p:sp>
       <p:sp>
         <p:nvSpPr>
-          <p:cNvPr id="6" name="Shape 4"/>
+          <p:cNvPr id="8" name="Shape 6"/>
           <p:cNvSpPr/>
           <p:nvPr/>
         </p:nvSpPr>
@@ -14897,7 +15599,7 @@
       </p:sp>
       <p:sp>
         <p:nvSpPr>
-          <p:cNvPr id="7" name="Shape 5"/>
+          <p:cNvPr id="9" name="Shape 7"/>
           <p:cNvSpPr/>
           <p:nvPr/>
         </p:nvSpPr>
@@ -14924,7 +15626,7 @@
       </p:sp>
       <p:sp>
         <p:nvSpPr>
-          <p:cNvPr id="8" name="mdpr:2-2-4f71ba:title:__title:2-2-4f71ba"/>
+          <p:cNvPr id="10" name="mdpr:2-2-4f71ba:title:__title:2-2-4f71ba"/>
           <p:cNvSpPr txBox="1"/>
           <p:nvPr/>
         </p:nvSpPr>
@@ -14966,7 +15668,7 @@
       </p:sp>
       <p:sp>
         <p:nvSpPr>
-          <p:cNvPr id="9" name="mdpr:2-2-4f71ba:left:block-27-chunk-2"/>
+          <p:cNvPr id="11" name="mdpr:2-2-4f71ba:left:block-27-chunk-2"/>
           <p:cNvSpPr txBox="1"/>
           <p:nvPr/>
         </p:nvSpPr>
@@ -15025,7 +15727,7 @@
       </p:sp>
       <p:sp>
         <p:nvSpPr>
-          <p:cNvPr id="10" name="mdpr:2-2-4f71ba:right:block-27-chunk-2"/>
+          <p:cNvPr id="12" name="mdpr:2-2-4f71ba:right:block-27-chunk-2"/>
           <p:cNvSpPr txBox="1"/>
           <p:nvPr/>
         </p:nvSpPr>
@@ -15122,29 +15824,31 @@
         </p:nvSpPr>
         <p:spPr>
           <a:xfrm>
-            <a:off x="10362895" y="502920"/>
-            <a:ext cx="822960" cy="822960"/>
-          </a:xfrm>
-          <a:prstGeom prst="ellipse">
-            <a:avLst/>
-          </a:prstGeom>
-          <a:solidFill>
-            <a:srgbClr val="F7FAFC">
-              <a:alpha val="92000"/>
+            <a:off x="493776" y="5852160"/>
+            <a:ext cx="11204143" cy="420624"/>
+          </a:xfrm>
+          <a:prstGeom prst="roundRect">
+            <a:avLst>
+              <a:gd name="adj" fmla="val 17391"/>
+            </a:avLst>
+          </a:prstGeom>
+          <a:solidFill>
+            <a:srgbClr val="DDE8F2">
+              <a:alpha val="62000"/>
             </a:srgbClr>
           </a:solidFill>
           <a:ln w="12700">
             <a:solidFill>
               <a:srgbClr val="FFFFFF">
-                <a:alpha val="0"/>
+                <a:alpha val="32000"/>
               </a:srgbClr>
             </a:solidFill>
             <a:prstDash val="solid"/>
           </a:ln>
           <a:effectLst>
-            <a:outerShdw sx="100000" sy="100000" kx="0" ky="0" algn="bl" rotWithShape="0" blurRad="15240" dist="50800" dir="2700000">
-              <a:srgbClr val="C7D0DE">
-                <a:alpha val="22000"/>
+            <a:outerShdw sx="100000" sy="100000" kx="0" ky="0" algn="bl" rotWithShape="0" blurRad="8890" dist="50800" dir="2700000">
+              <a:srgbClr val="A8B6C8">
+                <a:alpha val="8000"/>
               </a:srgbClr>
             </a:outerShdw>
           </a:effectLst>
@@ -15158,27 +15862,60 @@
         </p:nvSpPr>
         <p:spPr>
           <a:xfrm>
-            <a:off x="530352" y="5687568"/>
-            <a:ext cx="658368" cy="658368"/>
+            <a:off x="749808" y="5980176"/>
+            <a:ext cx="2103120" cy="146304"/>
+          </a:xfrm>
+          <a:prstGeom prst="roundRect">
+            <a:avLst>
+              <a:gd name="adj" fmla="val 25000"/>
+            </a:avLst>
+          </a:prstGeom>
+          <a:solidFill>
+            <a:srgbClr val="5D7FA4">
+              <a:alpha val="44000"/>
+            </a:srgbClr>
+          </a:solidFill>
+          <a:ln w="12700">
+            <a:solidFill>
+              <a:srgbClr val="5D7FA4">
+                <a:alpha val="0"/>
+              </a:srgbClr>
+            </a:solidFill>
+            <a:prstDash val="solid"/>
+          </a:ln>
+        </p:spPr>
+      </p:sp>
+      <p:sp>
+        <p:nvSpPr>
+          <p:cNvPr id="4" name="Shape 2"/>
+          <p:cNvSpPr/>
+          <p:nvPr/>
+        </p:nvSpPr>
+        <p:spPr>
+          <a:xfrm>
+            <a:off x="10710367" y="512064"/>
+            <a:ext cx="493776" cy="493776"/>
           </a:xfrm>
           <a:prstGeom prst="ellipse">
             <a:avLst/>
           </a:prstGeom>
           <a:solidFill>
-            <a:srgbClr val="EEF3F8"/>
-          </a:solidFill>
-          <a:ln w="12700">
-            <a:solidFill>
-              <a:srgbClr val="FFFFFF">
-                <a:alpha val="42000"/>
+            <a:srgbClr val="FFFFFF">
+              <a:alpha val="88000"/>
+            </a:srgbClr>
+          </a:solidFill>
+          <a:ln w="12700">
+            <a:solidFill>
+              <a:srgbClr val="CBD7E4">
+                <a:alpha val="50000"/>
               </a:srgbClr>
             </a:solidFill>
             <a:prstDash val="solid"/>
           </a:ln>
           <a:effectLst>
-            <a:outerShdw sx="100000" sy="100000" kx="0" ky="0" algn="bl" rotWithShape="0" blurRad="12700" dist="50800" dir="2700000">
-              <a:srgbClr val="B8C3D2">
-                <a:alpha val="18000"/>
+            <a:outerShdw sx="100000" sy="100000" kx="0" ky="0" algn="bl" rotWithShape="0" blurRad="11430" dist="50800" dir="2700000">
+              <a:srgbClr val="A8B6C8">
+                <a:alpha val="14000"/>
               </a:srgbClr>
             </a:outerShdw>
           </a:effectLst>
@@ -15186,38 +15923,57 @@
       </p:sp>
       <p:sp>
         <p:nvSpPr>
-          <p:cNvPr id="4" name="Shape 2"/>
-          <p:cNvSpPr/>
-          <p:nvPr/>
-        </p:nvSpPr>
-        <p:spPr>
-          <a:xfrm>
-            <a:off x="9357055" y="5907024"/>
-            <a:ext cx="2057400" cy="164592"/>
-          </a:xfrm>
-          <a:prstGeom prst="roundRect">
-            <a:avLst>
-              <a:gd name="adj" fmla="val 22222"/>
-            </a:avLst>
-          </a:prstGeom>
-          <a:solidFill>
-            <a:srgbClr val="FFFFFF">
-              <a:alpha val="72000"/>
-            </a:srgbClr>
-          </a:solidFill>
+          <p:cNvPr id="5" name="Shape 3"/>
+          <p:cNvSpPr/>
+          <p:nvPr/>
+        </p:nvSpPr>
+        <p:spPr>
+          <a:xfrm>
+            <a:off x="749808" y="749808"/>
+            <a:ext cx="1353312" cy="0"/>
+          </a:xfrm>
+          <a:prstGeom prst="line">
+            <a:avLst/>
+          </a:prstGeom>
+          <a:noFill/>
+          <a:ln w="12700">
+            <a:solidFill>
+              <a:srgbClr val="5D7FA4">
+                <a:alpha val="84000"/>
+              </a:srgbClr>
+            </a:solidFill>
+            <a:prstDash val="solid"/>
+          </a:ln>
+        </p:spPr>
+      </p:sp>
+      <p:sp>
+        <p:nvSpPr>
+          <p:cNvPr id="6" name="Shape 4"/>
+          <p:cNvSpPr/>
+          <p:nvPr/>
+        </p:nvSpPr>
+        <p:spPr>
+          <a:xfrm>
+            <a:off x="10088575" y="6144768"/>
+            <a:ext cx="1188720" cy="0"/>
+          </a:xfrm>
+          <a:prstGeom prst="line">
+            <a:avLst/>
+          </a:prstGeom>
+          <a:noFill/>
           <a:ln w="12700">
             <a:solidFill>
               <a:srgbClr val="FFFFFF">
-                <a:alpha val="0"/>
-              </a:srgbClr>
-            </a:solidFill>
-            <a:prstDash val="solid"/>
-          </a:ln>
-        </p:spPr>
-      </p:sp>
-      <p:sp>
-        <p:nvSpPr>
-          <p:cNvPr id="5" name="Shape 3"/>
+                <a:alpha val="82000"/>
+              </a:srgbClr>
+            </a:solidFill>
+            <a:prstDash val="solid"/>
+          </a:ln>
+        </p:spPr>
+      </p:sp>
+      <p:sp>
+        <p:nvSpPr>
+          <p:cNvPr id="7" name="Shape 5"/>
           <p:cNvSpPr/>
           <p:nvPr/>
         </p:nvSpPr>
@@ -15244,7 +16000,7 @@
       </p:sp>
       <p:sp>
         <p:nvSpPr>
-          <p:cNvPr id="6" name="Shape 4"/>
+          <p:cNvPr id="8" name="Shape 6"/>
           <p:cNvSpPr/>
           <p:nvPr/>
         </p:nvSpPr>
@@ -15282,7 +16038,7 @@
       </p:sp>
       <p:sp>
         <p:nvSpPr>
-          <p:cNvPr id="7" name="Shape 5"/>
+          <p:cNvPr id="9" name="Shape 7"/>
           <p:cNvSpPr/>
           <p:nvPr/>
         </p:nvSpPr>
@@ -15320,7 +16076,7 @@
       </p:sp>
       <p:sp>
         <p:nvSpPr>
-          <p:cNvPr id="8" name="Shape 6"/>
+          <p:cNvPr id="10" name="Shape 8"/>
           <p:cNvSpPr/>
           <p:nvPr/>
         </p:nvSpPr>
@@ -15351,7 +16107,7 @@
       </p:sp>
       <p:pic>
         <p:nvPicPr>
-          <p:cNvPr id="9" name="Image 0" descr="preencoded.png">    </p:cNvPr>
+          <p:cNvPr id="11" name="Image 0" descr="preencoded.png">    </p:cNvPr>
           <p:cNvPicPr>
             <a:picLocks noChangeAspect="1"/>
           </p:cNvPicPr>
@@ -15381,7 +16137,7 @@
       </p:pic>
       <p:sp>
         <p:nvSpPr>
-          <p:cNvPr id="10" name="Shape 7"/>
+          <p:cNvPr id="12" name="Shape 9"/>
           <p:cNvSpPr/>
           <p:nvPr/>
         </p:nvSpPr>
@@ -15419,7 +16175,7 @@
       </p:sp>
       <p:sp>
         <p:nvSpPr>
-          <p:cNvPr id="11" name="Shape 8"/>
+          <p:cNvPr id="13" name="Shape 10"/>
           <p:cNvSpPr/>
           <p:nvPr/>
         </p:nvSpPr>
@@ -15457,7 +16213,7 @@
       </p:sp>
       <p:sp>
         <p:nvSpPr>
-          <p:cNvPr id="12" name="Shape 9"/>
+          <p:cNvPr id="14" name="Shape 11"/>
           <p:cNvSpPr/>
           <p:nvPr/>
         </p:nvSpPr>
@@ -15488,7 +16244,7 @@
       </p:sp>
       <p:pic>
         <p:nvPicPr>
-          <p:cNvPr id="13" name="Image 1" descr="preencoded.png">    </p:cNvPr>
+          <p:cNvPr id="15" name="Image 1" descr="preencoded.png">    </p:cNvPr>
           <p:cNvPicPr>
             <a:picLocks noChangeAspect="1"/>
           </p:cNvPicPr>
@@ -15518,7 +16274,7 @@
       </p:pic>
       <p:sp>
         <p:nvSpPr>
-          <p:cNvPr id="14" name="Shape 10"/>
+          <p:cNvPr id="16" name="Shape 12"/>
           <p:cNvSpPr/>
           <p:nvPr/>
         </p:nvSpPr>
@@ -15556,7 +16312,7 @@
       </p:sp>
       <p:sp>
         <p:nvSpPr>
-          <p:cNvPr id="15" name="Shape 11"/>
+          <p:cNvPr id="17" name="Shape 13"/>
           <p:cNvSpPr/>
           <p:nvPr/>
         </p:nvSpPr>
@@ -15594,7 +16350,7 @@
       </p:sp>
       <p:sp>
         <p:nvSpPr>
-          <p:cNvPr id="16" name="Shape 12"/>
+          <p:cNvPr id="18" name="Shape 14"/>
           <p:cNvSpPr/>
           <p:nvPr/>
         </p:nvSpPr>
@@ -15625,7 +16381,7 @@
       </p:sp>
       <p:pic>
         <p:nvPicPr>
-          <p:cNvPr id="17" name="Image 2" descr="preencoded.png">    </p:cNvPr>
+          <p:cNvPr id="19" name="Image 2" descr="preencoded.png">    </p:cNvPr>
           <p:cNvPicPr>
             <a:picLocks noChangeAspect="1"/>
           </p:cNvPicPr>
@@ -15655,7 +16411,7 @@
       </p:pic>
       <p:sp>
         <p:nvSpPr>
-          <p:cNvPr id="18" name="Shape 13"/>
+          <p:cNvPr id="20" name="Shape 15"/>
           <p:cNvSpPr/>
           <p:nvPr/>
         </p:nvSpPr>
@@ -15693,7 +16449,7 @@
       </p:sp>
       <p:sp>
         <p:nvSpPr>
-          <p:cNvPr id="19" name="Shape 14"/>
+          <p:cNvPr id="21" name="Shape 16"/>
           <p:cNvSpPr/>
           <p:nvPr/>
         </p:nvSpPr>
@@ -15731,7 +16487,7 @@
       </p:sp>
       <p:sp>
         <p:nvSpPr>
-          <p:cNvPr id="20" name="Shape 15"/>
+          <p:cNvPr id="22" name="Shape 17"/>
           <p:cNvSpPr/>
           <p:nvPr/>
         </p:nvSpPr>
@@ -15762,7 +16518,7 @@
       </p:sp>
       <p:pic>
         <p:nvPicPr>
-          <p:cNvPr id="21" name="Image 3" descr="preencoded.png">    </p:cNvPr>
+          <p:cNvPr id="23" name="Image 3" descr="preencoded.png">    </p:cNvPr>
           <p:cNvPicPr>
             <a:picLocks noChangeAspect="1"/>
           </p:cNvPicPr>
@@ -15792,7 +16548,7 @@
       </p:pic>
       <p:sp>
         <p:nvSpPr>
-          <p:cNvPr id="22" name="Shape 16"/>
+          <p:cNvPr id="24" name="Shape 18"/>
           <p:cNvSpPr/>
           <p:nvPr/>
         </p:nvSpPr>
@@ -15819,7 +16575,7 @@
       </p:sp>
       <p:sp>
         <p:nvSpPr>
-          <p:cNvPr id="23" name="Shape 17"/>
+          <p:cNvPr id="25" name="Shape 19"/>
           <p:cNvSpPr/>
           <p:nvPr/>
         </p:nvSpPr>
@@ -15846,7 +16602,7 @@
       </p:sp>
       <p:sp>
         <p:nvSpPr>
-          <p:cNvPr id="24" name="Shape 18"/>
+          <p:cNvPr id="26" name="Shape 20"/>
           <p:cNvSpPr/>
           <p:nvPr/>
         </p:nvSpPr>
@@ -15873,7 +16629,7 @@
       </p:sp>
       <p:sp>
         <p:nvSpPr>
-          <p:cNvPr id="25" name="Shape 19"/>
+          <p:cNvPr id="27" name="Shape 21"/>
           <p:cNvSpPr/>
           <p:nvPr/>
         </p:nvSpPr>
@@ -15900,7 +16656,7 @@
       </p:sp>
       <p:sp>
         <p:nvSpPr>
-          <p:cNvPr id="26" name="mdpr:icon-and-text-aside-8429fc:title:__title:icon-and-text-aside-8429fc"/>
+          <p:cNvPr id="28" name="mdpr:icon-and-text-aside-8429fc:title:__title:icon-and-text-aside-8429fc"/>
           <p:cNvSpPr txBox="1"/>
           <p:nvPr/>
         </p:nvSpPr>
@@ -15942,7 +16698,7 @@
       </p:sp>
       <p:sp>
         <p:nvSpPr>
-          <p:cNvPr id="27" name="Shape 21"/>
+          <p:cNvPr id="29" name="Shape 23"/>
           <p:cNvSpPr/>
           <p:nvPr/>
         </p:nvSpPr>
@@ -15969,7 +16725,7 @@
       </p:sp>
       <p:pic>
         <p:nvPicPr>
-          <p:cNvPr id="28" name="Image 4" descr="article icon from tabler-icons (MIT)">    </p:cNvPr>
+          <p:cNvPr id="30" name="Image 4" descr="article icon from tabler-icons (MIT)">    </p:cNvPr>
           <p:cNvPicPr>
             <a:picLocks noChangeAspect="1"/>
           </p:cNvPicPr>
@@ -15999,7 +16755,7 @@
       </p:pic>
       <p:sp>
         <p:nvSpPr>
-          <p:cNvPr id="29" name="mdpr:icon-and-text-aside-8429fc:item-1:block-29"/>
+          <p:cNvPr id="31" name="mdpr:icon-and-text-aside-8429fc:item-1:block-29"/>
           <p:cNvSpPr txBox="1"/>
           <p:nvPr/>
         </p:nvSpPr>
@@ -16058,7 +16814,7 @@
       </p:sp>
       <p:sp>
         <p:nvSpPr>
-          <p:cNvPr id="30" name="Shape 23"/>
+          <p:cNvPr id="32" name="Shape 25"/>
           <p:cNvSpPr/>
           <p:nvPr/>
         </p:nvSpPr>
@@ -16085,7 +16841,7 @@
       </p:sp>
       <p:pic>
         <p:nvPicPr>
-          <p:cNvPr id="31" name="Image 5" descr="article icon from tabler-icons (MIT)">    </p:cNvPr>
+          <p:cNvPr id="33" name="Image 5" descr="article icon from tabler-icons (MIT)">    </p:cNvPr>
           <p:cNvPicPr>
             <a:picLocks noChangeAspect="1"/>
           </p:cNvPicPr>
@@ -16115,7 +16871,7 @@
       </p:pic>
       <p:sp>
         <p:nvSpPr>
-          <p:cNvPr id="32" name="mdpr:icon-and-text-aside-8429fc:item-2:block-29"/>
+          <p:cNvPr id="34" name="mdpr:icon-and-text-aside-8429fc:item-2:block-29"/>
           <p:cNvSpPr txBox="1"/>
           <p:nvPr/>
         </p:nvSpPr>
@@ -16174,7 +16930,7 @@
       </p:sp>
       <p:sp>
         <p:nvSpPr>
-          <p:cNvPr id="33" name="Shape 25"/>
+          <p:cNvPr id="35" name="Shape 27"/>
           <p:cNvSpPr/>
           <p:nvPr/>
         </p:nvSpPr>
@@ -16201,7 +16957,7 @@
       </p:sp>
       <p:pic>
         <p:nvPicPr>
-          <p:cNvPr id="34" name="Image 6" descr="article icon from tabler-icons (MIT)">    </p:cNvPr>
+          <p:cNvPr id="36" name="Image 6" descr="article icon from tabler-icons (MIT)">    </p:cNvPr>
           <p:cNvPicPr>
             <a:picLocks noChangeAspect="1"/>
           </p:cNvPicPr>
@@ -16231,7 +16987,7 @@
       </p:pic>
       <p:sp>
         <p:nvSpPr>
-          <p:cNvPr id="35" name="mdpr:icon-and-text-aside-8429fc:item-3:block-29"/>
+          <p:cNvPr id="37" name="mdpr:icon-and-text-aside-8429fc:item-3:block-29"/>
           <p:cNvSpPr txBox="1"/>
           <p:nvPr/>
         </p:nvSpPr>
@@ -16290,7 +17046,7 @@
       </p:sp>
       <p:sp>
         <p:nvSpPr>
-          <p:cNvPr id="36" name="Shape 27"/>
+          <p:cNvPr id="38" name="Shape 29"/>
           <p:cNvSpPr/>
           <p:nvPr/>
         </p:nvSpPr>
@@ -16317,7 +17073,7 @@
       </p:sp>
       <p:pic>
         <p:nvPicPr>
-          <p:cNvPr id="37" name="Image 7" descr="table icon from tabler-icons (MIT)">    </p:cNvPr>
+          <p:cNvPr id="39" name="Image 7" descr="table icon from tabler-icons (MIT)">    </p:cNvPr>
           <p:cNvPicPr>
             <a:picLocks noChangeAspect="1"/>
           </p:cNvPicPr>
@@ -16347,7 +17103,7 @@
       </p:pic>
       <p:sp>
         <p:nvSpPr>
-          <p:cNvPr id="38" name="mdpr:icon-and-text-aside-8429fc:item-4:block-29"/>
+          <p:cNvPr id="40" name="mdpr:icon-and-text-aside-8429fc:item-4:block-29"/>
           <p:cNvSpPr txBox="1"/>
           <p:nvPr/>
         </p:nvSpPr>
@@ -16444,29 +17200,31 @@
         </p:nvSpPr>
         <p:spPr>
           <a:xfrm>
-            <a:off x="10362895" y="502920"/>
-            <a:ext cx="822960" cy="822960"/>
-          </a:xfrm>
-          <a:prstGeom prst="ellipse">
-            <a:avLst/>
-          </a:prstGeom>
-          <a:solidFill>
-            <a:srgbClr val="F7FAFC">
-              <a:alpha val="92000"/>
+            <a:off x="493776" y="5852160"/>
+            <a:ext cx="11204143" cy="420624"/>
+          </a:xfrm>
+          <a:prstGeom prst="roundRect">
+            <a:avLst>
+              <a:gd name="adj" fmla="val 17391"/>
+            </a:avLst>
+          </a:prstGeom>
+          <a:solidFill>
+            <a:srgbClr val="DDE8F2">
+              <a:alpha val="62000"/>
             </a:srgbClr>
           </a:solidFill>
           <a:ln w="12700">
             <a:solidFill>
               <a:srgbClr val="FFFFFF">
-                <a:alpha val="0"/>
+                <a:alpha val="32000"/>
               </a:srgbClr>
             </a:solidFill>
             <a:prstDash val="solid"/>
           </a:ln>
           <a:effectLst>
-            <a:outerShdw sx="100000" sy="100000" kx="0" ky="0" algn="bl" rotWithShape="0" blurRad="15240" dist="50800" dir="2700000">
-              <a:srgbClr val="C7D0DE">
-                <a:alpha val="22000"/>
+            <a:outerShdw sx="100000" sy="100000" kx="0" ky="0" algn="bl" rotWithShape="0" blurRad="8890" dist="50800" dir="2700000">
+              <a:srgbClr val="A8B6C8">
+                <a:alpha val="8000"/>
               </a:srgbClr>
             </a:outerShdw>
           </a:effectLst>
@@ -16480,27 +17238,60 @@
         </p:nvSpPr>
         <p:spPr>
           <a:xfrm>
-            <a:off x="530352" y="5687568"/>
-            <a:ext cx="658368" cy="658368"/>
+            <a:off x="749808" y="5980176"/>
+            <a:ext cx="2103120" cy="146304"/>
+          </a:xfrm>
+          <a:prstGeom prst="roundRect">
+            <a:avLst>
+              <a:gd name="adj" fmla="val 25000"/>
+            </a:avLst>
+          </a:prstGeom>
+          <a:solidFill>
+            <a:srgbClr val="5D7FA4">
+              <a:alpha val="44000"/>
+            </a:srgbClr>
+          </a:solidFill>
+          <a:ln w="12700">
+            <a:solidFill>
+              <a:srgbClr val="5D7FA4">
+                <a:alpha val="0"/>
+              </a:srgbClr>
+            </a:solidFill>
+            <a:prstDash val="solid"/>
+          </a:ln>
+        </p:spPr>
+      </p:sp>
+      <p:sp>
+        <p:nvSpPr>
+          <p:cNvPr id="4" name="Shape 2"/>
+          <p:cNvSpPr/>
+          <p:nvPr/>
+        </p:nvSpPr>
+        <p:spPr>
+          <a:xfrm>
+            <a:off x="10710367" y="512064"/>
+            <a:ext cx="493776" cy="493776"/>
           </a:xfrm>
           <a:prstGeom prst="ellipse">
             <a:avLst/>
           </a:prstGeom>
           <a:solidFill>
-            <a:srgbClr val="EEF3F8"/>
-          </a:solidFill>
-          <a:ln w="12700">
-            <a:solidFill>
-              <a:srgbClr val="FFFFFF">
-                <a:alpha val="42000"/>
+            <a:srgbClr val="FFFFFF">
+              <a:alpha val="88000"/>
+            </a:srgbClr>
+          </a:solidFill>
+          <a:ln w="12700">
+            <a:solidFill>
+              <a:srgbClr val="CBD7E4">
+                <a:alpha val="50000"/>
               </a:srgbClr>
             </a:solidFill>
             <a:prstDash val="solid"/>
           </a:ln>
           <a:effectLst>
-            <a:outerShdw sx="100000" sy="100000" kx="0" ky="0" algn="bl" rotWithShape="0" blurRad="12700" dist="50800" dir="2700000">
-              <a:srgbClr val="B8C3D2">
-                <a:alpha val="18000"/>
+            <a:outerShdw sx="100000" sy="100000" kx="0" ky="0" algn="bl" rotWithShape="0" blurRad="11430" dist="50800" dir="2700000">
+              <a:srgbClr val="A8B6C8">
+                <a:alpha val="14000"/>
               </a:srgbClr>
             </a:outerShdw>
           </a:effectLst>
@@ -16508,38 +17299,57 @@
       </p:sp>
       <p:sp>
         <p:nvSpPr>
-          <p:cNvPr id="4" name="Shape 2"/>
-          <p:cNvSpPr/>
-          <p:nvPr/>
-        </p:nvSpPr>
-        <p:spPr>
-          <a:xfrm>
-            <a:off x="9357055" y="5907024"/>
-            <a:ext cx="2057400" cy="164592"/>
-          </a:xfrm>
-          <a:prstGeom prst="roundRect">
-            <a:avLst>
-              <a:gd name="adj" fmla="val 22222"/>
-            </a:avLst>
-          </a:prstGeom>
-          <a:solidFill>
-            <a:srgbClr val="FFFFFF">
-              <a:alpha val="72000"/>
-            </a:srgbClr>
-          </a:solidFill>
+          <p:cNvPr id="5" name="Shape 3"/>
+          <p:cNvSpPr/>
+          <p:nvPr/>
+        </p:nvSpPr>
+        <p:spPr>
+          <a:xfrm>
+            <a:off x="749808" y="749808"/>
+            <a:ext cx="1353312" cy="0"/>
+          </a:xfrm>
+          <a:prstGeom prst="line">
+            <a:avLst/>
+          </a:prstGeom>
+          <a:noFill/>
+          <a:ln w="12700">
+            <a:solidFill>
+              <a:srgbClr val="5D7FA4">
+                <a:alpha val="84000"/>
+              </a:srgbClr>
+            </a:solidFill>
+            <a:prstDash val="solid"/>
+          </a:ln>
+        </p:spPr>
+      </p:sp>
+      <p:sp>
+        <p:nvSpPr>
+          <p:cNvPr id="6" name="Shape 4"/>
+          <p:cNvSpPr/>
+          <p:nvPr/>
+        </p:nvSpPr>
+        <p:spPr>
+          <a:xfrm>
+            <a:off x="10088575" y="6144768"/>
+            <a:ext cx="1188720" cy="0"/>
+          </a:xfrm>
+          <a:prstGeom prst="line">
+            <a:avLst/>
+          </a:prstGeom>
+          <a:noFill/>
           <a:ln w="12700">
             <a:solidFill>
               <a:srgbClr val="FFFFFF">
-                <a:alpha val="0"/>
-              </a:srgbClr>
-            </a:solidFill>
-            <a:prstDash val="solid"/>
-          </a:ln>
-        </p:spPr>
-      </p:sp>
-      <p:sp>
-        <p:nvSpPr>
-          <p:cNvPr id="5" name="Shape 3"/>
+                <a:alpha val="82000"/>
+              </a:srgbClr>
+            </a:solidFill>
+            <a:prstDash val="solid"/>
+          </a:ln>
+        </p:spPr>
+      </p:sp>
+      <p:sp>
+        <p:nvSpPr>
+          <p:cNvPr id="7" name="Shape 5"/>
           <p:cNvSpPr/>
           <p:nvPr/>
         </p:nvSpPr>
@@ -16566,7 +17376,7 @@
       </p:sp>
       <p:sp>
         <p:nvSpPr>
-          <p:cNvPr id="6" name="Shape 4"/>
+          <p:cNvPr id="8" name="Shape 6"/>
           <p:cNvSpPr/>
           <p:nvPr/>
         </p:nvSpPr>
@@ -16604,7 +17414,7 @@
       </p:sp>
       <p:sp>
         <p:nvSpPr>
-          <p:cNvPr id="7" name="Shape 5"/>
+          <p:cNvPr id="9" name="Shape 7"/>
           <p:cNvSpPr/>
           <p:nvPr/>
         </p:nvSpPr>
@@ -16642,7 +17452,7 @@
       </p:sp>
       <p:sp>
         <p:nvSpPr>
-          <p:cNvPr id="8" name="Shape 6"/>
+          <p:cNvPr id="10" name="Shape 8"/>
           <p:cNvSpPr/>
           <p:nvPr/>
         </p:nvSpPr>
@@ -16673,7 +17483,7 @@
       </p:sp>
       <p:pic>
         <p:nvPicPr>
-          <p:cNvPr id="9" name="Image 0" descr="preencoded.png">    </p:cNvPr>
+          <p:cNvPr id="11" name="Image 0" descr="preencoded.png">    </p:cNvPr>
           <p:cNvPicPr>
             <a:picLocks noChangeAspect="1"/>
           </p:cNvPicPr>
@@ -16703,7 +17513,7 @@
       </p:pic>
       <p:sp>
         <p:nvSpPr>
-          <p:cNvPr id="10" name="Shape 7"/>
+          <p:cNvPr id="12" name="Shape 9"/>
           <p:cNvSpPr/>
           <p:nvPr/>
         </p:nvSpPr>
@@ -16741,7 +17551,7 @@
       </p:sp>
       <p:sp>
         <p:nvSpPr>
-          <p:cNvPr id="11" name="Shape 8"/>
+          <p:cNvPr id="13" name="Shape 10"/>
           <p:cNvSpPr/>
           <p:nvPr/>
         </p:nvSpPr>
@@ -16779,7 +17589,7 @@
       </p:sp>
       <p:sp>
         <p:nvSpPr>
-          <p:cNvPr id="12" name="Shape 9"/>
+          <p:cNvPr id="14" name="Shape 11"/>
           <p:cNvSpPr/>
           <p:nvPr/>
         </p:nvSpPr>
@@ -16810,7 +17620,7 @@
       </p:sp>
       <p:pic>
         <p:nvPicPr>
-          <p:cNvPr id="13" name="Image 1" descr="preencoded.png">    </p:cNvPr>
+          <p:cNvPr id="15" name="Image 1" descr="preencoded.png">    </p:cNvPr>
           <p:cNvPicPr>
             <a:picLocks noChangeAspect="1"/>
           </p:cNvPicPr>
@@ -16840,7 +17650,7 @@
       </p:pic>
       <p:sp>
         <p:nvSpPr>
-          <p:cNvPr id="14" name="Shape 10"/>
+          <p:cNvPr id="16" name="Shape 12"/>
           <p:cNvSpPr/>
           <p:nvPr/>
         </p:nvSpPr>
@@ -16878,7 +17688,7 @@
       </p:sp>
       <p:sp>
         <p:nvSpPr>
-          <p:cNvPr id="15" name="Shape 11"/>
+          <p:cNvPr id="17" name="Shape 13"/>
           <p:cNvSpPr/>
           <p:nvPr/>
         </p:nvSpPr>
@@ -16916,7 +17726,7 @@
       </p:sp>
       <p:sp>
         <p:nvSpPr>
-          <p:cNvPr id="16" name="Shape 12"/>
+          <p:cNvPr id="18" name="Shape 14"/>
           <p:cNvSpPr/>
           <p:nvPr/>
         </p:nvSpPr>
@@ -16947,7 +17757,7 @@
       </p:sp>
       <p:pic>
         <p:nvPicPr>
-          <p:cNvPr id="17" name="Image 2" descr="preencoded.png">    </p:cNvPr>
+          <p:cNvPr id="19" name="Image 2" descr="preencoded.png">    </p:cNvPr>
           <p:cNvPicPr>
             <a:picLocks noChangeAspect="1"/>
           </p:cNvPicPr>
@@ -16977,7 +17787,7 @@
       </p:pic>
       <p:sp>
         <p:nvSpPr>
-          <p:cNvPr id="18" name="Shape 13"/>
+          <p:cNvPr id="20" name="Shape 15"/>
           <p:cNvSpPr/>
           <p:nvPr/>
         </p:nvSpPr>
@@ -17015,7 +17825,7 @@
       </p:sp>
       <p:sp>
         <p:nvSpPr>
-          <p:cNvPr id="19" name="Shape 14"/>
+          <p:cNvPr id="21" name="Shape 16"/>
           <p:cNvSpPr/>
           <p:nvPr/>
         </p:nvSpPr>
@@ -17053,7 +17863,7 @@
       </p:sp>
       <p:sp>
         <p:nvSpPr>
-          <p:cNvPr id="20" name="Shape 15"/>
+          <p:cNvPr id="22" name="Shape 17"/>
           <p:cNvSpPr/>
           <p:nvPr/>
         </p:nvSpPr>
@@ -17084,7 +17894,7 @@
       </p:sp>
       <p:pic>
         <p:nvPicPr>
-          <p:cNvPr id="21" name="Image 3" descr="preencoded.png">    </p:cNvPr>
+          <p:cNvPr id="23" name="Image 3" descr="preencoded.png">    </p:cNvPr>
           <p:cNvPicPr>
             <a:picLocks noChangeAspect="1"/>
           </p:cNvPicPr>
@@ -17114,7 +17924,7 @@
       </p:pic>
       <p:sp>
         <p:nvSpPr>
-          <p:cNvPr id="22" name="Shape 16"/>
+          <p:cNvPr id="24" name="Shape 18"/>
           <p:cNvSpPr/>
           <p:nvPr/>
         </p:nvSpPr>
@@ -17141,7 +17951,7 @@
       </p:sp>
       <p:sp>
         <p:nvSpPr>
-          <p:cNvPr id="23" name="Shape 17"/>
+          <p:cNvPr id="25" name="Shape 19"/>
           <p:cNvSpPr/>
           <p:nvPr/>
         </p:nvSpPr>
@@ -17168,7 +17978,7 @@
       </p:sp>
       <p:sp>
         <p:nvSpPr>
-          <p:cNvPr id="24" name="Shape 18"/>
+          <p:cNvPr id="26" name="Shape 20"/>
           <p:cNvSpPr/>
           <p:nvPr/>
         </p:nvSpPr>
@@ -17195,7 +18005,7 @@
       </p:sp>
       <p:sp>
         <p:nvSpPr>
-          <p:cNvPr id="25" name="Shape 19"/>
+          <p:cNvPr id="27" name="Shape 21"/>
           <p:cNvSpPr/>
           <p:nvPr/>
         </p:nvSpPr>
@@ -17222,7 +18032,7 @@
       </p:sp>
       <p:sp>
         <p:nvSpPr>
-          <p:cNvPr id="26" name="mdpr:overflow-guard-f8d03e:title:__title:overflow-guard-f8d03e"/>
+          <p:cNvPr id="28" name="mdpr:overflow-guard-f8d03e:title:__title:overflow-guard-f8d03e"/>
           <p:cNvSpPr txBox="1"/>
           <p:nvPr/>
         </p:nvSpPr>
@@ -17264,7 +18074,7 @@
       </p:sp>
       <p:sp>
         <p:nvSpPr>
-          <p:cNvPr id="27" name="Shape 21"/>
+          <p:cNvPr id="29" name="Shape 23"/>
           <p:cNvSpPr/>
           <p:nvPr/>
         </p:nvSpPr>
@@ -17291,7 +18101,7 @@
       </p:sp>
       <p:pic>
         <p:nvPicPr>
-          <p:cNvPr id="28" name="Image 4" descr="verified icon from tabler-icons (MIT)">    </p:cNvPr>
+          <p:cNvPr id="30" name="Image 4" descr="verified icon from tabler-icons (MIT)">    </p:cNvPr>
           <p:cNvPicPr>
             <a:picLocks noChangeAspect="1"/>
           </p:cNvPicPr>
@@ -17321,7 +18131,7 @@
       </p:pic>
       <p:sp>
         <p:nvSpPr>
-          <p:cNvPr id="29" name="mdpr:overflow-guard-f8d03e:item-1:block-31"/>
+          <p:cNvPr id="31" name="mdpr:overflow-guard-f8d03e:item-1:block-31"/>
           <p:cNvSpPr txBox="1"/>
           <p:nvPr/>
         </p:nvSpPr>
@@ -17380,7 +18190,7 @@
       </p:sp>
       <p:sp>
         <p:nvSpPr>
-          <p:cNvPr id="30" name="Shape 23"/>
+          <p:cNvPr id="32" name="Shape 25"/>
           <p:cNvSpPr/>
           <p:nvPr/>
         </p:nvSpPr>
@@ -17407,7 +18217,7 @@
       </p:sp>
       <p:pic>
         <p:nvPicPr>
-          <p:cNvPr id="31" name="Image 5" descr="table icon from tabler-icons (MIT)">    </p:cNvPr>
+          <p:cNvPr id="33" name="Image 5" descr="table icon from tabler-icons (MIT)">    </p:cNvPr>
           <p:cNvPicPr>
             <a:picLocks noChangeAspect="1"/>
           </p:cNvPicPr>
@@ -17437,7 +18247,7 @@
       </p:pic>
       <p:sp>
         <p:nvSpPr>
-          <p:cNvPr id="32" name="mdpr:overflow-guard-f8d03e:item-2:block-31"/>
+          <p:cNvPr id="34" name="mdpr:overflow-guard-f8d03e:item-2:block-31"/>
           <p:cNvSpPr txBox="1"/>
           <p:nvPr/>
         </p:nvSpPr>
@@ -17496,7 +18306,7 @@
       </p:sp>
       <p:sp>
         <p:nvSpPr>
-          <p:cNvPr id="33" name="Shape 25"/>
+          <p:cNvPr id="35" name="Shape 27"/>
           <p:cNvSpPr/>
           <p:nvPr/>
         </p:nvSpPr>
@@ -17523,7 +18333,7 @@
       </p:sp>
       <p:pic>
         <p:nvPicPr>
-          <p:cNvPr id="34" name="Image 6" descr="article icon from tabler-icons (MIT)">    </p:cNvPr>
+          <p:cNvPr id="36" name="Image 6" descr="article icon from tabler-icons (MIT)">    </p:cNvPr>
           <p:cNvPicPr>
             <a:picLocks noChangeAspect="1"/>
           </p:cNvPicPr>
@@ -17553,7 +18363,7 @@
       </p:pic>
       <p:sp>
         <p:nvSpPr>
-          <p:cNvPr id="35" name="mdpr:overflow-guard-f8d03e:item-3:block-31"/>
+          <p:cNvPr id="37" name="mdpr:overflow-guard-f8d03e:item-3:block-31"/>
           <p:cNvSpPr txBox="1"/>
           <p:nvPr/>
         </p:nvSpPr>
@@ -17612,7 +18422,7 @@
       </p:sp>
       <p:sp>
         <p:nvSpPr>
-          <p:cNvPr id="36" name="Shape 27"/>
+          <p:cNvPr id="38" name="Shape 29"/>
           <p:cNvSpPr/>
           <p:nvPr/>
         </p:nvSpPr>
@@ -17639,7 +18449,7 @@
       </p:sp>
       <p:pic>
         <p:nvPicPr>
-          <p:cNvPr id="37" name="Image 7" descr="article icon from tabler-icons (MIT)">    </p:cNvPr>
+          <p:cNvPr id="39" name="Image 7" descr="article icon from tabler-icons (MIT)">    </p:cNvPr>
           <p:cNvPicPr>
             <a:picLocks noChangeAspect="1"/>
           </p:cNvPicPr>
@@ -17669,7 +18479,7 @@
       </p:pic>
       <p:sp>
         <p:nvSpPr>
-          <p:cNvPr id="38" name="mdpr:overflow-guard-f8d03e:item-4:block-31"/>
+          <p:cNvPr id="40" name="mdpr:overflow-guard-f8d03e:item-4:block-31"/>
           <p:cNvSpPr txBox="1"/>
           <p:nvPr/>
         </p:nvSpPr>
@@ -17766,29 +18576,31 @@
         </p:nvSpPr>
         <p:spPr>
           <a:xfrm>
-            <a:off x="10362895" y="502920"/>
-            <a:ext cx="822960" cy="822960"/>
-          </a:xfrm>
-          <a:prstGeom prst="ellipse">
-            <a:avLst/>
-          </a:prstGeom>
-          <a:solidFill>
-            <a:srgbClr val="F7FAFC">
-              <a:alpha val="92000"/>
+            <a:off x="493776" y="5852160"/>
+            <a:ext cx="11204143" cy="420624"/>
+          </a:xfrm>
+          <a:prstGeom prst="roundRect">
+            <a:avLst>
+              <a:gd name="adj" fmla="val 17391"/>
+            </a:avLst>
+          </a:prstGeom>
+          <a:solidFill>
+            <a:srgbClr val="DDE8F2">
+              <a:alpha val="62000"/>
             </a:srgbClr>
           </a:solidFill>
           <a:ln w="12700">
             <a:solidFill>
               <a:srgbClr val="FFFFFF">
-                <a:alpha val="0"/>
+                <a:alpha val="32000"/>
               </a:srgbClr>
             </a:solidFill>
             <a:prstDash val="solid"/>
           </a:ln>
           <a:effectLst>
-            <a:outerShdw sx="100000" sy="100000" kx="0" ky="0" algn="bl" rotWithShape="0" blurRad="15240" dist="50800" dir="2700000">
-              <a:srgbClr val="C7D0DE">
-                <a:alpha val="22000"/>
+            <a:outerShdw sx="100000" sy="100000" kx="0" ky="0" algn="bl" rotWithShape="0" blurRad="8890" dist="50800" dir="2700000">
+              <a:srgbClr val="A8B6C8">
+                <a:alpha val="8000"/>
               </a:srgbClr>
             </a:outerShdw>
           </a:effectLst>
@@ -17802,27 +18614,60 @@
         </p:nvSpPr>
         <p:spPr>
           <a:xfrm>
-            <a:off x="530352" y="5687568"/>
-            <a:ext cx="658368" cy="658368"/>
+            <a:off x="749808" y="5980176"/>
+            <a:ext cx="2103120" cy="146304"/>
+          </a:xfrm>
+          <a:prstGeom prst="roundRect">
+            <a:avLst>
+              <a:gd name="adj" fmla="val 25000"/>
+            </a:avLst>
+          </a:prstGeom>
+          <a:solidFill>
+            <a:srgbClr val="5D7FA4">
+              <a:alpha val="44000"/>
+            </a:srgbClr>
+          </a:solidFill>
+          <a:ln w="12700">
+            <a:solidFill>
+              <a:srgbClr val="5D7FA4">
+                <a:alpha val="0"/>
+              </a:srgbClr>
+            </a:solidFill>
+            <a:prstDash val="solid"/>
+          </a:ln>
+        </p:spPr>
+      </p:sp>
+      <p:sp>
+        <p:nvSpPr>
+          <p:cNvPr id="4" name="Shape 2"/>
+          <p:cNvSpPr/>
+          <p:nvPr/>
+        </p:nvSpPr>
+        <p:spPr>
+          <a:xfrm>
+            <a:off x="10710367" y="512064"/>
+            <a:ext cx="493776" cy="493776"/>
           </a:xfrm>
           <a:prstGeom prst="ellipse">
             <a:avLst/>
           </a:prstGeom>
           <a:solidFill>
-            <a:srgbClr val="EEF3F8"/>
-          </a:solidFill>
-          <a:ln w="12700">
-            <a:solidFill>
-              <a:srgbClr val="FFFFFF">
-                <a:alpha val="42000"/>
+            <a:srgbClr val="FFFFFF">
+              <a:alpha val="88000"/>
+            </a:srgbClr>
+          </a:solidFill>
+          <a:ln w="12700">
+            <a:solidFill>
+              <a:srgbClr val="CBD7E4">
+                <a:alpha val="50000"/>
               </a:srgbClr>
             </a:solidFill>
             <a:prstDash val="solid"/>
           </a:ln>
           <a:effectLst>
-            <a:outerShdw sx="100000" sy="100000" kx="0" ky="0" algn="bl" rotWithShape="0" blurRad="12700" dist="50800" dir="2700000">
-              <a:srgbClr val="B8C3D2">
-                <a:alpha val="18000"/>
+            <a:outerShdw sx="100000" sy="100000" kx="0" ky="0" algn="bl" rotWithShape="0" blurRad="11430" dist="50800" dir="2700000">
+              <a:srgbClr val="A8B6C8">
+                <a:alpha val="14000"/>
               </a:srgbClr>
             </a:outerShdw>
           </a:effectLst>
@@ -17830,38 +18675,57 @@
       </p:sp>
       <p:sp>
         <p:nvSpPr>
-          <p:cNvPr id="4" name="Shape 2"/>
-          <p:cNvSpPr/>
-          <p:nvPr/>
-        </p:nvSpPr>
-        <p:spPr>
-          <a:xfrm>
-            <a:off x="9357055" y="5907024"/>
-            <a:ext cx="2057400" cy="164592"/>
-          </a:xfrm>
-          <a:prstGeom prst="roundRect">
-            <a:avLst>
-              <a:gd name="adj" fmla="val 22222"/>
-            </a:avLst>
-          </a:prstGeom>
-          <a:solidFill>
-            <a:srgbClr val="FFFFFF">
-              <a:alpha val="72000"/>
-            </a:srgbClr>
-          </a:solidFill>
+          <p:cNvPr id="5" name="Shape 3"/>
+          <p:cNvSpPr/>
+          <p:nvPr/>
+        </p:nvSpPr>
+        <p:spPr>
+          <a:xfrm>
+            <a:off x="749808" y="749808"/>
+            <a:ext cx="1353312" cy="0"/>
+          </a:xfrm>
+          <a:prstGeom prst="line">
+            <a:avLst/>
+          </a:prstGeom>
+          <a:noFill/>
+          <a:ln w="12700">
+            <a:solidFill>
+              <a:srgbClr val="5D7FA4">
+                <a:alpha val="84000"/>
+              </a:srgbClr>
+            </a:solidFill>
+            <a:prstDash val="solid"/>
+          </a:ln>
+        </p:spPr>
+      </p:sp>
+      <p:sp>
+        <p:nvSpPr>
+          <p:cNvPr id="6" name="Shape 4"/>
+          <p:cNvSpPr/>
+          <p:nvPr/>
+        </p:nvSpPr>
+        <p:spPr>
+          <a:xfrm>
+            <a:off x="10088575" y="6144768"/>
+            <a:ext cx="1188720" cy="0"/>
+          </a:xfrm>
+          <a:prstGeom prst="line">
+            <a:avLst/>
+          </a:prstGeom>
+          <a:noFill/>
           <a:ln w="12700">
             <a:solidFill>
               <a:srgbClr val="FFFFFF">
-                <a:alpha val="0"/>
-              </a:srgbClr>
-            </a:solidFill>
-            <a:prstDash val="solid"/>
-          </a:ln>
-        </p:spPr>
-      </p:sp>
-      <p:sp>
-        <p:nvSpPr>
-          <p:cNvPr id="5" name="Shape 3"/>
+                <a:alpha val="82000"/>
+              </a:srgbClr>
+            </a:solidFill>
+            <a:prstDash val="solid"/>
+          </a:ln>
+        </p:spPr>
+      </p:sp>
+      <p:sp>
+        <p:nvSpPr>
+          <p:cNvPr id="7" name="Shape 5"/>
           <p:cNvSpPr/>
           <p:nvPr/>
         </p:nvSpPr>
@@ -17888,7 +18752,7 @@
       </p:sp>
       <p:sp>
         <p:nvSpPr>
-          <p:cNvPr id="6" name="Shape 4"/>
+          <p:cNvPr id="8" name="Shape 6"/>
           <p:cNvSpPr/>
           <p:nvPr/>
         </p:nvSpPr>
@@ -17926,7 +18790,7 @@
       </p:sp>
       <p:sp>
         <p:nvSpPr>
-          <p:cNvPr id="7" name="Shape 5"/>
+          <p:cNvPr id="9" name="Shape 7"/>
           <p:cNvSpPr/>
           <p:nvPr/>
         </p:nvSpPr>
@@ -17964,7 +18828,7 @@
       </p:sp>
       <p:sp>
         <p:nvSpPr>
-          <p:cNvPr id="8" name="Shape 6"/>
+          <p:cNvPr id="10" name="Shape 8"/>
           <p:cNvSpPr/>
           <p:nvPr/>
         </p:nvSpPr>
@@ -17995,7 +18859,7 @@
       </p:sp>
       <p:pic>
         <p:nvPicPr>
-          <p:cNvPr id="9" name="Image 0" descr="preencoded.png">    </p:cNvPr>
+          <p:cNvPr id="11" name="Image 0" descr="preencoded.png">    </p:cNvPr>
           <p:cNvPicPr>
             <a:picLocks noChangeAspect="1"/>
           </p:cNvPicPr>
@@ -18025,7 +18889,7 @@
       </p:pic>
       <p:sp>
         <p:nvSpPr>
-          <p:cNvPr id="10" name="Shape 7"/>
+          <p:cNvPr id="12" name="Shape 9"/>
           <p:cNvSpPr/>
           <p:nvPr/>
         </p:nvSpPr>
@@ -18052,7 +18916,7 @@
       </p:sp>
       <p:sp>
         <p:nvSpPr>
-          <p:cNvPr id="11" name="mdpr:image-safe-frame-d4d6a4:title:__title:image-safe-frame-d4d6a4"/>
+          <p:cNvPr id="13" name="mdpr:image-safe-frame-d4d6a4:title:__title:image-safe-frame-d4d6a4"/>
           <p:cNvSpPr txBox="1"/>
           <p:nvPr/>
         </p:nvSpPr>
@@ -18094,7 +18958,7 @@
       </p:sp>
       <p:sp>
         <p:nvSpPr>
-          <p:cNvPr id="12" name="mdpr:image-safe-frame-d4d6a4:body:block-33-block-33-block-33"/>
+          <p:cNvPr id="14" name="mdpr:image-safe-frame-d4d6a4:body:block-33-block-33-block-33"/>
           <p:cNvSpPr txBox="1"/>
           <p:nvPr/>
         </p:nvSpPr>
@@ -18233,7 +19097,7 @@
       </p:sp>
       <p:pic>
         <p:nvPicPr>
-          <p:cNvPr id="13" name="mdpr:image-safe-frame-d4d6a4:image-1:block-34" descr="{&quot;mdpr&quot;:{&quot;slideId&quot;:&quot;image-safe-frame-d4d6a4&quot;,&quot;layoutSlideId&quot;:&quot;layout-image-safe-frame-d4d6a4&quot;,&quot;regionId&quot;:&quot;image-1&quot;,&quot;blockIds&quot;:[&quot;block-34&quot;],&quot;objectKind&quot;:&quot;native-image&quot;,&quot;role&quot;:&quot;image&quot;,&quot;editable&quot;:false}}">    </p:cNvPr>
+          <p:cNvPr id="15" name="mdpr:image-safe-frame-d4d6a4:image-1:block-34" descr="{&quot;mdpr&quot;:{&quot;slideId&quot;:&quot;image-safe-frame-d4d6a4&quot;,&quot;layoutSlideId&quot;:&quot;layout-image-safe-frame-d4d6a4&quot;,&quot;regionId&quot;:&quot;image-1&quot;,&quot;blockIds&quot;:[&quot;block-34&quot;],&quot;objectKind&quot;:&quot;native-image&quot;,&quot;role&quot;:&quot;image&quot;,&quot;editable&quot;:false}}">    </p:cNvPr>
           <p:cNvPicPr>
             <a:picLocks noChangeAspect="1"/>
           </p:cNvPicPr>
@@ -18301,29 +19165,31 @@
         </p:nvSpPr>
         <p:spPr>
           <a:xfrm>
-            <a:off x="10362895" y="502920"/>
-            <a:ext cx="822960" cy="822960"/>
-          </a:xfrm>
-          <a:prstGeom prst="ellipse">
-            <a:avLst/>
-          </a:prstGeom>
-          <a:solidFill>
-            <a:srgbClr val="F7FAFC">
-              <a:alpha val="92000"/>
+            <a:off x="493776" y="5852160"/>
+            <a:ext cx="11204143" cy="420624"/>
+          </a:xfrm>
+          <a:prstGeom prst="roundRect">
+            <a:avLst>
+              <a:gd name="adj" fmla="val 17391"/>
+            </a:avLst>
+          </a:prstGeom>
+          <a:solidFill>
+            <a:srgbClr val="DDE8F2">
+              <a:alpha val="62000"/>
             </a:srgbClr>
           </a:solidFill>
           <a:ln w="12700">
             <a:solidFill>
               <a:srgbClr val="FFFFFF">
-                <a:alpha val="0"/>
+                <a:alpha val="32000"/>
               </a:srgbClr>
             </a:solidFill>
             <a:prstDash val="solid"/>
           </a:ln>
           <a:effectLst>
-            <a:outerShdw sx="100000" sy="100000" kx="0" ky="0" algn="bl" rotWithShape="0" blurRad="15240" dist="50800" dir="2700000">
-              <a:srgbClr val="C7D0DE">
-                <a:alpha val="22000"/>
+            <a:outerShdw sx="100000" sy="100000" kx="0" ky="0" algn="bl" rotWithShape="0" blurRad="8890" dist="50800" dir="2700000">
+              <a:srgbClr val="A8B6C8">
+                <a:alpha val="8000"/>
               </a:srgbClr>
             </a:outerShdw>
           </a:effectLst>
@@ -18337,27 +19203,60 @@
         </p:nvSpPr>
         <p:spPr>
           <a:xfrm>
-            <a:off x="530352" y="5687568"/>
-            <a:ext cx="658368" cy="658368"/>
+            <a:off x="749808" y="5980176"/>
+            <a:ext cx="2103120" cy="146304"/>
+          </a:xfrm>
+          <a:prstGeom prst="roundRect">
+            <a:avLst>
+              <a:gd name="adj" fmla="val 25000"/>
+            </a:avLst>
+          </a:prstGeom>
+          <a:solidFill>
+            <a:srgbClr val="5D7FA4">
+              <a:alpha val="44000"/>
+            </a:srgbClr>
+          </a:solidFill>
+          <a:ln w="12700">
+            <a:solidFill>
+              <a:srgbClr val="5D7FA4">
+                <a:alpha val="0"/>
+              </a:srgbClr>
+            </a:solidFill>
+            <a:prstDash val="solid"/>
+          </a:ln>
+        </p:spPr>
+      </p:sp>
+      <p:sp>
+        <p:nvSpPr>
+          <p:cNvPr id="4" name="Shape 2"/>
+          <p:cNvSpPr/>
+          <p:nvPr/>
+        </p:nvSpPr>
+        <p:spPr>
+          <a:xfrm>
+            <a:off x="10710367" y="512064"/>
+            <a:ext cx="493776" cy="493776"/>
           </a:xfrm>
           <a:prstGeom prst="ellipse">
             <a:avLst/>
           </a:prstGeom>
           <a:solidFill>
-            <a:srgbClr val="EEF3F8"/>
-          </a:solidFill>
-          <a:ln w="12700">
-            <a:solidFill>
-              <a:srgbClr val="FFFFFF">
-                <a:alpha val="42000"/>
+            <a:srgbClr val="FFFFFF">
+              <a:alpha val="88000"/>
+            </a:srgbClr>
+          </a:solidFill>
+          <a:ln w="12700">
+            <a:solidFill>
+              <a:srgbClr val="CBD7E4">
+                <a:alpha val="50000"/>
               </a:srgbClr>
             </a:solidFill>
             <a:prstDash val="solid"/>
           </a:ln>
           <a:effectLst>
-            <a:outerShdw sx="100000" sy="100000" kx="0" ky="0" algn="bl" rotWithShape="0" blurRad="12700" dist="50800" dir="2700000">
-              <a:srgbClr val="B8C3D2">
-                <a:alpha val="18000"/>
+            <a:outerShdw sx="100000" sy="100000" kx="0" ky="0" algn="bl" rotWithShape="0" blurRad="11430" dist="50800" dir="2700000">
+              <a:srgbClr val="A8B6C8">
+                <a:alpha val="14000"/>
               </a:srgbClr>
             </a:outerShdw>
           </a:effectLst>
@@ -18365,38 +19264,57 @@
       </p:sp>
       <p:sp>
         <p:nvSpPr>
-          <p:cNvPr id="4" name="Shape 2"/>
-          <p:cNvSpPr/>
-          <p:nvPr/>
-        </p:nvSpPr>
-        <p:spPr>
-          <a:xfrm>
-            <a:off x="9357055" y="5907024"/>
-            <a:ext cx="2057400" cy="164592"/>
-          </a:xfrm>
-          <a:prstGeom prst="roundRect">
-            <a:avLst>
-              <a:gd name="adj" fmla="val 22222"/>
-            </a:avLst>
-          </a:prstGeom>
-          <a:solidFill>
-            <a:srgbClr val="FFFFFF">
-              <a:alpha val="72000"/>
-            </a:srgbClr>
-          </a:solidFill>
+          <p:cNvPr id="5" name="Shape 3"/>
+          <p:cNvSpPr/>
+          <p:nvPr/>
+        </p:nvSpPr>
+        <p:spPr>
+          <a:xfrm>
+            <a:off x="749808" y="749808"/>
+            <a:ext cx="1353312" cy="0"/>
+          </a:xfrm>
+          <a:prstGeom prst="line">
+            <a:avLst/>
+          </a:prstGeom>
+          <a:noFill/>
+          <a:ln w="12700">
+            <a:solidFill>
+              <a:srgbClr val="5D7FA4">
+                <a:alpha val="84000"/>
+              </a:srgbClr>
+            </a:solidFill>
+            <a:prstDash val="solid"/>
+          </a:ln>
+        </p:spPr>
+      </p:sp>
+      <p:sp>
+        <p:nvSpPr>
+          <p:cNvPr id="6" name="Shape 4"/>
+          <p:cNvSpPr/>
+          <p:nvPr/>
+        </p:nvSpPr>
+        <p:spPr>
+          <a:xfrm>
+            <a:off x="10088575" y="6144768"/>
+            <a:ext cx="1188720" cy="0"/>
+          </a:xfrm>
+          <a:prstGeom prst="line">
+            <a:avLst/>
+          </a:prstGeom>
+          <a:noFill/>
           <a:ln w="12700">
             <a:solidFill>
               <a:srgbClr val="FFFFFF">
-                <a:alpha val="0"/>
-              </a:srgbClr>
-            </a:solidFill>
-            <a:prstDash val="solid"/>
-          </a:ln>
-        </p:spPr>
-      </p:sp>
-      <p:sp>
-        <p:nvSpPr>
-          <p:cNvPr id="5" name="Shape 3"/>
+                <a:alpha val="82000"/>
+              </a:srgbClr>
+            </a:solidFill>
+            <a:prstDash val="solid"/>
+          </a:ln>
+        </p:spPr>
+      </p:sp>
+      <p:sp>
+        <p:nvSpPr>
+          <p:cNvPr id="7" name="Shape 5"/>
           <p:cNvSpPr/>
           <p:nvPr/>
         </p:nvSpPr>
@@ -18423,7 +19341,7 @@
       </p:sp>
       <p:sp>
         <p:nvSpPr>
-          <p:cNvPr id="6" name="Shape 4"/>
+          <p:cNvPr id="8" name="Shape 6"/>
           <p:cNvSpPr/>
           <p:nvPr/>
         </p:nvSpPr>
@@ -18461,7 +19379,7 @@
       </p:sp>
       <p:sp>
         <p:nvSpPr>
-          <p:cNvPr id="7" name="Shape 5"/>
+          <p:cNvPr id="9" name="Shape 7"/>
           <p:cNvSpPr/>
           <p:nvPr/>
         </p:nvSpPr>
@@ -18499,7 +19417,7 @@
       </p:sp>
       <p:sp>
         <p:nvSpPr>
-          <p:cNvPr id="8" name="Shape 6"/>
+          <p:cNvPr id="10" name="Shape 8"/>
           <p:cNvSpPr/>
           <p:nvPr/>
         </p:nvSpPr>
@@ -18530,7 +19448,7 @@
       </p:sp>
       <p:pic>
         <p:nvPicPr>
-          <p:cNvPr id="9" name="Image 0" descr="preencoded.png">    </p:cNvPr>
+          <p:cNvPr id="11" name="Image 0" descr="preencoded.png">    </p:cNvPr>
           <p:cNvPicPr>
             <a:picLocks noChangeAspect="1"/>
           </p:cNvPicPr>
@@ -18560,7 +19478,7 @@
       </p:pic>
       <p:sp>
         <p:nvSpPr>
-          <p:cNvPr id="10" name="Shape 7"/>
+          <p:cNvPr id="12" name="Shape 9"/>
           <p:cNvSpPr/>
           <p:nvPr/>
         </p:nvSpPr>
@@ -18598,7 +19516,7 @@
       </p:sp>
       <p:sp>
         <p:nvSpPr>
-          <p:cNvPr id="11" name="Shape 8"/>
+          <p:cNvPr id="13" name="Shape 10"/>
           <p:cNvSpPr/>
           <p:nvPr/>
         </p:nvSpPr>
@@ -18636,7 +19554,7 @@
       </p:sp>
       <p:sp>
         <p:nvSpPr>
-          <p:cNvPr id="12" name="Shape 9"/>
+          <p:cNvPr id="14" name="Shape 11"/>
           <p:cNvSpPr/>
           <p:nvPr/>
         </p:nvSpPr>
@@ -18667,7 +19585,7 @@
       </p:sp>
       <p:pic>
         <p:nvPicPr>
-          <p:cNvPr id="13" name="Image 1" descr="preencoded.png">    </p:cNvPr>
+          <p:cNvPr id="15" name="Image 1" descr="preencoded.png">    </p:cNvPr>
           <p:cNvPicPr>
             <a:picLocks noChangeAspect="1"/>
           </p:cNvPicPr>
@@ -18697,7 +19615,7 @@
       </p:pic>
       <p:sp>
         <p:nvSpPr>
-          <p:cNvPr id="14" name="Shape 10"/>
+          <p:cNvPr id="16" name="Shape 12"/>
           <p:cNvSpPr/>
           <p:nvPr/>
         </p:nvSpPr>
@@ -18735,7 +19653,7 @@
       </p:sp>
       <p:sp>
         <p:nvSpPr>
-          <p:cNvPr id="15" name="Shape 11"/>
+          <p:cNvPr id="17" name="Shape 13"/>
           <p:cNvSpPr/>
           <p:nvPr/>
         </p:nvSpPr>
@@ -18773,7 +19691,7 @@
       </p:sp>
       <p:sp>
         <p:nvSpPr>
-          <p:cNvPr id="16" name="Shape 12"/>
+          <p:cNvPr id="18" name="Shape 14"/>
           <p:cNvSpPr/>
           <p:nvPr/>
         </p:nvSpPr>
@@ -18804,7 +19722,7 @@
       </p:sp>
       <p:pic>
         <p:nvPicPr>
-          <p:cNvPr id="17" name="Image 2" descr="preencoded.png">    </p:cNvPr>
+          <p:cNvPr id="19" name="Image 2" descr="preencoded.png">    </p:cNvPr>
           <p:cNvPicPr>
             <a:picLocks noChangeAspect="1"/>
           </p:cNvPicPr>
@@ -18834,7 +19752,7 @@
       </p:pic>
       <p:sp>
         <p:nvSpPr>
-          <p:cNvPr id="18" name="Shape 13"/>
+          <p:cNvPr id="20" name="Shape 15"/>
           <p:cNvSpPr/>
           <p:nvPr/>
         </p:nvSpPr>
@@ -18861,7 +19779,7 @@
       </p:sp>
       <p:sp>
         <p:nvSpPr>
-          <p:cNvPr id="19" name="mdpr:mixed-object-packing-438299:title:__title:mixed-object-packing-438299"/>
+          <p:cNvPr id="21" name="mdpr:mixed-object-packing-438299:title:__title:mixed-object-packing-438299"/>
           <p:cNvSpPr txBox="1"/>
           <p:nvPr/>
         </p:nvSpPr>
@@ -18903,7 +19821,7 @@
       </p:sp>
       <p:graphicFrame>
         <p:nvGraphicFramePr>
-          <p:cNvPr id="20" name="Chart 0" descr=""/>
+          <p:cNvPr id="22" name="Chart 0" descr=""/>
           <p:cNvGraphicFramePr/>
           <p:nvPr/>
         </p:nvGraphicFramePr>
@@ -19361,7 +20279,7 @@
       </p:graphicFrame>
       <p:sp>
         <p:nvSpPr>
-          <p:cNvPr id="22" name="mdpr:mixed-object-packing-438299:body:block-36"/>
+          <p:cNvPr id="24" name="mdpr:mixed-object-packing-438299:body:block-36"/>
           <p:cNvSpPr txBox="1"/>
           <p:nvPr/>
         </p:nvSpPr>
@@ -19460,7 +20378,7 @@
       </p:sp>
       <p:pic>
         <p:nvPicPr>
-          <p:cNvPr id="23" name="mdpr:mixed-object-packing-438299:image-1:block-39" descr="{&quot;mdpr&quot;:{&quot;slideId&quot;:&quot;mixed-object-packing-438299&quot;,&quot;layoutSlideId&quot;:&quot;layout-mixed-object-packing-438299&quot;,&quot;regionId&quot;:&quot;image-1&quot;,&quot;blockIds&quot;:[&quot;block-39&quot;],&quot;objectKind&quot;:&quot;native-image&quot;,&quot;role&quot;:&quot;image&quot;,&quot;editable&quot;:false}}">    </p:cNvPr>
+          <p:cNvPr id="25" name="mdpr:mixed-object-packing-438299:image-1:block-39" descr="{&quot;mdpr&quot;:{&quot;slideId&quot;:&quot;mixed-object-packing-438299&quot;,&quot;layoutSlideId&quot;:&quot;layout-mixed-object-packing-438299&quot;,&quot;regionId&quot;:&quot;image-1&quot;,&quot;blockIds&quot;:[&quot;block-39&quot;],&quot;objectKind&quot;:&quot;native-image&quot;,&quot;role&quot;:&quot;image&quot;,&quot;editable&quot;:false}}">    </p:cNvPr>
           <p:cNvPicPr>
             <a:picLocks noChangeAspect="1"/>
           </p:cNvPicPr>
@@ -19528,29 +20446,31 @@
         </p:nvSpPr>
         <p:spPr>
           <a:xfrm>
-            <a:off x="10362895" y="502920"/>
-            <a:ext cx="822960" cy="822960"/>
-          </a:xfrm>
-          <a:prstGeom prst="ellipse">
-            <a:avLst/>
-          </a:prstGeom>
-          <a:solidFill>
-            <a:srgbClr val="F7FAFC">
-              <a:alpha val="92000"/>
+            <a:off x="493776" y="5852160"/>
+            <a:ext cx="11204143" cy="420624"/>
+          </a:xfrm>
+          <a:prstGeom prst="roundRect">
+            <a:avLst>
+              <a:gd name="adj" fmla="val 17391"/>
+            </a:avLst>
+          </a:prstGeom>
+          <a:solidFill>
+            <a:srgbClr val="DDE8F2">
+              <a:alpha val="62000"/>
             </a:srgbClr>
           </a:solidFill>
           <a:ln w="12700">
             <a:solidFill>
               <a:srgbClr val="FFFFFF">
-                <a:alpha val="0"/>
+                <a:alpha val="32000"/>
               </a:srgbClr>
             </a:solidFill>
             <a:prstDash val="solid"/>
           </a:ln>
           <a:effectLst>
-            <a:outerShdw sx="100000" sy="100000" kx="0" ky="0" algn="bl" rotWithShape="0" blurRad="15240" dist="50800" dir="2700000">
-              <a:srgbClr val="C7D0DE">
-                <a:alpha val="22000"/>
+            <a:outerShdw sx="100000" sy="100000" kx="0" ky="0" algn="bl" rotWithShape="0" blurRad="8890" dist="50800" dir="2700000">
+              <a:srgbClr val="A8B6C8">
+                <a:alpha val="8000"/>
               </a:srgbClr>
             </a:outerShdw>
           </a:effectLst>
@@ -19564,27 +20484,60 @@
         </p:nvSpPr>
         <p:spPr>
           <a:xfrm>
-            <a:off x="530352" y="5687568"/>
-            <a:ext cx="658368" cy="658368"/>
+            <a:off x="749808" y="5980176"/>
+            <a:ext cx="2103120" cy="146304"/>
+          </a:xfrm>
+          <a:prstGeom prst="roundRect">
+            <a:avLst>
+              <a:gd name="adj" fmla="val 25000"/>
+            </a:avLst>
+          </a:prstGeom>
+          <a:solidFill>
+            <a:srgbClr val="5D7FA4">
+              <a:alpha val="44000"/>
+            </a:srgbClr>
+          </a:solidFill>
+          <a:ln w="12700">
+            <a:solidFill>
+              <a:srgbClr val="5D7FA4">
+                <a:alpha val="0"/>
+              </a:srgbClr>
+            </a:solidFill>
+            <a:prstDash val="solid"/>
+          </a:ln>
+        </p:spPr>
+      </p:sp>
+      <p:sp>
+        <p:nvSpPr>
+          <p:cNvPr id="4" name="Shape 2"/>
+          <p:cNvSpPr/>
+          <p:nvPr/>
+        </p:nvSpPr>
+        <p:spPr>
+          <a:xfrm>
+            <a:off x="10710367" y="512064"/>
+            <a:ext cx="493776" cy="493776"/>
           </a:xfrm>
           <a:prstGeom prst="ellipse">
             <a:avLst/>
           </a:prstGeom>
           <a:solidFill>
-            <a:srgbClr val="EEF3F8"/>
-          </a:solidFill>
-          <a:ln w="12700">
-            <a:solidFill>
-              <a:srgbClr val="FFFFFF">
-                <a:alpha val="42000"/>
+            <a:srgbClr val="FFFFFF">
+              <a:alpha val="88000"/>
+            </a:srgbClr>
+          </a:solidFill>
+          <a:ln w="12700">
+            <a:solidFill>
+              <a:srgbClr val="CBD7E4">
+                <a:alpha val="50000"/>
               </a:srgbClr>
             </a:solidFill>
             <a:prstDash val="solid"/>
           </a:ln>
           <a:effectLst>
-            <a:outerShdw sx="100000" sy="100000" kx="0" ky="0" algn="bl" rotWithShape="0" blurRad="12700" dist="50800" dir="2700000">
-              <a:srgbClr val="B8C3D2">
-                <a:alpha val="18000"/>
+            <a:outerShdw sx="100000" sy="100000" kx="0" ky="0" algn="bl" rotWithShape="0" blurRad="11430" dist="50800" dir="2700000">
+              <a:srgbClr val="A8B6C8">
+                <a:alpha val="14000"/>
               </a:srgbClr>
             </a:outerShdw>
           </a:effectLst>
@@ -19592,38 +20545,57 @@
       </p:sp>
       <p:sp>
         <p:nvSpPr>
-          <p:cNvPr id="4" name="Shape 2"/>
-          <p:cNvSpPr/>
-          <p:nvPr/>
-        </p:nvSpPr>
-        <p:spPr>
-          <a:xfrm>
-            <a:off x="9357055" y="5907024"/>
-            <a:ext cx="2057400" cy="164592"/>
-          </a:xfrm>
-          <a:prstGeom prst="roundRect">
-            <a:avLst>
-              <a:gd name="adj" fmla="val 22222"/>
-            </a:avLst>
-          </a:prstGeom>
-          <a:solidFill>
-            <a:srgbClr val="FFFFFF">
-              <a:alpha val="72000"/>
-            </a:srgbClr>
-          </a:solidFill>
+          <p:cNvPr id="5" name="Shape 3"/>
+          <p:cNvSpPr/>
+          <p:nvPr/>
+        </p:nvSpPr>
+        <p:spPr>
+          <a:xfrm>
+            <a:off x="749808" y="749808"/>
+            <a:ext cx="1353312" cy="0"/>
+          </a:xfrm>
+          <a:prstGeom prst="line">
+            <a:avLst/>
+          </a:prstGeom>
+          <a:noFill/>
+          <a:ln w="12700">
+            <a:solidFill>
+              <a:srgbClr val="5D7FA4">
+                <a:alpha val="84000"/>
+              </a:srgbClr>
+            </a:solidFill>
+            <a:prstDash val="solid"/>
+          </a:ln>
+        </p:spPr>
+      </p:sp>
+      <p:sp>
+        <p:nvSpPr>
+          <p:cNvPr id="6" name="Shape 4"/>
+          <p:cNvSpPr/>
+          <p:nvPr/>
+        </p:nvSpPr>
+        <p:spPr>
+          <a:xfrm>
+            <a:off x="10088575" y="6144768"/>
+            <a:ext cx="1188720" cy="0"/>
+          </a:xfrm>
+          <a:prstGeom prst="line">
+            <a:avLst/>
+          </a:prstGeom>
+          <a:noFill/>
           <a:ln w="12700">
             <a:solidFill>
               <a:srgbClr val="FFFFFF">
-                <a:alpha val="0"/>
-              </a:srgbClr>
-            </a:solidFill>
-            <a:prstDash val="solid"/>
-          </a:ln>
-        </p:spPr>
-      </p:sp>
-      <p:sp>
-        <p:nvSpPr>
-          <p:cNvPr id="5" name="Shape 3"/>
+                <a:alpha val="82000"/>
+              </a:srgbClr>
+            </a:solidFill>
+            <a:prstDash val="solid"/>
+          </a:ln>
+        </p:spPr>
+      </p:sp>
+      <p:sp>
+        <p:nvSpPr>
+          <p:cNvPr id="7" name="Shape 5"/>
           <p:cNvSpPr/>
           <p:nvPr/>
         </p:nvSpPr>
@@ -19650,7 +20622,7 @@
       </p:sp>
       <p:sp>
         <p:nvSpPr>
-          <p:cNvPr id="6" name="Shape 4"/>
+          <p:cNvPr id="8" name="Shape 6"/>
           <p:cNvSpPr/>
           <p:nvPr/>
         </p:nvSpPr>
@@ -19688,7 +20660,7 @@
       </p:sp>
       <p:sp>
         <p:nvSpPr>
-          <p:cNvPr id="7" name="Shape 5"/>
+          <p:cNvPr id="9" name="Shape 7"/>
           <p:cNvSpPr/>
           <p:nvPr/>
         </p:nvSpPr>
@@ -19726,7 +20698,7 @@
       </p:sp>
       <p:sp>
         <p:nvSpPr>
-          <p:cNvPr id="8" name="Shape 6"/>
+          <p:cNvPr id="10" name="Shape 8"/>
           <p:cNvSpPr/>
           <p:nvPr/>
         </p:nvSpPr>
@@ -19757,7 +20729,7 @@
       </p:sp>
       <p:pic>
         <p:nvPicPr>
-          <p:cNvPr id="9" name="Image 0" descr="preencoded.png">    </p:cNvPr>
+          <p:cNvPr id="11" name="Image 0" descr="preencoded.png">    </p:cNvPr>
           <p:cNvPicPr>
             <a:picLocks noChangeAspect="1"/>
           </p:cNvPicPr>
@@ -19787,7 +20759,7 @@
       </p:pic>
       <p:sp>
         <p:nvSpPr>
-          <p:cNvPr id="10" name="Shape 7"/>
+          <p:cNvPr id="12" name="Shape 9"/>
           <p:cNvSpPr/>
           <p:nvPr/>
         </p:nvSpPr>
@@ -19825,7 +20797,7 @@
       </p:sp>
       <p:sp>
         <p:nvSpPr>
-          <p:cNvPr id="11" name="Shape 8"/>
+          <p:cNvPr id="13" name="Shape 10"/>
           <p:cNvSpPr/>
           <p:nvPr/>
         </p:nvSpPr>
@@ -19863,7 +20835,7 @@
       </p:sp>
       <p:sp>
         <p:nvSpPr>
-          <p:cNvPr id="12" name="Shape 9"/>
+          <p:cNvPr id="14" name="Shape 11"/>
           <p:cNvSpPr/>
           <p:nvPr/>
         </p:nvSpPr>
@@ -19894,7 +20866,7 @@
       </p:sp>
       <p:pic>
         <p:nvPicPr>
-          <p:cNvPr id="13" name="Image 1" descr="preencoded.png">    </p:cNvPr>
+          <p:cNvPr id="15" name="Image 1" descr="preencoded.png">    </p:cNvPr>
           <p:cNvPicPr>
             <a:picLocks noChangeAspect="1"/>
           </p:cNvPicPr>
@@ -19924,7 +20896,7 @@
       </p:pic>
       <p:sp>
         <p:nvSpPr>
-          <p:cNvPr id="14" name="Shape 10"/>
+          <p:cNvPr id="16" name="Shape 12"/>
           <p:cNvSpPr/>
           <p:nvPr/>
         </p:nvSpPr>
@@ -19962,7 +20934,7 @@
       </p:sp>
       <p:sp>
         <p:nvSpPr>
-          <p:cNvPr id="15" name="Shape 11"/>
+          <p:cNvPr id="17" name="Shape 13"/>
           <p:cNvSpPr/>
           <p:nvPr/>
         </p:nvSpPr>
@@ -20000,7 +20972,7 @@
       </p:sp>
       <p:sp>
         <p:nvSpPr>
-          <p:cNvPr id="16" name="Shape 12"/>
+          <p:cNvPr id="18" name="Shape 14"/>
           <p:cNvSpPr/>
           <p:nvPr/>
         </p:nvSpPr>
@@ -20031,7 +21003,7 @@
       </p:sp>
       <p:pic>
         <p:nvPicPr>
-          <p:cNvPr id="17" name="Image 2" descr="preencoded.png">    </p:cNvPr>
+          <p:cNvPr id="19" name="Image 2" descr="preencoded.png">    </p:cNvPr>
           <p:cNvPicPr>
             <a:picLocks noChangeAspect="1"/>
           </p:cNvPicPr>
@@ -20061,7 +21033,7 @@
       </p:pic>
       <p:sp>
         <p:nvSpPr>
-          <p:cNvPr id="18" name="Shape 13"/>
+          <p:cNvPr id="20" name="Shape 15"/>
           <p:cNvSpPr/>
           <p:nvPr/>
         </p:nvSpPr>
@@ -20090,7 +21062,7 @@
       </p:sp>
       <p:sp>
         <p:nvSpPr>
-          <p:cNvPr id="19" name="Shape 14"/>
+          <p:cNvPr id="21" name="Shape 16"/>
           <p:cNvSpPr/>
           <p:nvPr/>
         </p:nvSpPr>
@@ -20117,7 +21089,7 @@
       </p:sp>
       <p:sp>
         <p:nvSpPr>
-          <p:cNvPr id="20" name="Shape 15"/>
+          <p:cNvPr id="22" name="Shape 17"/>
           <p:cNvSpPr/>
           <p:nvPr/>
         </p:nvSpPr>
@@ -20144,7 +21116,7 @@
       </p:sp>
       <p:sp>
         <p:nvSpPr>
-          <p:cNvPr id="21" name="Shape 16"/>
+          <p:cNvPr id="23" name="Shape 18"/>
           <p:cNvSpPr/>
           <p:nvPr/>
         </p:nvSpPr>
@@ -20171,7 +21143,7 @@
       </p:sp>
       <p:sp>
         <p:nvSpPr>
-          <p:cNvPr id="22" name="mdpr:actions-output-review-326e07:title:__title:actions-output-review-326e07"/>
+          <p:cNvPr id="24" name="mdpr:actions-output-review-326e07:title:__title:actions-output-review-326e07"/>
           <p:cNvSpPr txBox="1"/>
           <p:nvPr/>
         </p:nvSpPr>
@@ -20213,7 +21185,7 @@
       </p:sp>
       <p:sp>
         <p:nvSpPr>
-          <p:cNvPr id="23" name="Shape 18"/>
+          <p:cNvPr id="25" name="Shape 20"/>
           <p:cNvSpPr/>
           <p:nvPr/>
         </p:nvSpPr>
@@ -20240,7 +21212,7 @@
       </p:sp>
       <p:pic>
         <p:nvPicPr>
-          <p:cNvPr id="24" name="Image 3" descr="flow icon from tabler-icons (MIT)">    </p:cNvPr>
+          <p:cNvPr id="26" name="Image 3" descr="flow icon from tabler-icons (MIT)">    </p:cNvPr>
           <p:cNvPicPr>
             <a:picLocks noChangeAspect="1"/>
           </p:cNvPicPr>
@@ -20270,7 +21242,7 @@
       </p:pic>
       <p:sp>
         <p:nvSpPr>
-          <p:cNvPr id="25" name="mdpr:actions-output-review-326e07:item-1:block-41"/>
+          <p:cNvPr id="27" name="mdpr:actions-output-review-326e07:item-1:block-41"/>
           <p:cNvSpPr txBox="1"/>
           <p:nvPr/>
         </p:nvSpPr>
@@ -20329,7 +21301,7 @@
       </p:sp>
       <p:sp>
         <p:nvSpPr>
-          <p:cNvPr id="26" name="Shape 20"/>
+          <p:cNvPr id="28" name="Shape 22"/>
           <p:cNvSpPr/>
           <p:nvPr/>
         </p:nvSpPr>
@@ -20356,7 +21328,7 @@
       </p:sp>
       <p:pic>
         <p:nvPicPr>
-          <p:cNvPr id="27" name="Image 4" descr="verified icon from tabler-icons (MIT)">    </p:cNvPr>
+          <p:cNvPr id="29" name="Image 4" descr="verified icon from tabler-icons (MIT)">    </p:cNvPr>
           <p:cNvPicPr>
             <a:picLocks noChangeAspect="1"/>
           </p:cNvPicPr>
@@ -20386,7 +21358,7 @@
       </p:pic>
       <p:sp>
         <p:nvSpPr>
-          <p:cNvPr id="28" name="mdpr:actions-output-review-326e07:item-2:block-41"/>
+          <p:cNvPr id="30" name="mdpr:actions-output-review-326e07:item-2:block-41"/>
           <p:cNvSpPr txBox="1"/>
           <p:nvPr/>
         </p:nvSpPr>
@@ -20445,7 +21417,7 @@
       </p:sp>
       <p:sp>
         <p:nvSpPr>
-          <p:cNvPr id="29" name="Shape 22"/>
+          <p:cNvPr id="31" name="Shape 24"/>
           <p:cNvSpPr/>
           <p:nvPr/>
         </p:nvSpPr>
@@ -20472,7 +21444,7 @@
       </p:sp>
       <p:pic>
         <p:nvPicPr>
-          <p:cNvPr id="30" name="Image 5" descr="spark icon from tabler-icons (MIT)">    </p:cNvPr>
+          <p:cNvPr id="32" name="Image 5" descr="spark icon from tabler-icons (MIT)">    </p:cNvPr>
           <p:cNvPicPr>
             <a:picLocks noChangeAspect="1"/>
           </p:cNvPicPr>
@@ -20502,7 +21474,7 @@
       </p:pic>
       <p:sp>
         <p:nvSpPr>
-          <p:cNvPr id="31" name="mdpr:actions-output-review-326e07:item-3:block-41"/>
+          <p:cNvPr id="33" name="mdpr:actions-output-review-326e07:item-3:block-41"/>
           <p:cNvSpPr txBox="1"/>
           <p:nvPr/>
         </p:nvSpPr>
@@ -20599,29 +21571,31 @@
         </p:nvSpPr>
         <p:spPr>
           <a:xfrm>
-            <a:off x="10362895" y="502920"/>
-            <a:ext cx="822960" cy="822960"/>
-          </a:xfrm>
-          <a:prstGeom prst="ellipse">
-            <a:avLst/>
-          </a:prstGeom>
-          <a:solidFill>
-            <a:srgbClr val="F7FAFC">
-              <a:alpha val="92000"/>
+            <a:off x="493776" y="5852160"/>
+            <a:ext cx="11204143" cy="420624"/>
+          </a:xfrm>
+          <a:prstGeom prst="roundRect">
+            <a:avLst>
+              <a:gd name="adj" fmla="val 17391"/>
+            </a:avLst>
+          </a:prstGeom>
+          <a:solidFill>
+            <a:srgbClr val="DDE8F2">
+              <a:alpha val="62000"/>
             </a:srgbClr>
           </a:solidFill>
           <a:ln w="12700">
             <a:solidFill>
               <a:srgbClr val="FFFFFF">
-                <a:alpha val="0"/>
+                <a:alpha val="32000"/>
               </a:srgbClr>
             </a:solidFill>
             <a:prstDash val="solid"/>
           </a:ln>
           <a:effectLst>
-            <a:outerShdw sx="100000" sy="100000" kx="0" ky="0" algn="bl" rotWithShape="0" blurRad="15240" dist="50800" dir="2700000">
-              <a:srgbClr val="C7D0DE">
-                <a:alpha val="22000"/>
+            <a:outerShdw sx="100000" sy="100000" kx="0" ky="0" algn="bl" rotWithShape="0" blurRad="8890" dist="50800" dir="2700000">
+              <a:srgbClr val="A8B6C8">
+                <a:alpha val="8000"/>
               </a:srgbClr>
             </a:outerShdw>
           </a:effectLst>
@@ -20635,27 +21609,60 @@
         </p:nvSpPr>
         <p:spPr>
           <a:xfrm>
-            <a:off x="530352" y="5687568"/>
-            <a:ext cx="658368" cy="658368"/>
+            <a:off x="749808" y="5980176"/>
+            <a:ext cx="2103120" cy="146304"/>
+          </a:xfrm>
+          <a:prstGeom prst="roundRect">
+            <a:avLst>
+              <a:gd name="adj" fmla="val 25000"/>
+            </a:avLst>
+          </a:prstGeom>
+          <a:solidFill>
+            <a:srgbClr val="5D7FA4">
+              <a:alpha val="44000"/>
+            </a:srgbClr>
+          </a:solidFill>
+          <a:ln w="12700">
+            <a:solidFill>
+              <a:srgbClr val="5D7FA4">
+                <a:alpha val="0"/>
+              </a:srgbClr>
+            </a:solidFill>
+            <a:prstDash val="solid"/>
+          </a:ln>
+        </p:spPr>
+      </p:sp>
+      <p:sp>
+        <p:nvSpPr>
+          <p:cNvPr id="4" name="Shape 2"/>
+          <p:cNvSpPr/>
+          <p:nvPr/>
+        </p:nvSpPr>
+        <p:spPr>
+          <a:xfrm>
+            <a:off x="10710367" y="512064"/>
+            <a:ext cx="493776" cy="493776"/>
           </a:xfrm>
           <a:prstGeom prst="ellipse">
             <a:avLst/>
           </a:prstGeom>
           <a:solidFill>
-            <a:srgbClr val="EEF3F8"/>
-          </a:solidFill>
-          <a:ln w="12700">
-            <a:solidFill>
-              <a:srgbClr val="FFFFFF">
-                <a:alpha val="42000"/>
+            <a:srgbClr val="FFFFFF">
+              <a:alpha val="88000"/>
+            </a:srgbClr>
+          </a:solidFill>
+          <a:ln w="12700">
+            <a:solidFill>
+              <a:srgbClr val="CBD7E4">
+                <a:alpha val="50000"/>
               </a:srgbClr>
             </a:solidFill>
             <a:prstDash val="solid"/>
           </a:ln>
           <a:effectLst>
-            <a:outerShdw sx="100000" sy="100000" kx="0" ky="0" algn="bl" rotWithShape="0" blurRad="12700" dist="50800" dir="2700000">
-              <a:srgbClr val="B8C3D2">
-                <a:alpha val="18000"/>
+            <a:outerShdw sx="100000" sy="100000" kx="0" ky="0" algn="bl" rotWithShape="0" blurRad="11430" dist="50800" dir="2700000">
+              <a:srgbClr val="A8B6C8">
+                <a:alpha val="14000"/>
               </a:srgbClr>
             </a:outerShdw>
           </a:effectLst>
@@ -20663,38 +21670,57 @@
       </p:sp>
       <p:sp>
         <p:nvSpPr>
-          <p:cNvPr id="4" name="Shape 2"/>
-          <p:cNvSpPr/>
-          <p:nvPr/>
-        </p:nvSpPr>
-        <p:spPr>
-          <a:xfrm>
-            <a:off x="9357055" y="5907024"/>
-            <a:ext cx="2057400" cy="164592"/>
-          </a:xfrm>
-          <a:prstGeom prst="roundRect">
-            <a:avLst>
-              <a:gd name="adj" fmla="val 22222"/>
-            </a:avLst>
-          </a:prstGeom>
-          <a:solidFill>
-            <a:srgbClr val="FFFFFF">
-              <a:alpha val="72000"/>
-            </a:srgbClr>
-          </a:solidFill>
+          <p:cNvPr id="5" name="Shape 3"/>
+          <p:cNvSpPr/>
+          <p:nvPr/>
+        </p:nvSpPr>
+        <p:spPr>
+          <a:xfrm>
+            <a:off x="749808" y="749808"/>
+            <a:ext cx="1353312" cy="0"/>
+          </a:xfrm>
+          <a:prstGeom prst="line">
+            <a:avLst/>
+          </a:prstGeom>
+          <a:noFill/>
+          <a:ln w="12700">
+            <a:solidFill>
+              <a:srgbClr val="5D7FA4">
+                <a:alpha val="84000"/>
+              </a:srgbClr>
+            </a:solidFill>
+            <a:prstDash val="solid"/>
+          </a:ln>
+        </p:spPr>
+      </p:sp>
+      <p:sp>
+        <p:nvSpPr>
+          <p:cNvPr id="6" name="Shape 4"/>
+          <p:cNvSpPr/>
+          <p:nvPr/>
+        </p:nvSpPr>
+        <p:spPr>
+          <a:xfrm>
+            <a:off x="10088575" y="6144768"/>
+            <a:ext cx="1188720" cy="0"/>
+          </a:xfrm>
+          <a:prstGeom prst="line">
+            <a:avLst/>
+          </a:prstGeom>
+          <a:noFill/>
           <a:ln w="12700">
             <a:solidFill>
               <a:srgbClr val="FFFFFF">
-                <a:alpha val="0"/>
-              </a:srgbClr>
-            </a:solidFill>
-            <a:prstDash val="solid"/>
-          </a:ln>
-        </p:spPr>
-      </p:sp>
-      <p:sp>
-        <p:nvSpPr>
-          <p:cNvPr id="5" name="Shape 3"/>
+                <a:alpha val="82000"/>
+              </a:srgbClr>
+            </a:solidFill>
+            <a:prstDash val="solid"/>
+          </a:ln>
+        </p:spPr>
+      </p:sp>
+      <p:sp>
+        <p:nvSpPr>
+          <p:cNvPr id="7" name="Shape 5"/>
           <p:cNvSpPr/>
           <p:nvPr/>
         </p:nvSpPr>
@@ -20721,7 +21747,7 @@
       </p:sp>
       <p:sp>
         <p:nvSpPr>
-          <p:cNvPr id="6" name="Shape 4"/>
+          <p:cNvPr id="8" name="Shape 6"/>
           <p:cNvSpPr/>
           <p:nvPr/>
         </p:nvSpPr>
@@ -20748,7 +21774,7 @@
       </p:sp>
       <p:sp>
         <p:nvSpPr>
-          <p:cNvPr id="7" name="Shape 5"/>
+          <p:cNvPr id="9" name="Shape 7"/>
           <p:cNvSpPr/>
           <p:nvPr/>
         </p:nvSpPr>
@@ -20775,7 +21801,7 @@
       </p:sp>
       <p:sp>
         <p:nvSpPr>
-          <p:cNvPr id="8" name="Shape 6"/>
+          <p:cNvPr id="10" name="Shape 8"/>
           <p:cNvSpPr/>
           <p:nvPr/>
         </p:nvSpPr>
@@ -20802,7 +21828,7 @@
       </p:sp>
       <p:sp>
         <p:nvSpPr>
-          <p:cNvPr id="9" name="mdpr:2-2-7bfb60:title:__title:2-2-7bfb60"/>
+          <p:cNvPr id="11" name="mdpr:2-2-7bfb60:title:__title:2-2-7bfb60"/>
           <p:cNvSpPr txBox="1"/>
           <p:nvPr/>
         </p:nvSpPr>
@@ -20844,7 +21870,7 @@
       </p:sp>
       <p:sp>
         <p:nvSpPr>
-          <p:cNvPr id="10" name="mdpr:2-2-7bfb60:toc-item-1:toc-item-15"/>
+          <p:cNvPr id="12" name="mdpr:2-2-7bfb60:toc-item-1:toc-item-15"/>
           <p:cNvSpPr txBox="1"/>
           <p:nvPr/>
         </p:nvSpPr>
@@ -20924,29 +21950,31 @@
         </p:nvSpPr>
         <p:spPr>
           <a:xfrm>
-            <a:off x="10362895" y="502920"/>
-            <a:ext cx="822960" cy="822960"/>
-          </a:xfrm>
-          <a:prstGeom prst="ellipse">
-            <a:avLst/>
-          </a:prstGeom>
-          <a:solidFill>
-            <a:srgbClr val="F7FAFC">
-              <a:alpha val="92000"/>
+            <a:off x="493776" y="5852160"/>
+            <a:ext cx="11204143" cy="420624"/>
+          </a:xfrm>
+          <a:prstGeom prst="roundRect">
+            <a:avLst>
+              <a:gd name="adj" fmla="val 17391"/>
+            </a:avLst>
+          </a:prstGeom>
+          <a:solidFill>
+            <a:srgbClr val="DDE8F2">
+              <a:alpha val="62000"/>
             </a:srgbClr>
           </a:solidFill>
           <a:ln w="12700">
             <a:solidFill>
               <a:srgbClr val="FFFFFF">
-                <a:alpha val="0"/>
+                <a:alpha val="32000"/>
               </a:srgbClr>
             </a:solidFill>
             <a:prstDash val="solid"/>
           </a:ln>
           <a:effectLst>
-            <a:outerShdw sx="100000" sy="100000" kx="0" ky="0" algn="bl" rotWithShape="0" blurRad="15240" dist="50800" dir="2700000">
-              <a:srgbClr val="C7D0DE">
-                <a:alpha val="22000"/>
+            <a:outerShdw sx="100000" sy="100000" kx="0" ky="0" algn="bl" rotWithShape="0" blurRad="8890" dist="50800" dir="2700000">
+              <a:srgbClr val="A8B6C8">
+                <a:alpha val="8000"/>
               </a:srgbClr>
             </a:outerShdw>
           </a:effectLst>
@@ -20960,27 +21988,60 @@
         </p:nvSpPr>
         <p:spPr>
           <a:xfrm>
-            <a:off x="530352" y="5687568"/>
-            <a:ext cx="658368" cy="658368"/>
+            <a:off x="749808" y="5980176"/>
+            <a:ext cx="2103120" cy="146304"/>
+          </a:xfrm>
+          <a:prstGeom prst="roundRect">
+            <a:avLst>
+              <a:gd name="adj" fmla="val 25000"/>
+            </a:avLst>
+          </a:prstGeom>
+          <a:solidFill>
+            <a:srgbClr val="5D7FA4">
+              <a:alpha val="44000"/>
+            </a:srgbClr>
+          </a:solidFill>
+          <a:ln w="12700">
+            <a:solidFill>
+              <a:srgbClr val="5D7FA4">
+                <a:alpha val="0"/>
+              </a:srgbClr>
+            </a:solidFill>
+            <a:prstDash val="solid"/>
+          </a:ln>
+        </p:spPr>
+      </p:sp>
+      <p:sp>
+        <p:nvSpPr>
+          <p:cNvPr id="4" name="Shape 2"/>
+          <p:cNvSpPr/>
+          <p:nvPr/>
+        </p:nvSpPr>
+        <p:spPr>
+          <a:xfrm>
+            <a:off x="10710367" y="512064"/>
+            <a:ext cx="493776" cy="493776"/>
           </a:xfrm>
           <a:prstGeom prst="ellipse">
             <a:avLst/>
           </a:prstGeom>
           <a:solidFill>
-            <a:srgbClr val="EEF3F8"/>
-          </a:solidFill>
-          <a:ln w="12700">
-            <a:solidFill>
-              <a:srgbClr val="FFFFFF">
-                <a:alpha val="42000"/>
+            <a:srgbClr val="FFFFFF">
+              <a:alpha val="88000"/>
+            </a:srgbClr>
+          </a:solidFill>
+          <a:ln w="12700">
+            <a:solidFill>
+              <a:srgbClr val="CBD7E4">
+                <a:alpha val="50000"/>
               </a:srgbClr>
             </a:solidFill>
             <a:prstDash val="solid"/>
           </a:ln>
           <a:effectLst>
-            <a:outerShdw sx="100000" sy="100000" kx="0" ky="0" algn="bl" rotWithShape="0" blurRad="12700" dist="50800" dir="2700000">
-              <a:srgbClr val="B8C3D2">
-                <a:alpha val="18000"/>
+            <a:outerShdw sx="100000" sy="100000" kx="0" ky="0" algn="bl" rotWithShape="0" blurRad="11430" dist="50800" dir="2700000">
+              <a:srgbClr val="A8B6C8">
+                <a:alpha val="14000"/>
               </a:srgbClr>
             </a:outerShdw>
           </a:effectLst>
@@ -20988,38 +22049,57 @@
       </p:sp>
       <p:sp>
         <p:nvSpPr>
-          <p:cNvPr id="4" name="Shape 2"/>
-          <p:cNvSpPr/>
-          <p:nvPr/>
-        </p:nvSpPr>
-        <p:spPr>
-          <a:xfrm>
-            <a:off x="9357055" y="5907024"/>
-            <a:ext cx="2057400" cy="164592"/>
-          </a:xfrm>
-          <a:prstGeom prst="roundRect">
-            <a:avLst>
-              <a:gd name="adj" fmla="val 22222"/>
-            </a:avLst>
-          </a:prstGeom>
-          <a:solidFill>
-            <a:srgbClr val="FFFFFF">
-              <a:alpha val="72000"/>
-            </a:srgbClr>
-          </a:solidFill>
+          <p:cNvPr id="5" name="Shape 3"/>
+          <p:cNvSpPr/>
+          <p:nvPr/>
+        </p:nvSpPr>
+        <p:spPr>
+          <a:xfrm>
+            <a:off x="749808" y="749808"/>
+            <a:ext cx="1353312" cy="0"/>
+          </a:xfrm>
+          <a:prstGeom prst="line">
+            <a:avLst/>
+          </a:prstGeom>
+          <a:noFill/>
+          <a:ln w="12700">
+            <a:solidFill>
+              <a:srgbClr val="5D7FA4">
+                <a:alpha val="84000"/>
+              </a:srgbClr>
+            </a:solidFill>
+            <a:prstDash val="solid"/>
+          </a:ln>
+        </p:spPr>
+      </p:sp>
+      <p:sp>
+        <p:nvSpPr>
+          <p:cNvPr id="6" name="Shape 4"/>
+          <p:cNvSpPr/>
+          <p:nvPr/>
+        </p:nvSpPr>
+        <p:spPr>
+          <a:xfrm>
+            <a:off x="10088575" y="6144768"/>
+            <a:ext cx="1188720" cy="0"/>
+          </a:xfrm>
+          <a:prstGeom prst="line">
+            <a:avLst/>
+          </a:prstGeom>
+          <a:noFill/>
           <a:ln w="12700">
             <a:solidFill>
               <a:srgbClr val="FFFFFF">
-                <a:alpha val="0"/>
-              </a:srgbClr>
-            </a:solidFill>
-            <a:prstDash val="solid"/>
-          </a:ln>
-        </p:spPr>
-      </p:sp>
-      <p:sp>
-        <p:nvSpPr>
-          <p:cNvPr id="5" name="Shape 3"/>
+                <a:alpha val="82000"/>
+              </a:srgbClr>
+            </a:solidFill>
+            <a:prstDash val="solid"/>
+          </a:ln>
+        </p:spPr>
+      </p:sp>
+      <p:sp>
+        <p:nvSpPr>
+          <p:cNvPr id="7" name="Shape 5"/>
           <p:cNvSpPr/>
           <p:nvPr/>
         </p:nvSpPr>
@@ -21046,7 +22126,7 @@
       </p:sp>
       <p:sp>
         <p:nvSpPr>
-          <p:cNvPr id="6" name="Shape 4"/>
+          <p:cNvPr id="8" name="Shape 6"/>
           <p:cNvSpPr/>
           <p:nvPr/>
         </p:nvSpPr>
@@ -21084,7 +22164,7 @@
       </p:sp>
       <p:sp>
         <p:nvSpPr>
-          <p:cNvPr id="7" name="Shape 5"/>
+          <p:cNvPr id="9" name="Shape 7"/>
           <p:cNvSpPr/>
           <p:nvPr/>
         </p:nvSpPr>
@@ -21122,7 +22202,7 @@
       </p:sp>
       <p:sp>
         <p:nvSpPr>
-          <p:cNvPr id="8" name="Shape 6"/>
+          <p:cNvPr id="10" name="Shape 8"/>
           <p:cNvSpPr/>
           <p:nvPr/>
         </p:nvSpPr>
@@ -21153,7 +22233,7 @@
       </p:sp>
       <p:pic>
         <p:nvPicPr>
-          <p:cNvPr id="9" name="Image 0" descr="preencoded.png">    </p:cNvPr>
+          <p:cNvPr id="11" name="Image 0" descr="preencoded.png">    </p:cNvPr>
           <p:cNvPicPr>
             <a:picLocks noChangeAspect="1"/>
           </p:cNvPicPr>
@@ -21183,7 +22263,7 @@
       </p:pic>
       <p:sp>
         <p:nvSpPr>
-          <p:cNvPr id="10" name="Shape 7"/>
+          <p:cNvPr id="12" name="Shape 9"/>
           <p:cNvSpPr/>
           <p:nvPr/>
         </p:nvSpPr>
@@ -21212,7 +22292,7 @@
       </p:sp>
       <p:sp>
         <p:nvSpPr>
-          <p:cNvPr id="11" name="Shape 8"/>
+          <p:cNvPr id="13" name="Shape 10"/>
           <p:cNvSpPr/>
           <p:nvPr/>
         </p:nvSpPr>
@@ -21239,7 +22319,7 @@
       </p:sp>
       <p:sp>
         <p:nvSpPr>
-          <p:cNvPr id="12" name="mdpr:teaser-summary-7731dc:title:__title:teaser-summary-7731dc"/>
+          <p:cNvPr id="14" name="mdpr:teaser-summary-7731dc:title:__title:teaser-summary-7731dc"/>
           <p:cNvSpPr txBox="1"/>
           <p:nvPr/>
         </p:nvSpPr>
@@ -21281,7 +22361,7 @@
       </p:sp>
       <p:sp>
         <p:nvSpPr>
-          <p:cNvPr id="13" name="mdpr:teaser-summary-7731dc:key-message:block-3"/>
+          <p:cNvPr id="15" name="mdpr:teaser-summary-7731dc:key-message:block-3"/>
           <p:cNvSpPr txBox="1"/>
           <p:nvPr/>
         </p:nvSpPr>
@@ -21323,7 +22403,7 @@
       </p:sp>
       <p:sp>
         <p:nvSpPr>
-          <p:cNvPr id="14" name="mdpr:teaser-summary-7731dc:body:block-4"/>
+          <p:cNvPr id="16" name="mdpr:teaser-summary-7731dc:body:block-4"/>
           <p:cNvSpPr txBox="1"/>
           <p:nvPr/>
         </p:nvSpPr>
@@ -21540,29 +22620,31 @@
         </p:nvSpPr>
         <p:spPr>
           <a:xfrm>
-            <a:off x="10362895" y="502920"/>
-            <a:ext cx="822960" cy="822960"/>
-          </a:xfrm>
-          <a:prstGeom prst="ellipse">
-            <a:avLst/>
-          </a:prstGeom>
-          <a:solidFill>
-            <a:srgbClr val="F7FAFC">
-              <a:alpha val="92000"/>
+            <a:off x="493776" y="5852160"/>
+            <a:ext cx="11204143" cy="420624"/>
+          </a:xfrm>
+          <a:prstGeom prst="roundRect">
+            <a:avLst>
+              <a:gd name="adj" fmla="val 17391"/>
+            </a:avLst>
+          </a:prstGeom>
+          <a:solidFill>
+            <a:srgbClr val="DDE8F2">
+              <a:alpha val="62000"/>
             </a:srgbClr>
           </a:solidFill>
           <a:ln w="12700">
             <a:solidFill>
               <a:srgbClr val="FFFFFF">
-                <a:alpha val="0"/>
+                <a:alpha val="32000"/>
               </a:srgbClr>
             </a:solidFill>
             <a:prstDash val="solid"/>
           </a:ln>
           <a:effectLst>
-            <a:outerShdw sx="100000" sy="100000" kx="0" ky="0" algn="bl" rotWithShape="0" blurRad="15240" dist="50800" dir="2700000">
-              <a:srgbClr val="C7D0DE">
-                <a:alpha val="22000"/>
+            <a:outerShdw sx="100000" sy="100000" kx="0" ky="0" algn="bl" rotWithShape="0" blurRad="8890" dist="50800" dir="2700000">
+              <a:srgbClr val="A8B6C8">
+                <a:alpha val="8000"/>
               </a:srgbClr>
             </a:outerShdw>
           </a:effectLst>
@@ -21576,27 +22658,60 @@
         </p:nvSpPr>
         <p:spPr>
           <a:xfrm>
-            <a:off x="530352" y="5687568"/>
-            <a:ext cx="658368" cy="658368"/>
+            <a:off x="749808" y="5980176"/>
+            <a:ext cx="2103120" cy="146304"/>
+          </a:xfrm>
+          <a:prstGeom prst="roundRect">
+            <a:avLst>
+              <a:gd name="adj" fmla="val 25000"/>
+            </a:avLst>
+          </a:prstGeom>
+          <a:solidFill>
+            <a:srgbClr val="5D7FA4">
+              <a:alpha val="44000"/>
+            </a:srgbClr>
+          </a:solidFill>
+          <a:ln w="12700">
+            <a:solidFill>
+              <a:srgbClr val="5D7FA4">
+                <a:alpha val="0"/>
+              </a:srgbClr>
+            </a:solidFill>
+            <a:prstDash val="solid"/>
+          </a:ln>
+        </p:spPr>
+      </p:sp>
+      <p:sp>
+        <p:nvSpPr>
+          <p:cNvPr id="4" name="Shape 2"/>
+          <p:cNvSpPr/>
+          <p:nvPr/>
+        </p:nvSpPr>
+        <p:spPr>
+          <a:xfrm>
+            <a:off x="10710367" y="512064"/>
+            <a:ext cx="493776" cy="493776"/>
           </a:xfrm>
           <a:prstGeom prst="ellipse">
             <a:avLst/>
           </a:prstGeom>
           <a:solidFill>
-            <a:srgbClr val="EEF3F8"/>
-          </a:solidFill>
-          <a:ln w="12700">
-            <a:solidFill>
-              <a:srgbClr val="FFFFFF">
-                <a:alpha val="42000"/>
+            <a:srgbClr val="FFFFFF">
+              <a:alpha val="88000"/>
+            </a:srgbClr>
+          </a:solidFill>
+          <a:ln w="12700">
+            <a:solidFill>
+              <a:srgbClr val="CBD7E4">
+                <a:alpha val="50000"/>
               </a:srgbClr>
             </a:solidFill>
             <a:prstDash val="solid"/>
           </a:ln>
           <a:effectLst>
-            <a:outerShdw sx="100000" sy="100000" kx="0" ky="0" algn="bl" rotWithShape="0" blurRad="12700" dist="50800" dir="2700000">
-              <a:srgbClr val="B8C3D2">
-                <a:alpha val="18000"/>
+            <a:outerShdw sx="100000" sy="100000" kx="0" ky="0" algn="bl" rotWithShape="0" blurRad="11430" dist="50800" dir="2700000">
+              <a:srgbClr val="A8B6C8">
+                <a:alpha val="14000"/>
               </a:srgbClr>
             </a:outerShdw>
           </a:effectLst>
@@ -21604,38 +22719,57 @@
       </p:sp>
       <p:sp>
         <p:nvSpPr>
-          <p:cNvPr id="4" name="Shape 2"/>
-          <p:cNvSpPr/>
-          <p:nvPr/>
-        </p:nvSpPr>
-        <p:spPr>
-          <a:xfrm>
-            <a:off x="9357055" y="5907024"/>
-            <a:ext cx="2057400" cy="164592"/>
-          </a:xfrm>
-          <a:prstGeom prst="roundRect">
-            <a:avLst>
-              <a:gd name="adj" fmla="val 22222"/>
-            </a:avLst>
-          </a:prstGeom>
-          <a:solidFill>
-            <a:srgbClr val="FFFFFF">
-              <a:alpha val="72000"/>
-            </a:srgbClr>
-          </a:solidFill>
+          <p:cNvPr id="5" name="Shape 3"/>
+          <p:cNvSpPr/>
+          <p:nvPr/>
+        </p:nvSpPr>
+        <p:spPr>
+          <a:xfrm>
+            <a:off x="749808" y="749808"/>
+            <a:ext cx="1353312" cy="0"/>
+          </a:xfrm>
+          <a:prstGeom prst="line">
+            <a:avLst/>
+          </a:prstGeom>
+          <a:noFill/>
+          <a:ln w="12700">
+            <a:solidFill>
+              <a:srgbClr val="5D7FA4">
+                <a:alpha val="84000"/>
+              </a:srgbClr>
+            </a:solidFill>
+            <a:prstDash val="solid"/>
+          </a:ln>
+        </p:spPr>
+      </p:sp>
+      <p:sp>
+        <p:nvSpPr>
+          <p:cNvPr id="6" name="Shape 4"/>
+          <p:cNvSpPr/>
+          <p:nvPr/>
+        </p:nvSpPr>
+        <p:spPr>
+          <a:xfrm>
+            <a:off x="10088575" y="6144768"/>
+            <a:ext cx="1188720" cy="0"/>
+          </a:xfrm>
+          <a:prstGeom prst="line">
+            <a:avLst/>
+          </a:prstGeom>
+          <a:noFill/>
           <a:ln w="12700">
             <a:solidFill>
               <a:srgbClr val="FFFFFF">
-                <a:alpha val="0"/>
-              </a:srgbClr>
-            </a:solidFill>
-            <a:prstDash val="solid"/>
-          </a:ln>
-        </p:spPr>
-      </p:sp>
-      <p:sp>
-        <p:nvSpPr>
-          <p:cNvPr id="5" name="Shape 3"/>
+                <a:alpha val="82000"/>
+              </a:srgbClr>
+            </a:solidFill>
+            <a:prstDash val="solid"/>
+          </a:ln>
+        </p:spPr>
+      </p:sp>
+      <p:sp>
+        <p:nvSpPr>
+          <p:cNvPr id="7" name="Shape 5"/>
           <p:cNvSpPr/>
           <p:nvPr/>
         </p:nvSpPr>
@@ -21662,7 +22796,7 @@
       </p:sp>
       <p:sp>
         <p:nvSpPr>
-          <p:cNvPr id="6" name="Shape 4"/>
+          <p:cNvPr id="8" name="Shape 6"/>
           <p:cNvSpPr/>
           <p:nvPr/>
         </p:nvSpPr>
@@ -21700,7 +22834,7 @@
       </p:sp>
       <p:sp>
         <p:nvSpPr>
-          <p:cNvPr id="7" name="Shape 5"/>
+          <p:cNvPr id="9" name="Shape 7"/>
           <p:cNvSpPr/>
           <p:nvPr/>
         </p:nvSpPr>
@@ -21738,7 +22872,7 @@
       </p:sp>
       <p:sp>
         <p:nvSpPr>
-          <p:cNvPr id="8" name="Shape 6"/>
+          <p:cNvPr id="10" name="Shape 8"/>
           <p:cNvSpPr/>
           <p:nvPr/>
         </p:nvSpPr>
@@ -21769,7 +22903,7 @@
       </p:sp>
       <p:pic>
         <p:nvPicPr>
-          <p:cNvPr id="9" name="Image 0" descr="preencoded.png">    </p:cNvPr>
+          <p:cNvPr id="11" name="Image 0" descr="preencoded.png">    </p:cNvPr>
           <p:cNvPicPr>
             <a:picLocks noChangeAspect="1"/>
           </p:cNvPicPr>
@@ -21799,7 +22933,7 @@
       </p:pic>
       <p:sp>
         <p:nvSpPr>
-          <p:cNvPr id="10" name="Shape 7"/>
+          <p:cNvPr id="12" name="Shape 9"/>
           <p:cNvSpPr/>
           <p:nvPr/>
         </p:nvSpPr>
@@ -21837,7 +22971,7 @@
       </p:sp>
       <p:sp>
         <p:nvSpPr>
-          <p:cNvPr id="11" name="Shape 8"/>
+          <p:cNvPr id="13" name="Shape 10"/>
           <p:cNvSpPr/>
           <p:nvPr/>
         </p:nvSpPr>
@@ -21875,7 +23009,7 @@
       </p:sp>
       <p:sp>
         <p:nvSpPr>
-          <p:cNvPr id="12" name="Shape 9"/>
+          <p:cNvPr id="14" name="Shape 11"/>
           <p:cNvSpPr/>
           <p:nvPr/>
         </p:nvSpPr>
@@ -21906,7 +23040,7 @@
       </p:sp>
       <p:pic>
         <p:nvPicPr>
-          <p:cNvPr id="13" name="Image 1" descr="preencoded.png">    </p:cNvPr>
+          <p:cNvPr id="15" name="Image 1" descr="preencoded.png">    </p:cNvPr>
           <p:cNvPicPr>
             <a:picLocks noChangeAspect="1"/>
           </p:cNvPicPr>
@@ -21936,7 +23070,7 @@
       </p:pic>
       <p:sp>
         <p:nvSpPr>
-          <p:cNvPr id="14" name="Shape 10"/>
+          <p:cNvPr id="16" name="Shape 12"/>
           <p:cNvSpPr/>
           <p:nvPr/>
         </p:nvSpPr>
@@ -21974,7 +23108,7 @@
       </p:sp>
       <p:sp>
         <p:nvSpPr>
-          <p:cNvPr id="15" name="Shape 11"/>
+          <p:cNvPr id="17" name="Shape 13"/>
           <p:cNvSpPr/>
           <p:nvPr/>
         </p:nvSpPr>
@@ -22012,7 +23146,7 @@
       </p:sp>
       <p:sp>
         <p:nvSpPr>
-          <p:cNvPr id="16" name="Shape 12"/>
+          <p:cNvPr id="18" name="Shape 14"/>
           <p:cNvSpPr/>
           <p:nvPr/>
         </p:nvSpPr>
@@ -22043,7 +23177,7 @@
       </p:sp>
       <p:pic>
         <p:nvPicPr>
-          <p:cNvPr id="17" name="Image 2" descr="preencoded.png">    </p:cNvPr>
+          <p:cNvPr id="19" name="Image 2" descr="preencoded.png">    </p:cNvPr>
           <p:cNvPicPr>
             <a:picLocks noChangeAspect="1"/>
           </p:cNvPicPr>
@@ -22073,7 +23207,7 @@
       </p:pic>
       <p:sp>
         <p:nvSpPr>
-          <p:cNvPr id="18" name="Shape 13"/>
+          <p:cNvPr id="20" name="Shape 15"/>
           <p:cNvSpPr/>
           <p:nvPr/>
         </p:nvSpPr>
@@ -22102,7 +23236,7 @@
       </p:sp>
       <p:sp>
         <p:nvSpPr>
-          <p:cNvPr id="19" name="Shape 14"/>
+          <p:cNvPr id="21" name="Shape 16"/>
           <p:cNvSpPr/>
           <p:nvPr/>
         </p:nvSpPr>
@@ -22129,7 +23263,7 @@
       </p:sp>
       <p:sp>
         <p:nvSpPr>
-          <p:cNvPr id="20" name="Shape 15"/>
+          <p:cNvPr id="22" name="Shape 17"/>
           <p:cNvSpPr/>
           <p:nvPr/>
         </p:nvSpPr>
@@ -22156,7 +23290,7 @@
       </p:sp>
       <p:sp>
         <p:nvSpPr>
-          <p:cNvPr id="21" name="Shape 16"/>
+          <p:cNvPr id="23" name="Shape 18"/>
           <p:cNvSpPr/>
           <p:nvPr/>
         </p:nvSpPr>
@@ -22183,7 +23317,7 @@
       </p:sp>
       <p:sp>
         <p:nvSpPr>
-          <p:cNvPr id="22" name="mdpr:1-2-32ac08:title:__title:1-2-32ac08"/>
+          <p:cNvPr id="24" name="mdpr:1-2-32ac08:title:__title:1-2-32ac08"/>
           <p:cNvSpPr txBox="1"/>
           <p:nvPr/>
         </p:nvSpPr>
@@ -22225,7 +23359,7 @@
       </p:sp>
       <p:sp>
         <p:nvSpPr>
-          <p:cNvPr id="23" name="Shape 18"/>
+          <p:cNvPr id="25" name="Shape 20"/>
           <p:cNvSpPr/>
           <p:nvPr/>
         </p:nvSpPr>
@@ -22252,7 +23386,7 @@
       </p:sp>
       <p:pic>
         <p:nvPicPr>
-          <p:cNvPr id="24" name="Image 3" descr="article icon from tabler-icons (MIT)">    </p:cNvPr>
+          <p:cNvPr id="26" name="Image 3" descr="article icon from tabler-icons (MIT)">    </p:cNvPr>
           <p:cNvPicPr>
             <a:picLocks noChangeAspect="1"/>
           </p:cNvPicPr>
@@ -22282,7 +23416,7 @@
       </p:pic>
       <p:sp>
         <p:nvSpPr>
-          <p:cNvPr id="25" name="mdpr:1-2-32ac08:item-1:block-6-chunk-1"/>
+          <p:cNvPr id="27" name="mdpr:1-2-32ac08:item-1:block-6-chunk-1"/>
           <p:cNvSpPr txBox="1"/>
           <p:nvPr/>
         </p:nvSpPr>
@@ -22341,7 +23475,7 @@
       </p:sp>
       <p:sp>
         <p:nvSpPr>
-          <p:cNvPr id="26" name="Shape 20"/>
+          <p:cNvPr id="28" name="Shape 22"/>
           <p:cNvSpPr/>
           <p:nvPr/>
         </p:nvSpPr>
@@ -22368,7 +23502,7 @@
       </p:sp>
       <p:pic>
         <p:nvPicPr>
-          <p:cNvPr id="27" name="Image 4" descr="chart icon from tabler-icons (MIT)">    </p:cNvPr>
+          <p:cNvPr id="29" name="Image 4" descr="chart icon from tabler-icons (MIT)">    </p:cNvPr>
           <p:cNvPicPr>
             <a:picLocks noChangeAspect="1"/>
           </p:cNvPicPr>
@@ -22398,7 +23532,7 @@
       </p:pic>
       <p:sp>
         <p:nvSpPr>
-          <p:cNvPr id="28" name="mdpr:1-2-32ac08:item-2:block-6-chunk-1"/>
+          <p:cNvPr id="30" name="mdpr:1-2-32ac08:item-2:block-6-chunk-1"/>
           <p:cNvSpPr txBox="1"/>
           <p:nvPr/>
         </p:nvSpPr>
@@ -22457,7 +23591,7 @@
       </p:sp>
       <p:sp>
         <p:nvSpPr>
-          <p:cNvPr id="29" name="Shape 22"/>
+          <p:cNvPr id="31" name="Shape 24"/>
           <p:cNvSpPr/>
           <p:nvPr/>
         </p:nvSpPr>
@@ -22484,7 +23618,7 @@
       </p:sp>
       <p:pic>
         <p:nvPicPr>
-          <p:cNvPr id="30" name="Image 5" descr="article icon from tabler-icons (MIT)">    </p:cNvPr>
+          <p:cNvPr id="32" name="Image 5" descr="article icon from tabler-icons (MIT)">    </p:cNvPr>
           <p:cNvPicPr>
             <a:picLocks noChangeAspect="1"/>
           </p:cNvPicPr>
@@ -22514,7 +23648,7 @@
       </p:pic>
       <p:sp>
         <p:nvSpPr>
-          <p:cNvPr id="31" name="mdpr:1-2-32ac08:item-3:block-6-chunk-1"/>
+          <p:cNvPr id="33" name="mdpr:1-2-32ac08:item-3:block-6-chunk-1"/>
           <p:cNvSpPr txBox="1"/>
           <p:nvPr/>
         </p:nvSpPr>
@@ -22611,29 +23745,31 @@
         </p:nvSpPr>
         <p:spPr>
           <a:xfrm>
-            <a:off x="10362895" y="502920"/>
-            <a:ext cx="822960" cy="822960"/>
-          </a:xfrm>
-          <a:prstGeom prst="ellipse">
-            <a:avLst/>
-          </a:prstGeom>
-          <a:solidFill>
-            <a:srgbClr val="F7FAFC">
-              <a:alpha val="92000"/>
+            <a:off x="493776" y="5852160"/>
+            <a:ext cx="11204143" cy="420624"/>
+          </a:xfrm>
+          <a:prstGeom prst="roundRect">
+            <a:avLst>
+              <a:gd name="adj" fmla="val 17391"/>
+            </a:avLst>
+          </a:prstGeom>
+          <a:solidFill>
+            <a:srgbClr val="DDE8F2">
+              <a:alpha val="62000"/>
             </a:srgbClr>
           </a:solidFill>
           <a:ln w="12700">
             <a:solidFill>
               <a:srgbClr val="FFFFFF">
-                <a:alpha val="0"/>
+                <a:alpha val="32000"/>
               </a:srgbClr>
             </a:solidFill>
             <a:prstDash val="solid"/>
           </a:ln>
           <a:effectLst>
-            <a:outerShdw sx="100000" sy="100000" kx="0" ky="0" algn="bl" rotWithShape="0" blurRad="15240" dist="50800" dir="2700000">
-              <a:srgbClr val="C7D0DE">
-                <a:alpha val="22000"/>
+            <a:outerShdw sx="100000" sy="100000" kx="0" ky="0" algn="bl" rotWithShape="0" blurRad="8890" dist="50800" dir="2700000">
+              <a:srgbClr val="A8B6C8">
+                <a:alpha val="8000"/>
               </a:srgbClr>
             </a:outerShdw>
           </a:effectLst>
@@ -22647,27 +23783,60 @@
         </p:nvSpPr>
         <p:spPr>
           <a:xfrm>
-            <a:off x="530352" y="5687568"/>
-            <a:ext cx="658368" cy="658368"/>
+            <a:off x="749808" y="5980176"/>
+            <a:ext cx="2103120" cy="146304"/>
+          </a:xfrm>
+          <a:prstGeom prst="roundRect">
+            <a:avLst>
+              <a:gd name="adj" fmla="val 25000"/>
+            </a:avLst>
+          </a:prstGeom>
+          <a:solidFill>
+            <a:srgbClr val="5D7FA4">
+              <a:alpha val="44000"/>
+            </a:srgbClr>
+          </a:solidFill>
+          <a:ln w="12700">
+            <a:solidFill>
+              <a:srgbClr val="5D7FA4">
+                <a:alpha val="0"/>
+              </a:srgbClr>
+            </a:solidFill>
+            <a:prstDash val="solid"/>
+          </a:ln>
+        </p:spPr>
+      </p:sp>
+      <p:sp>
+        <p:nvSpPr>
+          <p:cNvPr id="4" name="Shape 2"/>
+          <p:cNvSpPr/>
+          <p:nvPr/>
+        </p:nvSpPr>
+        <p:spPr>
+          <a:xfrm>
+            <a:off x="10710367" y="512064"/>
+            <a:ext cx="493776" cy="493776"/>
           </a:xfrm>
           <a:prstGeom prst="ellipse">
             <a:avLst/>
           </a:prstGeom>
           <a:solidFill>
-            <a:srgbClr val="EEF3F8"/>
-          </a:solidFill>
-          <a:ln w="12700">
-            <a:solidFill>
-              <a:srgbClr val="FFFFFF">
-                <a:alpha val="42000"/>
+            <a:srgbClr val="FFFFFF">
+              <a:alpha val="88000"/>
+            </a:srgbClr>
+          </a:solidFill>
+          <a:ln w="12700">
+            <a:solidFill>
+              <a:srgbClr val="CBD7E4">
+                <a:alpha val="50000"/>
               </a:srgbClr>
             </a:solidFill>
             <a:prstDash val="solid"/>
           </a:ln>
           <a:effectLst>
-            <a:outerShdw sx="100000" sy="100000" kx="0" ky="0" algn="bl" rotWithShape="0" blurRad="12700" dist="50800" dir="2700000">
-              <a:srgbClr val="B8C3D2">
-                <a:alpha val="18000"/>
+            <a:outerShdw sx="100000" sy="100000" kx="0" ky="0" algn="bl" rotWithShape="0" blurRad="11430" dist="50800" dir="2700000">
+              <a:srgbClr val="A8B6C8">
+                <a:alpha val="14000"/>
               </a:srgbClr>
             </a:outerShdw>
           </a:effectLst>
@@ -22675,38 +23844,57 @@
       </p:sp>
       <p:sp>
         <p:nvSpPr>
-          <p:cNvPr id="4" name="Shape 2"/>
-          <p:cNvSpPr/>
-          <p:nvPr/>
-        </p:nvSpPr>
-        <p:spPr>
-          <a:xfrm>
-            <a:off x="9357055" y="5907024"/>
-            <a:ext cx="2057400" cy="164592"/>
-          </a:xfrm>
-          <a:prstGeom prst="roundRect">
-            <a:avLst>
-              <a:gd name="adj" fmla="val 22222"/>
-            </a:avLst>
-          </a:prstGeom>
-          <a:solidFill>
-            <a:srgbClr val="FFFFFF">
-              <a:alpha val="72000"/>
-            </a:srgbClr>
-          </a:solidFill>
+          <p:cNvPr id="5" name="Shape 3"/>
+          <p:cNvSpPr/>
+          <p:nvPr/>
+        </p:nvSpPr>
+        <p:spPr>
+          <a:xfrm>
+            <a:off x="749808" y="749808"/>
+            <a:ext cx="1353312" cy="0"/>
+          </a:xfrm>
+          <a:prstGeom prst="line">
+            <a:avLst/>
+          </a:prstGeom>
+          <a:noFill/>
+          <a:ln w="12700">
+            <a:solidFill>
+              <a:srgbClr val="5D7FA4">
+                <a:alpha val="84000"/>
+              </a:srgbClr>
+            </a:solidFill>
+            <a:prstDash val="solid"/>
+          </a:ln>
+        </p:spPr>
+      </p:sp>
+      <p:sp>
+        <p:nvSpPr>
+          <p:cNvPr id="6" name="Shape 4"/>
+          <p:cNvSpPr/>
+          <p:nvPr/>
+        </p:nvSpPr>
+        <p:spPr>
+          <a:xfrm>
+            <a:off x="10088575" y="6144768"/>
+            <a:ext cx="1188720" cy="0"/>
+          </a:xfrm>
+          <a:prstGeom prst="line">
+            <a:avLst/>
+          </a:prstGeom>
+          <a:noFill/>
           <a:ln w="12700">
             <a:solidFill>
               <a:srgbClr val="FFFFFF">
-                <a:alpha val="0"/>
-              </a:srgbClr>
-            </a:solidFill>
-            <a:prstDash val="solid"/>
-          </a:ln>
-        </p:spPr>
-      </p:sp>
-      <p:sp>
-        <p:nvSpPr>
-          <p:cNvPr id="5" name="Shape 3"/>
+                <a:alpha val="82000"/>
+              </a:srgbClr>
+            </a:solidFill>
+            <a:prstDash val="solid"/>
+          </a:ln>
+        </p:spPr>
+      </p:sp>
+      <p:sp>
+        <p:nvSpPr>
+          <p:cNvPr id="7" name="Shape 5"/>
           <p:cNvSpPr/>
           <p:nvPr/>
         </p:nvSpPr>
@@ -22733,7 +23921,7 @@
       </p:sp>
       <p:sp>
         <p:nvSpPr>
-          <p:cNvPr id="6" name="Shape 4"/>
+          <p:cNvPr id="8" name="Shape 6"/>
           <p:cNvSpPr/>
           <p:nvPr/>
         </p:nvSpPr>
@@ -22760,7 +23948,7 @@
       </p:sp>
       <p:sp>
         <p:nvSpPr>
-          <p:cNvPr id="7" name="Shape 5"/>
+          <p:cNvPr id="9" name="Shape 7"/>
           <p:cNvSpPr/>
           <p:nvPr/>
         </p:nvSpPr>
@@ -22787,7 +23975,7 @@
       </p:sp>
       <p:sp>
         <p:nvSpPr>
-          <p:cNvPr id="8" name="mdpr:2-2-14f8eb:title:__title:2-2-14f8eb"/>
+          <p:cNvPr id="10" name="mdpr:2-2-14f8eb:title:__title:2-2-14f8eb"/>
           <p:cNvSpPr txBox="1"/>
           <p:nvPr/>
         </p:nvSpPr>
@@ -22829,7 +24017,7 @@
       </p:sp>
       <p:sp>
         <p:nvSpPr>
-          <p:cNvPr id="9" name="mdpr:2-2-14f8eb:left:block-6-chunk-2"/>
+          <p:cNvPr id="11" name="mdpr:2-2-14f8eb:left:block-6-chunk-2"/>
           <p:cNvSpPr txBox="1"/>
           <p:nvPr/>
         </p:nvSpPr>
@@ -22888,7 +24076,7 @@
       </p:sp>
       <p:sp>
         <p:nvSpPr>
-          <p:cNvPr id="10" name="mdpr:2-2-14f8eb:right:block-6-chunk-2"/>
+          <p:cNvPr id="12" name="mdpr:2-2-14f8eb:right:block-6-chunk-2"/>
           <p:cNvSpPr txBox="1"/>
           <p:nvPr/>
         </p:nvSpPr>
@@ -22985,29 +24173,31 @@
         </p:nvSpPr>
         <p:spPr>
           <a:xfrm>
-            <a:off x="10362895" y="502920"/>
-            <a:ext cx="822960" cy="822960"/>
-          </a:xfrm>
-          <a:prstGeom prst="ellipse">
-            <a:avLst/>
-          </a:prstGeom>
-          <a:solidFill>
-            <a:srgbClr val="F7FAFC">
-              <a:alpha val="92000"/>
+            <a:off x="493776" y="5852160"/>
+            <a:ext cx="11204143" cy="420624"/>
+          </a:xfrm>
+          <a:prstGeom prst="roundRect">
+            <a:avLst>
+              <a:gd name="adj" fmla="val 17391"/>
+            </a:avLst>
+          </a:prstGeom>
+          <a:solidFill>
+            <a:srgbClr val="DDE8F2">
+              <a:alpha val="62000"/>
             </a:srgbClr>
           </a:solidFill>
           <a:ln w="12700">
             <a:solidFill>
               <a:srgbClr val="FFFFFF">
-                <a:alpha val="0"/>
+                <a:alpha val="32000"/>
               </a:srgbClr>
             </a:solidFill>
             <a:prstDash val="solid"/>
           </a:ln>
           <a:effectLst>
-            <a:outerShdw sx="100000" sy="100000" kx="0" ky="0" algn="bl" rotWithShape="0" blurRad="15240" dist="50800" dir="2700000">
-              <a:srgbClr val="C7D0DE">
-                <a:alpha val="22000"/>
+            <a:outerShdw sx="100000" sy="100000" kx="0" ky="0" algn="bl" rotWithShape="0" blurRad="8890" dist="50800" dir="2700000">
+              <a:srgbClr val="A8B6C8">
+                <a:alpha val="8000"/>
               </a:srgbClr>
             </a:outerShdw>
           </a:effectLst>
@@ -23021,27 +24211,60 @@
         </p:nvSpPr>
         <p:spPr>
           <a:xfrm>
-            <a:off x="530352" y="5687568"/>
-            <a:ext cx="658368" cy="658368"/>
+            <a:off x="749808" y="5980176"/>
+            <a:ext cx="2103120" cy="146304"/>
+          </a:xfrm>
+          <a:prstGeom prst="roundRect">
+            <a:avLst>
+              <a:gd name="adj" fmla="val 25000"/>
+            </a:avLst>
+          </a:prstGeom>
+          <a:solidFill>
+            <a:srgbClr val="5D7FA4">
+              <a:alpha val="44000"/>
+            </a:srgbClr>
+          </a:solidFill>
+          <a:ln w="12700">
+            <a:solidFill>
+              <a:srgbClr val="5D7FA4">
+                <a:alpha val="0"/>
+              </a:srgbClr>
+            </a:solidFill>
+            <a:prstDash val="solid"/>
+          </a:ln>
+        </p:spPr>
+      </p:sp>
+      <p:sp>
+        <p:nvSpPr>
+          <p:cNvPr id="4" name="Shape 2"/>
+          <p:cNvSpPr/>
+          <p:nvPr/>
+        </p:nvSpPr>
+        <p:spPr>
+          <a:xfrm>
+            <a:off x="10710367" y="512064"/>
+            <a:ext cx="493776" cy="493776"/>
           </a:xfrm>
           <a:prstGeom prst="ellipse">
             <a:avLst/>
           </a:prstGeom>
           <a:solidFill>
-            <a:srgbClr val="EEF3F8"/>
-          </a:solidFill>
-          <a:ln w="12700">
-            <a:solidFill>
-              <a:srgbClr val="FFFFFF">
-                <a:alpha val="42000"/>
+            <a:srgbClr val="FFFFFF">
+              <a:alpha val="88000"/>
+            </a:srgbClr>
+          </a:solidFill>
+          <a:ln w="12700">
+            <a:solidFill>
+              <a:srgbClr val="CBD7E4">
+                <a:alpha val="50000"/>
               </a:srgbClr>
             </a:solidFill>
             <a:prstDash val="solid"/>
           </a:ln>
           <a:effectLst>
-            <a:outerShdw sx="100000" sy="100000" kx="0" ky="0" algn="bl" rotWithShape="0" blurRad="12700" dist="50800" dir="2700000">
-              <a:srgbClr val="B8C3D2">
-                <a:alpha val="18000"/>
+            <a:outerShdw sx="100000" sy="100000" kx="0" ky="0" algn="bl" rotWithShape="0" blurRad="11430" dist="50800" dir="2700000">
+              <a:srgbClr val="A8B6C8">
+                <a:alpha val="14000"/>
               </a:srgbClr>
             </a:outerShdw>
           </a:effectLst>
@@ -23049,38 +24272,57 @@
       </p:sp>
       <p:sp>
         <p:nvSpPr>
-          <p:cNvPr id="4" name="Shape 2"/>
-          <p:cNvSpPr/>
-          <p:nvPr/>
-        </p:nvSpPr>
-        <p:spPr>
-          <a:xfrm>
-            <a:off x="9357055" y="5907024"/>
-            <a:ext cx="2057400" cy="164592"/>
-          </a:xfrm>
-          <a:prstGeom prst="roundRect">
-            <a:avLst>
-              <a:gd name="adj" fmla="val 22222"/>
-            </a:avLst>
-          </a:prstGeom>
-          <a:solidFill>
-            <a:srgbClr val="FFFFFF">
-              <a:alpha val="72000"/>
-            </a:srgbClr>
-          </a:solidFill>
+          <p:cNvPr id="5" name="Shape 3"/>
+          <p:cNvSpPr/>
+          <p:nvPr/>
+        </p:nvSpPr>
+        <p:spPr>
+          <a:xfrm>
+            <a:off x="749808" y="749808"/>
+            <a:ext cx="1353312" cy="0"/>
+          </a:xfrm>
+          <a:prstGeom prst="line">
+            <a:avLst/>
+          </a:prstGeom>
+          <a:noFill/>
+          <a:ln w="12700">
+            <a:solidFill>
+              <a:srgbClr val="5D7FA4">
+                <a:alpha val="84000"/>
+              </a:srgbClr>
+            </a:solidFill>
+            <a:prstDash val="solid"/>
+          </a:ln>
+        </p:spPr>
+      </p:sp>
+      <p:sp>
+        <p:nvSpPr>
+          <p:cNvPr id="6" name="Shape 4"/>
+          <p:cNvSpPr/>
+          <p:nvPr/>
+        </p:nvSpPr>
+        <p:spPr>
+          <a:xfrm>
+            <a:off x="10088575" y="6144768"/>
+            <a:ext cx="1188720" cy="0"/>
+          </a:xfrm>
+          <a:prstGeom prst="line">
+            <a:avLst/>
+          </a:prstGeom>
+          <a:noFill/>
           <a:ln w="12700">
             <a:solidFill>
               <a:srgbClr val="FFFFFF">
-                <a:alpha val="0"/>
-              </a:srgbClr>
-            </a:solidFill>
-            <a:prstDash val="solid"/>
-          </a:ln>
-        </p:spPr>
-      </p:sp>
-      <p:sp>
-        <p:nvSpPr>
-          <p:cNvPr id="5" name="Shape 3"/>
+                <a:alpha val="82000"/>
+              </a:srgbClr>
+            </a:solidFill>
+            <a:prstDash val="solid"/>
+          </a:ln>
+        </p:spPr>
+      </p:sp>
+      <p:sp>
+        <p:nvSpPr>
+          <p:cNvPr id="7" name="Shape 5"/>
           <p:cNvSpPr/>
           <p:nvPr/>
         </p:nvSpPr>
@@ -23107,7 +24349,7 @@
       </p:sp>
       <p:sp>
         <p:nvSpPr>
-          <p:cNvPr id="6" name="Shape 4"/>
+          <p:cNvPr id="8" name="Shape 6"/>
           <p:cNvSpPr/>
           <p:nvPr/>
         </p:nvSpPr>
@@ -23145,7 +24387,7 @@
       </p:sp>
       <p:sp>
         <p:nvSpPr>
-          <p:cNvPr id="7" name="Shape 5"/>
+          <p:cNvPr id="9" name="Shape 7"/>
           <p:cNvSpPr/>
           <p:nvPr/>
         </p:nvSpPr>
@@ -23183,7 +24425,7 @@
       </p:sp>
       <p:sp>
         <p:nvSpPr>
-          <p:cNvPr id="8" name="Shape 6"/>
+          <p:cNvPr id="10" name="Shape 8"/>
           <p:cNvSpPr/>
           <p:nvPr/>
         </p:nvSpPr>
@@ -23214,7 +24456,7 @@
       </p:sp>
       <p:pic>
         <p:nvPicPr>
-          <p:cNvPr id="9" name="Image 0" descr="preencoded.png">    </p:cNvPr>
+          <p:cNvPr id="11" name="Image 0" descr="preencoded.png">    </p:cNvPr>
           <p:cNvPicPr>
             <a:picLocks noChangeAspect="1"/>
           </p:cNvPicPr>
@@ -23244,7 +24486,7 @@
       </p:pic>
       <p:sp>
         <p:nvSpPr>
-          <p:cNvPr id="10" name="Shape 7"/>
+          <p:cNvPr id="12" name="Shape 9"/>
           <p:cNvSpPr/>
           <p:nvPr/>
         </p:nvSpPr>
@@ -23282,7 +24524,7 @@
       </p:sp>
       <p:sp>
         <p:nvSpPr>
-          <p:cNvPr id="11" name="Shape 8"/>
+          <p:cNvPr id="13" name="Shape 10"/>
           <p:cNvSpPr/>
           <p:nvPr/>
         </p:nvSpPr>
@@ -23320,7 +24562,7 @@
       </p:sp>
       <p:sp>
         <p:nvSpPr>
-          <p:cNvPr id="12" name="Shape 9"/>
+          <p:cNvPr id="14" name="Shape 11"/>
           <p:cNvSpPr/>
           <p:nvPr/>
         </p:nvSpPr>
@@ -23351,7 +24593,7 @@
       </p:sp>
       <p:pic>
         <p:nvPicPr>
-          <p:cNvPr id="13" name="Image 1" descr="preencoded.png">    </p:cNvPr>
+          <p:cNvPr id="15" name="Image 1" descr="preencoded.png">    </p:cNvPr>
           <p:cNvPicPr>
             <a:picLocks noChangeAspect="1"/>
           </p:cNvPicPr>
@@ -23381,7 +24623,7 @@
       </p:pic>
       <p:sp>
         <p:nvSpPr>
-          <p:cNvPr id="14" name="Shape 10"/>
+          <p:cNvPr id="16" name="Shape 12"/>
           <p:cNvSpPr/>
           <p:nvPr/>
         </p:nvSpPr>
@@ -23419,7 +24661,7 @@
       </p:sp>
       <p:sp>
         <p:nvSpPr>
-          <p:cNvPr id="15" name="Shape 11"/>
+          <p:cNvPr id="17" name="Shape 13"/>
           <p:cNvSpPr/>
           <p:nvPr/>
         </p:nvSpPr>
@@ -23457,7 +24699,7 @@
       </p:sp>
       <p:sp>
         <p:nvSpPr>
-          <p:cNvPr id="16" name="Shape 12"/>
+          <p:cNvPr id="18" name="Shape 14"/>
           <p:cNvSpPr/>
           <p:nvPr/>
         </p:nvSpPr>
@@ -23488,7 +24730,7 @@
       </p:sp>
       <p:pic>
         <p:nvPicPr>
-          <p:cNvPr id="17" name="Image 2" descr="preencoded.png">    </p:cNvPr>
+          <p:cNvPr id="19" name="Image 2" descr="preencoded.png">    </p:cNvPr>
           <p:cNvPicPr>
             <a:picLocks noChangeAspect="1"/>
           </p:cNvPicPr>
@@ -23518,7 +24760,7 @@
       </p:pic>
       <p:sp>
         <p:nvSpPr>
-          <p:cNvPr id="18" name="Shape 13"/>
+          <p:cNvPr id="20" name="Shape 15"/>
           <p:cNvSpPr/>
           <p:nvPr/>
         </p:nvSpPr>
@@ -23547,7 +24789,7 @@
       </p:sp>
       <p:sp>
         <p:nvSpPr>
-          <p:cNvPr id="19" name="Shape 14"/>
+          <p:cNvPr id="21" name="Shape 16"/>
           <p:cNvSpPr/>
           <p:nvPr/>
         </p:nvSpPr>
@@ -23574,7 +24816,7 @@
       </p:sp>
       <p:sp>
         <p:nvSpPr>
-          <p:cNvPr id="20" name="Shape 15"/>
+          <p:cNvPr id="22" name="Shape 17"/>
           <p:cNvSpPr/>
           <p:nvPr/>
         </p:nvSpPr>
@@ -23601,7 +24843,7 @@
       </p:sp>
       <p:sp>
         <p:nvSpPr>
-          <p:cNvPr id="21" name="Shape 16"/>
+          <p:cNvPr id="23" name="Shape 18"/>
           <p:cNvSpPr/>
           <p:nvPr/>
         </p:nvSpPr>
@@ -23628,7 +24870,7 @@
       </p:sp>
       <p:sp>
         <p:nvSpPr>
-          <p:cNvPr id="22" name="mdpr:1-2-dfa474:title:__title:1-2-dfa474"/>
+          <p:cNvPr id="24" name="mdpr:1-2-dfa474:title:__title:1-2-dfa474"/>
           <p:cNvSpPr txBox="1"/>
           <p:nvPr/>
         </p:nvSpPr>
@@ -23670,7 +24912,7 @@
       </p:sp>
       <p:sp>
         <p:nvSpPr>
-          <p:cNvPr id="23" name="Shape 18"/>
+          <p:cNvPr id="25" name="Shape 20"/>
           <p:cNvSpPr/>
           <p:nvPr/>
         </p:nvSpPr>
@@ -23697,7 +24939,7 @@
       </p:sp>
       <p:pic>
         <p:nvPicPr>
-          <p:cNvPr id="24" name="Image 3" descr="article icon from tabler-icons (MIT)">    </p:cNvPr>
+          <p:cNvPr id="26" name="Image 3" descr="article icon from tabler-icons (MIT)">    </p:cNvPr>
           <p:cNvPicPr>
             <a:picLocks noChangeAspect="1"/>
           </p:cNvPicPr>
@@ -23727,7 +24969,7 @@
       </p:pic>
       <p:sp>
         <p:nvSpPr>
-          <p:cNvPr id="25" name="mdpr:1-2-dfa474:item-1:block-8-chunk-1"/>
+          <p:cNvPr id="27" name="mdpr:1-2-dfa474:item-1:block-8-chunk-1"/>
           <p:cNvSpPr txBox="1"/>
           <p:nvPr/>
         </p:nvSpPr>
@@ -23786,7 +25028,7 @@
       </p:sp>
       <p:sp>
         <p:nvSpPr>
-          <p:cNvPr id="26" name="Shape 20"/>
+          <p:cNvPr id="28" name="Shape 22"/>
           <p:cNvSpPr/>
           <p:nvPr/>
         </p:nvSpPr>
@@ -23813,7 +25055,7 @@
       </p:sp>
       <p:pic>
         <p:nvPicPr>
-          <p:cNvPr id="27" name="Image 4" descr="article icon from tabler-icons (MIT)">    </p:cNvPr>
+          <p:cNvPr id="29" name="Image 4" descr="article icon from tabler-icons (MIT)">    </p:cNvPr>
           <p:cNvPicPr>
             <a:picLocks noChangeAspect="1"/>
           </p:cNvPicPr>
@@ -23843,7 +25085,7 @@
       </p:pic>
       <p:sp>
         <p:nvSpPr>
-          <p:cNvPr id="28" name="mdpr:1-2-dfa474:item-2:block-8-chunk-1"/>
+          <p:cNvPr id="30" name="mdpr:1-2-dfa474:item-2:block-8-chunk-1"/>
           <p:cNvSpPr txBox="1"/>
           <p:nvPr/>
         </p:nvSpPr>
@@ -23902,7 +25144,7 @@
       </p:sp>
       <p:sp>
         <p:nvSpPr>
-          <p:cNvPr id="29" name="Shape 22"/>
+          <p:cNvPr id="31" name="Shape 24"/>
           <p:cNvSpPr/>
           <p:nvPr/>
         </p:nvSpPr>
@@ -23929,7 +25171,7 @@
       </p:sp>
       <p:pic>
         <p:nvPicPr>
-          <p:cNvPr id="30" name="Image 5" descr="article icon from tabler-icons (MIT)">    </p:cNvPr>
+          <p:cNvPr id="32" name="Image 5" descr="article icon from tabler-icons (MIT)">    </p:cNvPr>
           <p:cNvPicPr>
             <a:picLocks noChangeAspect="1"/>
           </p:cNvPicPr>
@@ -23959,7 +25201,7 @@
       </p:pic>
       <p:sp>
         <p:nvSpPr>
-          <p:cNvPr id="31" name="mdpr:1-2-dfa474:item-3:block-8-chunk-1"/>
+          <p:cNvPr id="33" name="mdpr:1-2-dfa474:item-3:block-8-chunk-1"/>
           <p:cNvSpPr txBox="1"/>
           <p:nvPr/>
         </p:nvSpPr>
@@ -24056,29 +25298,31 @@
         </p:nvSpPr>
         <p:spPr>
           <a:xfrm>
-            <a:off x="10362895" y="502920"/>
-            <a:ext cx="822960" cy="822960"/>
-          </a:xfrm>
-          <a:prstGeom prst="ellipse">
-            <a:avLst/>
-          </a:prstGeom>
-          <a:solidFill>
-            <a:srgbClr val="F7FAFC">
-              <a:alpha val="92000"/>
+            <a:off x="493776" y="5852160"/>
+            <a:ext cx="11204143" cy="420624"/>
+          </a:xfrm>
+          <a:prstGeom prst="roundRect">
+            <a:avLst>
+              <a:gd name="adj" fmla="val 17391"/>
+            </a:avLst>
+          </a:prstGeom>
+          <a:solidFill>
+            <a:srgbClr val="DDE8F2">
+              <a:alpha val="62000"/>
             </a:srgbClr>
           </a:solidFill>
           <a:ln w="12700">
             <a:solidFill>
               <a:srgbClr val="FFFFFF">
-                <a:alpha val="0"/>
+                <a:alpha val="32000"/>
               </a:srgbClr>
             </a:solidFill>
             <a:prstDash val="solid"/>
           </a:ln>
           <a:effectLst>
-            <a:outerShdw sx="100000" sy="100000" kx="0" ky="0" algn="bl" rotWithShape="0" blurRad="15240" dist="50800" dir="2700000">
-              <a:srgbClr val="C7D0DE">
-                <a:alpha val="22000"/>
+            <a:outerShdw sx="100000" sy="100000" kx="0" ky="0" algn="bl" rotWithShape="0" blurRad="8890" dist="50800" dir="2700000">
+              <a:srgbClr val="A8B6C8">
+                <a:alpha val="8000"/>
               </a:srgbClr>
             </a:outerShdw>
           </a:effectLst>
@@ -24092,27 +25336,60 @@
         </p:nvSpPr>
         <p:spPr>
           <a:xfrm>
-            <a:off x="530352" y="5687568"/>
-            <a:ext cx="658368" cy="658368"/>
+            <a:off x="749808" y="5980176"/>
+            <a:ext cx="2103120" cy="146304"/>
+          </a:xfrm>
+          <a:prstGeom prst="roundRect">
+            <a:avLst>
+              <a:gd name="adj" fmla="val 25000"/>
+            </a:avLst>
+          </a:prstGeom>
+          <a:solidFill>
+            <a:srgbClr val="5D7FA4">
+              <a:alpha val="44000"/>
+            </a:srgbClr>
+          </a:solidFill>
+          <a:ln w="12700">
+            <a:solidFill>
+              <a:srgbClr val="5D7FA4">
+                <a:alpha val="0"/>
+              </a:srgbClr>
+            </a:solidFill>
+            <a:prstDash val="solid"/>
+          </a:ln>
+        </p:spPr>
+      </p:sp>
+      <p:sp>
+        <p:nvSpPr>
+          <p:cNvPr id="4" name="Shape 2"/>
+          <p:cNvSpPr/>
+          <p:nvPr/>
+        </p:nvSpPr>
+        <p:spPr>
+          <a:xfrm>
+            <a:off x="10710367" y="512064"/>
+            <a:ext cx="493776" cy="493776"/>
           </a:xfrm>
           <a:prstGeom prst="ellipse">
             <a:avLst/>
           </a:prstGeom>
           <a:solidFill>
-            <a:srgbClr val="EEF3F8"/>
-          </a:solidFill>
-          <a:ln w="12700">
-            <a:solidFill>
-              <a:srgbClr val="FFFFFF">
-                <a:alpha val="42000"/>
+            <a:srgbClr val="FFFFFF">
+              <a:alpha val="88000"/>
+            </a:srgbClr>
+          </a:solidFill>
+          <a:ln w="12700">
+            <a:solidFill>
+              <a:srgbClr val="CBD7E4">
+                <a:alpha val="50000"/>
               </a:srgbClr>
             </a:solidFill>
             <a:prstDash val="solid"/>
           </a:ln>
           <a:effectLst>
-            <a:outerShdw sx="100000" sy="100000" kx="0" ky="0" algn="bl" rotWithShape="0" blurRad="12700" dist="50800" dir="2700000">
-              <a:srgbClr val="B8C3D2">
-                <a:alpha val="18000"/>
+            <a:outerShdw sx="100000" sy="100000" kx="0" ky="0" algn="bl" rotWithShape="0" blurRad="11430" dist="50800" dir="2700000">
+              <a:srgbClr val="A8B6C8">
+                <a:alpha val="14000"/>
               </a:srgbClr>
             </a:outerShdw>
           </a:effectLst>
@@ -24120,38 +25397,57 @@
       </p:sp>
       <p:sp>
         <p:nvSpPr>
-          <p:cNvPr id="4" name="Shape 2"/>
-          <p:cNvSpPr/>
-          <p:nvPr/>
-        </p:nvSpPr>
-        <p:spPr>
-          <a:xfrm>
-            <a:off x="9357055" y="5907024"/>
-            <a:ext cx="2057400" cy="164592"/>
-          </a:xfrm>
-          <a:prstGeom prst="roundRect">
-            <a:avLst>
-              <a:gd name="adj" fmla="val 22222"/>
-            </a:avLst>
-          </a:prstGeom>
-          <a:solidFill>
-            <a:srgbClr val="FFFFFF">
-              <a:alpha val="72000"/>
-            </a:srgbClr>
-          </a:solidFill>
+          <p:cNvPr id="5" name="Shape 3"/>
+          <p:cNvSpPr/>
+          <p:nvPr/>
+        </p:nvSpPr>
+        <p:spPr>
+          <a:xfrm>
+            <a:off x="749808" y="749808"/>
+            <a:ext cx="1353312" cy="0"/>
+          </a:xfrm>
+          <a:prstGeom prst="line">
+            <a:avLst/>
+          </a:prstGeom>
+          <a:noFill/>
+          <a:ln w="12700">
+            <a:solidFill>
+              <a:srgbClr val="5D7FA4">
+                <a:alpha val="84000"/>
+              </a:srgbClr>
+            </a:solidFill>
+            <a:prstDash val="solid"/>
+          </a:ln>
+        </p:spPr>
+      </p:sp>
+      <p:sp>
+        <p:nvSpPr>
+          <p:cNvPr id="6" name="Shape 4"/>
+          <p:cNvSpPr/>
+          <p:nvPr/>
+        </p:nvSpPr>
+        <p:spPr>
+          <a:xfrm>
+            <a:off x="10088575" y="6144768"/>
+            <a:ext cx="1188720" cy="0"/>
+          </a:xfrm>
+          <a:prstGeom prst="line">
+            <a:avLst/>
+          </a:prstGeom>
+          <a:noFill/>
           <a:ln w="12700">
             <a:solidFill>
               <a:srgbClr val="FFFFFF">
-                <a:alpha val="0"/>
-              </a:srgbClr>
-            </a:solidFill>
-            <a:prstDash val="solid"/>
-          </a:ln>
-        </p:spPr>
-      </p:sp>
-      <p:sp>
-        <p:nvSpPr>
-          <p:cNvPr id="5" name="Shape 3"/>
+                <a:alpha val="82000"/>
+              </a:srgbClr>
+            </a:solidFill>
+            <a:prstDash val="solid"/>
+          </a:ln>
+        </p:spPr>
+      </p:sp>
+      <p:sp>
+        <p:nvSpPr>
+          <p:cNvPr id="7" name="Shape 5"/>
           <p:cNvSpPr/>
           <p:nvPr/>
         </p:nvSpPr>
@@ -24178,7 +25474,7 @@
       </p:sp>
       <p:sp>
         <p:nvSpPr>
-          <p:cNvPr id="6" name="Shape 4"/>
+          <p:cNvPr id="8" name="Shape 6"/>
           <p:cNvSpPr/>
           <p:nvPr/>
         </p:nvSpPr>
@@ -24205,7 +25501,7 @@
       </p:sp>
       <p:sp>
         <p:nvSpPr>
-          <p:cNvPr id="7" name="Shape 5"/>
+          <p:cNvPr id="9" name="Shape 7"/>
           <p:cNvSpPr/>
           <p:nvPr/>
         </p:nvSpPr>
@@ -24232,7 +25528,7 @@
       </p:sp>
       <p:sp>
         <p:nvSpPr>
-          <p:cNvPr id="8" name="mdpr:2-2-149bde:title:__title:2-2-149bde"/>
+          <p:cNvPr id="10" name="mdpr:2-2-149bde:title:__title:2-2-149bde"/>
           <p:cNvSpPr txBox="1"/>
           <p:nvPr/>
         </p:nvSpPr>
@@ -24274,7 +25570,7 @@
       </p:sp>
       <p:sp>
         <p:nvSpPr>
-          <p:cNvPr id="9" name="mdpr:2-2-149bde:left:block-8-chunk-2"/>
+          <p:cNvPr id="11" name="mdpr:2-2-149bde:left:block-8-chunk-2"/>
           <p:cNvSpPr txBox="1"/>
           <p:nvPr/>
         </p:nvSpPr>
@@ -24333,7 +25629,7 @@
       </p:sp>
       <p:sp>
         <p:nvSpPr>
-          <p:cNvPr id="10" name="mdpr:2-2-149bde:right:block-8-chunk-2"/>
+          <p:cNvPr id="12" name="mdpr:2-2-149bde:right:block-8-chunk-2"/>
           <p:cNvSpPr txBox="1"/>
           <p:nvPr/>
         </p:nvSpPr>
@@ -24430,29 +25726,31 @@
         </p:nvSpPr>
         <p:spPr>
           <a:xfrm>
-            <a:off x="10362895" y="502920"/>
-            <a:ext cx="822960" cy="822960"/>
-          </a:xfrm>
-          <a:prstGeom prst="ellipse">
-            <a:avLst/>
-          </a:prstGeom>
-          <a:solidFill>
-            <a:srgbClr val="F7FAFC">
-              <a:alpha val="92000"/>
+            <a:off x="493776" y="5852160"/>
+            <a:ext cx="11204143" cy="420624"/>
+          </a:xfrm>
+          <a:prstGeom prst="roundRect">
+            <a:avLst>
+              <a:gd name="adj" fmla="val 17391"/>
+            </a:avLst>
+          </a:prstGeom>
+          <a:solidFill>
+            <a:srgbClr val="DDE8F2">
+              <a:alpha val="62000"/>
             </a:srgbClr>
           </a:solidFill>
           <a:ln w="12700">
             <a:solidFill>
               <a:srgbClr val="FFFFFF">
-                <a:alpha val="0"/>
+                <a:alpha val="32000"/>
               </a:srgbClr>
             </a:solidFill>
             <a:prstDash val="solid"/>
           </a:ln>
           <a:effectLst>
-            <a:outerShdw sx="100000" sy="100000" kx="0" ky="0" algn="bl" rotWithShape="0" blurRad="15240" dist="50800" dir="2700000">
-              <a:srgbClr val="C7D0DE">
-                <a:alpha val="22000"/>
+            <a:outerShdw sx="100000" sy="100000" kx="0" ky="0" algn="bl" rotWithShape="0" blurRad="8890" dist="50800" dir="2700000">
+              <a:srgbClr val="A8B6C8">
+                <a:alpha val="8000"/>
               </a:srgbClr>
             </a:outerShdw>
           </a:effectLst>
@@ -24466,27 +25764,60 @@
         </p:nvSpPr>
         <p:spPr>
           <a:xfrm>
-            <a:off x="530352" y="5687568"/>
-            <a:ext cx="658368" cy="658368"/>
+            <a:off x="749808" y="5980176"/>
+            <a:ext cx="2103120" cy="146304"/>
+          </a:xfrm>
+          <a:prstGeom prst="roundRect">
+            <a:avLst>
+              <a:gd name="adj" fmla="val 25000"/>
+            </a:avLst>
+          </a:prstGeom>
+          <a:solidFill>
+            <a:srgbClr val="5D7FA4">
+              <a:alpha val="44000"/>
+            </a:srgbClr>
+          </a:solidFill>
+          <a:ln w="12700">
+            <a:solidFill>
+              <a:srgbClr val="5D7FA4">
+                <a:alpha val="0"/>
+              </a:srgbClr>
+            </a:solidFill>
+            <a:prstDash val="solid"/>
+          </a:ln>
+        </p:spPr>
+      </p:sp>
+      <p:sp>
+        <p:nvSpPr>
+          <p:cNvPr id="4" name="Shape 2"/>
+          <p:cNvSpPr/>
+          <p:nvPr/>
+        </p:nvSpPr>
+        <p:spPr>
+          <a:xfrm>
+            <a:off x="10710367" y="512064"/>
+            <a:ext cx="493776" cy="493776"/>
           </a:xfrm>
           <a:prstGeom prst="ellipse">
             <a:avLst/>
           </a:prstGeom>
           <a:solidFill>
-            <a:srgbClr val="EEF3F8"/>
-          </a:solidFill>
-          <a:ln w="12700">
-            <a:solidFill>
-              <a:srgbClr val="FFFFFF">
-                <a:alpha val="42000"/>
+            <a:srgbClr val="FFFFFF">
+              <a:alpha val="88000"/>
+            </a:srgbClr>
+          </a:solidFill>
+          <a:ln w="12700">
+            <a:solidFill>
+              <a:srgbClr val="CBD7E4">
+                <a:alpha val="50000"/>
               </a:srgbClr>
             </a:solidFill>
             <a:prstDash val="solid"/>
           </a:ln>
           <a:effectLst>
-            <a:outerShdw sx="100000" sy="100000" kx="0" ky="0" algn="bl" rotWithShape="0" blurRad="12700" dist="50800" dir="2700000">
-              <a:srgbClr val="B8C3D2">
-                <a:alpha val="18000"/>
+            <a:outerShdw sx="100000" sy="100000" kx="0" ky="0" algn="bl" rotWithShape="0" blurRad="11430" dist="50800" dir="2700000">
+              <a:srgbClr val="A8B6C8">
+                <a:alpha val="14000"/>
               </a:srgbClr>
             </a:outerShdw>
           </a:effectLst>
@@ -24494,38 +25825,57 @@
       </p:sp>
       <p:sp>
         <p:nvSpPr>
-          <p:cNvPr id="4" name="Shape 2"/>
-          <p:cNvSpPr/>
-          <p:nvPr/>
-        </p:nvSpPr>
-        <p:spPr>
-          <a:xfrm>
-            <a:off x="9357055" y="5907024"/>
-            <a:ext cx="2057400" cy="164592"/>
-          </a:xfrm>
-          <a:prstGeom prst="roundRect">
-            <a:avLst>
-              <a:gd name="adj" fmla="val 22222"/>
-            </a:avLst>
-          </a:prstGeom>
-          <a:solidFill>
-            <a:srgbClr val="FFFFFF">
-              <a:alpha val="72000"/>
-            </a:srgbClr>
-          </a:solidFill>
+          <p:cNvPr id="5" name="Shape 3"/>
+          <p:cNvSpPr/>
+          <p:nvPr/>
+        </p:nvSpPr>
+        <p:spPr>
+          <a:xfrm>
+            <a:off x="749808" y="749808"/>
+            <a:ext cx="1353312" cy="0"/>
+          </a:xfrm>
+          <a:prstGeom prst="line">
+            <a:avLst/>
+          </a:prstGeom>
+          <a:noFill/>
+          <a:ln w="12700">
+            <a:solidFill>
+              <a:srgbClr val="5D7FA4">
+                <a:alpha val="84000"/>
+              </a:srgbClr>
+            </a:solidFill>
+            <a:prstDash val="solid"/>
+          </a:ln>
+        </p:spPr>
+      </p:sp>
+      <p:sp>
+        <p:nvSpPr>
+          <p:cNvPr id="6" name="Shape 4"/>
+          <p:cNvSpPr/>
+          <p:nvPr/>
+        </p:nvSpPr>
+        <p:spPr>
+          <a:xfrm>
+            <a:off x="10088575" y="6144768"/>
+            <a:ext cx="1188720" cy="0"/>
+          </a:xfrm>
+          <a:prstGeom prst="line">
+            <a:avLst/>
+          </a:prstGeom>
+          <a:noFill/>
           <a:ln w="12700">
             <a:solidFill>
               <a:srgbClr val="FFFFFF">
-                <a:alpha val="0"/>
-              </a:srgbClr>
-            </a:solidFill>
-            <a:prstDash val="solid"/>
-          </a:ln>
-        </p:spPr>
-      </p:sp>
-      <p:sp>
-        <p:nvSpPr>
-          <p:cNvPr id="5" name="Shape 3"/>
+                <a:alpha val="82000"/>
+              </a:srgbClr>
+            </a:solidFill>
+            <a:prstDash val="solid"/>
+          </a:ln>
+        </p:spPr>
+      </p:sp>
+      <p:sp>
+        <p:nvSpPr>
+          <p:cNvPr id="7" name="Shape 5"/>
           <p:cNvSpPr/>
           <p:nvPr/>
         </p:nvSpPr>
@@ -24552,7 +25902,7 @@
       </p:sp>
       <p:sp>
         <p:nvSpPr>
-          <p:cNvPr id="6" name="Shape 4"/>
+          <p:cNvPr id="8" name="Shape 6"/>
           <p:cNvSpPr/>
           <p:nvPr/>
         </p:nvSpPr>
@@ -24579,7 +25929,7 @@
       </p:sp>
       <p:sp>
         <p:nvSpPr>
-          <p:cNvPr id="7" name="Shape 5"/>
+          <p:cNvPr id="9" name="Shape 7"/>
           <p:cNvSpPr/>
           <p:nvPr/>
         </p:nvSpPr>
@@ -24606,7 +25956,7 @@
       </p:sp>
       <p:sp>
         <p:nvSpPr>
-          <p:cNvPr id="8" name="mdpr:1-2-5a84f1:title:__title:1-2-5a84f1"/>
+          <p:cNvPr id="10" name="mdpr:1-2-5a84f1:title:__title:1-2-5a84f1"/>
           <p:cNvSpPr txBox="1"/>
           <p:nvPr/>
         </p:nvSpPr>
@@ -24648,7 +25998,7 @@
       </p:sp>
       <p:sp>
         <p:nvSpPr>
-          <p:cNvPr id="9" name="mdpr:1-2-5a84f1:left:block-10-chunk-1"/>
+          <p:cNvPr id="11" name="mdpr:1-2-5a84f1:left:block-10-chunk-1"/>
           <p:cNvSpPr txBox="1"/>
           <p:nvPr/>
         </p:nvSpPr>
@@ -24707,7 +26057,7 @@
       </p:sp>
       <p:sp>
         <p:nvSpPr>
-          <p:cNvPr id="10" name="mdpr:1-2-5a84f1:right:block-10-chunk-1"/>
+          <p:cNvPr id="12" name="mdpr:1-2-5a84f1:right:block-10-chunk-1"/>
           <p:cNvSpPr txBox="1"/>
           <p:nvPr/>
         </p:nvSpPr>

--- a/docs/theme-preview/pptx/neomorphism.pptx
+++ b/docs/theme-preview/pptx/neomorphism.pptx
@@ -5956,556 +5956,8 @@
         </p:nvSpPr>
         <p:spPr>
           <a:xfrm>
-            <a:off x="864108" y="1513332"/>
-            <a:ext cx="5029200" cy="1920240"/>
-          </a:xfrm>
-          <a:prstGeom prst="roundRect">
-            <a:avLst>
-              <a:gd name="adj" fmla="val 2857"/>
-            </a:avLst>
-          </a:prstGeom>
-          <a:solidFill>
-            <a:srgbClr val="B8C3D2">
-              <a:alpha val="26000"/>
-            </a:srgbClr>
-          </a:solidFill>
-          <a:ln w="12700">
-            <a:solidFill>
-              <a:srgbClr val="D1DAE7">
-                <a:alpha val="0"/>
-              </a:srgbClr>
-            </a:solidFill>
-            <a:prstDash val="solid"/>
-          </a:ln>
-          <a:effectLst>
-            <a:outerShdw sx="100000" sy="100000" kx="0" ky="0" algn="bl" rotWithShape="0" blurRad="13970" dist="50800" dir="2700000">
-              <a:srgbClr val="AAB5C4">
-                <a:alpha val="20000"/>
-              </a:srgbClr>
-            </a:outerShdw>
-          </a:effectLst>
-        </p:spPr>
-      </p:sp>
-      <p:sp>
-        <p:nvSpPr>
-          <p:cNvPr id="9" name="Shape 7"/>
-          <p:cNvSpPr/>
-          <p:nvPr/>
-        </p:nvSpPr>
-        <p:spPr>
-          <a:xfrm>
-            <a:off x="790956" y="1431036"/>
-            <a:ext cx="5029200" cy="1920240"/>
-          </a:xfrm>
-          <a:prstGeom prst="roundRect">
-            <a:avLst>
-              <a:gd name="adj" fmla="val 2857"/>
-            </a:avLst>
-          </a:prstGeom>
-          <a:solidFill>
-            <a:srgbClr val="FFFFFF">
-              <a:alpha val="42000"/>
-            </a:srgbClr>
-          </a:solidFill>
-          <a:ln w="12700">
-            <a:solidFill>
-              <a:srgbClr val="FFFFFF">
-                <a:alpha val="0"/>
-              </a:srgbClr>
-            </a:solidFill>
-            <a:prstDash val="solid"/>
-          </a:ln>
-          <a:effectLst>
-            <a:outerShdw sx="100000" sy="100000" kx="0" ky="0" algn="bl" rotWithShape="0" blurRad="10160" dist="50800" dir="13500000">
-              <a:srgbClr val="FFFFFF">
-                <a:alpha val="36000"/>
-              </a:srgbClr>
-            </a:outerShdw>
-          </a:effectLst>
-        </p:spPr>
-      </p:sp>
-      <p:sp>
-        <p:nvSpPr>
-          <p:cNvPr id="10" name="Shape 8"/>
-          <p:cNvSpPr/>
-          <p:nvPr/>
-        </p:nvSpPr>
-        <p:spPr>
-          <a:xfrm>
-            <a:off x="822960" y="1463040"/>
-            <a:ext cx="5029200" cy="1920240"/>
-          </a:xfrm>
-          <a:prstGeom prst="roundRect">
-            <a:avLst>
-              <a:gd name="adj" fmla="val 2857"/>
-            </a:avLst>
-          </a:prstGeom>
-          <a:solidFill>
-            <a:srgbClr val="EEF3F8">
-              <a:alpha val="6000"/>
-            </a:srgbClr>
-          </a:solidFill>
-          <a:ln w="12700">
-            <a:solidFill>
-              <a:srgbClr val="FFFFFF">
-                <a:alpha val="28000"/>
-              </a:srgbClr>
-            </a:solidFill>
-            <a:prstDash val="solid"/>
-          </a:ln>
-        </p:spPr>
-      </p:sp>
-      <p:pic>
-        <p:nvPicPr>
-          <p:cNvPr id="11" name="Image 0" descr="preencoded.png">    </p:cNvPr>
-          <p:cNvPicPr>
-            <a:picLocks noChangeAspect="1"/>
-          </p:cNvPicPr>
-          <p:nvPr/>
-        </p:nvPicPr>
-        <p:blipFill>
-          <a:blip r:embed="rId1">
-            <a:extLst>
-              <a:ext uri="{96DAC541-7B7A-43D3-8B79-37D633B846F1}">
-                <asvg:svgBlip xmlns:asvg="http://schemas.microsoft.com/office/drawing/2016/SVG/main" r:embed="rId2"/>
-              </a:ext>
-            </a:extLst>
-          </a:blip>
-          <a:stretch>
-            <a:fillRect/>
-          </a:stretch>
-        </p:blipFill>
-        <p:spPr>
-          <a:xfrm>
-            <a:off x="822960" y="1463040"/>
-            <a:ext cx="5029200" cy="1920240"/>
-          </a:xfrm>
-          <a:prstGeom prst="rect">
-            <a:avLst/>
-          </a:prstGeom>
-        </p:spPr>
-      </p:pic>
-      <p:sp>
-        <p:nvSpPr>
-          <p:cNvPr id="12" name="Shape 9"/>
-          <p:cNvSpPr/>
-          <p:nvPr/>
-        </p:nvSpPr>
-        <p:spPr>
-          <a:xfrm>
-            <a:off x="6350508" y="1513332"/>
-            <a:ext cx="5029200" cy="1920240"/>
-          </a:xfrm>
-          <a:prstGeom prst="roundRect">
-            <a:avLst>
-              <a:gd name="adj" fmla="val 2857"/>
-            </a:avLst>
-          </a:prstGeom>
-          <a:solidFill>
-            <a:srgbClr val="B8C3D2">
-              <a:alpha val="26000"/>
-            </a:srgbClr>
-          </a:solidFill>
-          <a:ln w="12700">
-            <a:solidFill>
-              <a:srgbClr val="D1DAE7">
-                <a:alpha val="0"/>
-              </a:srgbClr>
-            </a:solidFill>
-            <a:prstDash val="solid"/>
-          </a:ln>
-          <a:effectLst>
-            <a:outerShdw sx="100000" sy="100000" kx="0" ky="0" algn="bl" rotWithShape="0" blurRad="13970" dist="50800" dir="2700000">
-              <a:srgbClr val="AAB5C4">
-                <a:alpha val="20000"/>
-              </a:srgbClr>
-            </a:outerShdw>
-          </a:effectLst>
-        </p:spPr>
-      </p:sp>
-      <p:sp>
-        <p:nvSpPr>
-          <p:cNvPr id="13" name="Shape 10"/>
-          <p:cNvSpPr/>
-          <p:nvPr/>
-        </p:nvSpPr>
-        <p:spPr>
-          <a:xfrm>
-            <a:off x="6277356" y="1431036"/>
-            <a:ext cx="5029200" cy="1920240"/>
-          </a:xfrm>
-          <a:prstGeom prst="roundRect">
-            <a:avLst>
-              <a:gd name="adj" fmla="val 2857"/>
-            </a:avLst>
-          </a:prstGeom>
-          <a:solidFill>
-            <a:srgbClr val="FFFFFF">
-              <a:alpha val="42000"/>
-            </a:srgbClr>
-          </a:solidFill>
-          <a:ln w="12700">
-            <a:solidFill>
-              <a:srgbClr val="FFFFFF">
-                <a:alpha val="0"/>
-              </a:srgbClr>
-            </a:solidFill>
-            <a:prstDash val="solid"/>
-          </a:ln>
-          <a:effectLst>
-            <a:outerShdw sx="100000" sy="100000" kx="0" ky="0" algn="bl" rotWithShape="0" blurRad="10160" dist="50800" dir="13500000">
-              <a:srgbClr val="FFFFFF">
-                <a:alpha val="36000"/>
-              </a:srgbClr>
-            </a:outerShdw>
-          </a:effectLst>
-        </p:spPr>
-      </p:sp>
-      <p:sp>
-        <p:nvSpPr>
-          <p:cNvPr id="14" name="Shape 11"/>
-          <p:cNvSpPr/>
-          <p:nvPr/>
-        </p:nvSpPr>
-        <p:spPr>
-          <a:xfrm>
-            <a:off x="6309360" y="1463040"/>
-            <a:ext cx="5029200" cy="1920240"/>
-          </a:xfrm>
-          <a:prstGeom prst="roundRect">
-            <a:avLst>
-              <a:gd name="adj" fmla="val 2857"/>
-            </a:avLst>
-          </a:prstGeom>
-          <a:solidFill>
-            <a:srgbClr val="EEF3F8">
-              <a:alpha val="6000"/>
-            </a:srgbClr>
-          </a:solidFill>
-          <a:ln w="12700">
-            <a:solidFill>
-              <a:srgbClr val="FFFFFF">
-                <a:alpha val="28000"/>
-              </a:srgbClr>
-            </a:solidFill>
-            <a:prstDash val="solid"/>
-          </a:ln>
-        </p:spPr>
-      </p:sp>
-      <p:pic>
-        <p:nvPicPr>
-          <p:cNvPr id="15" name="Image 1" descr="preencoded.png">    </p:cNvPr>
-          <p:cNvPicPr>
-            <a:picLocks noChangeAspect="1"/>
-          </p:cNvPicPr>
-          <p:nvPr/>
-        </p:nvPicPr>
-        <p:blipFill>
-          <a:blip r:embed="rId3">
-            <a:extLst>
-              <a:ext uri="{96DAC541-7B7A-43D3-8B79-37D633B846F1}">
-                <asvg:svgBlip xmlns:asvg="http://schemas.microsoft.com/office/drawing/2016/SVG/main" r:embed="rId4"/>
-              </a:ext>
-            </a:extLst>
-          </a:blip>
-          <a:stretch>
-            <a:fillRect/>
-          </a:stretch>
-        </p:blipFill>
-        <p:spPr>
-          <a:xfrm>
-            <a:off x="6309360" y="1463040"/>
-            <a:ext cx="5029200" cy="1920240"/>
-          </a:xfrm>
-          <a:prstGeom prst="rect">
-            <a:avLst/>
-          </a:prstGeom>
-        </p:spPr>
-      </p:pic>
-      <p:sp>
-        <p:nvSpPr>
-          <p:cNvPr id="16" name="Shape 12"/>
-          <p:cNvSpPr/>
-          <p:nvPr/>
-        </p:nvSpPr>
-        <p:spPr>
-          <a:xfrm>
-            <a:off x="864108" y="3799332"/>
-            <a:ext cx="5029200" cy="1920240"/>
-          </a:xfrm>
-          <a:prstGeom prst="roundRect">
-            <a:avLst>
-              <a:gd name="adj" fmla="val 2857"/>
-            </a:avLst>
-          </a:prstGeom>
-          <a:solidFill>
-            <a:srgbClr val="B8C3D2">
-              <a:alpha val="26000"/>
-            </a:srgbClr>
-          </a:solidFill>
-          <a:ln w="12700">
-            <a:solidFill>
-              <a:srgbClr val="D1DAE7">
-                <a:alpha val="0"/>
-              </a:srgbClr>
-            </a:solidFill>
-            <a:prstDash val="solid"/>
-          </a:ln>
-          <a:effectLst>
-            <a:outerShdw sx="100000" sy="100000" kx="0" ky="0" algn="bl" rotWithShape="0" blurRad="13970" dist="50800" dir="2700000">
-              <a:srgbClr val="AAB5C4">
-                <a:alpha val="20000"/>
-              </a:srgbClr>
-            </a:outerShdw>
-          </a:effectLst>
-        </p:spPr>
-      </p:sp>
-      <p:sp>
-        <p:nvSpPr>
-          <p:cNvPr id="17" name="Shape 13"/>
-          <p:cNvSpPr/>
-          <p:nvPr/>
-        </p:nvSpPr>
-        <p:spPr>
-          <a:xfrm>
-            <a:off x="790956" y="3717036"/>
-            <a:ext cx="5029200" cy="1920240"/>
-          </a:xfrm>
-          <a:prstGeom prst="roundRect">
-            <a:avLst>
-              <a:gd name="adj" fmla="val 2857"/>
-            </a:avLst>
-          </a:prstGeom>
-          <a:solidFill>
-            <a:srgbClr val="FFFFFF">
-              <a:alpha val="42000"/>
-            </a:srgbClr>
-          </a:solidFill>
-          <a:ln w="12700">
-            <a:solidFill>
-              <a:srgbClr val="FFFFFF">
-                <a:alpha val="0"/>
-              </a:srgbClr>
-            </a:solidFill>
-            <a:prstDash val="solid"/>
-          </a:ln>
-          <a:effectLst>
-            <a:outerShdw sx="100000" sy="100000" kx="0" ky="0" algn="bl" rotWithShape="0" blurRad="10160" dist="50800" dir="13500000">
-              <a:srgbClr val="FFFFFF">
-                <a:alpha val="36000"/>
-              </a:srgbClr>
-            </a:outerShdw>
-          </a:effectLst>
-        </p:spPr>
-      </p:sp>
-      <p:sp>
-        <p:nvSpPr>
-          <p:cNvPr id="18" name="Shape 14"/>
-          <p:cNvSpPr/>
-          <p:nvPr/>
-        </p:nvSpPr>
-        <p:spPr>
-          <a:xfrm>
-            <a:off x="822960" y="3749040"/>
-            <a:ext cx="5029200" cy="1920240"/>
-          </a:xfrm>
-          <a:prstGeom prst="roundRect">
-            <a:avLst>
-              <a:gd name="adj" fmla="val 2857"/>
-            </a:avLst>
-          </a:prstGeom>
-          <a:solidFill>
-            <a:srgbClr val="EEF3F8">
-              <a:alpha val="6000"/>
-            </a:srgbClr>
-          </a:solidFill>
-          <a:ln w="12700">
-            <a:solidFill>
-              <a:srgbClr val="FFFFFF">
-                <a:alpha val="28000"/>
-              </a:srgbClr>
-            </a:solidFill>
-            <a:prstDash val="solid"/>
-          </a:ln>
-        </p:spPr>
-      </p:sp>
-      <p:pic>
-        <p:nvPicPr>
-          <p:cNvPr id="19" name="Image 2" descr="preencoded.png">    </p:cNvPr>
-          <p:cNvPicPr>
-            <a:picLocks noChangeAspect="1"/>
-          </p:cNvPicPr>
-          <p:nvPr/>
-        </p:nvPicPr>
-        <p:blipFill>
-          <a:blip r:embed="rId5">
-            <a:extLst>
-              <a:ext uri="{96DAC541-7B7A-43D3-8B79-37D633B846F1}">
-                <asvg:svgBlip xmlns:asvg="http://schemas.microsoft.com/office/drawing/2016/SVG/main" r:embed="rId6"/>
-              </a:ext>
-            </a:extLst>
-          </a:blip>
-          <a:stretch>
-            <a:fillRect/>
-          </a:stretch>
-        </p:blipFill>
-        <p:spPr>
-          <a:xfrm>
-            <a:off x="822960" y="3749040"/>
-            <a:ext cx="5029200" cy="1920240"/>
-          </a:xfrm>
-          <a:prstGeom prst="rect">
-            <a:avLst/>
-          </a:prstGeom>
-        </p:spPr>
-      </p:pic>
-      <p:sp>
-        <p:nvSpPr>
-          <p:cNvPr id="20" name="Shape 15"/>
-          <p:cNvSpPr/>
-          <p:nvPr/>
-        </p:nvSpPr>
-        <p:spPr>
-          <a:xfrm>
-            <a:off x="6350508" y="3799332"/>
-            <a:ext cx="5029200" cy="1920240"/>
-          </a:xfrm>
-          <a:prstGeom prst="roundRect">
-            <a:avLst>
-              <a:gd name="adj" fmla="val 2857"/>
-            </a:avLst>
-          </a:prstGeom>
-          <a:solidFill>
-            <a:srgbClr val="B8C3D2">
-              <a:alpha val="26000"/>
-            </a:srgbClr>
-          </a:solidFill>
-          <a:ln w="12700">
-            <a:solidFill>
-              <a:srgbClr val="D1DAE7">
-                <a:alpha val="0"/>
-              </a:srgbClr>
-            </a:solidFill>
-            <a:prstDash val="solid"/>
-          </a:ln>
-          <a:effectLst>
-            <a:outerShdw sx="100000" sy="100000" kx="0" ky="0" algn="bl" rotWithShape="0" blurRad="13970" dist="50800" dir="2700000">
-              <a:srgbClr val="AAB5C4">
-                <a:alpha val="20000"/>
-              </a:srgbClr>
-            </a:outerShdw>
-          </a:effectLst>
-        </p:spPr>
-      </p:sp>
-      <p:sp>
-        <p:nvSpPr>
-          <p:cNvPr id="21" name="Shape 16"/>
-          <p:cNvSpPr/>
-          <p:nvPr/>
-        </p:nvSpPr>
-        <p:spPr>
-          <a:xfrm>
-            <a:off x="6277356" y="3717036"/>
-            <a:ext cx="5029200" cy="1920240"/>
-          </a:xfrm>
-          <a:prstGeom prst="roundRect">
-            <a:avLst>
-              <a:gd name="adj" fmla="val 2857"/>
-            </a:avLst>
-          </a:prstGeom>
-          <a:solidFill>
-            <a:srgbClr val="FFFFFF">
-              <a:alpha val="42000"/>
-            </a:srgbClr>
-          </a:solidFill>
-          <a:ln w="12700">
-            <a:solidFill>
-              <a:srgbClr val="FFFFFF">
-                <a:alpha val="0"/>
-              </a:srgbClr>
-            </a:solidFill>
-            <a:prstDash val="solid"/>
-          </a:ln>
-          <a:effectLst>
-            <a:outerShdw sx="100000" sy="100000" kx="0" ky="0" algn="bl" rotWithShape="0" blurRad="10160" dist="50800" dir="13500000">
-              <a:srgbClr val="FFFFFF">
-                <a:alpha val="36000"/>
-              </a:srgbClr>
-            </a:outerShdw>
-          </a:effectLst>
-        </p:spPr>
-      </p:sp>
-      <p:sp>
-        <p:nvSpPr>
-          <p:cNvPr id="22" name="Shape 17"/>
-          <p:cNvSpPr/>
-          <p:nvPr/>
-        </p:nvSpPr>
-        <p:spPr>
-          <a:xfrm>
-            <a:off x="6309360" y="3749040"/>
-            <a:ext cx="5029200" cy="1920240"/>
-          </a:xfrm>
-          <a:prstGeom prst="roundRect">
-            <a:avLst>
-              <a:gd name="adj" fmla="val 2857"/>
-            </a:avLst>
-          </a:prstGeom>
-          <a:solidFill>
-            <a:srgbClr val="EEF3F8">
-              <a:alpha val="6000"/>
-            </a:srgbClr>
-          </a:solidFill>
-          <a:ln w="12700">
-            <a:solidFill>
-              <a:srgbClr val="FFFFFF">
-                <a:alpha val="28000"/>
-              </a:srgbClr>
-            </a:solidFill>
-            <a:prstDash val="solid"/>
-          </a:ln>
-        </p:spPr>
-      </p:sp>
-      <p:pic>
-        <p:nvPicPr>
-          <p:cNvPr id="23" name="Image 3" descr="preencoded.png">    </p:cNvPr>
-          <p:cNvPicPr>
-            <a:picLocks noChangeAspect="1"/>
-          </p:cNvPicPr>
-          <p:nvPr/>
-        </p:nvPicPr>
-        <p:blipFill>
-          <a:blip r:embed="rId7">
-            <a:extLst>
-              <a:ext uri="{96DAC541-7B7A-43D3-8B79-37D633B846F1}">
-                <asvg:svgBlip xmlns:asvg="http://schemas.microsoft.com/office/drawing/2016/SVG/main" r:embed="rId8"/>
-              </a:ext>
-            </a:extLst>
-          </a:blip>
-          <a:stretch>
-            <a:fillRect/>
-          </a:stretch>
-        </p:blipFill>
-        <p:spPr>
-          <a:xfrm>
-            <a:off x="6309360" y="3749040"/>
-            <a:ext cx="5029200" cy="1920240"/>
-          </a:xfrm>
-          <a:prstGeom prst="rect">
-            <a:avLst/>
-          </a:prstGeom>
-        </p:spPr>
-      </p:pic>
-      <p:sp>
-        <p:nvSpPr>
-          <p:cNvPr id="24" name="Shape 18"/>
-          <p:cNvSpPr/>
-          <p:nvPr/>
-        </p:nvSpPr>
-        <p:spPr>
-          <a:xfrm>
-            <a:off x="822960" y="1463040"/>
-            <a:ext cx="73152" cy="1920240"/>
+            <a:off x="822960" y="1389888"/>
+            <a:ext cx="4937760" cy="73152"/>
           </a:xfrm>
           <a:prstGeom prst="rect">
             <a:avLst/>
@@ -6525,41 +5977,14 @@
       </p:sp>
       <p:sp>
         <p:nvSpPr>
-          <p:cNvPr id="25" name="Shape 19"/>
-          <p:cNvSpPr/>
-          <p:nvPr/>
-        </p:nvSpPr>
-        <p:spPr>
-          <a:xfrm>
-            <a:off x="6309360" y="1463040"/>
-            <a:ext cx="73152" cy="1920240"/>
-          </a:xfrm>
-          <a:prstGeom prst="rect">
-            <a:avLst/>
-          </a:prstGeom>
-          <a:solidFill>
-            <a:srgbClr val="D8E2EE"/>
-          </a:solidFill>
-          <a:ln w="12700">
-            <a:solidFill>
-              <a:srgbClr val="D8E2EE">
-                <a:alpha val="0"/>
-              </a:srgbClr>
-            </a:solidFill>
-            <a:prstDash val="solid"/>
-          </a:ln>
-        </p:spPr>
-      </p:sp>
-      <p:sp>
-        <p:nvSpPr>
-          <p:cNvPr id="26" name="Shape 20"/>
-          <p:cNvSpPr/>
-          <p:nvPr/>
-        </p:nvSpPr>
-        <p:spPr>
-          <a:xfrm>
-            <a:off x="822960" y="3749040"/>
-            <a:ext cx="73152" cy="1920240"/>
+          <p:cNvPr id="9" name="Shape 7"/>
+          <p:cNvSpPr/>
+          <p:nvPr/>
+        </p:nvSpPr>
+        <p:spPr>
+          <a:xfrm>
+            <a:off x="6400800" y="1389888"/>
+            <a:ext cx="4937760" cy="73152"/>
           </a:xfrm>
           <a:prstGeom prst="rect">
             <a:avLst/>
@@ -6579,34 +6004,7 @@
       </p:sp>
       <p:sp>
         <p:nvSpPr>
-          <p:cNvPr id="27" name="Shape 21"/>
-          <p:cNvSpPr/>
-          <p:nvPr/>
-        </p:nvSpPr>
-        <p:spPr>
-          <a:xfrm>
-            <a:off x="6309360" y="3749040"/>
-            <a:ext cx="73152" cy="1920240"/>
-          </a:xfrm>
-          <a:prstGeom prst="rect">
-            <a:avLst/>
-          </a:prstGeom>
-          <a:solidFill>
-            <a:srgbClr val="D8E2EE"/>
-          </a:solidFill>
-          <a:ln w="12700">
-            <a:solidFill>
-              <a:srgbClr val="D8E2EE">
-                <a:alpha val="0"/>
-              </a:srgbClr>
-            </a:solidFill>
-            <a:prstDash val="solid"/>
-          </a:ln>
-        </p:spPr>
-      </p:sp>
-      <p:sp>
-        <p:nvSpPr>
-          <p:cNvPr id="28" name="mdpr:1-2-e3669a:title:__title:1-2-e3669a"/>
+          <p:cNvPr id="10" name="mdpr:1-2-e3669a:title:__title:1-2-e3669a"/>
           <p:cNvSpPr txBox="1"/>
           <p:nvPr/>
         </p:nvSpPr>
@@ -6648,71 +6046,14 @@
       </p:sp>
       <p:sp>
         <p:nvSpPr>
-          <p:cNvPr id="29" name="Shape 23"/>
-          <p:cNvSpPr/>
-          <p:nvPr/>
-        </p:nvSpPr>
-        <p:spPr>
-          <a:xfrm>
-            <a:off x="976122" y="2130552"/>
-            <a:ext cx="585216" cy="585216"/>
-          </a:xfrm>
-          <a:prstGeom prst="roundRect">
-            <a:avLst>
-              <a:gd name="adj" fmla="val 6250"/>
-            </a:avLst>
-          </a:prstGeom>
-          <a:solidFill>
-            <a:srgbClr val="EEF3F8"/>
-          </a:solidFill>
-          <a:ln w="12700">
-            <a:solidFill>
-              <a:srgbClr val="D1DAE7"/>
-            </a:solidFill>
-            <a:prstDash val="solid"/>
-          </a:ln>
-        </p:spPr>
-      </p:sp>
-      <p:pic>
-        <p:nvPicPr>
-          <p:cNvPr id="30" name="Image 4" descr="article icon from tabler-icons (MIT)">    </p:cNvPr>
-          <p:cNvPicPr>
-            <a:picLocks noChangeAspect="1"/>
-          </p:cNvPicPr>
-          <p:nvPr/>
-        </p:nvPicPr>
-        <p:blipFill>
-          <a:blip r:embed="rId9">
-            <a:extLst>
-              <a:ext uri="{96DAC541-7B7A-43D3-8B79-37D633B846F1}">
-                <asvg:svgBlip xmlns:asvg="http://schemas.microsoft.com/office/drawing/2016/SVG/main" r:embed="rId10"/>
-              </a:ext>
-            </a:extLst>
-          </a:blip>
-          <a:stretch>
-            <a:fillRect/>
-          </a:stretch>
-        </p:blipFill>
-        <p:spPr>
-          <a:xfrm>
-            <a:off x="1049274" y="2203704"/>
-            <a:ext cx="438912" cy="438912"/>
-          </a:xfrm>
-          <a:prstGeom prst="rect">
-            <a:avLst/>
-          </a:prstGeom>
-        </p:spPr>
-      </p:pic>
-      <p:sp>
-        <p:nvSpPr>
-          <p:cNvPr id="31" name="mdpr:1-2-e3669a:item-1:block-15-chunk-1"/>
+          <p:cNvPr id="11" name="mdpr:1-2-e3669a:left:block-15-chunk-1-block-15-chunk-1"/>
           <p:cNvSpPr txBox="1"/>
           <p:nvPr/>
         </p:nvSpPr>
         <p:spPr>
           <a:xfrm>
-            <a:off x="1689354" y="1627632"/>
-            <a:ext cx="3961638" cy="1591056"/>
+            <a:off x="896112" y="1499616"/>
+            <a:ext cx="4791456" cy="4398264"/>
           </a:xfrm>
           <a:prstGeom prst="rect">
             <a:avLst/>
@@ -6721,7 +6062,7 @@
           <a:ln/>
         </p:spPr>
         <p:txBody>
-          <a:bodyPr wrap="square" lIns="0" tIns="25400" rIns="25400" bIns="0" rtlCol="0" anchor="ctr"/>
+          <a:bodyPr wrap="square" lIns="0" tIns="25400" rIns="25400" bIns="0" rtlCol="0" anchor="t"/>
           <a:lstStyle/>
           <a:p>
             <a:pPr algn="l" indent="0" marL="0">
@@ -6731,7 +6072,7 @@
               <a:buNone/>
             </a:pPr>
             <a:r>
-              <a:rPr lang="en-US" sz="2200" b="1" dirty="0">
+              <a:rPr lang="en-US" sz="1800" b="1" dirty="0">
                 <a:solidFill>
                   <a:srgbClr val="5D7FA4"/>
                 </a:solidFill>
@@ -6739,7 +6080,7 @@
                 <a:ea typeface="Pretendard" pitchFamily="34" charset="-122"/>
                 <a:cs typeface="Pretendard" pitchFamily="34" charset="-120"/>
               </a:rPr>
-              <a:t>Surfaces</a:t>
+              <a:t>- Surfaces</a:t>
             </a:r>
             <a:pPr algn="l" indent="0" marL="0">
               <a:lnSpc>
@@ -6748,7 +6089,7 @@
               <a:buNone/>
             </a:pPr>
             <a:r>
-              <a:rPr lang="en-US" sz="2200" dirty="0">
+              <a:rPr lang="en-US" sz="1800" dirty="0">
                 <a:solidFill>
                   <a:srgbClr val="111111"/>
                 </a:solidFill>
@@ -6758,77 +6099,60 @@
               </a:rPr>
               <a:t>  rounded-card, two-corner-card, flag-drop, ticket-panel, notched-panel, circle-vine.</a:t>
             </a:r>
-            <a:endParaRPr lang="en-US" sz="2200" dirty="0"/>
+            <a:endParaRPr lang="en-US" sz="1800" dirty="0"/>
+          </a:p>
+          <a:p>
+            <a:pPr algn="l" indent="0" marL="0">
+              <a:lnSpc>
+                <a:spcPct val="120000"/>
+              </a:lnSpc>
+              <a:buNone/>
+            </a:pPr>
+            <a:r>
+              <a:rPr lang="en-US" sz="1800" b="1" dirty="0">
+                <a:solidFill>
+                  <a:srgbClr val="5D7FA4"/>
+                </a:solidFill>
+                <a:latin typeface="Pretendard" pitchFamily="34" charset="0"/>
+                <a:ea typeface="Pretendard" pitchFamily="34" charset="-122"/>
+                <a:cs typeface="Pretendard" pitchFamily="34" charset="-120"/>
+              </a:rPr>
+              <a:t>- Layouts</a:t>
+            </a:r>
+            <a:endParaRPr lang="en-US" sz="1800" dirty="0"/>
+          </a:p>
+          <a:p>
+            <a:pPr algn="l" indent="0" marL="0">
+              <a:lnSpc>
+                <a:spcPct val="120000"/>
+              </a:lnSpc>
+              <a:buNone/>
+            </a:pPr>
+            <a:r>
+              <a:rPr lang="en-US" sz="1800" dirty="0">
+                <a:solidFill>
+                  <a:srgbClr val="111111"/>
+                </a:solidFill>
+                <a:latin typeface="Pretendard" pitchFamily="34" charset="0"/>
+                <a:ea typeface="Pretendard" pitchFamily="34" charset="-122"/>
+                <a:cs typeface="Pretendard" pitchFamily="34" charset="-120"/>
+              </a:rPr>
+              <a:t>  toc-strips, two-column-compare, three-card-grid, six-tile-grid, timeline-rail, pipeline-chain.</a:t>
+            </a:r>
+            <a:endParaRPr lang="en-US" sz="1800" dirty="0"/>
           </a:p>
         </p:txBody>
       </p:sp>
       <p:sp>
         <p:nvSpPr>
-          <p:cNvPr id="32" name="Shape 25"/>
-          <p:cNvSpPr/>
-          <p:nvPr/>
-        </p:nvSpPr>
-        <p:spPr>
-          <a:xfrm>
-            <a:off x="6462522" y="2130552"/>
-            <a:ext cx="585216" cy="585216"/>
-          </a:xfrm>
-          <a:prstGeom prst="roundRect">
-            <a:avLst>
-              <a:gd name="adj" fmla="val 6250"/>
-            </a:avLst>
-          </a:prstGeom>
-          <a:solidFill>
-            <a:srgbClr val="EEF3F8"/>
-          </a:solidFill>
-          <a:ln w="12700">
-            <a:solidFill>
-              <a:srgbClr val="D1DAE7"/>
-            </a:solidFill>
-            <a:prstDash val="solid"/>
-          </a:ln>
-        </p:spPr>
-      </p:sp>
-      <p:pic>
-        <p:nvPicPr>
-          <p:cNvPr id="33" name="Image 5" descr="table icon from tabler-icons (MIT)">    </p:cNvPr>
-          <p:cNvPicPr>
-            <a:picLocks noChangeAspect="1"/>
-          </p:cNvPicPr>
-          <p:nvPr/>
-        </p:nvPicPr>
-        <p:blipFill>
-          <a:blip r:embed="rId11">
-            <a:extLst>
-              <a:ext uri="{96DAC541-7B7A-43D3-8B79-37D633B846F1}">
-                <asvg:svgBlip xmlns:asvg="http://schemas.microsoft.com/office/drawing/2016/SVG/main" r:embed="rId12"/>
-              </a:ext>
-            </a:extLst>
-          </a:blip>
-          <a:stretch>
-            <a:fillRect/>
-          </a:stretch>
-        </p:blipFill>
-        <p:spPr>
-          <a:xfrm>
-            <a:off x="6535674" y="2203704"/>
-            <a:ext cx="438912" cy="438912"/>
-          </a:xfrm>
-          <a:prstGeom prst="rect">
-            <a:avLst/>
-          </a:prstGeom>
-        </p:spPr>
-      </p:pic>
-      <p:sp>
-        <p:nvSpPr>
-          <p:cNvPr id="34" name="mdpr:1-2-e3669a:item-2:block-15-chunk-1"/>
+          <p:cNvPr id="12" name="mdpr:1-2-e3669a:right:block-15-chunk-1-block-15-chunk-1"/>
           <p:cNvSpPr txBox="1"/>
           <p:nvPr/>
         </p:nvSpPr>
         <p:spPr>
           <a:xfrm>
-            <a:off x="7175754" y="1627632"/>
-            <a:ext cx="3961638" cy="1591056"/>
+            <a:off x="6473952" y="1499616"/>
+            <a:ext cx="4791456" cy="4398264"/>
           </a:xfrm>
           <a:prstGeom prst="rect">
             <a:avLst/>
@@ -6837,7 +6161,7 @@
           <a:ln/>
         </p:spPr>
         <p:txBody>
-          <a:bodyPr wrap="square" lIns="0" tIns="25400" rIns="25400" bIns="0" rtlCol="0" anchor="ctr"/>
+          <a:bodyPr wrap="square" lIns="0" tIns="25400" rIns="25400" bIns="0" rtlCol="0" anchor="t"/>
           <a:lstStyle/>
           <a:p>
             <a:pPr algn="l" indent="0" marL="0">
@@ -6847,7 +6171,7 @@
               <a:buNone/>
             </a:pPr>
             <a:r>
-              <a:rPr lang="en-US" sz="2200" b="1" dirty="0">
+              <a:rPr lang="en-US" sz="1800" b="1" dirty="0">
                 <a:solidFill>
                   <a:srgbClr val="5D7FA4"/>
                 </a:solidFill>
@@ -6855,7 +6179,7 @@
                 <a:ea typeface="Pretendard" pitchFamily="34" charset="-122"/>
                 <a:cs typeface="Pretendard" pitchFamily="34" charset="-120"/>
               </a:rPr>
-              <a:t>Layouts</a:t>
+              <a:t>- Evidence</a:t>
             </a:r>
             <a:pPr algn="l" indent="0" marL="0">
               <a:lnSpc>
@@ -6864,123 +6188,7 @@
               <a:buNone/>
             </a:pPr>
             <a:r>
-              <a:rPr lang="en-US" sz="2200" dirty="0">
-                <a:solidFill>
-                  <a:srgbClr val="111111"/>
-                </a:solidFill>
-                <a:latin typeface="Pretendard" pitchFamily="34" charset="0"/>
-                <a:ea typeface="Pretendard" pitchFamily="34" charset="-122"/>
-                <a:cs typeface="Pretendard" pitchFamily="34" charset="-120"/>
-              </a:rPr>
-              <a:t>  toc-strips, two-column-compare, three-card-grid, six-tile-grid, timeline-rail, pipeline-chain.</a:t>
-            </a:r>
-            <a:endParaRPr lang="en-US" sz="2200" dirty="0"/>
-          </a:p>
-        </p:txBody>
-      </p:sp>
-      <p:sp>
-        <p:nvSpPr>
-          <p:cNvPr id="35" name="Shape 27"/>
-          <p:cNvSpPr/>
-          <p:nvPr/>
-        </p:nvSpPr>
-        <p:spPr>
-          <a:xfrm>
-            <a:off x="976122" y="4416552"/>
-            <a:ext cx="585216" cy="585216"/>
-          </a:xfrm>
-          <a:prstGeom prst="roundRect">
-            <a:avLst>
-              <a:gd name="adj" fmla="val 6250"/>
-            </a:avLst>
-          </a:prstGeom>
-          <a:solidFill>
-            <a:srgbClr val="EEF3F8"/>
-          </a:solidFill>
-          <a:ln w="12700">
-            <a:solidFill>
-              <a:srgbClr val="D1DAE7"/>
-            </a:solidFill>
-            <a:prstDash val="solid"/>
-          </a:ln>
-        </p:spPr>
-      </p:sp>
-      <p:pic>
-        <p:nvPicPr>
-          <p:cNvPr id="36" name="Image 6" descr="chart icon from tabler-icons (MIT)">    </p:cNvPr>
-          <p:cNvPicPr>
-            <a:picLocks noChangeAspect="1"/>
-          </p:cNvPicPr>
-          <p:nvPr/>
-        </p:nvPicPr>
-        <p:blipFill>
-          <a:blip r:embed="rId13">
-            <a:extLst>
-              <a:ext uri="{96DAC541-7B7A-43D3-8B79-37D633B846F1}">
-                <asvg:svgBlip xmlns:asvg="http://schemas.microsoft.com/office/drawing/2016/SVG/main" r:embed="rId14"/>
-              </a:ext>
-            </a:extLst>
-          </a:blip>
-          <a:stretch>
-            <a:fillRect/>
-          </a:stretch>
-        </p:blipFill>
-        <p:spPr>
-          <a:xfrm>
-            <a:off x="1049274" y="4489704"/>
-            <a:ext cx="438912" cy="438912"/>
-          </a:xfrm>
-          <a:prstGeom prst="rect">
-            <a:avLst/>
-          </a:prstGeom>
-        </p:spPr>
-      </p:pic>
-      <p:sp>
-        <p:nvSpPr>
-          <p:cNvPr id="37" name="mdpr:1-2-e3669a:item-3:block-15-chunk-1"/>
-          <p:cNvSpPr txBox="1"/>
-          <p:nvPr/>
-        </p:nvSpPr>
-        <p:spPr>
-          <a:xfrm>
-            <a:off x="1689354" y="3913632"/>
-            <a:ext cx="3961638" cy="1591056"/>
-          </a:xfrm>
-          <a:prstGeom prst="rect">
-            <a:avLst/>
-          </a:prstGeom>
-          <a:noFill/>
-          <a:ln/>
-        </p:spPr>
-        <p:txBody>
-          <a:bodyPr wrap="square" lIns="0" tIns="25400" rIns="25400" bIns="0" rtlCol="0" anchor="ctr"/>
-          <a:lstStyle/>
-          <a:p>
-            <a:pPr algn="l" indent="0" marL="0">
-              <a:lnSpc>
-                <a:spcPct val="120000"/>
-              </a:lnSpc>
-              <a:buNone/>
-            </a:pPr>
-            <a:r>
-              <a:rPr lang="en-US" sz="2200" b="1" dirty="0">
-                <a:solidFill>
-                  <a:srgbClr val="5D7FA4"/>
-                </a:solidFill>
-                <a:latin typeface="Pretendard" pitchFamily="34" charset="0"/>
-                <a:ea typeface="Pretendard" pitchFamily="34" charset="-122"/>
-                <a:cs typeface="Pretendard" pitchFamily="34" charset="-120"/>
-              </a:rPr>
-              <a:t>Evidence</a:t>
-            </a:r>
-            <a:pPr algn="l" indent="0" marL="0">
-              <a:lnSpc>
-                <a:spcPct val="120000"/>
-              </a:lnSpc>
-              <a:buNone/>
-            </a:pPr>
-            <a:r>
-              <a:rPr lang="en-US" sz="2200" dirty="0">
+              <a:rPr lang="en-US" sz="1800" dirty="0">
                 <a:solidFill>
                   <a:srgbClr val="111111"/>
                 </a:solidFill>
@@ -6990,87 +6198,8 @@
               </a:rPr>
               <a:t>  chart-table-pair, metric-proof, arc-ring-proof, gauge-proof, connected-strip, mixed-object-pack.</a:t>
             </a:r>
-            <a:endParaRPr lang="en-US" sz="2200" dirty="0"/>
+            <a:endParaRPr lang="en-US" sz="1800" dirty="0"/>
           </a:p>
-        </p:txBody>
-      </p:sp>
-      <p:sp>
-        <p:nvSpPr>
-          <p:cNvPr id="38" name="Shape 29"/>
-          <p:cNvSpPr/>
-          <p:nvPr/>
-        </p:nvSpPr>
-        <p:spPr>
-          <a:xfrm>
-            <a:off x="6462522" y="4416552"/>
-            <a:ext cx="585216" cy="585216"/>
-          </a:xfrm>
-          <a:prstGeom prst="roundRect">
-            <a:avLst>
-              <a:gd name="adj" fmla="val 6250"/>
-            </a:avLst>
-          </a:prstGeom>
-          <a:solidFill>
-            <a:srgbClr val="EEF3F8"/>
-          </a:solidFill>
-          <a:ln w="12700">
-            <a:solidFill>
-              <a:srgbClr val="D1DAE7"/>
-            </a:solidFill>
-            <a:prstDash val="solid"/>
-          </a:ln>
-        </p:spPr>
-      </p:sp>
-      <p:pic>
-        <p:nvPicPr>
-          <p:cNvPr id="39" name="Image 7" descr="flow icon from tabler-icons (MIT)">    </p:cNvPr>
-          <p:cNvPicPr>
-            <a:picLocks noChangeAspect="1"/>
-          </p:cNvPicPr>
-          <p:nvPr/>
-        </p:nvPicPr>
-        <p:blipFill>
-          <a:blip r:embed="rId15">
-            <a:extLst>
-              <a:ext uri="{96DAC541-7B7A-43D3-8B79-37D633B846F1}">
-                <asvg:svgBlip xmlns:asvg="http://schemas.microsoft.com/office/drawing/2016/SVG/main" r:embed="rId16"/>
-              </a:ext>
-            </a:extLst>
-          </a:blip>
-          <a:stretch>
-            <a:fillRect/>
-          </a:stretch>
-        </p:blipFill>
-        <p:spPr>
-          <a:xfrm>
-            <a:off x="6535674" y="4489704"/>
-            <a:ext cx="438912" cy="438912"/>
-          </a:xfrm>
-          <a:prstGeom prst="rect">
-            <a:avLst/>
-          </a:prstGeom>
-        </p:spPr>
-      </p:pic>
-      <p:sp>
-        <p:nvSpPr>
-          <p:cNvPr id="40" name="mdpr:1-2-e3669a:item-4:block-15-chunk-1"/>
-          <p:cNvSpPr txBox="1"/>
-          <p:nvPr/>
-        </p:nvSpPr>
-        <p:spPr>
-          <a:xfrm>
-            <a:off x="7175754" y="3913632"/>
-            <a:ext cx="3961638" cy="1591056"/>
-          </a:xfrm>
-          <a:prstGeom prst="rect">
-            <a:avLst/>
-          </a:prstGeom>
-          <a:noFill/>
-          <a:ln/>
-        </p:spPr>
-        <p:txBody>
-          <a:bodyPr wrap="square" lIns="0" tIns="25400" rIns="25400" bIns="0" rtlCol="0" anchor="ctr"/>
-          <a:lstStyle/>
           <a:p>
             <a:pPr algn="l" indent="0" marL="0">
               <a:lnSpc>
@@ -7079,7 +6208,7 @@
               <a:buNone/>
             </a:pPr>
             <a:r>
-              <a:rPr lang="en-US" sz="2200" b="1" dirty="0">
+              <a:rPr lang="en-US" sz="1800" b="1" dirty="0">
                 <a:solidFill>
                   <a:srgbClr val="5D7FA4"/>
                 </a:solidFill>
@@ -7087,8 +6216,11 @@
                 <a:ea typeface="Pretendard" pitchFamily="34" charset="-122"/>
                 <a:cs typeface="Pretendard" pitchFamily="34" charset="-120"/>
               </a:rPr>
-              <a:t>Connectors</a:t>
+              <a:t>- Connectors</a:t>
             </a:r>
+            <a:endParaRPr lang="en-US" sz="1800" dirty="0"/>
+          </a:p>
+          <a:p>
             <a:pPr algn="l" indent="0" marL="0">
               <a:lnSpc>
                 <a:spcPct val="120000"/>
@@ -7096,7 +6228,7 @@
               <a:buNone/>
             </a:pPr>
             <a:r>
-              <a:rPr lang="en-US" sz="2200" dirty="0">
+              <a:rPr lang="en-US" sz="1800" dirty="0">
                 <a:solidFill>
                   <a:srgbClr val="111111"/>
                 </a:solidFill>
@@ -7106,7 +6238,7 @@
               </a:rPr>
               <a:t>  straight-arrow, elbow-arrow, boundary-attach, overlap-joint, parallel-flow, contrast-flow.</a:t>
             </a:r>
-            <a:endParaRPr lang="en-US" sz="2200" dirty="0"/>
+            <a:endParaRPr lang="en-US" sz="1800" dirty="0"/>
           </a:p>
         </p:txBody>
       </p:sp>
@@ -13705,71 +12837,14 @@
       </p:sp>
       <p:sp>
         <p:nvSpPr>
-          <p:cNvPr id="25" name="Shape 20"/>
-          <p:cNvSpPr/>
-          <p:nvPr/>
-        </p:nvSpPr>
-        <p:spPr>
-          <a:xfrm>
-            <a:off x="1097280" y="2140428"/>
-            <a:ext cx="474025" cy="474025"/>
-          </a:xfrm>
-          <a:prstGeom prst="roundRect">
-            <a:avLst>
-              <a:gd name="adj" fmla="val 7716"/>
-            </a:avLst>
-          </a:prstGeom>
-          <a:solidFill>
-            <a:srgbClr val="EEF3F8"/>
-          </a:solidFill>
-          <a:ln w="12700">
-            <a:solidFill>
-              <a:srgbClr val="D1DAE7"/>
-            </a:solidFill>
-            <a:prstDash val="solid"/>
-          </a:ln>
-        </p:spPr>
-      </p:sp>
-      <p:pic>
-        <p:nvPicPr>
-          <p:cNvPr id="26" name="Image 3" descr="article icon from tabler-icons (MIT)">    </p:cNvPr>
-          <p:cNvPicPr>
-            <a:picLocks noChangeAspect="1"/>
-          </p:cNvPicPr>
-          <p:nvPr/>
-        </p:nvPicPr>
-        <p:blipFill>
-          <a:blip r:embed="rId7">
-            <a:extLst>
-              <a:ext uri="{96DAC541-7B7A-43D3-8B79-37D633B846F1}">
-                <asvg:svgBlip xmlns:asvg="http://schemas.microsoft.com/office/drawing/2016/SVG/main" r:embed="rId8"/>
-              </a:ext>
-            </a:extLst>
-          </a:blip>
-          <a:stretch>
-            <a:fillRect/>
-          </a:stretch>
-        </p:blipFill>
-        <p:spPr>
-          <a:xfrm>
-            <a:off x="1170432" y="2213580"/>
-            <a:ext cx="327721" cy="327721"/>
-          </a:xfrm>
-          <a:prstGeom prst="rect">
-            <a:avLst/>
-          </a:prstGeom>
-        </p:spPr>
-      </p:pic>
-      <p:sp>
-        <p:nvSpPr>
-          <p:cNvPr id="27" name="mdpr:1-2-ea42c8:item-1:block-27-chunk-1"/>
+          <p:cNvPr id="25" name="mdpr:1-2-ea42c8:item-1:block-27-chunk-1"/>
           <p:cNvSpPr txBox="1"/>
           <p:nvPr/>
         </p:nvSpPr>
         <p:spPr>
           <a:xfrm>
-            <a:off x="1699321" y="1987296"/>
-            <a:ext cx="9255191" cy="780288"/>
+            <a:off x="1133856" y="1957548"/>
+            <a:ext cx="9820656" cy="839785"/>
           </a:xfrm>
           <a:prstGeom prst="rect">
             <a:avLst/>
@@ -13821,71 +12896,14 @@
       </p:sp>
       <p:sp>
         <p:nvSpPr>
-          <p:cNvPr id="28" name="Shape 22"/>
-          <p:cNvSpPr/>
-          <p:nvPr/>
-        </p:nvSpPr>
-        <p:spPr>
-          <a:xfrm>
-            <a:off x="1097280" y="3466308"/>
-            <a:ext cx="474025" cy="474025"/>
-          </a:xfrm>
-          <a:prstGeom prst="roundRect">
-            <a:avLst>
-              <a:gd name="adj" fmla="val 7716"/>
-            </a:avLst>
-          </a:prstGeom>
-          <a:solidFill>
-            <a:srgbClr val="EEF3F8"/>
-          </a:solidFill>
-          <a:ln w="12700">
-            <a:solidFill>
-              <a:srgbClr val="D1DAE7"/>
-            </a:solidFill>
-            <a:prstDash val="solid"/>
-          </a:ln>
-        </p:spPr>
-      </p:sp>
-      <p:pic>
-        <p:nvPicPr>
-          <p:cNvPr id="29" name="Image 4" descr="article icon from tabler-icons (MIT)">    </p:cNvPr>
-          <p:cNvPicPr>
-            <a:picLocks noChangeAspect="1"/>
-          </p:cNvPicPr>
-          <p:nvPr/>
-        </p:nvPicPr>
-        <p:blipFill>
-          <a:blip r:embed="rId9">
-            <a:extLst>
-              <a:ext uri="{96DAC541-7B7A-43D3-8B79-37D633B846F1}">
-                <asvg:svgBlip xmlns:asvg="http://schemas.microsoft.com/office/drawing/2016/SVG/main" r:embed="rId10"/>
-              </a:ext>
-            </a:extLst>
-          </a:blip>
-          <a:stretch>
-            <a:fillRect/>
-          </a:stretch>
-        </p:blipFill>
-        <p:spPr>
-          <a:xfrm>
-            <a:off x="1170432" y="3539460"/>
-            <a:ext cx="327721" cy="327721"/>
-          </a:xfrm>
-          <a:prstGeom prst="rect">
-            <a:avLst/>
-          </a:prstGeom>
-        </p:spPr>
-      </p:pic>
-      <p:sp>
-        <p:nvSpPr>
-          <p:cNvPr id="30" name="mdpr:1-2-ea42c8:item-2:block-27-chunk-1"/>
+          <p:cNvPr id="26" name="mdpr:1-2-ea42c8:item-2:block-27-chunk-1"/>
           <p:cNvSpPr txBox="1"/>
           <p:nvPr/>
         </p:nvSpPr>
         <p:spPr>
           <a:xfrm>
-            <a:off x="1699321" y="3313176"/>
-            <a:ext cx="9255191" cy="780288"/>
+            <a:off x="1133856" y="3283428"/>
+            <a:ext cx="9820656" cy="839785"/>
           </a:xfrm>
           <a:prstGeom prst="rect">
             <a:avLst/>
@@ -13937,71 +12955,14 @@
       </p:sp>
       <p:sp>
         <p:nvSpPr>
-          <p:cNvPr id="31" name="Shape 24"/>
-          <p:cNvSpPr/>
-          <p:nvPr/>
-        </p:nvSpPr>
-        <p:spPr>
-          <a:xfrm>
-            <a:off x="1097280" y="4783044"/>
-            <a:ext cx="474025" cy="474025"/>
-          </a:xfrm>
-          <a:prstGeom prst="roundRect">
-            <a:avLst>
-              <a:gd name="adj" fmla="val 7716"/>
-            </a:avLst>
-          </a:prstGeom>
-          <a:solidFill>
-            <a:srgbClr val="EEF3F8"/>
-          </a:solidFill>
-          <a:ln w="12700">
-            <a:solidFill>
-              <a:srgbClr val="D1DAE7"/>
-            </a:solidFill>
-            <a:prstDash val="solid"/>
-          </a:ln>
-        </p:spPr>
-      </p:sp>
-      <p:pic>
-        <p:nvPicPr>
-          <p:cNvPr id="32" name="Image 5" descr="article icon from tabler-icons (MIT)">    </p:cNvPr>
-          <p:cNvPicPr>
-            <a:picLocks noChangeAspect="1"/>
-          </p:cNvPicPr>
-          <p:nvPr/>
-        </p:nvPicPr>
-        <p:blipFill>
-          <a:blip r:embed="rId11">
-            <a:extLst>
-              <a:ext uri="{96DAC541-7B7A-43D3-8B79-37D633B846F1}">
-                <asvg:svgBlip xmlns:asvg="http://schemas.microsoft.com/office/drawing/2016/SVG/main" r:embed="rId12"/>
-              </a:ext>
-            </a:extLst>
-          </a:blip>
-          <a:stretch>
-            <a:fillRect/>
-          </a:stretch>
-        </p:blipFill>
-        <p:spPr>
-          <a:xfrm>
-            <a:off x="1170432" y="4856196"/>
-            <a:ext cx="327721" cy="327721"/>
-          </a:xfrm>
-          <a:prstGeom prst="rect">
-            <a:avLst/>
-          </a:prstGeom>
-        </p:spPr>
-      </p:pic>
-      <p:sp>
-        <p:nvSpPr>
-          <p:cNvPr id="33" name="mdpr:1-2-ea42c8:item-3:block-27-chunk-1"/>
+          <p:cNvPr id="27" name="mdpr:1-2-ea42c8:item-3:block-27-chunk-1"/>
           <p:cNvSpPr txBox="1"/>
           <p:nvPr/>
         </p:nvSpPr>
         <p:spPr>
           <a:xfrm>
-            <a:off x="1699321" y="4629912"/>
-            <a:ext cx="9255191" cy="780288"/>
+            <a:off x="1133856" y="4600164"/>
+            <a:ext cx="9820656" cy="839785"/>
           </a:xfrm>
           <a:prstGeom prst="rect">
             <a:avLst/>
@@ -16698,71 +15659,14 @@
       </p:sp>
       <p:sp>
         <p:nvSpPr>
-          <p:cNvPr id="29" name="Shape 23"/>
-          <p:cNvSpPr/>
-          <p:nvPr/>
-        </p:nvSpPr>
-        <p:spPr>
-          <a:xfrm>
-            <a:off x="976122" y="2130552"/>
-            <a:ext cx="585216" cy="585216"/>
-          </a:xfrm>
-          <a:prstGeom prst="roundRect">
-            <a:avLst>
-              <a:gd name="adj" fmla="val 6250"/>
-            </a:avLst>
-          </a:prstGeom>
-          <a:solidFill>
-            <a:srgbClr val="EEF3F8"/>
-          </a:solidFill>
-          <a:ln w="12700">
-            <a:solidFill>
-              <a:srgbClr val="D1DAE7"/>
-            </a:solidFill>
-            <a:prstDash val="solid"/>
-          </a:ln>
-        </p:spPr>
-      </p:sp>
-      <p:pic>
-        <p:nvPicPr>
-          <p:cNvPr id="30" name="Image 4" descr="article icon from tabler-icons (MIT)">    </p:cNvPr>
-          <p:cNvPicPr>
-            <a:picLocks noChangeAspect="1"/>
-          </p:cNvPicPr>
-          <p:nvPr/>
-        </p:nvPicPr>
-        <p:blipFill>
-          <a:blip r:embed="rId9">
-            <a:extLst>
-              <a:ext uri="{96DAC541-7B7A-43D3-8B79-37D633B846F1}">
-                <asvg:svgBlip xmlns:asvg="http://schemas.microsoft.com/office/drawing/2016/SVG/main" r:embed="rId10"/>
-              </a:ext>
-            </a:extLst>
-          </a:blip>
-          <a:stretch>
-            <a:fillRect/>
-          </a:stretch>
-        </p:blipFill>
-        <p:spPr>
-          <a:xfrm>
-            <a:off x="1049274" y="2203704"/>
-            <a:ext cx="438912" cy="438912"/>
-          </a:xfrm>
-          <a:prstGeom prst="rect">
-            <a:avLst/>
-          </a:prstGeom>
-        </p:spPr>
-      </p:pic>
-      <p:sp>
-        <p:nvSpPr>
-          <p:cNvPr id="31" name="mdpr:icon-and-text-aside-8429fc:item-1:block-29"/>
+          <p:cNvPr id="29" name="mdpr:icon-and-text-aside-8429fc:item-1:block-29"/>
           <p:cNvSpPr txBox="1"/>
           <p:nvPr/>
         </p:nvSpPr>
         <p:spPr>
           <a:xfrm>
-            <a:off x="1689354" y="2033016"/>
-            <a:ext cx="3961638" cy="780288"/>
+            <a:off x="1042416" y="1627632"/>
+            <a:ext cx="4608576" cy="1591056"/>
           </a:xfrm>
           <a:prstGeom prst="rect">
             <a:avLst/>
@@ -16814,71 +15718,14 @@
       </p:sp>
       <p:sp>
         <p:nvSpPr>
-          <p:cNvPr id="32" name="Shape 25"/>
-          <p:cNvSpPr/>
-          <p:nvPr/>
-        </p:nvSpPr>
-        <p:spPr>
-          <a:xfrm>
-            <a:off x="6462522" y="2130552"/>
-            <a:ext cx="585216" cy="585216"/>
-          </a:xfrm>
-          <a:prstGeom prst="roundRect">
-            <a:avLst>
-              <a:gd name="adj" fmla="val 6250"/>
-            </a:avLst>
-          </a:prstGeom>
-          <a:solidFill>
-            <a:srgbClr val="EEF3F8"/>
-          </a:solidFill>
-          <a:ln w="12700">
-            <a:solidFill>
-              <a:srgbClr val="D1DAE7"/>
-            </a:solidFill>
-            <a:prstDash val="solid"/>
-          </a:ln>
-        </p:spPr>
-      </p:sp>
-      <p:pic>
-        <p:nvPicPr>
-          <p:cNvPr id="33" name="Image 5" descr="article icon from tabler-icons (MIT)">    </p:cNvPr>
-          <p:cNvPicPr>
-            <a:picLocks noChangeAspect="1"/>
-          </p:cNvPicPr>
-          <p:nvPr/>
-        </p:nvPicPr>
-        <p:blipFill>
-          <a:blip r:embed="rId11">
-            <a:extLst>
-              <a:ext uri="{96DAC541-7B7A-43D3-8B79-37D633B846F1}">
-                <asvg:svgBlip xmlns:asvg="http://schemas.microsoft.com/office/drawing/2016/SVG/main" r:embed="rId12"/>
-              </a:ext>
-            </a:extLst>
-          </a:blip>
-          <a:stretch>
-            <a:fillRect/>
-          </a:stretch>
-        </p:blipFill>
-        <p:spPr>
-          <a:xfrm>
-            <a:off x="6535674" y="2203704"/>
-            <a:ext cx="438912" cy="438912"/>
-          </a:xfrm>
-          <a:prstGeom prst="rect">
-            <a:avLst/>
-          </a:prstGeom>
-        </p:spPr>
-      </p:pic>
-      <p:sp>
-        <p:nvSpPr>
-          <p:cNvPr id="34" name="mdpr:icon-and-text-aside-8429fc:item-2:block-29"/>
+          <p:cNvPr id="30" name="mdpr:icon-and-text-aside-8429fc:item-2:block-29"/>
           <p:cNvSpPr txBox="1"/>
           <p:nvPr/>
         </p:nvSpPr>
         <p:spPr>
           <a:xfrm>
-            <a:off x="7175754" y="1865376"/>
-            <a:ext cx="3961638" cy="1115568"/>
+            <a:off x="6528816" y="1627632"/>
+            <a:ext cx="4608576" cy="1591056"/>
           </a:xfrm>
           <a:prstGeom prst="rect">
             <a:avLst/>
@@ -16930,71 +15777,14 @@
       </p:sp>
       <p:sp>
         <p:nvSpPr>
-          <p:cNvPr id="35" name="Shape 27"/>
-          <p:cNvSpPr/>
-          <p:nvPr/>
-        </p:nvSpPr>
-        <p:spPr>
-          <a:xfrm>
-            <a:off x="976122" y="4416552"/>
-            <a:ext cx="585216" cy="585216"/>
-          </a:xfrm>
-          <a:prstGeom prst="roundRect">
-            <a:avLst>
-              <a:gd name="adj" fmla="val 6250"/>
-            </a:avLst>
-          </a:prstGeom>
-          <a:solidFill>
-            <a:srgbClr val="EEF3F8"/>
-          </a:solidFill>
-          <a:ln w="12700">
-            <a:solidFill>
-              <a:srgbClr val="D1DAE7"/>
-            </a:solidFill>
-            <a:prstDash val="solid"/>
-          </a:ln>
-        </p:spPr>
-      </p:sp>
-      <p:pic>
-        <p:nvPicPr>
-          <p:cNvPr id="36" name="Image 6" descr="article icon from tabler-icons (MIT)">    </p:cNvPr>
-          <p:cNvPicPr>
-            <a:picLocks noChangeAspect="1"/>
-          </p:cNvPicPr>
-          <p:nvPr/>
-        </p:nvPicPr>
-        <p:blipFill>
-          <a:blip r:embed="rId13">
-            <a:extLst>
-              <a:ext uri="{96DAC541-7B7A-43D3-8B79-37D633B846F1}">
-                <asvg:svgBlip xmlns:asvg="http://schemas.microsoft.com/office/drawing/2016/SVG/main" r:embed="rId14"/>
-              </a:ext>
-            </a:extLst>
-          </a:blip>
-          <a:stretch>
-            <a:fillRect/>
-          </a:stretch>
-        </p:blipFill>
-        <p:spPr>
-          <a:xfrm>
-            <a:off x="1049274" y="4489704"/>
-            <a:ext cx="438912" cy="438912"/>
-          </a:xfrm>
-          <a:prstGeom prst="rect">
-            <a:avLst/>
-          </a:prstGeom>
-        </p:spPr>
-      </p:pic>
-      <p:sp>
-        <p:nvSpPr>
-          <p:cNvPr id="37" name="mdpr:icon-and-text-aside-8429fc:item-3:block-29"/>
+          <p:cNvPr id="31" name="mdpr:icon-and-text-aside-8429fc:item-3:block-29"/>
           <p:cNvSpPr txBox="1"/>
           <p:nvPr/>
         </p:nvSpPr>
         <p:spPr>
           <a:xfrm>
-            <a:off x="1689354" y="4151376"/>
-            <a:ext cx="3961638" cy="1115568"/>
+            <a:off x="1042416" y="3913632"/>
+            <a:ext cx="4608576" cy="1591056"/>
           </a:xfrm>
           <a:prstGeom prst="rect">
             <a:avLst/>
@@ -17046,71 +15836,14 @@
       </p:sp>
       <p:sp>
         <p:nvSpPr>
-          <p:cNvPr id="38" name="Shape 29"/>
-          <p:cNvSpPr/>
-          <p:nvPr/>
-        </p:nvSpPr>
-        <p:spPr>
-          <a:xfrm>
-            <a:off x="6462522" y="4416552"/>
-            <a:ext cx="585216" cy="585216"/>
-          </a:xfrm>
-          <a:prstGeom prst="roundRect">
-            <a:avLst>
-              <a:gd name="adj" fmla="val 6250"/>
-            </a:avLst>
-          </a:prstGeom>
-          <a:solidFill>
-            <a:srgbClr val="EEF3F8"/>
-          </a:solidFill>
-          <a:ln w="12700">
-            <a:solidFill>
-              <a:srgbClr val="D1DAE7"/>
-            </a:solidFill>
-            <a:prstDash val="solid"/>
-          </a:ln>
-        </p:spPr>
-      </p:sp>
-      <p:pic>
-        <p:nvPicPr>
-          <p:cNvPr id="39" name="Image 7" descr="table icon from tabler-icons (MIT)">    </p:cNvPr>
-          <p:cNvPicPr>
-            <a:picLocks noChangeAspect="1"/>
-          </p:cNvPicPr>
-          <p:nvPr/>
-        </p:nvPicPr>
-        <p:blipFill>
-          <a:blip r:embed="rId15">
-            <a:extLst>
-              <a:ext uri="{96DAC541-7B7A-43D3-8B79-37D633B846F1}">
-                <asvg:svgBlip xmlns:asvg="http://schemas.microsoft.com/office/drawing/2016/SVG/main" r:embed="rId16"/>
-              </a:ext>
-            </a:extLst>
-          </a:blip>
-          <a:stretch>
-            <a:fillRect/>
-          </a:stretch>
-        </p:blipFill>
-        <p:spPr>
-          <a:xfrm>
-            <a:off x="6535674" y="4489704"/>
-            <a:ext cx="438912" cy="438912"/>
-          </a:xfrm>
-          <a:prstGeom prst="rect">
-            <a:avLst/>
-          </a:prstGeom>
-        </p:spPr>
-      </p:pic>
-      <p:sp>
-        <p:nvSpPr>
-          <p:cNvPr id="40" name="mdpr:icon-and-text-aside-8429fc:item-4:block-29"/>
+          <p:cNvPr id="32" name="mdpr:icon-and-text-aside-8429fc:item-4:block-29"/>
           <p:cNvSpPr txBox="1"/>
           <p:nvPr/>
         </p:nvSpPr>
         <p:spPr>
           <a:xfrm>
-            <a:off x="7175754" y="4151376"/>
-            <a:ext cx="3961638" cy="1115568"/>
+            <a:off x="6528816" y="3913632"/>
+            <a:ext cx="4608576" cy="1591056"/>
           </a:xfrm>
           <a:prstGeom prst="rect">
             <a:avLst/>
@@ -18074,71 +16807,14 @@
       </p:sp>
       <p:sp>
         <p:nvSpPr>
-          <p:cNvPr id="29" name="Shape 23"/>
-          <p:cNvSpPr/>
-          <p:nvPr/>
-        </p:nvSpPr>
-        <p:spPr>
-          <a:xfrm>
-            <a:off x="976122" y="2130552"/>
-            <a:ext cx="585216" cy="585216"/>
-          </a:xfrm>
-          <a:prstGeom prst="roundRect">
-            <a:avLst>
-              <a:gd name="adj" fmla="val 6250"/>
-            </a:avLst>
-          </a:prstGeom>
-          <a:solidFill>
-            <a:srgbClr val="EEF3F8"/>
-          </a:solidFill>
-          <a:ln w="12700">
-            <a:solidFill>
-              <a:srgbClr val="D1DAE7"/>
-            </a:solidFill>
-            <a:prstDash val="solid"/>
-          </a:ln>
-        </p:spPr>
-      </p:sp>
-      <p:pic>
-        <p:nvPicPr>
-          <p:cNvPr id="30" name="Image 4" descr="verified icon from tabler-icons (MIT)">    </p:cNvPr>
-          <p:cNvPicPr>
-            <a:picLocks noChangeAspect="1"/>
-          </p:cNvPicPr>
-          <p:nvPr/>
-        </p:nvPicPr>
-        <p:blipFill>
-          <a:blip r:embed="rId9">
-            <a:extLst>
-              <a:ext uri="{96DAC541-7B7A-43D3-8B79-37D633B846F1}">
-                <asvg:svgBlip xmlns:asvg="http://schemas.microsoft.com/office/drawing/2016/SVG/main" r:embed="rId10"/>
-              </a:ext>
-            </a:extLst>
-          </a:blip>
-          <a:stretch>
-            <a:fillRect/>
-          </a:stretch>
-        </p:blipFill>
-        <p:spPr>
-          <a:xfrm>
-            <a:off x="1049274" y="2203704"/>
-            <a:ext cx="438912" cy="438912"/>
-          </a:xfrm>
-          <a:prstGeom prst="rect">
-            <a:avLst/>
-          </a:prstGeom>
-        </p:spPr>
-      </p:pic>
-      <p:sp>
-        <p:nvSpPr>
-          <p:cNvPr id="31" name="mdpr:overflow-guard-f8d03e:item-1:block-31"/>
+          <p:cNvPr id="29" name="mdpr:overflow-guard-f8d03e:item-1:block-31"/>
           <p:cNvSpPr txBox="1"/>
           <p:nvPr/>
         </p:nvSpPr>
         <p:spPr>
           <a:xfrm>
-            <a:off x="1689354" y="1865376"/>
-            <a:ext cx="3961638" cy="1115568"/>
+            <a:off x="1042416" y="1627632"/>
+            <a:ext cx="4608576" cy="1591056"/>
           </a:xfrm>
           <a:prstGeom prst="rect">
             <a:avLst/>
@@ -18190,71 +16866,14 @@
       </p:sp>
       <p:sp>
         <p:nvSpPr>
-          <p:cNvPr id="32" name="Shape 25"/>
-          <p:cNvSpPr/>
-          <p:nvPr/>
-        </p:nvSpPr>
-        <p:spPr>
-          <a:xfrm>
-            <a:off x="6462522" y="2130552"/>
-            <a:ext cx="585216" cy="585216"/>
-          </a:xfrm>
-          <a:prstGeom prst="roundRect">
-            <a:avLst>
-              <a:gd name="adj" fmla="val 6250"/>
-            </a:avLst>
-          </a:prstGeom>
-          <a:solidFill>
-            <a:srgbClr val="EEF3F8"/>
-          </a:solidFill>
-          <a:ln w="12700">
-            <a:solidFill>
-              <a:srgbClr val="D1DAE7"/>
-            </a:solidFill>
-            <a:prstDash val="solid"/>
-          </a:ln>
-        </p:spPr>
-      </p:sp>
-      <p:pic>
-        <p:nvPicPr>
-          <p:cNvPr id="33" name="Image 5" descr="table icon from tabler-icons (MIT)">    </p:cNvPr>
-          <p:cNvPicPr>
-            <a:picLocks noChangeAspect="1"/>
-          </p:cNvPicPr>
-          <p:nvPr/>
-        </p:nvPicPr>
-        <p:blipFill>
-          <a:blip r:embed="rId11">
-            <a:extLst>
-              <a:ext uri="{96DAC541-7B7A-43D3-8B79-37D633B846F1}">
-                <asvg:svgBlip xmlns:asvg="http://schemas.microsoft.com/office/drawing/2016/SVG/main" r:embed="rId12"/>
-              </a:ext>
-            </a:extLst>
-          </a:blip>
-          <a:stretch>
-            <a:fillRect/>
-          </a:stretch>
-        </p:blipFill>
-        <p:spPr>
-          <a:xfrm>
-            <a:off x="6535674" y="2203704"/>
-            <a:ext cx="438912" cy="438912"/>
-          </a:xfrm>
-          <a:prstGeom prst="rect">
-            <a:avLst/>
-          </a:prstGeom>
-        </p:spPr>
-      </p:pic>
-      <p:sp>
-        <p:nvSpPr>
-          <p:cNvPr id="34" name="mdpr:overflow-guard-f8d03e:item-2:block-31"/>
+          <p:cNvPr id="30" name="mdpr:overflow-guard-f8d03e:item-2:block-31"/>
           <p:cNvSpPr txBox="1"/>
           <p:nvPr/>
         </p:nvSpPr>
         <p:spPr>
           <a:xfrm>
-            <a:off x="7175754" y="1697736"/>
-            <a:ext cx="3961638" cy="1450848"/>
+            <a:off x="6528816" y="1627632"/>
+            <a:ext cx="4608576" cy="1591056"/>
           </a:xfrm>
           <a:prstGeom prst="rect">
             <a:avLst/>
@@ -18306,71 +16925,14 @@
       </p:sp>
       <p:sp>
         <p:nvSpPr>
-          <p:cNvPr id="35" name="Shape 27"/>
-          <p:cNvSpPr/>
-          <p:nvPr/>
-        </p:nvSpPr>
-        <p:spPr>
-          <a:xfrm>
-            <a:off x="976122" y="4416552"/>
-            <a:ext cx="585216" cy="585216"/>
-          </a:xfrm>
-          <a:prstGeom prst="roundRect">
-            <a:avLst>
-              <a:gd name="adj" fmla="val 6250"/>
-            </a:avLst>
-          </a:prstGeom>
-          <a:solidFill>
-            <a:srgbClr val="EEF3F8"/>
-          </a:solidFill>
-          <a:ln w="12700">
-            <a:solidFill>
-              <a:srgbClr val="D1DAE7"/>
-            </a:solidFill>
-            <a:prstDash val="solid"/>
-          </a:ln>
-        </p:spPr>
-      </p:sp>
-      <p:pic>
-        <p:nvPicPr>
-          <p:cNvPr id="36" name="Image 6" descr="article icon from tabler-icons (MIT)">    </p:cNvPr>
-          <p:cNvPicPr>
-            <a:picLocks noChangeAspect="1"/>
-          </p:cNvPicPr>
-          <p:nvPr/>
-        </p:nvPicPr>
-        <p:blipFill>
-          <a:blip r:embed="rId13">
-            <a:extLst>
-              <a:ext uri="{96DAC541-7B7A-43D3-8B79-37D633B846F1}">
-                <asvg:svgBlip xmlns:asvg="http://schemas.microsoft.com/office/drawing/2016/SVG/main" r:embed="rId14"/>
-              </a:ext>
-            </a:extLst>
-          </a:blip>
-          <a:stretch>
-            <a:fillRect/>
-          </a:stretch>
-        </p:blipFill>
-        <p:spPr>
-          <a:xfrm>
-            <a:off x="1049274" y="4489704"/>
-            <a:ext cx="438912" cy="438912"/>
-          </a:xfrm>
-          <a:prstGeom prst="rect">
-            <a:avLst/>
-          </a:prstGeom>
-        </p:spPr>
-      </p:pic>
-      <p:sp>
-        <p:nvSpPr>
-          <p:cNvPr id="37" name="mdpr:overflow-guard-f8d03e:item-3:block-31"/>
+          <p:cNvPr id="31" name="mdpr:overflow-guard-f8d03e:item-3:block-31"/>
           <p:cNvSpPr txBox="1"/>
           <p:nvPr/>
         </p:nvSpPr>
         <p:spPr>
           <a:xfrm>
-            <a:off x="1689354" y="4151376"/>
-            <a:ext cx="3961638" cy="1115568"/>
+            <a:off x="1042416" y="3913632"/>
+            <a:ext cx="4608576" cy="1591056"/>
           </a:xfrm>
           <a:prstGeom prst="rect">
             <a:avLst/>
@@ -18422,71 +16984,14 @@
       </p:sp>
       <p:sp>
         <p:nvSpPr>
-          <p:cNvPr id="38" name="Shape 29"/>
-          <p:cNvSpPr/>
-          <p:nvPr/>
-        </p:nvSpPr>
-        <p:spPr>
-          <a:xfrm>
-            <a:off x="6462522" y="4416552"/>
-            <a:ext cx="585216" cy="585216"/>
-          </a:xfrm>
-          <a:prstGeom prst="roundRect">
-            <a:avLst>
-              <a:gd name="adj" fmla="val 6250"/>
-            </a:avLst>
-          </a:prstGeom>
-          <a:solidFill>
-            <a:srgbClr val="EEF3F8"/>
-          </a:solidFill>
-          <a:ln w="12700">
-            <a:solidFill>
-              <a:srgbClr val="D1DAE7"/>
-            </a:solidFill>
-            <a:prstDash val="solid"/>
-          </a:ln>
-        </p:spPr>
-      </p:sp>
-      <p:pic>
-        <p:nvPicPr>
-          <p:cNvPr id="39" name="Image 7" descr="article icon from tabler-icons (MIT)">    </p:cNvPr>
-          <p:cNvPicPr>
-            <a:picLocks noChangeAspect="1"/>
-          </p:cNvPicPr>
-          <p:nvPr/>
-        </p:nvPicPr>
-        <p:blipFill>
-          <a:blip r:embed="rId15">
-            <a:extLst>
-              <a:ext uri="{96DAC541-7B7A-43D3-8B79-37D633B846F1}">
-                <asvg:svgBlip xmlns:asvg="http://schemas.microsoft.com/office/drawing/2016/SVG/main" r:embed="rId16"/>
-              </a:ext>
-            </a:extLst>
-          </a:blip>
-          <a:stretch>
-            <a:fillRect/>
-          </a:stretch>
-        </p:blipFill>
-        <p:spPr>
-          <a:xfrm>
-            <a:off x="6535674" y="4489704"/>
-            <a:ext cx="438912" cy="438912"/>
-          </a:xfrm>
-          <a:prstGeom prst="rect">
-            <a:avLst/>
-          </a:prstGeom>
-        </p:spPr>
-      </p:pic>
-      <p:sp>
-        <p:nvSpPr>
-          <p:cNvPr id="40" name="mdpr:overflow-guard-f8d03e:item-4:block-31"/>
+          <p:cNvPr id="32" name="mdpr:overflow-guard-f8d03e:item-4:block-31"/>
           <p:cNvSpPr txBox="1"/>
           <p:nvPr/>
         </p:nvSpPr>
         <p:spPr>
           <a:xfrm>
-            <a:off x="7175754" y="4151376"/>
-            <a:ext cx="3961638" cy="1115568"/>
+            <a:off x="6528816" y="3913632"/>
+            <a:ext cx="4608576" cy="1591056"/>
           </a:xfrm>
           <a:prstGeom prst="rect">
             <a:avLst/>
@@ -21185,71 +19690,14 @@
       </p:sp>
       <p:sp>
         <p:nvSpPr>
-          <p:cNvPr id="25" name="Shape 20"/>
-          <p:cNvSpPr/>
-          <p:nvPr/>
-        </p:nvSpPr>
-        <p:spPr>
-          <a:xfrm>
-            <a:off x="1097280" y="2140428"/>
-            <a:ext cx="474025" cy="474025"/>
-          </a:xfrm>
-          <a:prstGeom prst="roundRect">
-            <a:avLst>
-              <a:gd name="adj" fmla="val 7716"/>
-            </a:avLst>
-          </a:prstGeom>
-          <a:solidFill>
-            <a:srgbClr val="EEF3F8"/>
-          </a:solidFill>
-          <a:ln w="12700">
-            <a:solidFill>
-              <a:srgbClr val="D1DAE7"/>
-            </a:solidFill>
-            <a:prstDash val="solid"/>
-          </a:ln>
-        </p:spPr>
-      </p:sp>
-      <p:pic>
-        <p:nvPicPr>
-          <p:cNvPr id="26" name="Image 3" descr="flow icon from tabler-icons (MIT)">    </p:cNvPr>
-          <p:cNvPicPr>
-            <a:picLocks noChangeAspect="1"/>
-          </p:cNvPicPr>
-          <p:nvPr/>
-        </p:nvPicPr>
-        <p:blipFill>
-          <a:blip r:embed="rId7">
-            <a:extLst>
-              <a:ext uri="{96DAC541-7B7A-43D3-8B79-37D633B846F1}">
-                <asvg:svgBlip xmlns:asvg="http://schemas.microsoft.com/office/drawing/2016/SVG/main" r:embed="rId8"/>
-              </a:ext>
-            </a:extLst>
-          </a:blip>
-          <a:stretch>
-            <a:fillRect/>
-          </a:stretch>
-        </p:blipFill>
-        <p:spPr>
-          <a:xfrm>
-            <a:off x="1170432" y="2213580"/>
-            <a:ext cx="327721" cy="327721"/>
-          </a:xfrm>
-          <a:prstGeom prst="rect">
-            <a:avLst/>
-          </a:prstGeom>
-        </p:spPr>
-      </p:pic>
-      <p:sp>
-        <p:nvSpPr>
-          <p:cNvPr id="27" name="mdpr:actions-output-review-326e07:item-1:block-41"/>
+          <p:cNvPr id="25" name="mdpr:actions-output-review-326e07:item-1:block-41"/>
           <p:cNvSpPr txBox="1"/>
           <p:nvPr/>
         </p:nvSpPr>
         <p:spPr>
           <a:xfrm>
-            <a:off x="1699321" y="1987296"/>
-            <a:ext cx="9255191" cy="780288"/>
+            <a:off x="1133856" y="1957548"/>
+            <a:ext cx="9820656" cy="839785"/>
           </a:xfrm>
           <a:prstGeom prst="rect">
             <a:avLst/>
@@ -21301,71 +19749,14 @@
       </p:sp>
       <p:sp>
         <p:nvSpPr>
-          <p:cNvPr id="28" name="Shape 22"/>
-          <p:cNvSpPr/>
-          <p:nvPr/>
-        </p:nvSpPr>
-        <p:spPr>
-          <a:xfrm>
-            <a:off x="1097280" y="3466308"/>
-            <a:ext cx="474025" cy="474025"/>
-          </a:xfrm>
-          <a:prstGeom prst="roundRect">
-            <a:avLst>
-              <a:gd name="adj" fmla="val 7716"/>
-            </a:avLst>
-          </a:prstGeom>
-          <a:solidFill>
-            <a:srgbClr val="EEF3F8"/>
-          </a:solidFill>
-          <a:ln w="12700">
-            <a:solidFill>
-              <a:srgbClr val="D1DAE7"/>
-            </a:solidFill>
-            <a:prstDash val="solid"/>
-          </a:ln>
-        </p:spPr>
-      </p:sp>
-      <p:pic>
-        <p:nvPicPr>
-          <p:cNvPr id="29" name="Image 4" descr="verified icon from tabler-icons (MIT)">    </p:cNvPr>
-          <p:cNvPicPr>
-            <a:picLocks noChangeAspect="1"/>
-          </p:cNvPicPr>
-          <p:nvPr/>
-        </p:nvPicPr>
-        <p:blipFill>
-          <a:blip r:embed="rId9">
-            <a:extLst>
-              <a:ext uri="{96DAC541-7B7A-43D3-8B79-37D633B846F1}">
-                <asvg:svgBlip xmlns:asvg="http://schemas.microsoft.com/office/drawing/2016/SVG/main" r:embed="rId10"/>
-              </a:ext>
-            </a:extLst>
-          </a:blip>
-          <a:stretch>
-            <a:fillRect/>
-          </a:stretch>
-        </p:blipFill>
-        <p:spPr>
-          <a:xfrm>
-            <a:off x="1170432" y="3539460"/>
-            <a:ext cx="327721" cy="327721"/>
-          </a:xfrm>
-          <a:prstGeom prst="rect">
-            <a:avLst/>
-          </a:prstGeom>
-        </p:spPr>
-      </p:pic>
-      <p:sp>
-        <p:nvSpPr>
-          <p:cNvPr id="30" name="mdpr:actions-output-review-326e07:item-2:block-41"/>
+          <p:cNvPr id="26" name="mdpr:actions-output-review-326e07:item-2:block-41"/>
           <p:cNvSpPr txBox="1"/>
           <p:nvPr/>
         </p:nvSpPr>
         <p:spPr>
           <a:xfrm>
-            <a:off x="1699321" y="3313176"/>
-            <a:ext cx="9255191" cy="780288"/>
+            <a:off x="1133856" y="3283428"/>
+            <a:ext cx="9820656" cy="839785"/>
           </a:xfrm>
           <a:prstGeom prst="rect">
             <a:avLst/>
@@ -21417,71 +19808,14 @@
       </p:sp>
       <p:sp>
         <p:nvSpPr>
-          <p:cNvPr id="31" name="Shape 24"/>
-          <p:cNvSpPr/>
-          <p:nvPr/>
-        </p:nvSpPr>
-        <p:spPr>
-          <a:xfrm>
-            <a:off x="1097280" y="4783044"/>
-            <a:ext cx="474025" cy="474025"/>
-          </a:xfrm>
-          <a:prstGeom prst="roundRect">
-            <a:avLst>
-              <a:gd name="adj" fmla="val 7716"/>
-            </a:avLst>
-          </a:prstGeom>
-          <a:solidFill>
-            <a:srgbClr val="EEF3F8"/>
-          </a:solidFill>
-          <a:ln w="12700">
-            <a:solidFill>
-              <a:srgbClr val="D1DAE7"/>
-            </a:solidFill>
-            <a:prstDash val="solid"/>
-          </a:ln>
-        </p:spPr>
-      </p:sp>
-      <p:pic>
-        <p:nvPicPr>
-          <p:cNvPr id="32" name="Image 5" descr="spark icon from tabler-icons (MIT)">    </p:cNvPr>
-          <p:cNvPicPr>
-            <a:picLocks noChangeAspect="1"/>
-          </p:cNvPicPr>
-          <p:nvPr/>
-        </p:nvPicPr>
-        <p:blipFill>
-          <a:blip r:embed="rId11">
-            <a:extLst>
-              <a:ext uri="{96DAC541-7B7A-43D3-8B79-37D633B846F1}">
-                <asvg:svgBlip xmlns:asvg="http://schemas.microsoft.com/office/drawing/2016/SVG/main" r:embed="rId12"/>
-              </a:ext>
-            </a:extLst>
-          </a:blip>
-          <a:stretch>
-            <a:fillRect/>
-          </a:stretch>
-        </p:blipFill>
-        <p:spPr>
-          <a:xfrm>
-            <a:off x="1170432" y="4856196"/>
-            <a:ext cx="327721" cy="327721"/>
-          </a:xfrm>
-          <a:prstGeom prst="rect">
-            <a:avLst/>
-          </a:prstGeom>
-        </p:spPr>
-      </p:pic>
-      <p:sp>
-        <p:nvSpPr>
-          <p:cNvPr id="33" name="mdpr:actions-output-review-326e07:item-3:block-41"/>
+          <p:cNvPr id="27" name="mdpr:actions-output-review-326e07:item-3:block-41"/>
           <p:cNvSpPr txBox="1"/>
           <p:nvPr/>
         </p:nvSpPr>
         <p:spPr>
           <a:xfrm>
-            <a:off x="1699321" y="4629912"/>
-            <a:ext cx="9255191" cy="780288"/>
+            <a:off x="1133856" y="4600164"/>
+            <a:ext cx="9820656" cy="839785"/>
           </a:xfrm>
           <a:prstGeom prst="rect">
             <a:avLst/>
@@ -23359,71 +21693,14 @@
       </p:sp>
       <p:sp>
         <p:nvSpPr>
-          <p:cNvPr id="25" name="Shape 20"/>
-          <p:cNvSpPr/>
-          <p:nvPr/>
-        </p:nvSpPr>
-        <p:spPr>
-          <a:xfrm>
-            <a:off x="1097280" y="2140428"/>
-            <a:ext cx="474025" cy="474025"/>
-          </a:xfrm>
-          <a:prstGeom prst="roundRect">
-            <a:avLst>
-              <a:gd name="adj" fmla="val 7716"/>
-            </a:avLst>
-          </a:prstGeom>
-          <a:solidFill>
-            <a:srgbClr val="EEF3F8"/>
-          </a:solidFill>
-          <a:ln w="12700">
-            <a:solidFill>
-              <a:srgbClr val="D1DAE7"/>
-            </a:solidFill>
-            <a:prstDash val="solid"/>
-          </a:ln>
-        </p:spPr>
-      </p:sp>
-      <p:pic>
-        <p:nvPicPr>
-          <p:cNvPr id="26" name="Image 3" descr="article icon from tabler-icons (MIT)">    </p:cNvPr>
-          <p:cNvPicPr>
-            <a:picLocks noChangeAspect="1"/>
-          </p:cNvPicPr>
-          <p:nvPr/>
-        </p:nvPicPr>
-        <p:blipFill>
-          <a:blip r:embed="rId7">
-            <a:extLst>
-              <a:ext uri="{96DAC541-7B7A-43D3-8B79-37D633B846F1}">
-                <asvg:svgBlip xmlns:asvg="http://schemas.microsoft.com/office/drawing/2016/SVG/main" r:embed="rId8"/>
-              </a:ext>
-            </a:extLst>
-          </a:blip>
-          <a:stretch>
-            <a:fillRect/>
-          </a:stretch>
-        </p:blipFill>
-        <p:spPr>
-          <a:xfrm>
-            <a:off x="1170432" y="2213580"/>
-            <a:ext cx="327721" cy="327721"/>
-          </a:xfrm>
-          <a:prstGeom prst="rect">
-            <a:avLst/>
-          </a:prstGeom>
-        </p:spPr>
-      </p:pic>
-      <p:sp>
-        <p:nvSpPr>
-          <p:cNvPr id="27" name="mdpr:1-2-32ac08:item-1:block-6-chunk-1"/>
+          <p:cNvPr id="25" name="mdpr:1-2-32ac08:item-1:block-6-chunk-1"/>
           <p:cNvSpPr txBox="1"/>
           <p:nvPr/>
         </p:nvSpPr>
         <p:spPr>
           <a:xfrm>
-            <a:off x="1699321" y="1987296"/>
-            <a:ext cx="9255191" cy="780288"/>
+            <a:off x="1133856" y="1957548"/>
+            <a:ext cx="9820656" cy="839785"/>
           </a:xfrm>
           <a:prstGeom prst="rect">
             <a:avLst/>
@@ -23475,71 +21752,14 @@
       </p:sp>
       <p:sp>
         <p:nvSpPr>
-          <p:cNvPr id="28" name="Shape 22"/>
-          <p:cNvSpPr/>
-          <p:nvPr/>
-        </p:nvSpPr>
-        <p:spPr>
-          <a:xfrm>
-            <a:off x="1097280" y="3466308"/>
-            <a:ext cx="474025" cy="474025"/>
-          </a:xfrm>
-          <a:prstGeom prst="roundRect">
-            <a:avLst>
-              <a:gd name="adj" fmla="val 7716"/>
-            </a:avLst>
-          </a:prstGeom>
-          <a:solidFill>
-            <a:srgbClr val="EEF3F8"/>
-          </a:solidFill>
-          <a:ln w="12700">
-            <a:solidFill>
-              <a:srgbClr val="D1DAE7"/>
-            </a:solidFill>
-            <a:prstDash val="solid"/>
-          </a:ln>
-        </p:spPr>
-      </p:sp>
-      <p:pic>
-        <p:nvPicPr>
-          <p:cNvPr id="29" name="Image 4" descr="chart icon from tabler-icons (MIT)">    </p:cNvPr>
-          <p:cNvPicPr>
-            <a:picLocks noChangeAspect="1"/>
-          </p:cNvPicPr>
-          <p:nvPr/>
-        </p:nvPicPr>
-        <p:blipFill>
-          <a:blip r:embed="rId9">
-            <a:extLst>
-              <a:ext uri="{96DAC541-7B7A-43D3-8B79-37D633B846F1}">
-                <asvg:svgBlip xmlns:asvg="http://schemas.microsoft.com/office/drawing/2016/SVG/main" r:embed="rId10"/>
-              </a:ext>
-            </a:extLst>
-          </a:blip>
-          <a:stretch>
-            <a:fillRect/>
-          </a:stretch>
-        </p:blipFill>
-        <p:spPr>
-          <a:xfrm>
-            <a:off x="1170432" y="3539460"/>
-            <a:ext cx="327721" cy="327721"/>
-          </a:xfrm>
-          <a:prstGeom prst="rect">
-            <a:avLst/>
-          </a:prstGeom>
-        </p:spPr>
-      </p:pic>
-      <p:sp>
-        <p:nvSpPr>
-          <p:cNvPr id="30" name="mdpr:1-2-32ac08:item-2:block-6-chunk-1"/>
+          <p:cNvPr id="26" name="mdpr:1-2-32ac08:item-2:block-6-chunk-1"/>
           <p:cNvSpPr txBox="1"/>
           <p:nvPr/>
         </p:nvSpPr>
         <p:spPr>
           <a:xfrm>
-            <a:off x="1699321" y="3313176"/>
-            <a:ext cx="9255191" cy="780288"/>
+            <a:off x="1133856" y="3283428"/>
+            <a:ext cx="9820656" cy="839785"/>
           </a:xfrm>
           <a:prstGeom prst="rect">
             <a:avLst/>
@@ -23591,71 +21811,14 @@
       </p:sp>
       <p:sp>
         <p:nvSpPr>
-          <p:cNvPr id="31" name="Shape 24"/>
-          <p:cNvSpPr/>
-          <p:nvPr/>
-        </p:nvSpPr>
-        <p:spPr>
-          <a:xfrm>
-            <a:off x="1097280" y="4783044"/>
-            <a:ext cx="474025" cy="474025"/>
-          </a:xfrm>
-          <a:prstGeom prst="roundRect">
-            <a:avLst>
-              <a:gd name="adj" fmla="val 7716"/>
-            </a:avLst>
-          </a:prstGeom>
-          <a:solidFill>
-            <a:srgbClr val="EEF3F8"/>
-          </a:solidFill>
-          <a:ln w="12700">
-            <a:solidFill>
-              <a:srgbClr val="D1DAE7"/>
-            </a:solidFill>
-            <a:prstDash val="solid"/>
-          </a:ln>
-        </p:spPr>
-      </p:sp>
-      <p:pic>
-        <p:nvPicPr>
-          <p:cNvPr id="32" name="Image 5" descr="article icon from tabler-icons (MIT)">    </p:cNvPr>
-          <p:cNvPicPr>
-            <a:picLocks noChangeAspect="1"/>
-          </p:cNvPicPr>
-          <p:nvPr/>
-        </p:nvPicPr>
-        <p:blipFill>
-          <a:blip r:embed="rId11">
-            <a:extLst>
-              <a:ext uri="{96DAC541-7B7A-43D3-8B79-37D633B846F1}">
-                <asvg:svgBlip xmlns:asvg="http://schemas.microsoft.com/office/drawing/2016/SVG/main" r:embed="rId12"/>
-              </a:ext>
-            </a:extLst>
-          </a:blip>
-          <a:stretch>
-            <a:fillRect/>
-          </a:stretch>
-        </p:blipFill>
-        <p:spPr>
-          <a:xfrm>
-            <a:off x="1170432" y="4856196"/>
-            <a:ext cx="327721" cy="327721"/>
-          </a:xfrm>
-          <a:prstGeom prst="rect">
-            <a:avLst/>
-          </a:prstGeom>
-        </p:spPr>
-      </p:pic>
-      <p:sp>
-        <p:nvSpPr>
-          <p:cNvPr id="33" name="mdpr:1-2-32ac08:item-3:block-6-chunk-1"/>
+          <p:cNvPr id="27" name="mdpr:1-2-32ac08:item-3:block-6-chunk-1"/>
           <p:cNvSpPr txBox="1"/>
           <p:nvPr/>
         </p:nvSpPr>
         <p:spPr>
           <a:xfrm>
-            <a:off x="1699321" y="4629912"/>
-            <a:ext cx="9255191" cy="780288"/>
+            <a:off x="1133856" y="4600164"/>
+            <a:ext cx="9820656" cy="839785"/>
           </a:xfrm>
           <a:prstGeom prst="rect">
             <a:avLst/>
@@ -24912,71 +23075,14 @@
       </p:sp>
       <p:sp>
         <p:nvSpPr>
-          <p:cNvPr id="25" name="Shape 20"/>
-          <p:cNvSpPr/>
-          <p:nvPr/>
-        </p:nvSpPr>
-        <p:spPr>
-          <a:xfrm>
-            <a:off x="1097280" y="2140428"/>
-            <a:ext cx="474025" cy="474025"/>
-          </a:xfrm>
-          <a:prstGeom prst="roundRect">
-            <a:avLst>
-              <a:gd name="adj" fmla="val 7716"/>
-            </a:avLst>
-          </a:prstGeom>
-          <a:solidFill>
-            <a:srgbClr val="EEF3F8"/>
-          </a:solidFill>
-          <a:ln w="12700">
-            <a:solidFill>
-              <a:srgbClr val="D1DAE7"/>
-            </a:solidFill>
-            <a:prstDash val="solid"/>
-          </a:ln>
-        </p:spPr>
-      </p:sp>
-      <p:pic>
-        <p:nvPicPr>
-          <p:cNvPr id="26" name="Image 3" descr="article icon from tabler-icons (MIT)">    </p:cNvPr>
-          <p:cNvPicPr>
-            <a:picLocks noChangeAspect="1"/>
-          </p:cNvPicPr>
-          <p:nvPr/>
-        </p:nvPicPr>
-        <p:blipFill>
-          <a:blip r:embed="rId7">
-            <a:extLst>
-              <a:ext uri="{96DAC541-7B7A-43D3-8B79-37D633B846F1}">
-                <asvg:svgBlip xmlns:asvg="http://schemas.microsoft.com/office/drawing/2016/SVG/main" r:embed="rId8"/>
-              </a:ext>
-            </a:extLst>
-          </a:blip>
-          <a:stretch>
-            <a:fillRect/>
-          </a:stretch>
-        </p:blipFill>
-        <p:spPr>
-          <a:xfrm>
-            <a:off x="1170432" y="2213580"/>
-            <a:ext cx="327721" cy="327721"/>
-          </a:xfrm>
-          <a:prstGeom prst="rect">
-            <a:avLst/>
-          </a:prstGeom>
-        </p:spPr>
-      </p:pic>
-      <p:sp>
-        <p:nvSpPr>
-          <p:cNvPr id="27" name="mdpr:1-2-dfa474:item-1:block-8-chunk-1"/>
+          <p:cNvPr id="25" name="mdpr:1-2-dfa474:item-1:block-8-chunk-1"/>
           <p:cNvSpPr txBox="1"/>
           <p:nvPr/>
         </p:nvSpPr>
         <p:spPr>
           <a:xfrm>
-            <a:off x="1699321" y="1987296"/>
-            <a:ext cx="9255191" cy="780288"/>
+            <a:off x="1133856" y="1957548"/>
+            <a:ext cx="9820656" cy="839785"/>
           </a:xfrm>
           <a:prstGeom prst="rect">
             <a:avLst/>
@@ -25028,71 +23134,14 @@
       </p:sp>
       <p:sp>
         <p:nvSpPr>
-          <p:cNvPr id="28" name="Shape 22"/>
-          <p:cNvSpPr/>
-          <p:nvPr/>
-        </p:nvSpPr>
-        <p:spPr>
-          <a:xfrm>
-            <a:off x="1097280" y="3466308"/>
-            <a:ext cx="474025" cy="474025"/>
-          </a:xfrm>
-          <a:prstGeom prst="roundRect">
-            <a:avLst>
-              <a:gd name="adj" fmla="val 7716"/>
-            </a:avLst>
-          </a:prstGeom>
-          <a:solidFill>
-            <a:srgbClr val="EEF3F8"/>
-          </a:solidFill>
-          <a:ln w="12700">
-            <a:solidFill>
-              <a:srgbClr val="D1DAE7"/>
-            </a:solidFill>
-            <a:prstDash val="solid"/>
-          </a:ln>
-        </p:spPr>
-      </p:sp>
-      <p:pic>
-        <p:nvPicPr>
-          <p:cNvPr id="29" name="Image 4" descr="article icon from tabler-icons (MIT)">    </p:cNvPr>
-          <p:cNvPicPr>
-            <a:picLocks noChangeAspect="1"/>
-          </p:cNvPicPr>
-          <p:nvPr/>
-        </p:nvPicPr>
-        <p:blipFill>
-          <a:blip r:embed="rId9">
-            <a:extLst>
-              <a:ext uri="{96DAC541-7B7A-43D3-8B79-37D633B846F1}">
-                <asvg:svgBlip xmlns:asvg="http://schemas.microsoft.com/office/drawing/2016/SVG/main" r:embed="rId10"/>
-              </a:ext>
-            </a:extLst>
-          </a:blip>
-          <a:stretch>
-            <a:fillRect/>
-          </a:stretch>
-        </p:blipFill>
-        <p:spPr>
-          <a:xfrm>
-            <a:off x="1170432" y="3539460"/>
-            <a:ext cx="327721" cy="327721"/>
-          </a:xfrm>
-          <a:prstGeom prst="rect">
-            <a:avLst/>
-          </a:prstGeom>
-        </p:spPr>
-      </p:pic>
-      <p:sp>
-        <p:nvSpPr>
-          <p:cNvPr id="30" name="mdpr:1-2-dfa474:item-2:block-8-chunk-1"/>
+          <p:cNvPr id="26" name="mdpr:1-2-dfa474:item-2:block-8-chunk-1"/>
           <p:cNvSpPr txBox="1"/>
           <p:nvPr/>
         </p:nvSpPr>
         <p:spPr>
           <a:xfrm>
-            <a:off x="1699321" y="3313176"/>
-            <a:ext cx="9255191" cy="780288"/>
+            <a:off x="1133856" y="3283428"/>
+            <a:ext cx="9820656" cy="839785"/>
           </a:xfrm>
           <a:prstGeom prst="rect">
             <a:avLst/>
@@ -25144,71 +23193,14 @@
       </p:sp>
       <p:sp>
         <p:nvSpPr>
-          <p:cNvPr id="31" name="Shape 24"/>
-          <p:cNvSpPr/>
-          <p:nvPr/>
-        </p:nvSpPr>
-        <p:spPr>
-          <a:xfrm>
-            <a:off x="1097280" y="4783044"/>
-            <a:ext cx="474025" cy="474025"/>
-          </a:xfrm>
-          <a:prstGeom prst="roundRect">
-            <a:avLst>
-              <a:gd name="adj" fmla="val 7716"/>
-            </a:avLst>
-          </a:prstGeom>
-          <a:solidFill>
-            <a:srgbClr val="EEF3F8"/>
-          </a:solidFill>
-          <a:ln w="12700">
-            <a:solidFill>
-              <a:srgbClr val="D1DAE7"/>
-            </a:solidFill>
-            <a:prstDash val="solid"/>
-          </a:ln>
-        </p:spPr>
-      </p:sp>
-      <p:pic>
-        <p:nvPicPr>
-          <p:cNvPr id="32" name="Image 5" descr="article icon from tabler-icons (MIT)">    </p:cNvPr>
-          <p:cNvPicPr>
-            <a:picLocks noChangeAspect="1"/>
-          </p:cNvPicPr>
-          <p:nvPr/>
-        </p:nvPicPr>
-        <p:blipFill>
-          <a:blip r:embed="rId11">
-            <a:extLst>
-              <a:ext uri="{96DAC541-7B7A-43D3-8B79-37D633B846F1}">
-                <asvg:svgBlip xmlns:asvg="http://schemas.microsoft.com/office/drawing/2016/SVG/main" r:embed="rId12"/>
-              </a:ext>
-            </a:extLst>
-          </a:blip>
-          <a:stretch>
-            <a:fillRect/>
-          </a:stretch>
-        </p:blipFill>
-        <p:spPr>
-          <a:xfrm>
-            <a:off x="1170432" y="4856196"/>
-            <a:ext cx="327721" cy="327721"/>
-          </a:xfrm>
-          <a:prstGeom prst="rect">
-            <a:avLst/>
-          </a:prstGeom>
-        </p:spPr>
-      </p:pic>
-      <p:sp>
-        <p:nvSpPr>
-          <p:cNvPr id="33" name="mdpr:1-2-dfa474:item-3:block-8-chunk-1"/>
+          <p:cNvPr id="27" name="mdpr:1-2-dfa474:item-3:block-8-chunk-1"/>
           <p:cNvSpPr txBox="1"/>
           <p:nvPr/>
         </p:nvSpPr>
         <p:spPr>
           <a:xfrm>
-            <a:off x="1699321" y="4629912"/>
-            <a:ext cx="9255191" cy="780288"/>
+            <a:off x="1133856" y="4600164"/>
+            <a:ext cx="9820656" cy="839785"/>
           </a:xfrm>
           <a:prstGeom prst="rect">
             <a:avLst/>

--- a/docs/theme-preview/pptx/neomorphism.pptx
+++ b/docs/theme-preview/pptx/neomorphism.pptx
@@ -3757,33 +3757,6 @@
         </p:nvSpPr>
         <p:spPr>
           <a:xfrm>
-            <a:off x="731520" y="1207008"/>
-            <a:ext cx="1325880" cy="54864"/>
-          </a:xfrm>
-          <a:prstGeom prst="rect">
-            <a:avLst/>
-          </a:prstGeom>
-          <a:solidFill>
-            <a:srgbClr val="5D7FA4"/>
-          </a:solidFill>
-          <a:ln w="12700">
-            <a:solidFill>
-              <a:srgbClr val="5D7FA4">
-                <a:alpha val="0"/>
-              </a:srgbClr>
-            </a:solidFill>
-            <a:prstDash val="solid"/>
-          </a:ln>
-        </p:spPr>
-      </p:sp>
-      <p:sp>
-        <p:nvSpPr>
-          <p:cNvPr id="8" name="Shape 6"/>
-          <p:cNvSpPr/>
-          <p:nvPr/>
-        </p:nvSpPr>
-        <p:spPr>
-          <a:xfrm>
             <a:off x="0" y="0"/>
             <a:ext cx="12191695" cy="201168"/>
           </a:xfrm>
@@ -3805,36 +3778,7 @@
       </p:sp>
       <p:sp>
         <p:nvSpPr>
-          <p:cNvPr id="9" name="Shape 7"/>
-          <p:cNvSpPr/>
-          <p:nvPr/>
-        </p:nvSpPr>
-        <p:spPr>
-          <a:xfrm>
-            <a:off x="9357055" y="6528816"/>
-            <a:ext cx="2148840" cy="73152"/>
-          </a:xfrm>
-          <a:prstGeom prst="rect">
-            <a:avLst/>
-          </a:prstGeom>
-          <a:solidFill>
-            <a:srgbClr val="FFFFFF">
-              <a:alpha val="90000"/>
-            </a:srgbClr>
-          </a:solidFill>
-          <a:ln w="12700">
-            <a:solidFill>
-              <a:srgbClr val="FFFFFF">
-                <a:alpha val="0"/>
-              </a:srgbClr>
-            </a:solidFill>
-            <a:prstDash val="solid"/>
-          </a:ln>
-        </p:spPr>
-      </p:sp>
-      <p:sp>
-        <p:nvSpPr>
-          <p:cNvPr id="10" name="mdpr:mdpr-design-grammar-b3a462:title:__title:mdpr-design-grammar-b3a462"/>
+          <p:cNvPr id="8" name="mdpr:mdpr-design-grammar-b3a462:title:__title:mdpr-design-grammar-b3a462"/>
           <p:cNvSpPr txBox="1"/>
           <p:nvPr/>
         </p:nvSpPr>
@@ -4069,8 +4013,282 @@
         </p:nvSpPr>
         <p:spPr>
           <a:xfrm>
-            <a:off x="731520" y="1207008"/>
-            <a:ext cx="1325880" cy="54864"/>
+            <a:off x="955548" y="2574036"/>
+            <a:ext cx="10241280" cy="1024128"/>
+          </a:xfrm>
+          <a:prstGeom prst="roundRect">
+            <a:avLst>
+              <a:gd name="adj" fmla="val 5357"/>
+            </a:avLst>
+          </a:prstGeom>
+          <a:solidFill>
+            <a:srgbClr val="B8C3D2">
+              <a:alpha val="26000"/>
+            </a:srgbClr>
+          </a:solidFill>
+          <a:ln w="12700">
+            <a:solidFill>
+              <a:srgbClr val="D1DAE7">
+                <a:alpha val="0"/>
+              </a:srgbClr>
+            </a:solidFill>
+            <a:prstDash val="solid"/>
+          </a:ln>
+          <a:effectLst>
+            <a:outerShdw sx="100000" sy="100000" kx="0" ky="0" algn="bl" rotWithShape="0" blurRad="13970" dist="50800" dir="2700000">
+              <a:srgbClr val="AAB5C4">
+                <a:alpha val="20000"/>
+              </a:srgbClr>
+            </a:outerShdw>
+          </a:effectLst>
+        </p:spPr>
+      </p:sp>
+      <p:sp>
+        <p:nvSpPr>
+          <p:cNvPr id="8" name="Shape 6"/>
+          <p:cNvSpPr/>
+          <p:nvPr/>
+        </p:nvSpPr>
+        <p:spPr>
+          <a:xfrm>
+            <a:off x="882396" y="2491740"/>
+            <a:ext cx="10241280" cy="1024128"/>
+          </a:xfrm>
+          <a:prstGeom prst="roundRect">
+            <a:avLst>
+              <a:gd name="adj" fmla="val 5357"/>
+            </a:avLst>
+          </a:prstGeom>
+          <a:solidFill>
+            <a:srgbClr val="FFFFFF">
+              <a:alpha val="42000"/>
+            </a:srgbClr>
+          </a:solidFill>
+          <a:ln w="12700">
+            <a:solidFill>
+              <a:srgbClr val="FFFFFF">
+                <a:alpha val="0"/>
+              </a:srgbClr>
+            </a:solidFill>
+            <a:prstDash val="solid"/>
+          </a:ln>
+          <a:effectLst>
+            <a:outerShdw sx="100000" sy="100000" kx="0" ky="0" algn="bl" rotWithShape="0" blurRad="10160" dist="50800" dir="13500000">
+              <a:srgbClr val="FFFFFF">
+                <a:alpha val="36000"/>
+              </a:srgbClr>
+            </a:outerShdw>
+          </a:effectLst>
+        </p:spPr>
+      </p:sp>
+      <p:sp>
+        <p:nvSpPr>
+          <p:cNvPr id="9" name="Shape 7"/>
+          <p:cNvSpPr/>
+          <p:nvPr/>
+        </p:nvSpPr>
+        <p:spPr>
+          <a:xfrm>
+            <a:off x="914400" y="2523744"/>
+            <a:ext cx="10241280" cy="1024128"/>
+          </a:xfrm>
+          <a:prstGeom prst="roundRect">
+            <a:avLst>
+              <a:gd name="adj" fmla="val 5357"/>
+            </a:avLst>
+          </a:prstGeom>
+          <a:solidFill>
+            <a:srgbClr val="EEF3F8">
+              <a:alpha val="6000"/>
+            </a:srgbClr>
+          </a:solidFill>
+          <a:ln w="12700">
+            <a:solidFill>
+              <a:srgbClr val="FFFFFF">
+                <a:alpha val="28000"/>
+              </a:srgbClr>
+            </a:solidFill>
+            <a:prstDash val="solid"/>
+          </a:ln>
+        </p:spPr>
+      </p:sp>
+      <p:pic>
+        <p:nvPicPr>
+          <p:cNvPr id="10" name="Image 0" descr="preencoded.png">    </p:cNvPr>
+          <p:cNvPicPr>
+            <a:picLocks noChangeAspect="1"/>
+          </p:cNvPicPr>
+          <p:nvPr/>
+        </p:nvPicPr>
+        <p:blipFill>
+          <a:blip r:embed="rId1">
+            <a:extLst>
+              <a:ext uri="{96DAC541-7B7A-43D3-8B79-37D633B846F1}">
+                <asvg:svgBlip xmlns:asvg="http://schemas.microsoft.com/office/drawing/2016/SVG/main" r:embed="rId2"/>
+              </a:ext>
+            </a:extLst>
+          </a:blip>
+          <a:stretch>
+            <a:fillRect/>
+          </a:stretch>
+        </p:blipFill>
+        <p:spPr>
+          <a:xfrm>
+            <a:off x="914400" y="2523744"/>
+            <a:ext cx="10241280" cy="1024128"/>
+          </a:xfrm>
+          <a:prstGeom prst="rect">
+            <a:avLst/>
+          </a:prstGeom>
+        </p:spPr>
+      </p:pic>
+      <p:sp>
+        <p:nvSpPr>
+          <p:cNvPr id="11" name="Shape 8"/>
+          <p:cNvSpPr/>
+          <p:nvPr/>
+        </p:nvSpPr>
+        <p:spPr>
+          <a:xfrm>
+            <a:off x="955548" y="3899916"/>
+            <a:ext cx="10241280" cy="1024128"/>
+          </a:xfrm>
+          <a:prstGeom prst="roundRect">
+            <a:avLst>
+              <a:gd name="adj" fmla="val 5357"/>
+            </a:avLst>
+          </a:prstGeom>
+          <a:solidFill>
+            <a:srgbClr val="B8C3D2">
+              <a:alpha val="26000"/>
+            </a:srgbClr>
+          </a:solidFill>
+          <a:ln w="12700">
+            <a:solidFill>
+              <a:srgbClr val="D1DAE7">
+                <a:alpha val="0"/>
+              </a:srgbClr>
+            </a:solidFill>
+            <a:prstDash val="solid"/>
+          </a:ln>
+          <a:effectLst>
+            <a:outerShdw sx="100000" sy="100000" kx="0" ky="0" algn="bl" rotWithShape="0" blurRad="13970" dist="50800" dir="2700000">
+              <a:srgbClr val="AAB5C4">
+                <a:alpha val="20000"/>
+              </a:srgbClr>
+            </a:outerShdw>
+          </a:effectLst>
+        </p:spPr>
+      </p:sp>
+      <p:sp>
+        <p:nvSpPr>
+          <p:cNvPr id="12" name="Shape 9"/>
+          <p:cNvSpPr/>
+          <p:nvPr/>
+        </p:nvSpPr>
+        <p:spPr>
+          <a:xfrm>
+            <a:off x="882396" y="3817620"/>
+            <a:ext cx="10241280" cy="1024128"/>
+          </a:xfrm>
+          <a:prstGeom prst="roundRect">
+            <a:avLst>
+              <a:gd name="adj" fmla="val 5357"/>
+            </a:avLst>
+          </a:prstGeom>
+          <a:solidFill>
+            <a:srgbClr val="FFFFFF">
+              <a:alpha val="42000"/>
+            </a:srgbClr>
+          </a:solidFill>
+          <a:ln w="12700">
+            <a:solidFill>
+              <a:srgbClr val="FFFFFF">
+                <a:alpha val="0"/>
+              </a:srgbClr>
+            </a:solidFill>
+            <a:prstDash val="solid"/>
+          </a:ln>
+          <a:effectLst>
+            <a:outerShdw sx="100000" sy="100000" kx="0" ky="0" algn="bl" rotWithShape="0" blurRad="10160" dist="50800" dir="13500000">
+              <a:srgbClr val="FFFFFF">
+                <a:alpha val="36000"/>
+              </a:srgbClr>
+            </a:outerShdw>
+          </a:effectLst>
+        </p:spPr>
+      </p:sp>
+      <p:sp>
+        <p:nvSpPr>
+          <p:cNvPr id="13" name="Shape 10"/>
+          <p:cNvSpPr/>
+          <p:nvPr/>
+        </p:nvSpPr>
+        <p:spPr>
+          <a:xfrm>
+            <a:off x="914400" y="3849624"/>
+            <a:ext cx="10241280" cy="1024128"/>
+          </a:xfrm>
+          <a:prstGeom prst="roundRect">
+            <a:avLst>
+              <a:gd name="adj" fmla="val 5357"/>
+            </a:avLst>
+          </a:prstGeom>
+          <a:solidFill>
+            <a:srgbClr val="EEF3F8">
+              <a:alpha val="6000"/>
+            </a:srgbClr>
+          </a:solidFill>
+          <a:ln w="12700">
+            <a:solidFill>
+              <a:srgbClr val="FFFFFF">
+                <a:alpha val="28000"/>
+              </a:srgbClr>
+            </a:solidFill>
+            <a:prstDash val="solid"/>
+          </a:ln>
+        </p:spPr>
+      </p:sp>
+      <p:pic>
+        <p:nvPicPr>
+          <p:cNvPr id="14" name="Image 1" descr="preencoded.png">    </p:cNvPr>
+          <p:cNvPicPr>
+            <a:picLocks noChangeAspect="1"/>
+          </p:cNvPicPr>
+          <p:nvPr/>
+        </p:nvPicPr>
+        <p:blipFill>
+          <a:blip r:embed="rId3">
+            <a:extLst>
+              <a:ext uri="{96DAC541-7B7A-43D3-8B79-37D633B846F1}">
+                <asvg:svgBlip xmlns:asvg="http://schemas.microsoft.com/office/drawing/2016/SVG/main" r:embed="rId4"/>
+              </a:ext>
+            </a:extLst>
+          </a:blip>
+          <a:stretch>
+            <a:fillRect/>
+          </a:stretch>
+        </p:blipFill>
+        <p:spPr>
+          <a:xfrm>
+            <a:off x="914400" y="3849624"/>
+            <a:ext cx="10241280" cy="1024128"/>
+          </a:xfrm>
+          <a:prstGeom prst="rect">
+            <a:avLst/>
+          </a:prstGeom>
+        </p:spPr>
+      </p:pic>
+      <p:sp>
+        <p:nvSpPr>
+          <p:cNvPr id="15" name="Shape 11"/>
+          <p:cNvSpPr/>
+          <p:nvPr/>
+        </p:nvSpPr>
+        <p:spPr>
+          <a:xfrm>
+            <a:off x="914400" y="2523744"/>
+            <a:ext cx="73152" cy="1024128"/>
           </a:xfrm>
           <a:prstGeom prst="rect">
             <a:avLst/>
@@ -4090,24 +4308,24 @@
       </p:sp>
       <p:sp>
         <p:nvSpPr>
-          <p:cNvPr id="8" name="Shape 6"/>
-          <p:cNvSpPr/>
-          <p:nvPr/>
-        </p:nvSpPr>
-        <p:spPr>
-          <a:xfrm>
-            <a:off x="822960" y="1554480"/>
-            <a:ext cx="4937760" cy="73152"/>
+          <p:cNvPr id="16" name="Shape 12"/>
+          <p:cNvSpPr/>
+          <p:nvPr/>
+        </p:nvSpPr>
+        <p:spPr>
+          <a:xfrm>
+            <a:off x="914400" y="3849624"/>
+            <a:ext cx="73152" cy="1024128"/>
           </a:xfrm>
           <a:prstGeom prst="rect">
             <a:avLst/>
           </a:prstGeom>
           <a:solidFill>
-            <a:srgbClr val="5D7FA4"/>
-          </a:solidFill>
-          <a:ln w="12700">
-            <a:solidFill>
-              <a:srgbClr val="5D7FA4">
+            <a:srgbClr val="D8E2EE"/>
+          </a:solidFill>
+          <a:ln w="12700">
+            <a:solidFill>
+              <a:srgbClr val="D8E2EE">
                 <a:alpha val="0"/>
               </a:srgbClr>
             </a:solidFill>
@@ -4117,34 +4335,7 @@
       </p:sp>
       <p:sp>
         <p:nvSpPr>
-          <p:cNvPr id="9" name="Shape 7"/>
-          <p:cNvSpPr/>
-          <p:nvPr/>
-        </p:nvSpPr>
-        <p:spPr>
-          <a:xfrm>
-            <a:off x="6400800" y="1554480"/>
-            <a:ext cx="4937760" cy="73152"/>
-          </a:xfrm>
-          <a:prstGeom prst="rect">
-            <a:avLst/>
-          </a:prstGeom>
-          <a:solidFill>
-            <a:srgbClr val="5D7FA4"/>
-          </a:solidFill>
-          <a:ln w="12700">
-            <a:solidFill>
-              <a:srgbClr val="5D7FA4">
-                <a:alpha val="0"/>
-              </a:srgbClr>
-            </a:solidFill>
-            <a:prstDash val="solid"/>
-          </a:ln>
-        </p:spPr>
-      </p:sp>
-      <p:sp>
-        <p:nvSpPr>
-          <p:cNvPr id="10" name="mdpr:2-2-a9df10:title:__title:2-2-a9df10"/>
+          <p:cNvPr id="17" name="mdpr:2-2-a9df10:title:__title:2-2-a9df10"/>
           <p:cNvSpPr txBox="1"/>
           <p:nvPr/>
         </p:nvSpPr>
@@ -4178,7 +4369,24 @@
                 <a:ea typeface="Pretendard" pitchFamily="34" charset="-122"/>
                 <a:cs typeface="Pretendard" pitchFamily="34" charset="-120"/>
               </a:rPr>
-              <a:t>Semantic Blocks (Cont. 2/2)</a:t>
+              <a:t>Semantic Blocks</a:t>
+            </a:r>
+            <a:pPr algn="ctr" indent="0" marL="0">
+              <a:lnSpc>
+                <a:spcPct val="120000"/>
+              </a:lnSpc>
+              <a:buNone/>
+            </a:pPr>
+            <a:r>
+              <a:rPr lang="en-US" sz="2000" dirty="0">
+                <a:solidFill>
+                  <a:srgbClr val="8C8C8C"/>
+                </a:solidFill>
+                <a:latin typeface="Pretendard" pitchFamily="34" charset="0"/>
+                <a:ea typeface="Pretendard" pitchFamily="34" charset="-122"/>
+                <a:cs typeface="Pretendard" pitchFamily="34" charset="-120"/>
+              </a:rPr>
+              <a:t> (Cont. 2/2)</a:t>
             </a:r>
             <a:endParaRPr lang="en-US" sz="3400" dirty="0"/>
           </a:p>
@@ -4186,14 +4394,14 @@
       </p:sp>
       <p:sp>
         <p:nvSpPr>
-          <p:cNvPr id="11" name="mdpr:2-2-a9df10:left:block-10-chunk-2"/>
+          <p:cNvPr id="18" name="mdpr:2-2-a9df10:item-1:block-10-chunk-2"/>
           <p:cNvSpPr txBox="1"/>
           <p:nvPr/>
         </p:nvSpPr>
         <p:spPr>
           <a:xfrm>
-            <a:off x="896112" y="1664208"/>
-            <a:ext cx="4791456" cy="4169664"/>
+            <a:off x="1133856" y="2615916"/>
+            <a:ext cx="9820656" cy="839785"/>
           </a:xfrm>
           <a:prstGeom prst="rect">
             <a:avLst/>
@@ -4202,7 +4410,7 @@
           <a:ln/>
         </p:spPr>
         <p:txBody>
-          <a:bodyPr wrap="square" lIns="0" tIns="25400" rIns="25400" bIns="0" rtlCol="0" anchor="t"/>
+          <a:bodyPr wrap="square" lIns="0" tIns="25400" rIns="25400" bIns="0" rtlCol="0" anchor="ctr"/>
           <a:lstStyle/>
           <a:p>
             <a:pPr algn="l" indent="0" marL="0">
@@ -4220,7 +4428,7 @@
                 <a:ea typeface="Pretendard" pitchFamily="34" charset="-122"/>
                 <a:cs typeface="Pretendard" pitchFamily="34" charset="-120"/>
               </a:rPr>
-              <a:t>- Constraint:</a:t>
+              <a:t>Constraint:</a:t>
             </a:r>
             <a:pPr algn="l" indent="0" marL="0">
               <a:lnSpc>
@@ -4245,14 +4453,14 @@
       </p:sp>
       <p:sp>
         <p:nvSpPr>
-          <p:cNvPr id="12" name="mdpr:2-2-a9df10:right:block-10-chunk-2"/>
+          <p:cNvPr id="19" name="mdpr:2-2-a9df10:item-2:block-10-chunk-2"/>
           <p:cNvSpPr txBox="1"/>
           <p:nvPr/>
         </p:nvSpPr>
         <p:spPr>
           <a:xfrm>
-            <a:off x="6473952" y="1664208"/>
-            <a:ext cx="4791456" cy="4169664"/>
+            <a:off x="1133856" y="3941796"/>
+            <a:ext cx="9820656" cy="839785"/>
           </a:xfrm>
           <a:prstGeom prst="rect">
             <a:avLst/>
@@ -4261,7 +4469,7 @@
           <a:ln/>
         </p:spPr>
         <p:txBody>
-          <a:bodyPr wrap="square" lIns="0" tIns="25400" rIns="25400" bIns="0" rtlCol="0" anchor="t"/>
+          <a:bodyPr wrap="square" lIns="0" tIns="25400" rIns="25400" bIns="0" rtlCol="0" anchor="ctr"/>
           <a:lstStyle/>
           <a:p>
             <a:pPr algn="l" indent="0" marL="0">
@@ -4279,7 +4487,7 @@
                 <a:ea typeface="Pretendard" pitchFamily="34" charset="-122"/>
                 <a:cs typeface="Pretendard" pitchFamily="34" charset="-120"/>
               </a:rPr>
-              <a:t>- Emphasis</a:t>
+              <a:t>Emphasis</a:t>
             </a:r>
             <a:pPr algn="l" indent="0" marL="0">
               <a:lnSpc>
@@ -4491,34 +4699,7 @@
       </p:sp>
       <p:sp>
         <p:nvSpPr>
-          <p:cNvPr id="7" name="Shape 5"/>
-          <p:cNvSpPr/>
-          <p:nvPr/>
-        </p:nvSpPr>
-        <p:spPr>
-          <a:xfrm>
-            <a:off x="731520" y="1207008"/>
-            <a:ext cx="1325880" cy="54864"/>
-          </a:xfrm>
-          <a:prstGeom prst="rect">
-            <a:avLst/>
-          </a:prstGeom>
-          <a:solidFill>
-            <a:srgbClr val="5D7FA4"/>
-          </a:solidFill>
-          <a:ln w="12700">
-            <a:solidFill>
-              <a:srgbClr val="5D7FA4">
-                <a:alpha val="0"/>
-              </a:srgbClr>
-            </a:solidFill>
-            <a:prstDash val="solid"/>
-          </a:ln>
-        </p:spPr>
-      </p:sp>
-      <p:sp>
-        <p:nvSpPr>
-          <p:cNvPr id="8" name="mdpr:pipeline-diagram-51792c:title:__title:pipeline-diagram-51792c"/>
+          <p:cNvPr id="7" name="mdpr:pipeline-diagram-51792c:title:__title:pipeline-diagram-51792c"/>
           <p:cNvSpPr txBox="1"/>
           <p:nvPr/>
         </p:nvSpPr>
@@ -4560,7 +4741,7 @@
       </p:sp>
       <p:sp>
         <p:nvSpPr>
-          <p:cNvPr id="9" name="Shape 7"/>
+          <p:cNvPr id="8" name="Shape 6"/>
           <p:cNvSpPr/>
           <p:nvPr/>
         </p:nvSpPr>
@@ -4584,7 +4765,7 @@
       </p:sp>
       <p:sp>
         <p:nvSpPr>
-          <p:cNvPr id="10" name="Shape 8"/>
+          <p:cNvPr id="9" name="Shape 7"/>
           <p:cNvSpPr/>
           <p:nvPr/>
         </p:nvSpPr>
@@ -4608,7 +4789,7 @@
       </p:sp>
       <p:sp>
         <p:nvSpPr>
-          <p:cNvPr id="11" name="Shape 9"/>
+          <p:cNvPr id="10" name="Shape 8"/>
           <p:cNvSpPr/>
           <p:nvPr/>
         </p:nvSpPr>
@@ -4632,7 +4813,7 @@
       </p:sp>
       <p:sp>
         <p:nvSpPr>
-          <p:cNvPr id="12" name="Shape 10"/>
+          <p:cNvPr id="11" name="Shape 9"/>
           <p:cNvSpPr/>
           <p:nvPr/>
         </p:nvSpPr>
@@ -4656,7 +4837,7 @@
       </p:sp>
       <p:sp>
         <p:nvSpPr>
-          <p:cNvPr id="13" name="Shape 11"/>
+          <p:cNvPr id="12" name="Shape 10"/>
           <p:cNvSpPr/>
           <p:nvPr/>
         </p:nvSpPr>
@@ -4680,7 +4861,7 @@
       </p:sp>
       <p:sp>
         <p:nvSpPr>
-          <p:cNvPr id="14" name="Shape 12"/>
+          <p:cNvPr id="13" name="Shape 11"/>
           <p:cNvSpPr/>
           <p:nvPr/>
         </p:nvSpPr>
@@ -4714,7 +4895,7 @@
       </p:sp>
       <p:sp>
         <p:nvSpPr>
-          <p:cNvPr id="15" name="Shape 13"/>
+          <p:cNvPr id="14" name="Shape 12"/>
           <p:cNvSpPr/>
           <p:nvPr/>
         </p:nvSpPr>
@@ -4741,7 +4922,7 @@
       </p:sp>
       <p:sp>
         <p:nvSpPr>
-          <p:cNvPr id="16" name="Shape 14"/>
+          <p:cNvPr id="15" name="Shape 13"/>
           <p:cNvSpPr/>
           <p:nvPr/>
         </p:nvSpPr>
@@ -4768,7 +4949,7 @@
       </p:sp>
       <p:sp>
         <p:nvSpPr>
-          <p:cNvPr id="17" name="Text 15"/>
+          <p:cNvPr id="16" name="Text 14"/>
           <p:cNvSpPr txBox="1"/>
           <p:nvPr/>
         </p:nvSpPr>
@@ -4796,7 +4977,7 @@
               <a:buNone/>
             </a:pPr>
             <a:r>
-              <a:rPr lang="en-US" sz="1500" b="1" dirty="0">
+              <a:rPr lang="en-US" sz="1600" b="1" dirty="0">
                 <a:solidFill>
                   <a:srgbClr val="EEF3F8"/>
                 </a:solidFill>
@@ -4806,13 +4987,13 @@
               </a:rPr>
               <a:t>1</a:t>
             </a:r>
-            <a:endParaRPr lang="en-US" sz="1500" dirty="0"/>
+            <a:endParaRPr lang="en-US" sz="1600" dirty="0"/>
           </a:p>
         </p:txBody>
       </p:sp>
       <p:sp>
         <p:nvSpPr>
-          <p:cNvPr id="18" name="Text 16"/>
+          <p:cNvPr id="17" name="Text 15"/>
           <p:cNvSpPr txBox="1"/>
           <p:nvPr/>
         </p:nvSpPr>
@@ -4856,7 +5037,7 @@
       </p:sp>
       <p:sp>
         <p:nvSpPr>
-          <p:cNvPr id="19" name="Shape 17"/>
+          <p:cNvPr id="18" name="Shape 16"/>
           <p:cNvSpPr/>
           <p:nvPr/>
         </p:nvSpPr>
@@ -4890,7 +5071,7 @@
       </p:sp>
       <p:sp>
         <p:nvSpPr>
-          <p:cNvPr id="20" name="Shape 18"/>
+          <p:cNvPr id="19" name="Shape 17"/>
           <p:cNvSpPr/>
           <p:nvPr/>
         </p:nvSpPr>
@@ -4917,7 +5098,7 @@
       </p:sp>
       <p:sp>
         <p:nvSpPr>
-          <p:cNvPr id="21" name="Shape 19"/>
+          <p:cNvPr id="20" name="Shape 18"/>
           <p:cNvSpPr/>
           <p:nvPr/>
         </p:nvSpPr>
@@ -4944,7 +5125,7 @@
       </p:sp>
       <p:sp>
         <p:nvSpPr>
-          <p:cNvPr id="22" name="Text 20"/>
+          <p:cNvPr id="21" name="Text 19"/>
           <p:cNvSpPr txBox="1"/>
           <p:nvPr/>
         </p:nvSpPr>
@@ -4972,7 +5153,7 @@
               <a:buNone/>
             </a:pPr>
             <a:r>
-              <a:rPr lang="en-US" sz="1500" b="1" dirty="0">
+              <a:rPr lang="en-US" sz="1600" b="1" dirty="0">
                 <a:solidFill>
                   <a:srgbClr val="EEF3F8"/>
                 </a:solidFill>
@@ -4982,13 +5163,13 @@
               </a:rPr>
               <a:t>2</a:t>
             </a:r>
-            <a:endParaRPr lang="en-US" sz="1500" dirty="0"/>
+            <a:endParaRPr lang="en-US" sz="1600" dirty="0"/>
           </a:p>
         </p:txBody>
       </p:sp>
       <p:sp>
         <p:nvSpPr>
-          <p:cNvPr id="23" name="Text 21"/>
+          <p:cNvPr id="22" name="Text 20"/>
           <p:cNvSpPr txBox="1"/>
           <p:nvPr/>
         </p:nvSpPr>
@@ -5032,7 +5213,7 @@
       </p:sp>
       <p:sp>
         <p:nvSpPr>
-          <p:cNvPr id="24" name="Shape 22"/>
+          <p:cNvPr id="23" name="Shape 21"/>
           <p:cNvSpPr/>
           <p:nvPr/>
         </p:nvSpPr>
@@ -5066,7 +5247,7 @@
       </p:sp>
       <p:sp>
         <p:nvSpPr>
-          <p:cNvPr id="25" name="Shape 23"/>
+          <p:cNvPr id="24" name="Shape 22"/>
           <p:cNvSpPr/>
           <p:nvPr/>
         </p:nvSpPr>
@@ -5093,7 +5274,7 @@
       </p:sp>
       <p:sp>
         <p:nvSpPr>
-          <p:cNvPr id="26" name="Shape 24"/>
+          <p:cNvPr id="25" name="Shape 23"/>
           <p:cNvSpPr/>
           <p:nvPr/>
         </p:nvSpPr>
@@ -5120,7 +5301,7 @@
       </p:sp>
       <p:sp>
         <p:nvSpPr>
-          <p:cNvPr id="27" name="Text 25"/>
+          <p:cNvPr id="26" name="Text 24"/>
           <p:cNvSpPr txBox="1"/>
           <p:nvPr/>
         </p:nvSpPr>
@@ -5148,7 +5329,7 @@
               <a:buNone/>
             </a:pPr>
             <a:r>
-              <a:rPr lang="en-US" sz="1500" b="1" dirty="0">
+              <a:rPr lang="en-US" sz="1600" b="1" dirty="0">
                 <a:solidFill>
                   <a:srgbClr val="EEF3F8"/>
                 </a:solidFill>
@@ -5158,13 +5339,13 @@
               </a:rPr>
               <a:t>3</a:t>
             </a:r>
-            <a:endParaRPr lang="en-US" sz="1500" dirty="0"/>
+            <a:endParaRPr lang="en-US" sz="1600" dirty="0"/>
           </a:p>
         </p:txBody>
       </p:sp>
       <p:sp>
         <p:nvSpPr>
-          <p:cNvPr id="28" name="Text 26"/>
+          <p:cNvPr id="27" name="Text 25"/>
           <p:cNvSpPr txBox="1"/>
           <p:nvPr/>
         </p:nvSpPr>
@@ -5208,7 +5389,7 @@
       </p:sp>
       <p:sp>
         <p:nvSpPr>
-          <p:cNvPr id="29" name="Shape 27"/>
+          <p:cNvPr id="28" name="Shape 26"/>
           <p:cNvSpPr/>
           <p:nvPr/>
         </p:nvSpPr>
@@ -5242,7 +5423,7 @@
       </p:sp>
       <p:sp>
         <p:nvSpPr>
-          <p:cNvPr id="30" name="Shape 28"/>
+          <p:cNvPr id="29" name="Shape 27"/>
           <p:cNvSpPr/>
           <p:nvPr/>
         </p:nvSpPr>
@@ -5269,7 +5450,7 @@
       </p:sp>
       <p:sp>
         <p:nvSpPr>
-          <p:cNvPr id="31" name="Shape 29"/>
+          <p:cNvPr id="30" name="Shape 28"/>
           <p:cNvSpPr/>
           <p:nvPr/>
         </p:nvSpPr>
@@ -5296,7 +5477,7 @@
       </p:sp>
       <p:sp>
         <p:nvSpPr>
-          <p:cNvPr id="32" name="Text 30"/>
+          <p:cNvPr id="31" name="Text 29"/>
           <p:cNvSpPr txBox="1"/>
           <p:nvPr/>
         </p:nvSpPr>
@@ -5324,7 +5505,7 @@
               <a:buNone/>
             </a:pPr>
             <a:r>
-              <a:rPr lang="en-US" sz="1500" b="1" dirty="0">
+              <a:rPr lang="en-US" sz="1600" b="1" dirty="0">
                 <a:solidFill>
                   <a:srgbClr val="EEF3F8"/>
                 </a:solidFill>
@@ -5334,13 +5515,13 @@
               </a:rPr>
               <a:t>4</a:t>
             </a:r>
-            <a:endParaRPr lang="en-US" sz="1500" dirty="0"/>
+            <a:endParaRPr lang="en-US" sz="1600" dirty="0"/>
           </a:p>
         </p:txBody>
       </p:sp>
       <p:sp>
         <p:nvSpPr>
-          <p:cNvPr id="33" name="Text 31"/>
+          <p:cNvPr id="32" name="Text 30"/>
           <p:cNvSpPr txBox="1"/>
           <p:nvPr/>
         </p:nvSpPr>
@@ -5384,7 +5565,7 @@
       </p:sp>
       <p:sp>
         <p:nvSpPr>
-          <p:cNvPr id="34" name="Shape 32"/>
+          <p:cNvPr id="33" name="Shape 31"/>
           <p:cNvSpPr/>
           <p:nvPr/>
         </p:nvSpPr>
@@ -5418,7 +5599,7 @@
       </p:sp>
       <p:sp>
         <p:nvSpPr>
-          <p:cNvPr id="35" name="Shape 33"/>
+          <p:cNvPr id="34" name="Shape 32"/>
           <p:cNvSpPr/>
           <p:nvPr/>
         </p:nvSpPr>
@@ -5445,7 +5626,7 @@
       </p:sp>
       <p:sp>
         <p:nvSpPr>
-          <p:cNvPr id="36" name="Shape 34"/>
+          <p:cNvPr id="35" name="Shape 33"/>
           <p:cNvSpPr/>
           <p:nvPr/>
         </p:nvSpPr>
@@ -5472,7 +5653,7 @@
       </p:sp>
       <p:sp>
         <p:nvSpPr>
-          <p:cNvPr id="37" name="Text 35"/>
+          <p:cNvPr id="36" name="Text 34"/>
           <p:cNvSpPr txBox="1"/>
           <p:nvPr/>
         </p:nvSpPr>
@@ -5500,7 +5681,7 @@
               <a:buNone/>
             </a:pPr>
             <a:r>
-              <a:rPr lang="en-US" sz="1500" b="1" dirty="0">
+              <a:rPr lang="en-US" sz="1600" b="1" dirty="0">
                 <a:solidFill>
                   <a:srgbClr val="EEF3F8"/>
                 </a:solidFill>
@@ -5510,13 +5691,13 @@
               </a:rPr>
               <a:t>5</a:t>
             </a:r>
-            <a:endParaRPr lang="en-US" sz="1500" dirty="0"/>
+            <a:endParaRPr lang="en-US" sz="1600" dirty="0"/>
           </a:p>
         </p:txBody>
       </p:sp>
       <p:sp>
         <p:nvSpPr>
-          <p:cNvPr id="38" name="Text 36"/>
+          <p:cNvPr id="37" name="Text 35"/>
           <p:cNvSpPr txBox="1"/>
           <p:nvPr/>
         </p:nvSpPr>
@@ -5560,7 +5741,7 @@
       </p:sp>
       <p:sp>
         <p:nvSpPr>
-          <p:cNvPr id="39" name="Shape 37"/>
+          <p:cNvPr id="38" name="Shape 36"/>
           <p:cNvSpPr/>
           <p:nvPr/>
         </p:nvSpPr>
@@ -5594,7 +5775,7 @@
       </p:sp>
       <p:sp>
         <p:nvSpPr>
-          <p:cNvPr id="40" name="Shape 38"/>
+          <p:cNvPr id="39" name="Shape 37"/>
           <p:cNvSpPr/>
           <p:nvPr/>
         </p:nvSpPr>
@@ -5621,7 +5802,7 @@
       </p:sp>
       <p:sp>
         <p:nvSpPr>
-          <p:cNvPr id="41" name="Shape 39"/>
+          <p:cNvPr id="40" name="Shape 38"/>
           <p:cNvSpPr/>
           <p:nvPr/>
         </p:nvSpPr>
@@ -5648,7 +5829,7 @@
       </p:sp>
       <p:sp>
         <p:nvSpPr>
-          <p:cNvPr id="42" name="Text 40"/>
+          <p:cNvPr id="41" name="Text 39"/>
           <p:cNvSpPr txBox="1"/>
           <p:nvPr/>
         </p:nvSpPr>
@@ -5676,7 +5857,7 @@
               <a:buNone/>
             </a:pPr>
             <a:r>
-              <a:rPr lang="en-US" sz="1500" b="1" dirty="0">
+              <a:rPr lang="en-US" sz="1600" b="1" dirty="0">
                 <a:solidFill>
                   <a:srgbClr val="EEF3F8"/>
                 </a:solidFill>
@@ -5686,13 +5867,13 @@
               </a:rPr>
               <a:t>6</a:t>
             </a:r>
-            <a:endParaRPr lang="en-US" sz="1500" dirty="0"/>
+            <a:endParaRPr lang="en-US" sz="1600" dirty="0"/>
           </a:p>
         </p:txBody>
       </p:sp>
       <p:sp>
         <p:nvSpPr>
-          <p:cNvPr id="43" name="Text 41"/>
+          <p:cNvPr id="42" name="Text 40"/>
           <p:cNvSpPr txBox="1"/>
           <p:nvPr/>
         </p:nvSpPr>
@@ -5923,88 +6104,7 @@
       </p:sp>
       <p:sp>
         <p:nvSpPr>
-          <p:cNvPr id="7" name="Shape 5"/>
-          <p:cNvSpPr/>
-          <p:nvPr/>
-        </p:nvSpPr>
-        <p:spPr>
-          <a:xfrm>
-            <a:off x="731520" y="1207008"/>
-            <a:ext cx="1325880" cy="54864"/>
-          </a:xfrm>
-          <a:prstGeom prst="rect">
-            <a:avLst/>
-          </a:prstGeom>
-          <a:solidFill>
-            <a:srgbClr val="5D7FA4"/>
-          </a:solidFill>
-          <a:ln w="12700">
-            <a:solidFill>
-              <a:srgbClr val="5D7FA4">
-                <a:alpha val="0"/>
-              </a:srgbClr>
-            </a:solidFill>
-            <a:prstDash val="solid"/>
-          </a:ln>
-        </p:spPr>
-      </p:sp>
-      <p:sp>
-        <p:nvSpPr>
-          <p:cNvPr id="8" name="Shape 6"/>
-          <p:cNvSpPr/>
-          <p:nvPr/>
-        </p:nvSpPr>
-        <p:spPr>
-          <a:xfrm>
-            <a:off x="822960" y="1389888"/>
-            <a:ext cx="4937760" cy="73152"/>
-          </a:xfrm>
-          <a:prstGeom prst="rect">
-            <a:avLst/>
-          </a:prstGeom>
-          <a:solidFill>
-            <a:srgbClr val="5D7FA4"/>
-          </a:solidFill>
-          <a:ln w="12700">
-            <a:solidFill>
-              <a:srgbClr val="5D7FA4">
-                <a:alpha val="0"/>
-              </a:srgbClr>
-            </a:solidFill>
-            <a:prstDash val="solid"/>
-          </a:ln>
-        </p:spPr>
-      </p:sp>
-      <p:sp>
-        <p:nvSpPr>
-          <p:cNvPr id="9" name="Shape 7"/>
-          <p:cNvSpPr/>
-          <p:nvPr/>
-        </p:nvSpPr>
-        <p:spPr>
-          <a:xfrm>
-            <a:off x="6400800" y="1389888"/>
-            <a:ext cx="4937760" cy="73152"/>
-          </a:xfrm>
-          <a:prstGeom prst="rect">
-            <a:avLst/>
-          </a:prstGeom>
-          <a:solidFill>
-            <a:srgbClr val="5D7FA4"/>
-          </a:solidFill>
-          <a:ln w="12700">
-            <a:solidFill>
-              <a:srgbClr val="5D7FA4">
-                <a:alpha val="0"/>
-              </a:srgbClr>
-            </a:solidFill>
-            <a:prstDash val="solid"/>
-          </a:ln>
-        </p:spPr>
-      </p:sp>
-      <p:sp>
-        <p:nvSpPr>
-          <p:cNvPr id="10" name="mdpr:1-2-e3669a:title:__title:1-2-e3669a"/>
+          <p:cNvPr id="7" name="mdpr:1-2-e3669a:title:__title:1-2-e3669a"/>
           <p:cNvSpPr txBox="1"/>
           <p:nvPr/>
         </p:nvSpPr>
@@ -6046,14 +6146,14 @@
       </p:sp>
       <p:sp>
         <p:nvSpPr>
-          <p:cNvPr id="11" name="mdpr:1-2-e3669a:left:block-15-chunk-1-block-15-chunk-1"/>
+          <p:cNvPr id="8" name="mdpr:1-2-e3669a:left:block-15-chunk-1-block-15-chunk-1"/>
           <p:cNvSpPr txBox="1"/>
           <p:nvPr/>
         </p:nvSpPr>
         <p:spPr>
           <a:xfrm>
-            <a:off x="896112" y="1499616"/>
-            <a:ext cx="4791456" cy="4398264"/>
+            <a:off x="896112" y="1463040"/>
+            <a:ext cx="4791456" cy="4261104"/>
           </a:xfrm>
           <a:prstGeom prst="rect">
             <a:avLst/>
@@ -6145,14 +6245,14 @@
       </p:sp>
       <p:sp>
         <p:nvSpPr>
-          <p:cNvPr id="12" name="mdpr:1-2-e3669a:right:block-15-chunk-1-block-15-chunk-1"/>
+          <p:cNvPr id="9" name="mdpr:1-2-e3669a:right:block-15-chunk-1"/>
           <p:cNvSpPr txBox="1"/>
           <p:nvPr/>
         </p:nvSpPr>
         <p:spPr>
           <a:xfrm>
-            <a:off x="6473952" y="1499616"/>
-            <a:ext cx="4791456" cy="4398264"/>
+            <a:off x="6473952" y="1463040"/>
+            <a:ext cx="4791456" cy="4261104"/>
           </a:xfrm>
           <a:prstGeom prst="rect">
             <a:avLst/>
@@ -6200,46 +6300,6 @@
             </a:r>
             <a:endParaRPr lang="en-US" sz="1800" dirty="0"/>
           </a:p>
-          <a:p>
-            <a:pPr algn="l" indent="0" marL="0">
-              <a:lnSpc>
-                <a:spcPct val="120000"/>
-              </a:lnSpc>
-              <a:buNone/>
-            </a:pPr>
-            <a:r>
-              <a:rPr lang="en-US" sz="1800" b="1" dirty="0">
-                <a:solidFill>
-                  <a:srgbClr val="5D7FA4"/>
-                </a:solidFill>
-                <a:latin typeface="Pretendard" pitchFamily="34" charset="0"/>
-                <a:ea typeface="Pretendard" pitchFamily="34" charset="-122"/>
-                <a:cs typeface="Pretendard" pitchFamily="34" charset="-120"/>
-              </a:rPr>
-              <a:t>- Connectors</a:t>
-            </a:r>
-            <a:endParaRPr lang="en-US" sz="1800" dirty="0"/>
-          </a:p>
-          <a:p>
-            <a:pPr algn="l" indent="0" marL="0">
-              <a:lnSpc>
-                <a:spcPct val="120000"/>
-              </a:lnSpc>
-              <a:buNone/>
-            </a:pPr>
-            <a:r>
-              <a:rPr lang="en-US" sz="1800" dirty="0">
-                <a:solidFill>
-                  <a:srgbClr val="111111"/>
-                </a:solidFill>
-                <a:latin typeface="Pretendard" pitchFamily="34" charset="0"/>
-                <a:ea typeface="Pretendard" pitchFamily="34" charset="-122"/>
-                <a:cs typeface="Pretendard" pitchFamily="34" charset="-120"/>
-              </a:rPr>
-              <a:t>  straight-arrow, elbow-arrow, boundary-attach, overlap-joint, parallel-flow, contrast-flow.</a:t>
-            </a:r>
-            <a:endParaRPr lang="en-US" sz="1800" dirty="0"/>
-          </a:p>
         </p:txBody>
       </p:sp>
     </p:spTree>
@@ -6431,88 +6491,7 @@
       </p:sp>
       <p:sp>
         <p:nvSpPr>
-          <p:cNvPr id="7" name="Shape 5"/>
-          <p:cNvSpPr/>
-          <p:nvPr/>
-        </p:nvSpPr>
-        <p:spPr>
-          <a:xfrm>
-            <a:off x="731520" y="1207008"/>
-            <a:ext cx="1325880" cy="54864"/>
-          </a:xfrm>
-          <a:prstGeom prst="rect">
-            <a:avLst/>
-          </a:prstGeom>
-          <a:solidFill>
-            <a:srgbClr val="5D7FA4"/>
-          </a:solidFill>
-          <a:ln w="12700">
-            <a:solidFill>
-              <a:srgbClr val="5D7FA4">
-                <a:alpha val="0"/>
-              </a:srgbClr>
-            </a:solidFill>
-            <a:prstDash val="solid"/>
-          </a:ln>
-        </p:spPr>
-      </p:sp>
-      <p:sp>
-        <p:nvSpPr>
-          <p:cNvPr id="8" name="Shape 6"/>
-          <p:cNvSpPr/>
-          <p:nvPr/>
-        </p:nvSpPr>
-        <p:spPr>
-          <a:xfrm>
-            <a:off x="822960" y="1554480"/>
-            <a:ext cx="4937760" cy="73152"/>
-          </a:xfrm>
-          <a:prstGeom prst="rect">
-            <a:avLst/>
-          </a:prstGeom>
-          <a:solidFill>
-            <a:srgbClr val="5D7FA4"/>
-          </a:solidFill>
-          <a:ln w="12700">
-            <a:solidFill>
-              <a:srgbClr val="5D7FA4">
-                <a:alpha val="0"/>
-              </a:srgbClr>
-            </a:solidFill>
-            <a:prstDash val="solid"/>
-          </a:ln>
-        </p:spPr>
-      </p:sp>
-      <p:sp>
-        <p:nvSpPr>
-          <p:cNvPr id="9" name="Shape 7"/>
-          <p:cNvSpPr/>
-          <p:nvPr/>
-        </p:nvSpPr>
-        <p:spPr>
-          <a:xfrm>
-            <a:off x="6400800" y="1554480"/>
-            <a:ext cx="4937760" cy="73152"/>
-          </a:xfrm>
-          <a:prstGeom prst="rect">
-            <a:avLst/>
-          </a:prstGeom>
-          <a:solidFill>
-            <a:srgbClr val="5D7FA4"/>
-          </a:solidFill>
-          <a:ln w="12700">
-            <a:solidFill>
-              <a:srgbClr val="5D7FA4">
-                <a:alpha val="0"/>
-              </a:srgbClr>
-            </a:solidFill>
-            <a:prstDash val="solid"/>
-          </a:ln>
-        </p:spPr>
-      </p:sp>
-      <p:sp>
-        <p:nvSpPr>
-          <p:cNvPr id="10" name="mdpr:2-2-c23e9b:title:__title:2-2-c23e9b"/>
+          <p:cNvPr id="7" name="mdpr:2-2-c23e9b:title:__title:2-2-c23e9b"/>
           <p:cNvSpPr txBox="1"/>
           <p:nvPr/>
         </p:nvSpPr>
@@ -6546,7 +6525,24 @@
                 <a:ea typeface="Pretendard" pitchFamily="34" charset="-122"/>
                 <a:cs typeface="Pretendard" pitchFamily="34" charset="-120"/>
               </a:rPr>
-              <a:t>Decoration Pattern Catalog (Cont. 2/2)</a:t>
+              <a:t>Decoration Pattern Catalog</a:t>
+            </a:r>
+            <a:pPr algn="ctr" indent="0" marL="0">
+              <a:lnSpc>
+                <a:spcPct val="120000"/>
+              </a:lnSpc>
+              <a:buNone/>
+            </a:pPr>
+            <a:r>
+              <a:rPr lang="en-US" sz="2000" dirty="0">
+                <a:solidFill>
+                  <a:srgbClr val="8C8C8C"/>
+                </a:solidFill>
+                <a:latin typeface="Pretendard" pitchFamily="34" charset="0"/>
+                <a:ea typeface="Pretendard" pitchFamily="34" charset="-122"/>
+                <a:cs typeface="Pretendard" pitchFamily="34" charset="-120"/>
+              </a:rPr>
+              <a:t> (Cont. 2/2)</a:t>
             </a:r>
             <a:endParaRPr lang="en-US" sz="3400" dirty="0"/>
           </a:p>
@@ -6554,14 +6550,14 @@
       </p:sp>
       <p:sp>
         <p:nvSpPr>
-          <p:cNvPr id="11" name="mdpr:2-2-c23e9b:left:block-15-chunk-2"/>
+          <p:cNvPr id="8" name="mdpr:2-2-c23e9b:left:block-15-chunk-2-block-15-chunk-2"/>
           <p:cNvSpPr txBox="1"/>
           <p:nvPr/>
         </p:nvSpPr>
         <p:spPr>
           <a:xfrm>
-            <a:off x="896112" y="1664208"/>
-            <a:ext cx="4791456" cy="4169664"/>
+            <a:off x="896112" y="1463040"/>
+            <a:ext cx="4791456" cy="4261104"/>
           </a:xfrm>
           <a:prstGeom prst="rect">
             <a:avLst/>
@@ -6580,7 +6576,44 @@
               <a:buNone/>
             </a:pPr>
             <a:r>
-              <a:rPr lang="en-US" sz="2200" b="1" dirty="0">
+              <a:rPr lang="en-US" sz="1800" b="1" dirty="0">
+                <a:solidFill>
+                  <a:srgbClr val="5D7FA4"/>
+                </a:solidFill>
+                <a:latin typeface="Pretendard" pitchFamily="34" charset="0"/>
+                <a:ea typeface="Pretendard" pitchFamily="34" charset="-122"/>
+                <a:cs typeface="Pretendard" pitchFamily="34" charset="-120"/>
+              </a:rPr>
+              <a:t>- Connectors</a:t>
+            </a:r>
+            <a:pPr algn="l" indent="0" marL="0">
+              <a:lnSpc>
+                <a:spcPct val="120000"/>
+              </a:lnSpc>
+              <a:buNone/>
+            </a:pPr>
+            <a:r>
+              <a:rPr lang="en-US" sz="1800" dirty="0">
+                <a:solidFill>
+                  <a:srgbClr val="111111"/>
+                </a:solidFill>
+                <a:latin typeface="Pretendard" pitchFamily="34" charset="0"/>
+                <a:ea typeface="Pretendard" pitchFamily="34" charset="-122"/>
+                <a:cs typeface="Pretendard" pitchFamily="34" charset="-120"/>
+              </a:rPr>
+              <a:t>  straight-arrow, elbow-arrow, boundary-attach, overlap-joint, parallel-flow, contrast-flow.</a:t>
+            </a:r>
+            <a:endParaRPr lang="en-US" sz="1800" dirty="0"/>
+          </a:p>
+          <a:p>
+            <a:pPr algn="l" indent="0" marL="0">
+              <a:lnSpc>
+                <a:spcPct val="120000"/>
+              </a:lnSpc>
+              <a:buNone/>
+            </a:pPr>
+            <a:r>
+              <a:rPr lang="en-US" sz="1800" b="1" dirty="0">
                 <a:solidFill>
                   <a:srgbClr val="5D7FA4"/>
                 </a:solidFill>
@@ -6590,6 +6623,9 @@
               </a:rPr>
               <a:t>- Icons</a:t>
             </a:r>
+            <a:endParaRPr lang="en-US" sz="1800" dirty="0"/>
+          </a:p>
+          <a:p>
             <a:pPr algn="l" indent="0" marL="0">
               <a:lnSpc>
                 <a:spcPct val="120000"/>
@@ -6597,7 +6633,7 @@
               <a:buNone/>
             </a:pPr>
             <a:r>
-              <a:rPr lang="en-US" sz="2200" dirty="0">
+              <a:rPr lang="en-US" sz="1800" dirty="0">
                 <a:solidFill>
                   <a:srgbClr val="111111"/>
                 </a:solidFill>
@@ -6607,20 +6643,20 @@
               </a:rPr>
               <a:t>  number-badge, mono-icon-slot, letter-disc, quiet-aside, image-safe-frame, brand-glyph.</a:t>
             </a:r>
-            <a:endParaRPr lang="en-US" sz="2200" dirty="0"/>
+            <a:endParaRPr lang="en-US" sz="1800" dirty="0"/>
           </a:p>
         </p:txBody>
       </p:sp>
       <p:sp>
         <p:nvSpPr>
-          <p:cNvPr id="12" name="mdpr:2-2-c23e9b:right:block-15-chunk-2"/>
+          <p:cNvPr id="9" name="mdpr:2-2-c23e9b:right:block-15-chunk-2"/>
           <p:cNvSpPr txBox="1"/>
           <p:nvPr/>
         </p:nvSpPr>
         <p:spPr>
           <a:xfrm>
-            <a:off x="6473952" y="1664208"/>
-            <a:ext cx="4791456" cy="4169664"/>
+            <a:off x="6473952" y="1463040"/>
+            <a:ext cx="4791456" cy="4261104"/>
           </a:xfrm>
           <a:prstGeom prst="rect">
             <a:avLst/>
@@ -6639,7 +6675,7 @@
               <a:buNone/>
             </a:pPr>
             <a:r>
-              <a:rPr lang="en-US" sz="2200" b="1" dirty="0">
+              <a:rPr lang="en-US" sz="1800" b="1" dirty="0">
                 <a:solidFill>
                   <a:srgbClr val="5D7FA4"/>
                 </a:solidFill>
@@ -6656,7 +6692,7 @@
               <a:buNone/>
             </a:pPr>
             <a:r>
-              <a:rPr lang="en-US" sz="2200" dirty="0">
+              <a:rPr lang="en-US" sz="1800" dirty="0">
                 <a:solidFill>
                   <a:srgbClr val="111111"/>
                 </a:solidFill>
@@ -6666,7 +6702,7 @@
               </a:rPr>
               <a:t>  skeuomorphic-bevel, glassmorphism-surface, newmorphic-panel, clay-blob, bento-tile, liquid-lens.</a:t>
             </a:r>
-            <a:endParaRPr lang="en-US" sz="2200" dirty="0"/>
+            <a:endParaRPr lang="en-US" sz="1800" dirty="0"/>
           </a:p>
         </p:txBody>
       </p:sp>
@@ -6865,33 +6901,6 @@
         </p:nvSpPr>
         <p:spPr>
           <a:xfrm>
-            <a:off x="731520" y="1207008"/>
-            <a:ext cx="1325880" cy="54864"/>
-          </a:xfrm>
-          <a:prstGeom prst="rect">
-            <a:avLst/>
-          </a:prstGeom>
-          <a:solidFill>
-            <a:srgbClr val="5D7FA4"/>
-          </a:solidFill>
-          <a:ln w="12700">
-            <a:solidFill>
-              <a:srgbClr val="5D7FA4">
-                <a:alpha val="0"/>
-              </a:srgbClr>
-            </a:solidFill>
-            <a:prstDash val="solid"/>
-          </a:ln>
-        </p:spPr>
-      </p:sp>
-      <p:sp>
-        <p:nvSpPr>
-          <p:cNvPr id="8" name="Shape 6"/>
-          <p:cNvSpPr/>
-          <p:nvPr/>
-        </p:nvSpPr>
-        <p:spPr>
-          <a:xfrm>
             <a:off x="955548" y="1467612"/>
             <a:ext cx="10241280" cy="4526280"/>
           </a:xfrm>
@@ -6924,7 +6933,7 @@
       </p:sp>
       <p:sp>
         <p:nvSpPr>
-          <p:cNvPr id="9" name="Shape 7"/>
+          <p:cNvPr id="8" name="Shape 6"/>
           <p:cNvSpPr/>
           <p:nvPr/>
         </p:nvSpPr>
@@ -6962,7 +6971,7 @@
       </p:sp>
       <p:sp>
         <p:nvSpPr>
-          <p:cNvPr id="10" name="Shape 8"/>
+          <p:cNvPr id="9" name="Shape 7"/>
           <p:cNvSpPr/>
           <p:nvPr/>
         </p:nvSpPr>
@@ -6993,7 +7002,7 @@
       </p:sp>
       <p:pic>
         <p:nvPicPr>
-          <p:cNvPr id="11" name="Image 0" descr="preencoded.png">    </p:cNvPr>
+          <p:cNvPr id="10" name="Image 0" descr="preencoded.png">    </p:cNvPr>
           <p:cNvPicPr>
             <a:picLocks noChangeAspect="1"/>
           </p:cNvPicPr>
@@ -7023,7 +7032,7 @@
       </p:pic>
       <p:sp>
         <p:nvSpPr>
-          <p:cNvPr id="12" name="mdpr:table-coherence-2f9a7b:title:__title:table-coherence-2f9a7b"/>
+          <p:cNvPr id="11" name="mdpr:table-coherence-2f9a7b:title:__title:table-coherence-2f9a7b"/>
           <p:cNvSpPr txBox="1"/>
           <p:nvPr/>
         </p:nvSpPr>
@@ -8313,33 +8322,6 @@
         </p:nvSpPr>
         <p:spPr>
           <a:xfrm>
-            <a:off x="731520" y="1207008"/>
-            <a:ext cx="1325880" cy="54864"/>
-          </a:xfrm>
-          <a:prstGeom prst="rect">
-            <a:avLst/>
-          </a:prstGeom>
-          <a:solidFill>
-            <a:srgbClr val="5D7FA4"/>
-          </a:solidFill>
-          <a:ln w="12700">
-            <a:solidFill>
-              <a:srgbClr val="5D7FA4">
-                <a:alpha val="0"/>
-              </a:srgbClr>
-            </a:solidFill>
-            <a:prstDash val="solid"/>
-          </a:ln>
-        </p:spPr>
-      </p:sp>
-      <p:sp>
-        <p:nvSpPr>
-          <p:cNvPr id="8" name="Shape 6"/>
-          <p:cNvSpPr/>
-          <p:nvPr/>
-        </p:nvSpPr>
-        <p:spPr>
-          <a:xfrm>
             <a:off x="4997196" y="1476756"/>
             <a:ext cx="6199632" cy="4407408"/>
           </a:xfrm>
@@ -8372,7 +8354,7 @@
       </p:sp>
       <p:sp>
         <p:nvSpPr>
-          <p:cNvPr id="9" name="Shape 7"/>
+          <p:cNvPr id="8" name="Shape 6"/>
           <p:cNvSpPr/>
           <p:nvPr/>
         </p:nvSpPr>
@@ -8410,7 +8392,7 @@
       </p:sp>
       <p:sp>
         <p:nvSpPr>
-          <p:cNvPr id="10" name="Shape 8"/>
+          <p:cNvPr id="9" name="Shape 7"/>
           <p:cNvSpPr/>
           <p:nvPr/>
         </p:nvSpPr>
@@ -8441,7 +8423,7 @@
       </p:sp>
       <p:pic>
         <p:nvPicPr>
-          <p:cNvPr id="11" name="Image 0" descr="preencoded.png">    </p:cNvPr>
+          <p:cNvPr id="10" name="Image 0" descr="preencoded.png">    </p:cNvPr>
           <p:cNvPicPr>
             <a:picLocks noChangeAspect="1"/>
           </p:cNvPicPr>
@@ -8471,7 +8453,7 @@
       </p:pic>
       <p:sp>
         <p:nvSpPr>
-          <p:cNvPr id="12" name="Shape 9"/>
+          <p:cNvPr id="11" name="Shape 8"/>
           <p:cNvSpPr/>
           <p:nvPr/>
         </p:nvSpPr>
@@ -8498,7 +8480,7 @@
       </p:sp>
       <p:sp>
         <p:nvSpPr>
-          <p:cNvPr id="13" name="mdpr:1-2-2ff3f0:title:__title:1-2-2ff3f0"/>
+          <p:cNvPr id="12" name="mdpr:1-2-2ff3f0:title:__title:1-2-2ff3f0"/>
           <p:cNvSpPr txBox="1"/>
           <p:nvPr/>
         </p:nvSpPr>
@@ -8540,7 +8522,7 @@
       </p:sp>
       <p:sp>
         <p:nvSpPr>
-          <p:cNvPr id="14" name="mdpr:1-2-2ff3f0:body:block-19"/>
+          <p:cNvPr id="13" name="mdpr:1-2-2ff3f0:body:block-19"/>
           <p:cNvSpPr txBox="1"/>
           <p:nvPr/>
         </p:nvSpPr>
@@ -8679,7 +8661,7 @@
       </p:sp>
       <p:graphicFrame>
         <p:nvGraphicFramePr>
-          <p:cNvPr id="15" name="Chart 0" descr=""/>
+          <p:cNvPr id="14" name="Chart 0" descr=""/>
           <p:cNvGraphicFramePr/>
           <p:nvPr/>
         </p:nvGraphicFramePr>
@@ -8888,33 +8870,6 @@
         </p:nvSpPr>
         <p:spPr>
           <a:xfrm>
-            <a:off x="731520" y="1207008"/>
-            <a:ext cx="1325880" cy="54864"/>
-          </a:xfrm>
-          <a:prstGeom prst="rect">
-            <a:avLst/>
-          </a:prstGeom>
-          <a:solidFill>
-            <a:srgbClr val="5D7FA4"/>
-          </a:solidFill>
-          <a:ln w="12700">
-            <a:solidFill>
-              <a:srgbClr val="5D7FA4">
-                <a:alpha val="0"/>
-              </a:srgbClr>
-            </a:solidFill>
-            <a:prstDash val="solid"/>
-          </a:ln>
-        </p:spPr>
-      </p:sp>
-      <p:sp>
-        <p:nvSpPr>
-          <p:cNvPr id="8" name="Shape 6"/>
-          <p:cNvSpPr/>
-          <p:nvPr/>
-        </p:nvSpPr>
-        <p:spPr>
-          <a:xfrm>
             <a:off x="955548" y="1467612"/>
             <a:ext cx="10241280" cy="4526280"/>
           </a:xfrm>
@@ -8947,7 +8902,7 @@
       </p:sp>
       <p:sp>
         <p:nvSpPr>
-          <p:cNvPr id="9" name="Shape 7"/>
+          <p:cNvPr id="8" name="Shape 6"/>
           <p:cNvSpPr/>
           <p:nvPr/>
         </p:nvSpPr>
@@ -8985,7 +8940,7 @@
       </p:sp>
       <p:sp>
         <p:nvSpPr>
-          <p:cNvPr id="10" name="Shape 8"/>
+          <p:cNvPr id="9" name="Shape 7"/>
           <p:cNvSpPr/>
           <p:nvPr/>
         </p:nvSpPr>
@@ -9016,7 +8971,7 @@
       </p:sp>
       <p:pic>
         <p:nvPicPr>
-          <p:cNvPr id="11" name="Image 0" descr="preencoded.png">    </p:cNvPr>
+          <p:cNvPr id="10" name="Image 0" descr="preencoded.png">    </p:cNvPr>
           <p:cNvPicPr>
             <a:picLocks noChangeAspect="1"/>
           </p:cNvPicPr>
@@ -9046,7 +9001,7 @@
       </p:pic>
       <p:sp>
         <p:nvSpPr>
-          <p:cNvPr id="12" name="mdpr:2-2-542095:title:__title:2-2-542095"/>
+          <p:cNvPr id="11" name="mdpr:2-2-542095:title:__title:2-2-542095"/>
           <p:cNvSpPr txBox="1"/>
           <p:nvPr/>
         </p:nvSpPr>
@@ -9080,7 +9035,24 @@
                 <a:ea typeface="Pretendard" pitchFamily="34" charset="-122"/>
                 <a:cs typeface="Pretendard" pitchFamily="34" charset="-120"/>
               </a:rPr>
-              <a:t>Chart and Table Pair (Cont. 2/2)</a:t>
+              <a:t>Chart and Table Pair</a:t>
+            </a:r>
+            <a:pPr algn="ctr" indent="0" marL="0">
+              <a:lnSpc>
+                <a:spcPct val="120000"/>
+              </a:lnSpc>
+              <a:buNone/>
+            </a:pPr>
+            <a:r>
+              <a:rPr lang="en-US" sz="2000" dirty="0">
+                <a:solidFill>
+                  <a:srgbClr val="8C8C8C"/>
+                </a:solidFill>
+                <a:latin typeface="Pretendard" pitchFamily="34" charset="0"/>
+                <a:ea typeface="Pretendard" pitchFamily="34" charset="-122"/>
+                <a:cs typeface="Pretendard" pitchFamily="34" charset="-120"/>
+              </a:rPr>
+              <a:t> (Cont. 2/2)</a:t>
             </a:r>
             <a:endParaRPr lang="en-US" sz="3400" dirty="0"/>
           </a:p>
@@ -10124,33 +10096,6 @@
         </p:nvSpPr>
         <p:spPr>
           <a:xfrm>
-            <a:off x="731520" y="1207008"/>
-            <a:ext cx="1325880" cy="54864"/>
-          </a:xfrm>
-          <a:prstGeom prst="rect">
-            <a:avLst/>
-          </a:prstGeom>
-          <a:solidFill>
-            <a:srgbClr val="5D7FA4"/>
-          </a:solidFill>
-          <a:ln w="12700">
-            <a:solidFill>
-              <a:srgbClr val="5D7FA4">
-                <a:alpha val="0"/>
-              </a:srgbClr>
-            </a:solidFill>
-            <a:prstDash val="solid"/>
-          </a:ln>
-        </p:spPr>
-      </p:sp>
-      <p:sp>
-        <p:nvSpPr>
-          <p:cNvPr id="8" name="Shape 6"/>
-          <p:cNvSpPr/>
-          <p:nvPr/>
-        </p:nvSpPr>
-        <p:spPr>
-          <a:xfrm>
             <a:off x="955548" y="1467612"/>
             <a:ext cx="10241280" cy="4343400"/>
           </a:xfrm>
@@ -10183,7 +10128,7 @@
       </p:sp>
       <p:sp>
         <p:nvSpPr>
-          <p:cNvPr id="9" name="Shape 7"/>
+          <p:cNvPr id="8" name="Shape 6"/>
           <p:cNvSpPr/>
           <p:nvPr/>
         </p:nvSpPr>
@@ -10221,7 +10166,7 @@
       </p:sp>
       <p:sp>
         <p:nvSpPr>
-          <p:cNvPr id="10" name="Shape 8"/>
+          <p:cNvPr id="9" name="Shape 7"/>
           <p:cNvSpPr/>
           <p:nvPr/>
         </p:nvSpPr>
@@ -10252,7 +10197,7 @@
       </p:sp>
       <p:pic>
         <p:nvPicPr>
-          <p:cNvPr id="11" name="Image 0" descr="preencoded.png">    </p:cNvPr>
+          <p:cNvPr id="10" name="Image 0" descr="preencoded.png">    </p:cNvPr>
           <p:cNvPicPr>
             <a:picLocks noChangeAspect="1"/>
           </p:cNvPicPr>
@@ -10282,7 +10227,7 @@
       </p:pic>
       <p:sp>
         <p:nvSpPr>
-          <p:cNvPr id="12" name="mdpr:1-2-b8955f:title:__title:1-2-b8955f"/>
+          <p:cNvPr id="11" name="mdpr:1-2-b8955f:title:__title:1-2-b8955f"/>
           <p:cNvSpPr txBox="1"/>
           <p:nvPr/>
         </p:nvSpPr>
@@ -10324,7 +10269,7 @@
       </p:sp>
       <p:sp>
         <p:nvSpPr>
-          <p:cNvPr id="13" name="Shape 10"/>
+          <p:cNvPr id="12" name="Shape 9"/>
           <p:cNvSpPr/>
           <p:nvPr/>
         </p:nvSpPr>
@@ -10357,7 +10302,7 @@
       </p:sp>
       <p:sp>
         <p:nvSpPr>
-          <p:cNvPr id="14" name="Shape 11"/>
+          <p:cNvPr id="13" name="Shape 10"/>
           <p:cNvSpPr/>
           <p:nvPr/>
         </p:nvSpPr>
@@ -10388,7 +10333,7 @@
       </p:sp>
       <p:sp>
         <p:nvSpPr>
-          <p:cNvPr id="15" name="Shape 12"/>
+          <p:cNvPr id="14" name="Shape 11"/>
           <p:cNvSpPr/>
           <p:nvPr/>
         </p:nvSpPr>
@@ -10419,7 +10364,7 @@
       </p:sp>
       <p:sp>
         <p:nvSpPr>
-          <p:cNvPr id="16" name="Shape 13"/>
+          <p:cNvPr id="15" name="Shape 12"/>
           <p:cNvSpPr/>
           <p:nvPr/>
         </p:nvSpPr>
@@ -10444,7 +10389,7 @@
       </p:sp>
       <p:sp>
         <p:nvSpPr>
-          <p:cNvPr id="17" name="Shape 14"/>
+          <p:cNvPr id="16" name="Shape 13"/>
           <p:cNvSpPr/>
           <p:nvPr/>
         </p:nvSpPr>
@@ -10471,7 +10416,7 @@
       </p:sp>
       <p:sp>
         <p:nvSpPr>
-          <p:cNvPr id="18" name="Text 15"/>
+          <p:cNvPr id="17" name="Text 14"/>
           <p:cNvSpPr txBox="1"/>
           <p:nvPr/>
         </p:nvSpPr>
@@ -10515,7 +10460,7 @@
       </p:sp>
       <p:sp>
         <p:nvSpPr>
-          <p:cNvPr id="19" name="Text 16"/>
+          <p:cNvPr id="18" name="Text 15"/>
           <p:cNvSpPr txBox="1"/>
           <p:nvPr/>
         </p:nvSpPr>
@@ -10557,7 +10502,7 @@
       </p:sp>
       <p:sp>
         <p:nvSpPr>
-          <p:cNvPr id="20" name="Shape 17"/>
+          <p:cNvPr id="19" name="Shape 16"/>
           <p:cNvSpPr/>
           <p:nvPr/>
         </p:nvSpPr>
@@ -10584,7 +10529,7 @@
       </p:sp>
       <p:sp>
         <p:nvSpPr>
-          <p:cNvPr id="21" name="Text 18"/>
+          <p:cNvPr id="20" name="Text 17"/>
           <p:cNvSpPr txBox="1"/>
           <p:nvPr/>
         </p:nvSpPr>
@@ -10628,7 +10573,7 @@
       </p:sp>
       <p:sp>
         <p:nvSpPr>
-          <p:cNvPr id="22" name="Shape 19"/>
+          <p:cNvPr id="21" name="Shape 18"/>
           <p:cNvSpPr/>
           <p:nvPr/>
         </p:nvSpPr>
@@ -10655,7 +10600,7 @@
       </p:sp>
       <p:sp>
         <p:nvSpPr>
-          <p:cNvPr id="23" name="Text 20"/>
+          <p:cNvPr id="22" name="Text 19"/>
           <p:cNvSpPr txBox="1"/>
           <p:nvPr/>
         </p:nvSpPr>
@@ -10699,7 +10644,7 @@
       </p:sp>
       <p:sp>
         <p:nvSpPr>
-          <p:cNvPr id="24" name="Shape 21"/>
+          <p:cNvPr id="23" name="Shape 20"/>
           <p:cNvSpPr/>
           <p:nvPr/>
         </p:nvSpPr>
@@ -10730,7 +10675,7 @@
       </p:sp>
       <p:sp>
         <p:nvSpPr>
-          <p:cNvPr id="25" name="Shape 22"/>
+          <p:cNvPr id="24" name="Shape 21"/>
           <p:cNvSpPr/>
           <p:nvPr/>
         </p:nvSpPr>
@@ -10759,7 +10704,7 @@
       </p:sp>
       <p:sp>
         <p:nvSpPr>
-          <p:cNvPr id="26" name="Shape 23"/>
+          <p:cNvPr id="25" name="Shape 22"/>
           <p:cNvSpPr/>
           <p:nvPr/>
         </p:nvSpPr>
@@ -10782,7 +10727,7 @@
       </p:sp>
       <p:sp>
         <p:nvSpPr>
-          <p:cNvPr id="27" name="Shape 24"/>
+          <p:cNvPr id="26" name="Shape 23"/>
           <p:cNvSpPr/>
           <p:nvPr/>
         </p:nvSpPr>
@@ -10807,7 +10752,7 @@
       </p:sp>
       <p:sp>
         <p:nvSpPr>
-          <p:cNvPr id="28" name="Shape 25"/>
+          <p:cNvPr id="27" name="Shape 24"/>
           <p:cNvSpPr/>
           <p:nvPr/>
         </p:nvSpPr>
@@ -10832,7 +10777,7 @@
       </p:sp>
       <p:sp>
         <p:nvSpPr>
-          <p:cNvPr id="29" name="Shape 26"/>
+          <p:cNvPr id="28" name="Shape 25"/>
           <p:cNvSpPr/>
           <p:nvPr/>
         </p:nvSpPr>
@@ -10857,7 +10802,7 @@
       </p:sp>
       <p:sp>
         <p:nvSpPr>
-          <p:cNvPr id="30" name="Text 27"/>
+          <p:cNvPr id="29" name="Text 26"/>
           <p:cNvSpPr txBox="1"/>
           <p:nvPr/>
         </p:nvSpPr>
@@ -10901,7 +10846,7 @@
       </p:sp>
       <p:sp>
         <p:nvSpPr>
-          <p:cNvPr id="31" name="Text 28"/>
+          <p:cNvPr id="30" name="Text 27"/>
           <p:cNvSpPr txBox="1"/>
           <p:nvPr/>
         </p:nvSpPr>
@@ -10943,7 +10888,7 @@
       </p:sp>
       <p:sp>
         <p:nvSpPr>
-          <p:cNvPr id="32" name="Text 29"/>
+          <p:cNvPr id="31" name="Text 28"/>
           <p:cNvSpPr txBox="1"/>
           <p:nvPr/>
         </p:nvSpPr>
@@ -10985,7 +10930,7 @@
       </p:sp>
       <p:sp>
         <p:nvSpPr>
-          <p:cNvPr id="33" name="Text 30"/>
+          <p:cNvPr id="32" name="Text 29"/>
           <p:cNvSpPr txBox="1"/>
           <p:nvPr/>
         </p:nvSpPr>
@@ -11220,33 +11165,6 @@
         </p:nvSpPr>
         <p:spPr>
           <a:xfrm>
-            <a:off x="731520" y="1207008"/>
-            <a:ext cx="1325880" cy="54864"/>
-          </a:xfrm>
-          <a:prstGeom prst="rect">
-            <a:avLst/>
-          </a:prstGeom>
-          <a:solidFill>
-            <a:srgbClr val="5D7FA4"/>
-          </a:solidFill>
-          <a:ln w="12700">
-            <a:solidFill>
-              <a:srgbClr val="5D7FA4">
-                <a:alpha val="0"/>
-              </a:srgbClr>
-            </a:solidFill>
-            <a:prstDash val="solid"/>
-          </a:ln>
-        </p:spPr>
-      </p:sp>
-      <p:sp>
-        <p:nvSpPr>
-          <p:cNvPr id="8" name="Shape 6"/>
-          <p:cNvSpPr/>
-          <p:nvPr/>
-        </p:nvSpPr>
-        <p:spPr>
-          <a:xfrm>
             <a:off x="955548" y="1467612"/>
             <a:ext cx="10241280" cy="4343400"/>
           </a:xfrm>
@@ -11279,7 +11197,7 @@
       </p:sp>
       <p:sp>
         <p:nvSpPr>
-          <p:cNvPr id="9" name="Shape 7"/>
+          <p:cNvPr id="8" name="Shape 6"/>
           <p:cNvSpPr/>
           <p:nvPr/>
         </p:nvSpPr>
@@ -11317,7 +11235,7 @@
       </p:sp>
       <p:sp>
         <p:nvSpPr>
-          <p:cNvPr id="10" name="Shape 8"/>
+          <p:cNvPr id="9" name="Shape 7"/>
           <p:cNvSpPr/>
           <p:nvPr/>
         </p:nvSpPr>
@@ -11348,7 +11266,7 @@
       </p:sp>
       <p:pic>
         <p:nvPicPr>
-          <p:cNvPr id="11" name="Image 0" descr="preencoded.png">    </p:cNvPr>
+          <p:cNvPr id="10" name="Image 0" descr="preencoded.png">    </p:cNvPr>
           <p:cNvPicPr>
             <a:picLocks noChangeAspect="1"/>
           </p:cNvPicPr>
@@ -11378,7 +11296,7 @@
       </p:pic>
       <p:sp>
         <p:nvSpPr>
-          <p:cNvPr id="12" name="mdpr:2-2-4dc4c1:title:__title:2-2-4dc4c1"/>
+          <p:cNvPr id="11" name="mdpr:2-2-4dc4c1:title:__title:2-2-4dc4c1"/>
           <p:cNvSpPr txBox="1"/>
           <p:nvPr/>
         </p:nvSpPr>
@@ -11412,7 +11330,24 @@
                 <a:ea typeface="Pretendard" pitchFamily="34" charset="-122"/>
                 <a:cs typeface="Pretendard" pitchFamily="34" charset="-120"/>
               </a:rPr>
-              <a:t>Editable Proof Objects (Cont. 2/2)</a:t>
+              <a:t>Editable Proof Objects</a:t>
+            </a:r>
+            <a:pPr algn="ctr" indent="0" marL="0">
+              <a:lnSpc>
+                <a:spcPct val="120000"/>
+              </a:lnSpc>
+              <a:buNone/>
+            </a:pPr>
+            <a:r>
+              <a:rPr lang="en-US" sz="2000" dirty="0">
+                <a:solidFill>
+                  <a:srgbClr val="8C8C8C"/>
+                </a:solidFill>
+                <a:latin typeface="Pretendard" pitchFamily="34" charset="0"/>
+                <a:ea typeface="Pretendard" pitchFamily="34" charset="-122"/>
+                <a:cs typeface="Pretendard" pitchFamily="34" charset="-120"/>
+              </a:rPr>
+              <a:t> (Cont. 2/2)</a:t>
             </a:r>
             <a:endParaRPr lang="en-US" sz="3400" dirty="0"/>
           </a:p>
@@ -11420,7 +11355,7 @@
       </p:sp>
       <p:sp>
         <p:nvSpPr>
-          <p:cNvPr id="13" name="Shape 10"/>
+          <p:cNvPr id="12" name="Shape 9"/>
           <p:cNvSpPr/>
           <p:nvPr/>
         </p:nvSpPr>
@@ -11447,7 +11382,7 @@
       </p:sp>
       <p:sp>
         <p:nvSpPr>
-          <p:cNvPr id="14" name="Shape 11"/>
+          <p:cNvPr id="13" name="Shape 10"/>
           <p:cNvSpPr/>
           <p:nvPr/>
         </p:nvSpPr>
@@ -11474,7 +11409,7 @@
       </p:sp>
       <p:sp>
         <p:nvSpPr>
-          <p:cNvPr id="15" name="Text 12"/>
+          <p:cNvPr id="14" name="Text 11"/>
           <p:cNvSpPr txBox="1"/>
           <p:nvPr/>
         </p:nvSpPr>
@@ -11518,7 +11453,7 @@
       </p:sp>
       <p:sp>
         <p:nvSpPr>
-          <p:cNvPr id="16" name="Text 13"/>
+          <p:cNvPr id="15" name="Text 12"/>
           <p:cNvSpPr txBox="1"/>
           <p:nvPr/>
         </p:nvSpPr>
@@ -11562,7 +11497,7 @@
       </p:sp>
       <p:sp>
         <p:nvSpPr>
-          <p:cNvPr id="17" name="Shape 14"/>
+          <p:cNvPr id="16" name="Shape 13"/>
           <p:cNvSpPr/>
           <p:nvPr/>
         </p:nvSpPr>
@@ -11589,7 +11524,7 @@
       </p:sp>
       <p:sp>
         <p:nvSpPr>
-          <p:cNvPr id="18" name="Shape 15"/>
+          <p:cNvPr id="17" name="Shape 14"/>
           <p:cNvSpPr/>
           <p:nvPr/>
         </p:nvSpPr>
@@ -11616,7 +11551,7 @@
       </p:sp>
       <p:sp>
         <p:nvSpPr>
-          <p:cNvPr id="19" name="Text 16"/>
+          <p:cNvPr id="18" name="Text 15"/>
           <p:cNvSpPr txBox="1"/>
           <p:nvPr/>
         </p:nvSpPr>
@@ -11660,7 +11595,7 @@
       </p:sp>
       <p:sp>
         <p:nvSpPr>
-          <p:cNvPr id="20" name="Text 17"/>
+          <p:cNvPr id="19" name="Text 16"/>
           <p:cNvSpPr txBox="1"/>
           <p:nvPr/>
         </p:nvSpPr>
@@ -11704,7 +11639,7 @@
       </p:sp>
       <p:sp>
         <p:nvSpPr>
-          <p:cNvPr id="21" name="Shape 18"/>
+          <p:cNvPr id="20" name="Shape 17"/>
           <p:cNvSpPr/>
           <p:nvPr/>
         </p:nvSpPr>
@@ -11731,7 +11666,7 @@
       </p:sp>
       <p:sp>
         <p:nvSpPr>
-          <p:cNvPr id="22" name="Shape 19"/>
+          <p:cNvPr id="21" name="Shape 18"/>
           <p:cNvSpPr/>
           <p:nvPr/>
         </p:nvSpPr>
@@ -11758,7 +11693,7 @@
       </p:sp>
       <p:sp>
         <p:nvSpPr>
-          <p:cNvPr id="23" name="Text 20"/>
+          <p:cNvPr id="22" name="Text 19"/>
           <p:cNvSpPr txBox="1"/>
           <p:nvPr/>
         </p:nvSpPr>
@@ -11802,7 +11737,7 @@
       </p:sp>
       <p:sp>
         <p:nvSpPr>
-          <p:cNvPr id="24" name="Text 21"/>
+          <p:cNvPr id="23" name="Text 20"/>
           <p:cNvSpPr txBox="1"/>
           <p:nvPr/>
         </p:nvSpPr>
@@ -11846,7 +11781,7 @@
       </p:sp>
       <p:sp>
         <p:nvSpPr>
-          <p:cNvPr id="25" name="Shape 22"/>
+          <p:cNvPr id="24" name="Shape 21"/>
           <p:cNvSpPr/>
           <p:nvPr/>
         </p:nvSpPr>
@@ -11873,7 +11808,7 @@
       </p:sp>
       <p:sp>
         <p:nvSpPr>
-          <p:cNvPr id="26" name="Shape 23"/>
+          <p:cNvPr id="25" name="Shape 22"/>
           <p:cNvSpPr/>
           <p:nvPr/>
         </p:nvSpPr>
@@ -11900,7 +11835,7 @@
       </p:sp>
       <p:sp>
         <p:nvSpPr>
-          <p:cNvPr id="27" name="Text 24"/>
+          <p:cNvPr id="26" name="Text 23"/>
           <p:cNvSpPr txBox="1"/>
           <p:nvPr/>
         </p:nvSpPr>
@@ -11944,7 +11879,7 @@
       </p:sp>
       <p:sp>
         <p:nvSpPr>
-          <p:cNvPr id="28" name="Text 25"/>
+          <p:cNvPr id="27" name="Text 24"/>
           <p:cNvSpPr txBox="1"/>
           <p:nvPr/>
         </p:nvSpPr>
@@ -11988,7 +11923,7 @@
       </p:sp>
       <p:sp>
         <p:nvSpPr>
-          <p:cNvPr id="29" name="Shape 26"/>
+          <p:cNvPr id="28" name="Shape 25"/>
           <p:cNvSpPr/>
           <p:nvPr/>
         </p:nvSpPr>
@@ -12012,7 +11947,7 @@
       </p:sp>
       <p:sp>
         <p:nvSpPr>
-          <p:cNvPr id="30" name="Shape 27"/>
+          <p:cNvPr id="29" name="Shape 26"/>
           <p:cNvSpPr/>
           <p:nvPr/>
         </p:nvSpPr>
@@ -12036,7 +11971,7 @@
       </p:sp>
       <p:sp>
         <p:nvSpPr>
-          <p:cNvPr id="31" name="Shape 28"/>
+          <p:cNvPr id="30" name="Shape 27"/>
           <p:cNvSpPr/>
           <p:nvPr/>
         </p:nvSpPr>
@@ -12253,8 +12188,8 @@
         </p:nvSpPr>
         <p:spPr>
           <a:xfrm>
-            <a:off x="731520" y="1207008"/>
-            <a:ext cx="1325880" cy="54864"/>
+            <a:off x="822960" y="1938528"/>
+            <a:ext cx="73152" cy="2514600"/>
           </a:xfrm>
           <a:prstGeom prst="rect">
             <a:avLst/>
@@ -12280,427 +12215,14 @@
         </p:nvSpPr>
         <p:spPr>
           <a:xfrm>
-            <a:off x="955548" y="1915668"/>
-            <a:ext cx="10241280" cy="1024128"/>
-          </a:xfrm>
-          <a:prstGeom prst="roundRect">
-            <a:avLst>
-              <a:gd name="adj" fmla="val 5357"/>
-            </a:avLst>
-          </a:prstGeom>
-          <a:solidFill>
-            <a:srgbClr val="B8C3D2">
-              <a:alpha val="26000"/>
-            </a:srgbClr>
-          </a:solidFill>
-          <a:ln w="12700">
-            <a:solidFill>
-              <a:srgbClr val="D1DAE7">
-                <a:alpha val="0"/>
-              </a:srgbClr>
-            </a:solidFill>
-            <a:prstDash val="solid"/>
-          </a:ln>
-          <a:effectLst>
-            <a:outerShdw sx="100000" sy="100000" kx="0" ky="0" algn="bl" rotWithShape="0" blurRad="13970" dist="50800" dir="2700000">
-              <a:srgbClr val="AAB5C4">
-                <a:alpha val="20000"/>
-              </a:srgbClr>
-            </a:outerShdw>
-          </a:effectLst>
-        </p:spPr>
-      </p:sp>
-      <p:sp>
-        <p:nvSpPr>
-          <p:cNvPr id="9" name="Shape 7"/>
-          <p:cNvSpPr/>
-          <p:nvPr/>
-        </p:nvSpPr>
-        <p:spPr>
-          <a:xfrm>
-            <a:off x="882396" y="1833372"/>
-            <a:ext cx="10241280" cy="1024128"/>
-          </a:xfrm>
-          <a:prstGeom prst="roundRect">
-            <a:avLst>
-              <a:gd name="adj" fmla="val 5357"/>
-            </a:avLst>
-          </a:prstGeom>
-          <a:solidFill>
-            <a:srgbClr val="FFFFFF">
-              <a:alpha val="42000"/>
-            </a:srgbClr>
-          </a:solidFill>
-          <a:ln w="12700">
-            <a:solidFill>
-              <a:srgbClr val="FFFFFF">
-                <a:alpha val="0"/>
-              </a:srgbClr>
-            </a:solidFill>
-            <a:prstDash val="solid"/>
-          </a:ln>
-          <a:effectLst>
-            <a:outerShdw sx="100000" sy="100000" kx="0" ky="0" algn="bl" rotWithShape="0" blurRad="10160" dist="50800" dir="13500000">
-              <a:srgbClr val="FFFFFF">
-                <a:alpha val="36000"/>
-              </a:srgbClr>
-            </a:outerShdw>
-          </a:effectLst>
-        </p:spPr>
-      </p:sp>
-      <p:sp>
-        <p:nvSpPr>
-          <p:cNvPr id="10" name="Shape 8"/>
-          <p:cNvSpPr/>
-          <p:nvPr/>
-        </p:nvSpPr>
-        <p:spPr>
-          <a:xfrm>
-            <a:off x="914400" y="1865376"/>
-            <a:ext cx="10241280" cy="1024128"/>
-          </a:xfrm>
-          <a:prstGeom prst="roundRect">
-            <a:avLst>
-              <a:gd name="adj" fmla="val 5357"/>
-            </a:avLst>
-          </a:prstGeom>
-          <a:solidFill>
-            <a:srgbClr val="EEF3F8">
-              <a:alpha val="6000"/>
-            </a:srgbClr>
-          </a:solidFill>
-          <a:ln w="12700">
-            <a:solidFill>
-              <a:srgbClr val="FFFFFF">
-                <a:alpha val="28000"/>
-              </a:srgbClr>
-            </a:solidFill>
-            <a:prstDash val="solid"/>
-          </a:ln>
-        </p:spPr>
-      </p:sp>
-      <p:pic>
-        <p:nvPicPr>
-          <p:cNvPr id="11" name="Image 0" descr="preencoded.png">    </p:cNvPr>
-          <p:cNvPicPr>
-            <a:picLocks noChangeAspect="1"/>
-          </p:cNvPicPr>
-          <p:nvPr/>
-        </p:nvPicPr>
-        <p:blipFill>
-          <a:blip r:embed="rId1">
-            <a:extLst>
-              <a:ext uri="{96DAC541-7B7A-43D3-8B79-37D633B846F1}">
-                <asvg:svgBlip xmlns:asvg="http://schemas.microsoft.com/office/drawing/2016/SVG/main" r:embed="rId2"/>
-              </a:ext>
-            </a:extLst>
-          </a:blip>
-          <a:stretch>
-            <a:fillRect/>
-          </a:stretch>
-        </p:blipFill>
-        <p:spPr>
-          <a:xfrm>
-            <a:off x="914400" y="1865376"/>
-            <a:ext cx="10241280" cy="1024128"/>
+            <a:off x="4343400" y="1938528"/>
+            <a:ext cx="73152" cy="2514600"/>
           </a:xfrm>
           <a:prstGeom prst="rect">
             <a:avLst/>
           </a:prstGeom>
-        </p:spPr>
-      </p:pic>
-      <p:sp>
-        <p:nvSpPr>
-          <p:cNvPr id="12" name="Shape 9"/>
-          <p:cNvSpPr/>
-          <p:nvPr/>
-        </p:nvSpPr>
-        <p:spPr>
-          <a:xfrm>
-            <a:off x="955548" y="3241548"/>
-            <a:ext cx="10241280" cy="1024128"/>
-          </a:xfrm>
-          <a:prstGeom prst="roundRect">
-            <a:avLst>
-              <a:gd name="adj" fmla="val 5357"/>
-            </a:avLst>
-          </a:prstGeom>
-          <a:solidFill>
-            <a:srgbClr val="B8C3D2">
-              <a:alpha val="26000"/>
-            </a:srgbClr>
-          </a:solidFill>
-          <a:ln w="12700">
-            <a:solidFill>
-              <a:srgbClr val="D1DAE7">
-                <a:alpha val="0"/>
-              </a:srgbClr>
-            </a:solidFill>
-            <a:prstDash val="solid"/>
-          </a:ln>
-          <a:effectLst>
-            <a:outerShdw sx="100000" sy="100000" kx="0" ky="0" algn="bl" rotWithShape="0" blurRad="13970" dist="50800" dir="2700000">
-              <a:srgbClr val="AAB5C4">
-                <a:alpha val="20000"/>
-              </a:srgbClr>
-            </a:outerShdw>
-          </a:effectLst>
-        </p:spPr>
-      </p:sp>
-      <p:sp>
-        <p:nvSpPr>
-          <p:cNvPr id="13" name="Shape 10"/>
-          <p:cNvSpPr/>
-          <p:nvPr/>
-        </p:nvSpPr>
-        <p:spPr>
-          <a:xfrm>
-            <a:off x="882396" y="3159252"/>
-            <a:ext cx="10241280" cy="1024128"/>
-          </a:xfrm>
-          <a:prstGeom prst="roundRect">
-            <a:avLst>
-              <a:gd name="adj" fmla="val 5357"/>
-            </a:avLst>
-          </a:prstGeom>
-          <a:solidFill>
-            <a:srgbClr val="FFFFFF">
-              <a:alpha val="42000"/>
-            </a:srgbClr>
-          </a:solidFill>
-          <a:ln w="12700">
-            <a:solidFill>
-              <a:srgbClr val="FFFFFF">
-                <a:alpha val="0"/>
-              </a:srgbClr>
-            </a:solidFill>
-            <a:prstDash val="solid"/>
-          </a:ln>
-          <a:effectLst>
-            <a:outerShdw sx="100000" sy="100000" kx="0" ky="0" algn="bl" rotWithShape="0" blurRad="10160" dist="50800" dir="13500000">
-              <a:srgbClr val="FFFFFF">
-                <a:alpha val="36000"/>
-              </a:srgbClr>
-            </a:outerShdw>
-          </a:effectLst>
-        </p:spPr>
-      </p:sp>
-      <p:sp>
-        <p:nvSpPr>
-          <p:cNvPr id="14" name="Shape 11"/>
-          <p:cNvSpPr/>
-          <p:nvPr/>
-        </p:nvSpPr>
-        <p:spPr>
-          <a:xfrm>
-            <a:off x="914400" y="3191256"/>
-            <a:ext cx="10241280" cy="1024128"/>
-          </a:xfrm>
-          <a:prstGeom prst="roundRect">
-            <a:avLst>
-              <a:gd name="adj" fmla="val 5357"/>
-            </a:avLst>
-          </a:prstGeom>
-          <a:solidFill>
-            <a:srgbClr val="EEF3F8">
-              <a:alpha val="6000"/>
-            </a:srgbClr>
-          </a:solidFill>
-          <a:ln w="12700">
-            <a:solidFill>
-              <a:srgbClr val="FFFFFF">
-                <a:alpha val="28000"/>
-              </a:srgbClr>
-            </a:solidFill>
-            <a:prstDash val="solid"/>
-          </a:ln>
-        </p:spPr>
-      </p:sp>
-      <p:pic>
-        <p:nvPicPr>
-          <p:cNvPr id="15" name="Image 1" descr="preencoded.png">    </p:cNvPr>
-          <p:cNvPicPr>
-            <a:picLocks noChangeAspect="1"/>
-          </p:cNvPicPr>
-          <p:nvPr/>
-        </p:nvPicPr>
-        <p:blipFill>
-          <a:blip r:embed="rId3">
-            <a:extLst>
-              <a:ext uri="{96DAC541-7B7A-43D3-8B79-37D633B846F1}">
-                <asvg:svgBlip xmlns:asvg="http://schemas.microsoft.com/office/drawing/2016/SVG/main" r:embed="rId4"/>
-              </a:ext>
-            </a:extLst>
-          </a:blip>
-          <a:stretch>
-            <a:fillRect/>
-          </a:stretch>
-        </p:blipFill>
-        <p:spPr>
-          <a:xfrm>
-            <a:off x="914400" y="3191256"/>
-            <a:ext cx="10241280" cy="1024128"/>
-          </a:xfrm>
-          <a:prstGeom prst="rect">
-            <a:avLst/>
-          </a:prstGeom>
-        </p:spPr>
-      </p:pic>
-      <p:sp>
-        <p:nvSpPr>
-          <p:cNvPr id="16" name="Shape 12"/>
-          <p:cNvSpPr/>
-          <p:nvPr/>
-        </p:nvSpPr>
-        <p:spPr>
-          <a:xfrm>
-            <a:off x="955548" y="4558284"/>
-            <a:ext cx="10241280" cy="1024128"/>
-          </a:xfrm>
-          <a:prstGeom prst="roundRect">
-            <a:avLst>
-              <a:gd name="adj" fmla="val 5357"/>
-            </a:avLst>
-          </a:prstGeom>
-          <a:solidFill>
-            <a:srgbClr val="B8C3D2">
-              <a:alpha val="26000"/>
-            </a:srgbClr>
-          </a:solidFill>
-          <a:ln w="12700">
-            <a:solidFill>
-              <a:srgbClr val="D1DAE7">
-                <a:alpha val="0"/>
-              </a:srgbClr>
-            </a:solidFill>
-            <a:prstDash val="solid"/>
-          </a:ln>
-          <a:effectLst>
-            <a:outerShdw sx="100000" sy="100000" kx="0" ky="0" algn="bl" rotWithShape="0" blurRad="13970" dist="50800" dir="2700000">
-              <a:srgbClr val="AAB5C4">
-                <a:alpha val="20000"/>
-              </a:srgbClr>
-            </a:outerShdw>
-          </a:effectLst>
-        </p:spPr>
-      </p:sp>
-      <p:sp>
-        <p:nvSpPr>
-          <p:cNvPr id="17" name="Shape 13"/>
-          <p:cNvSpPr/>
-          <p:nvPr/>
-        </p:nvSpPr>
-        <p:spPr>
-          <a:xfrm>
-            <a:off x="882396" y="4475988"/>
-            <a:ext cx="10241280" cy="1024128"/>
-          </a:xfrm>
-          <a:prstGeom prst="roundRect">
-            <a:avLst>
-              <a:gd name="adj" fmla="val 5357"/>
-            </a:avLst>
-          </a:prstGeom>
-          <a:solidFill>
-            <a:srgbClr val="FFFFFF">
-              <a:alpha val="42000"/>
-            </a:srgbClr>
-          </a:solidFill>
-          <a:ln w="12700">
-            <a:solidFill>
-              <a:srgbClr val="FFFFFF">
-                <a:alpha val="0"/>
-              </a:srgbClr>
-            </a:solidFill>
-            <a:prstDash val="solid"/>
-          </a:ln>
-          <a:effectLst>
-            <a:outerShdw sx="100000" sy="100000" kx="0" ky="0" algn="bl" rotWithShape="0" blurRad="10160" dist="50800" dir="13500000">
-              <a:srgbClr val="FFFFFF">
-                <a:alpha val="36000"/>
-              </a:srgbClr>
-            </a:outerShdw>
-          </a:effectLst>
-        </p:spPr>
-      </p:sp>
-      <p:sp>
-        <p:nvSpPr>
-          <p:cNvPr id="18" name="Shape 14"/>
-          <p:cNvSpPr/>
-          <p:nvPr/>
-        </p:nvSpPr>
-        <p:spPr>
-          <a:xfrm>
-            <a:off x="914400" y="4507992"/>
-            <a:ext cx="10241280" cy="1024128"/>
-          </a:xfrm>
-          <a:prstGeom prst="roundRect">
-            <a:avLst>
-              <a:gd name="adj" fmla="val 5357"/>
-            </a:avLst>
-          </a:prstGeom>
-          <a:solidFill>
-            <a:srgbClr val="EEF3F8">
-              <a:alpha val="6000"/>
-            </a:srgbClr>
-          </a:solidFill>
-          <a:ln w="12700">
-            <a:solidFill>
-              <a:srgbClr val="FFFFFF">
-                <a:alpha val="28000"/>
-              </a:srgbClr>
-            </a:solidFill>
-            <a:prstDash val="solid"/>
-          </a:ln>
-        </p:spPr>
-      </p:sp>
-      <p:pic>
-        <p:nvPicPr>
-          <p:cNvPr id="19" name="Image 2" descr="preencoded.png">    </p:cNvPr>
-          <p:cNvPicPr>
-            <a:picLocks noChangeAspect="1"/>
-          </p:cNvPicPr>
-          <p:nvPr/>
-        </p:nvPicPr>
-        <p:blipFill>
-          <a:blip r:embed="rId5">
-            <a:extLst>
-              <a:ext uri="{96DAC541-7B7A-43D3-8B79-37D633B846F1}">
-                <asvg:svgBlip xmlns:asvg="http://schemas.microsoft.com/office/drawing/2016/SVG/main" r:embed="rId6"/>
-              </a:ext>
-            </a:extLst>
-          </a:blip>
-          <a:stretch>
-            <a:fillRect/>
-          </a:stretch>
-        </p:blipFill>
-        <p:spPr>
-          <a:xfrm>
-            <a:off x="914400" y="4507992"/>
-            <a:ext cx="10241280" cy="1024128"/>
-          </a:xfrm>
-          <a:prstGeom prst="rect">
-            <a:avLst/>
-          </a:prstGeom>
-        </p:spPr>
-      </p:pic>
-      <p:sp>
-        <p:nvSpPr>
-          <p:cNvPr id="20" name="Shape 15"/>
-          <p:cNvSpPr/>
-          <p:nvPr/>
-        </p:nvSpPr>
-        <p:spPr>
-          <a:xfrm>
-            <a:off x="786384" y="1956816"/>
-            <a:ext cx="32004" cy="3483864"/>
-          </a:xfrm>
-          <a:prstGeom prst="rect">
-            <a:avLst/>
-          </a:prstGeom>
-          <a:solidFill>
-            <a:srgbClr val="D8E2EE">
-              <a:alpha val="80000"/>
-            </a:srgbClr>
+          <a:solidFill>
+            <a:srgbClr val="D8E2EE"/>
           </a:solidFill>
           <a:ln w="12700">
             <a:solidFill>
@@ -12714,14 +12236,14 @@
       </p:sp>
       <p:sp>
         <p:nvSpPr>
-          <p:cNvPr id="21" name="Shape 16"/>
-          <p:cNvSpPr/>
-          <p:nvPr/>
-        </p:nvSpPr>
-        <p:spPr>
-          <a:xfrm>
-            <a:off x="914400" y="1865376"/>
-            <a:ext cx="73152" cy="1024128"/>
+          <p:cNvPr id="9" name="Shape 7"/>
+          <p:cNvSpPr/>
+          <p:nvPr/>
+        </p:nvSpPr>
+        <p:spPr>
+          <a:xfrm>
+            <a:off x="7863840" y="1938528"/>
+            <a:ext cx="73152" cy="2514600"/>
           </a:xfrm>
           <a:prstGeom prst="rect">
             <a:avLst/>
@@ -12741,61 +12263,7 @@
       </p:sp>
       <p:sp>
         <p:nvSpPr>
-          <p:cNvPr id="22" name="Shape 17"/>
-          <p:cNvSpPr/>
-          <p:nvPr/>
-        </p:nvSpPr>
-        <p:spPr>
-          <a:xfrm>
-            <a:off x="914400" y="3191256"/>
-            <a:ext cx="73152" cy="1024128"/>
-          </a:xfrm>
-          <a:prstGeom prst="rect">
-            <a:avLst/>
-          </a:prstGeom>
-          <a:solidFill>
-            <a:srgbClr val="D8E2EE"/>
-          </a:solidFill>
-          <a:ln w="12700">
-            <a:solidFill>
-              <a:srgbClr val="D8E2EE">
-                <a:alpha val="0"/>
-              </a:srgbClr>
-            </a:solidFill>
-            <a:prstDash val="solid"/>
-          </a:ln>
-        </p:spPr>
-      </p:sp>
-      <p:sp>
-        <p:nvSpPr>
-          <p:cNvPr id="23" name="Shape 18"/>
-          <p:cNvSpPr/>
-          <p:nvPr/>
-        </p:nvSpPr>
-        <p:spPr>
-          <a:xfrm>
-            <a:off x="914400" y="4507992"/>
-            <a:ext cx="73152" cy="1024128"/>
-          </a:xfrm>
-          <a:prstGeom prst="rect">
-            <a:avLst/>
-          </a:prstGeom>
-          <a:solidFill>
-            <a:srgbClr val="5D7FA4"/>
-          </a:solidFill>
-          <a:ln w="12700">
-            <a:solidFill>
-              <a:srgbClr val="5D7FA4">
-                <a:alpha val="0"/>
-              </a:srgbClr>
-            </a:solidFill>
-            <a:prstDash val="solid"/>
-          </a:ln>
-        </p:spPr>
-      </p:sp>
-      <p:sp>
-        <p:nvSpPr>
-          <p:cNvPr id="24" name="mdpr:1-2-ea42c8:title:__title:1-2-ea42c8"/>
+          <p:cNvPr id="10" name="mdpr:1-2-ea42c8:title:__title:1-2-ea42c8"/>
           <p:cNvSpPr txBox="1"/>
           <p:nvPr/>
         </p:nvSpPr>
@@ -12837,14 +12305,14 @@
       </p:sp>
       <p:sp>
         <p:nvSpPr>
-          <p:cNvPr id="25" name="mdpr:1-2-ea42c8:item-1:block-27-chunk-1"/>
+          <p:cNvPr id="11" name="mdpr:1-2-ea42c8:item-1:block-27-chunk-1"/>
           <p:cNvSpPr txBox="1"/>
           <p:nvPr/>
         </p:nvSpPr>
         <p:spPr>
           <a:xfrm>
-            <a:off x="1133856" y="1957548"/>
-            <a:ext cx="9820656" cy="839785"/>
+            <a:off x="1042416" y="2103120"/>
+            <a:ext cx="2825496" cy="2185416"/>
           </a:xfrm>
           <a:prstGeom prst="rect">
             <a:avLst/>
@@ -12896,14 +12364,14 @@
       </p:sp>
       <p:sp>
         <p:nvSpPr>
-          <p:cNvPr id="26" name="mdpr:1-2-ea42c8:item-2:block-27-chunk-1"/>
+          <p:cNvPr id="12" name="mdpr:1-2-ea42c8:item-2:block-27-chunk-1"/>
           <p:cNvSpPr txBox="1"/>
           <p:nvPr/>
         </p:nvSpPr>
         <p:spPr>
           <a:xfrm>
-            <a:off x="1133856" y="3283428"/>
-            <a:ext cx="9820656" cy="839785"/>
+            <a:off x="4562856" y="2103120"/>
+            <a:ext cx="2825496" cy="2185416"/>
           </a:xfrm>
           <a:prstGeom prst="rect">
             <a:avLst/>
@@ -12955,14 +12423,14 @@
       </p:sp>
       <p:sp>
         <p:nvSpPr>
-          <p:cNvPr id="27" name="mdpr:1-2-ea42c8:item-3:block-27-chunk-1"/>
+          <p:cNvPr id="13" name="mdpr:1-2-ea42c8:item-3:block-27-chunk-1"/>
           <p:cNvSpPr txBox="1"/>
           <p:nvPr/>
         </p:nvSpPr>
         <p:spPr>
           <a:xfrm>
-            <a:off x="1133856" y="4600164"/>
-            <a:ext cx="9820656" cy="839785"/>
+            <a:off x="8083296" y="2103120"/>
+            <a:ext cx="2825496" cy="2185416"/>
           </a:xfrm>
           <a:prstGeom prst="rect">
             <a:avLst/>
@@ -13207,8 +12675,8 @@
         </p:nvSpPr>
         <p:spPr>
           <a:xfrm>
-            <a:off x="731520" y="1207008"/>
-            <a:ext cx="1325880" cy="54864"/>
+            <a:off x="822960" y="1737360"/>
+            <a:ext cx="73152" cy="841248"/>
           </a:xfrm>
           <a:prstGeom prst="rect">
             <a:avLst/>
@@ -13234,8 +12702,35 @@
         </p:nvSpPr>
         <p:spPr>
           <a:xfrm>
-            <a:off x="822960" y="1188720"/>
-            <a:ext cx="10515600" cy="45720"/>
+            <a:off x="822960" y="2779776"/>
+            <a:ext cx="73152" cy="841248"/>
+          </a:xfrm>
+          <a:prstGeom prst="rect">
+            <a:avLst/>
+          </a:prstGeom>
+          <a:solidFill>
+            <a:srgbClr val="D8E2EE"/>
+          </a:solidFill>
+          <a:ln w="12700">
+            <a:solidFill>
+              <a:srgbClr val="D8E2EE">
+                <a:alpha val="0"/>
+              </a:srgbClr>
+            </a:solidFill>
+            <a:prstDash val="solid"/>
+          </a:ln>
+        </p:spPr>
+      </p:sp>
+      <p:sp>
+        <p:nvSpPr>
+          <p:cNvPr id="9" name="Shape 7"/>
+          <p:cNvSpPr/>
+          <p:nvPr/>
+        </p:nvSpPr>
+        <p:spPr>
+          <a:xfrm>
+            <a:off x="822960" y="3822192"/>
+            <a:ext cx="73152" cy="841248"/>
           </a:xfrm>
           <a:prstGeom prst="rect">
             <a:avLst/>
@@ -13255,14 +12750,14 @@
       </p:sp>
       <p:sp>
         <p:nvSpPr>
-          <p:cNvPr id="9" name="Shape 7"/>
-          <p:cNvSpPr/>
-          <p:nvPr/>
-        </p:nvSpPr>
-        <p:spPr>
-          <a:xfrm>
-            <a:off x="822960" y="6382512"/>
-            <a:ext cx="2011680" cy="45720"/>
+          <p:cNvPr id="10" name="Shape 8"/>
+          <p:cNvSpPr/>
+          <p:nvPr/>
+        </p:nvSpPr>
+        <p:spPr>
+          <a:xfrm>
+            <a:off x="822960" y="4864608"/>
+            <a:ext cx="73152" cy="841248"/>
           </a:xfrm>
           <a:prstGeom prst="rect">
             <a:avLst/>
@@ -13282,43 +12777,14 @@
       </p:sp>
       <p:sp>
         <p:nvSpPr>
-          <p:cNvPr id="10" name="Shape 8"/>
-          <p:cNvSpPr/>
-          <p:nvPr/>
-        </p:nvSpPr>
-        <p:spPr>
-          <a:xfrm>
-            <a:off x="6080760" y="1389888"/>
-            <a:ext cx="22860" cy="4846320"/>
-          </a:xfrm>
-          <a:prstGeom prst="rect">
-            <a:avLst/>
-          </a:prstGeom>
-          <a:solidFill>
-            <a:srgbClr val="D1DAE7">
-              <a:alpha val="90000"/>
-            </a:srgbClr>
-          </a:solidFill>
-          <a:ln w="12700">
-            <a:solidFill>
-              <a:srgbClr val="D1DAE7">
-                <a:alpha val="0"/>
-              </a:srgbClr>
-            </a:solidFill>
-            <a:prstDash val="solid"/>
-          </a:ln>
-        </p:spPr>
-      </p:sp>
-      <p:sp>
-        <p:nvSpPr>
           <p:cNvPr id="11" name="Shape 9"/>
           <p:cNvSpPr/>
           <p:nvPr/>
         </p:nvSpPr>
         <p:spPr>
           <a:xfrm>
-            <a:off x="822960" y="1389888"/>
-            <a:ext cx="73152" cy="566928"/>
+            <a:off x="6272784" y="1737360"/>
+            <a:ext cx="73152" cy="841248"/>
           </a:xfrm>
           <a:prstGeom prst="rect">
             <a:avLst/>
@@ -13344,8 +12810,8 @@
         </p:nvSpPr>
         <p:spPr>
           <a:xfrm>
-            <a:off x="822960" y="2103120"/>
-            <a:ext cx="73152" cy="566928"/>
+            <a:off x="6272784" y="2779776"/>
+            <a:ext cx="73152" cy="841248"/>
           </a:xfrm>
           <a:prstGeom prst="rect">
             <a:avLst/>
@@ -13371,8 +12837,8 @@
         </p:nvSpPr>
         <p:spPr>
           <a:xfrm>
-            <a:off x="822960" y="2816352"/>
-            <a:ext cx="73152" cy="566928"/>
+            <a:off x="6272784" y="3822192"/>
+            <a:ext cx="73152" cy="841248"/>
           </a:xfrm>
           <a:prstGeom prst="rect">
             <a:avLst/>
@@ -13398,8 +12864,8 @@
         </p:nvSpPr>
         <p:spPr>
           <a:xfrm>
-            <a:off x="822960" y="3529584"/>
-            <a:ext cx="73152" cy="566928"/>
+            <a:off x="6272784" y="4864608"/>
+            <a:ext cx="73152" cy="841248"/>
           </a:xfrm>
           <a:prstGeom prst="rect">
             <a:avLst/>
@@ -13419,277 +12885,7 @@
       </p:sp>
       <p:sp>
         <p:nvSpPr>
-          <p:cNvPr id="15" name="Shape 13"/>
-          <p:cNvSpPr/>
-          <p:nvPr/>
-        </p:nvSpPr>
-        <p:spPr>
-          <a:xfrm>
-            <a:off x="822960" y="4242816"/>
-            <a:ext cx="73152" cy="566928"/>
-          </a:xfrm>
-          <a:prstGeom prst="rect">
-            <a:avLst/>
-          </a:prstGeom>
-          <a:solidFill>
-            <a:srgbClr val="5D7FA4"/>
-          </a:solidFill>
-          <a:ln w="12700">
-            <a:solidFill>
-              <a:srgbClr val="5D7FA4">
-                <a:alpha val="0"/>
-              </a:srgbClr>
-            </a:solidFill>
-            <a:prstDash val="solid"/>
-          </a:ln>
-        </p:spPr>
-      </p:sp>
-      <p:sp>
-        <p:nvSpPr>
-          <p:cNvPr id="16" name="Shape 14"/>
-          <p:cNvSpPr/>
-          <p:nvPr/>
-        </p:nvSpPr>
-        <p:spPr>
-          <a:xfrm>
-            <a:off x="822960" y="4956048"/>
-            <a:ext cx="73152" cy="566928"/>
-          </a:xfrm>
-          <a:prstGeom prst="rect">
-            <a:avLst/>
-          </a:prstGeom>
-          <a:solidFill>
-            <a:srgbClr val="D8E2EE"/>
-          </a:solidFill>
-          <a:ln w="12700">
-            <a:solidFill>
-              <a:srgbClr val="D8E2EE">
-                <a:alpha val="0"/>
-              </a:srgbClr>
-            </a:solidFill>
-            <a:prstDash val="solid"/>
-          </a:ln>
-        </p:spPr>
-      </p:sp>
-      <p:sp>
-        <p:nvSpPr>
-          <p:cNvPr id="17" name="Shape 15"/>
-          <p:cNvSpPr/>
-          <p:nvPr/>
-        </p:nvSpPr>
-        <p:spPr>
-          <a:xfrm>
-            <a:off x="822960" y="5669280"/>
-            <a:ext cx="73152" cy="566928"/>
-          </a:xfrm>
-          <a:prstGeom prst="rect">
-            <a:avLst/>
-          </a:prstGeom>
-          <a:solidFill>
-            <a:srgbClr val="5D7FA4"/>
-          </a:solidFill>
-          <a:ln w="12700">
-            <a:solidFill>
-              <a:srgbClr val="5D7FA4">
-                <a:alpha val="0"/>
-              </a:srgbClr>
-            </a:solidFill>
-            <a:prstDash val="solid"/>
-          </a:ln>
-        </p:spPr>
-      </p:sp>
-      <p:sp>
-        <p:nvSpPr>
-          <p:cNvPr id="18" name="Shape 16"/>
-          <p:cNvSpPr/>
-          <p:nvPr/>
-        </p:nvSpPr>
-        <p:spPr>
-          <a:xfrm>
-            <a:off x="6272784" y="1389888"/>
-            <a:ext cx="73152" cy="566928"/>
-          </a:xfrm>
-          <a:prstGeom prst="rect">
-            <a:avLst/>
-          </a:prstGeom>
-          <a:solidFill>
-            <a:srgbClr val="D8E2EE"/>
-          </a:solidFill>
-          <a:ln w="12700">
-            <a:solidFill>
-              <a:srgbClr val="D8E2EE">
-                <a:alpha val="0"/>
-              </a:srgbClr>
-            </a:solidFill>
-            <a:prstDash val="solid"/>
-          </a:ln>
-        </p:spPr>
-      </p:sp>
-      <p:sp>
-        <p:nvSpPr>
-          <p:cNvPr id="19" name="Shape 17"/>
-          <p:cNvSpPr/>
-          <p:nvPr/>
-        </p:nvSpPr>
-        <p:spPr>
-          <a:xfrm>
-            <a:off x="6272784" y="2103120"/>
-            <a:ext cx="73152" cy="566928"/>
-          </a:xfrm>
-          <a:prstGeom prst="rect">
-            <a:avLst/>
-          </a:prstGeom>
-          <a:solidFill>
-            <a:srgbClr val="5D7FA4"/>
-          </a:solidFill>
-          <a:ln w="12700">
-            <a:solidFill>
-              <a:srgbClr val="5D7FA4">
-                <a:alpha val="0"/>
-              </a:srgbClr>
-            </a:solidFill>
-            <a:prstDash val="solid"/>
-          </a:ln>
-        </p:spPr>
-      </p:sp>
-      <p:sp>
-        <p:nvSpPr>
-          <p:cNvPr id="20" name="Shape 18"/>
-          <p:cNvSpPr/>
-          <p:nvPr/>
-        </p:nvSpPr>
-        <p:spPr>
-          <a:xfrm>
-            <a:off x="6272784" y="2816352"/>
-            <a:ext cx="73152" cy="566928"/>
-          </a:xfrm>
-          <a:prstGeom prst="rect">
-            <a:avLst/>
-          </a:prstGeom>
-          <a:solidFill>
-            <a:srgbClr val="D8E2EE"/>
-          </a:solidFill>
-          <a:ln w="12700">
-            <a:solidFill>
-              <a:srgbClr val="D8E2EE">
-                <a:alpha val="0"/>
-              </a:srgbClr>
-            </a:solidFill>
-            <a:prstDash val="solid"/>
-          </a:ln>
-        </p:spPr>
-      </p:sp>
-      <p:sp>
-        <p:nvSpPr>
-          <p:cNvPr id="21" name="Shape 19"/>
-          <p:cNvSpPr/>
-          <p:nvPr/>
-        </p:nvSpPr>
-        <p:spPr>
-          <a:xfrm>
-            <a:off x="6272784" y="3529584"/>
-            <a:ext cx="73152" cy="566928"/>
-          </a:xfrm>
-          <a:prstGeom prst="rect">
-            <a:avLst/>
-          </a:prstGeom>
-          <a:solidFill>
-            <a:srgbClr val="5D7FA4"/>
-          </a:solidFill>
-          <a:ln w="12700">
-            <a:solidFill>
-              <a:srgbClr val="5D7FA4">
-                <a:alpha val="0"/>
-              </a:srgbClr>
-            </a:solidFill>
-            <a:prstDash val="solid"/>
-          </a:ln>
-        </p:spPr>
-      </p:sp>
-      <p:sp>
-        <p:nvSpPr>
-          <p:cNvPr id="22" name="Shape 20"/>
-          <p:cNvSpPr/>
-          <p:nvPr/>
-        </p:nvSpPr>
-        <p:spPr>
-          <a:xfrm>
-            <a:off x="6272784" y="4242816"/>
-            <a:ext cx="73152" cy="566928"/>
-          </a:xfrm>
-          <a:prstGeom prst="rect">
-            <a:avLst/>
-          </a:prstGeom>
-          <a:solidFill>
-            <a:srgbClr val="D8E2EE"/>
-          </a:solidFill>
-          <a:ln w="12700">
-            <a:solidFill>
-              <a:srgbClr val="D8E2EE">
-                <a:alpha val="0"/>
-              </a:srgbClr>
-            </a:solidFill>
-            <a:prstDash val="solid"/>
-          </a:ln>
-        </p:spPr>
-      </p:sp>
-      <p:sp>
-        <p:nvSpPr>
-          <p:cNvPr id="23" name="Shape 21"/>
-          <p:cNvSpPr/>
-          <p:nvPr/>
-        </p:nvSpPr>
-        <p:spPr>
-          <a:xfrm>
-            <a:off x="6272784" y="4956048"/>
-            <a:ext cx="73152" cy="566928"/>
-          </a:xfrm>
-          <a:prstGeom prst="rect">
-            <a:avLst/>
-          </a:prstGeom>
-          <a:solidFill>
-            <a:srgbClr val="5D7FA4"/>
-          </a:solidFill>
-          <a:ln w="12700">
-            <a:solidFill>
-              <a:srgbClr val="5D7FA4">
-                <a:alpha val="0"/>
-              </a:srgbClr>
-            </a:solidFill>
-            <a:prstDash val="solid"/>
-          </a:ln>
-        </p:spPr>
-      </p:sp>
-      <p:sp>
-        <p:nvSpPr>
-          <p:cNvPr id="24" name="Shape 22"/>
-          <p:cNvSpPr/>
-          <p:nvPr/>
-        </p:nvSpPr>
-        <p:spPr>
-          <a:xfrm>
-            <a:off x="6272784" y="5669280"/>
-            <a:ext cx="73152" cy="566928"/>
-          </a:xfrm>
-          <a:prstGeom prst="rect">
-            <a:avLst/>
-          </a:prstGeom>
-          <a:solidFill>
-            <a:srgbClr val="D8E2EE"/>
-          </a:solidFill>
-          <a:ln w="12700">
-            <a:solidFill>
-              <a:srgbClr val="D8E2EE">
-                <a:alpha val="0"/>
-              </a:srgbClr>
-            </a:solidFill>
-            <a:prstDash val="solid"/>
-          </a:ln>
-        </p:spPr>
-      </p:sp>
-      <p:sp>
-        <p:nvSpPr>
-          <p:cNvPr id="25" name="mdpr:1-2-0772f8:title:__title:1-2-0772f8"/>
+          <p:cNvPr id="15" name="mdpr:1-2-0772f8:title:__title:1-2-0772f8"/>
           <p:cNvSpPr txBox="1"/>
           <p:nvPr/>
         </p:nvSpPr>
@@ -13731,14 +12927,14 @@
       </p:sp>
       <p:sp>
         <p:nvSpPr>
-          <p:cNvPr id="26" name="mdpr:1-2-0772f8:toc-item-1:toc-item-1"/>
+          <p:cNvPr id="16" name="mdpr:1-2-0772f8:toc-item-1:toc-item-1"/>
           <p:cNvSpPr txBox="1"/>
           <p:nvPr/>
         </p:nvSpPr>
         <p:spPr>
           <a:xfrm>
-            <a:off x="1042416" y="1481328"/>
-            <a:ext cx="4645152" cy="384048"/>
+            <a:off x="1042416" y="1828800"/>
+            <a:ext cx="4645152" cy="658368"/>
           </a:xfrm>
           <a:prstGeom prst="rect">
             <a:avLst/>
@@ -13773,14 +12969,14 @@
       </p:sp>
       <p:sp>
         <p:nvSpPr>
-          <p:cNvPr id="27" name="mdpr:1-2-0772f8:toc-item-2:toc-item-2"/>
+          <p:cNvPr id="17" name="mdpr:1-2-0772f8:toc-item-2:toc-item-2"/>
           <p:cNvSpPr txBox="1"/>
           <p:nvPr/>
         </p:nvSpPr>
         <p:spPr>
           <a:xfrm>
-            <a:off x="1042416" y="2194560"/>
-            <a:ext cx="4645152" cy="384048"/>
+            <a:off x="1042416" y="2871216"/>
+            <a:ext cx="4645152" cy="658368"/>
           </a:xfrm>
           <a:prstGeom prst="rect">
             <a:avLst/>
@@ -13815,14 +13011,14 @@
       </p:sp>
       <p:sp>
         <p:nvSpPr>
-          <p:cNvPr id="28" name="mdpr:1-2-0772f8:toc-item-3:toc-item-3"/>
+          <p:cNvPr id="18" name="mdpr:1-2-0772f8:toc-item-3:toc-item-3"/>
           <p:cNvSpPr txBox="1"/>
           <p:nvPr/>
         </p:nvSpPr>
         <p:spPr>
           <a:xfrm>
-            <a:off x="1042416" y="2907792"/>
-            <a:ext cx="4645152" cy="384048"/>
+            <a:off x="1042416" y="3913632"/>
+            <a:ext cx="4645152" cy="658368"/>
           </a:xfrm>
           <a:prstGeom prst="rect">
             <a:avLst/>
@@ -13857,14 +13053,14 @@
       </p:sp>
       <p:sp>
         <p:nvSpPr>
-          <p:cNvPr id="29" name="mdpr:1-2-0772f8:toc-item-4:toc-item-4"/>
+          <p:cNvPr id="19" name="mdpr:1-2-0772f8:toc-item-4:toc-item-4"/>
           <p:cNvSpPr txBox="1"/>
           <p:nvPr/>
         </p:nvSpPr>
         <p:spPr>
           <a:xfrm>
-            <a:off x="1042416" y="3621024"/>
-            <a:ext cx="4645152" cy="384048"/>
+            <a:off x="1042416" y="4956048"/>
+            <a:ext cx="4645152" cy="658368"/>
           </a:xfrm>
           <a:prstGeom prst="rect">
             <a:avLst/>
@@ -13899,14 +13095,14 @@
       </p:sp>
       <p:sp>
         <p:nvSpPr>
-          <p:cNvPr id="30" name="mdpr:1-2-0772f8:toc-item-5:toc-item-5"/>
+          <p:cNvPr id="20" name="mdpr:1-2-0772f8:toc-item-5:toc-item-5"/>
           <p:cNvSpPr txBox="1"/>
           <p:nvPr/>
         </p:nvSpPr>
         <p:spPr>
           <a:xfrm>
-            <a:off x="1042416" y="4334256"/>
-            <a:ext cx="4645152" cy="384048"/>
+            <a:off x="6492240" y="1828800"/>
+            <a:ext cx="4645152" cy="658368"/>
           </a:xfrm>
           <a:prstGeom prst="rect">
             <a:avLst/>
@@ -13941,14 +13137,14 @@
       </p:sp>
       <p:sp>
         <p:nvSpPr>
-          <p:cNvPr id="31" name="mdpr:1-2-0772f8:toc-item-6:toc-item-6"/>
+          <p:cNvPr id="21" name="mdpr:1-2-0772f8:toc-item-6:toc-item-6"/>
           <p:cNvSpPr txBox="1"/>
           <p:nvPr/>
         </p:nvSpPr>
         <p:spPr>
           <a:xfrm>
-            <a:off x="1042416" y="5047488"/>
-            <a:ext cx="4645152" cy="384048"/>
+            <a:off x="6492240" y="2871216"/>
+            <a:ext cx="4645152" cy="658368"/>
           </a:xfrm>
           <a:prstGeom prst="rect">
             <a:avLst/>
@@ -13983,14 +13179,14 @@
       </p:sp>
       <p:sp>
         <p:nvSpPr>
-          <p:cNvPr id="32" name="mdpr:1-2-0772f8:toc-item-7:toc-item-7"/>
+          <p:cNvPr id="22" name="mdpr:1-2-0772f8:toc-item-7:toc-item-7"/>
           <p:cNvSpPr txBox="1"/>
           <p:nvPr/>
         </p:nvSpPr>
         <p:spPr>
           <a:xfrm>
-            <a:off x="1042416" y="5760720"/>
-            <a:ext cx="4645152" cy="384048"/>
+            <a:off x="6492240" y="3913632"/>
+            <a:ext cx="4645152" cy="658368"/>
           </a:xfrm>
           <a:prstGeom prst="rect">
             <a:avLst/>
@@ -14025,14 +13221,14 @@
       </p:sp>
       <p:sp>
         <p:nvSpPr>
-          <p:cNvPr id="33" name="mdpr:1-2-0772f8:toc-item-8:toc-item-8"/>
+          <p:cNvPr id="23" name="mdpr:1-2-0772f8:toc-item-8:toc-item-8"/>
           <p:cNvSpPr txBox="1"/>
           <p:nvPr/>
         </p:nvSpPr>
         <p:spPr>
           <a:xfrm>
-            <a:off x="6492240" y="1481328"/>
-            <a:ext cx="4645152" cy="384048"/>
+            <a:off x="6492240" y="4956048"/>
+            <a:ext cx="4645152" cy="658368"/>
           </a:xfrm>
           <a:prstGeom prst="rect">
             <a:avLst/>
@@ -14060,258 +13256,6 @@
                 <a:cs typeface="Pretendard" pitchFamily="34" charset="-120"/>
               </a:rPr>
               <a:t>08  Chart and Table Pair</a:t>
-            </a:r>
-            <a:endParaRPr lang="en-US" sz="1800" dirty="0"/>
-          </a:p>
-        </p:txBody>
-      </p:sp>
-      <p:sp>
-        <p:nvSpPr>
-          <p:cNvPr id="34" name="mdpr:1-2-0772f8:toc-item-9:toc-item-9"/>
-          <p:cNvSpPr txBox="1"/>
-          <p:nvPr/>
-        </p:nvSpPr>
-        <p:spPr>
-          <a:xfrm>
-            <a:off x="6492240" y="2194560"/>
-            <a:ext cx="4645152" cy="384048"/>
-          </a:xfrm>
-          <a:prstGeom prst="rect">
-            <a:avLst/>
-          </a:prstGeom>
-          <a:noFill/>
-          <a:ln/>
-        </p:spPr>
-        <p:txBody>
-          <a:bodyPr wrap="square" lIns="0" tIns="25400" rIns="25400" bIns="0" rtlCol="0" anchor="ctr"/>
-          <a:lstStyle/>
-          <a:p>
-            <a:pPr algn="ctr" indent="0" marL="0">
-              <a:lnSpc>
-                <a:spcPct val="120000"/>
-              </a:lnSpc>
-              <a:buNone/>
-            </a:pPr>
-            <a:r>
-              <a:rPr lang="en-US" sz="1800" dirty="0">
-                <a:solidFill>
-                  <a:srgbClr val="111111"/>
-                </a:solidFill>
-                <a:latin typeface="Pretendard" pitchFamily="34" charset="0"/>
-                <a:ea typeface="Pretendard" pitchFamily="34" charset="-122"/>
-                <a:cs typeface="Pretendard" pitchFamily="34" charset="-120"/>
-              </a:rPr>
-              <a:t>09  Editable Proof Objects</a:t>
-            </a:r>
-            <a:endParaRPr lang="en-US" sz="1800" dirty="0"/>
-          </a:p>
-        </p:txBody>
-      </p:sp>
-      <p:sp>
-        <p:nvSpPr>
-          <p:cNvPr id="35" name="mdpr:1-2-0772f8:toc-item-10:toc-item-10"/>
-          <p:cNvSpPr txBox="1"/>
-          <p:nvPr/>
-        </p:nvSpPr>
-        <p:spPr>
-          <a:xfrm>
-            <a:off x="6492240" y="2907792"/>
-            <a:ext cx="4645152" cy="384048"/>
-          </a:xfrm>
-          <a:prstGeom prst="rect">
-            <a:avLst/>
-          </a:prstGeom>
-          <a:noFill/>
-          <a:ln/>
-        </p:spPr>
-        <p:txBody>
-          <a:bodyPr wrap="square" lIns="0" tIns="25400" rIns="25400" bIns="0" rtlCol="0" anchor="ctr"/>
-          <a:lstStyle/>
-          <a:p>
-            <a:pPr algn="ctr" indent="0" marL="0">
-              <a:lnSpc>
-                <a:spcPct val="120000"/>
-              </a:lnSpc>
-              <a:buNone/>
-            </a:pPr>
-            <a:r>
-              <a:rPr lang="en-US" sz="1800" dirty="0">
-                <a:solidFill>
-                  <a:srgbClr val="111111"/>
-                </a:solidFill>
-                <a:latin typeface="Pretendard" pitchFamily="34" charset="0"/>
-                <a:ea typeface="Pretendard" pitchFamily="34" charset="-122"/>
-                <a:cs typeface="Pretendard" pitchFamily="34" charset="-120"/>
-              </a:rPr>
-              <a:t>10  Object Shape Grammar</a:t>
-            </a:r>
-            <a:endParaRPr lang="en-US" sz="1800" dirty="0"/>
-          </a:p>
-        </p:txBody>
-      </p:sp>
-      <p:sp>
-        <p:nvSpPr>
-          <p:cNvPr id="36" name="mdpr:1-2-0772f8:toc-item-11:toc-item-11"/>
-          <p:cNvSpPr txBox="1"/>
-          <p:nvPr/>
-        </p:nvSpPr>
-        <p:spPr>
-          <a:xfrm>
-            <a:off x="6492240" y="3621024"/>
-            <a:ext cx="4645152" cy="384048"/>
-          </a:xfrm>
-          <a:prstGeom prst="rect">
-            <a:avLst/>
-          </a:prstGeom>
-          <a:noFill/>
-          <a:ln/>
-        </p:spPr>
-        <p:txBody>
-          <a:bodyPr wrap="square" lIns="0" tIns="25400" rIns="25400" bIns="0" rtlCol="0" anchor="ctr"/>
-          <a:lstStyle/>
-          <a:p>
-            <a:pPr algn="ctr" indent="0" marL="0">
-              <a:lnSpc>
-                <a:spcPct val="120000"/>
-              </a:lnSpc>
-              <a:buNone/>
-            </a:pPr>
-            <a:r>
-              <a:rPr lang="en-US" sz="1800" dirty="0">
-                <a:solidFill>
-                  <a:srgbClr val="111111"/>
-                </a:solidFill>
-                <a:latin typeface="Pretendard" pitchFamily="34" charset="0"/>
-                <a:ea typeface="Pretendard" pitchFamily="34" charset="-122"/>
-                <a:cs typeface="Pretendard" pitchFamily="34" charset="-120"/>
-              </a:rPr>
-              <a:t>11  Icon and Text Aside</a:t>
-            </a:r>
-            <a:endParaRPr lang="en-US" sz="1800" dirty="0"/>
-          </a:p>
-        </p:txBody>
-      </p:sp>
-      <p:sp>
-        <p:nvSpPr>
-          <p:cNvPr id="37" name="mdpr:1-2-0772f8:toc-item-12:toc-item-12"/>
-          <p:cNvSpPr txBox="1"/>
-          <p:nvPr/>
-        </p:nvSpPr>
-        <p:spPr>
-          <a:xfrm>
-            <a:off x="6492240" y="4334256"/>
-            <a:ext cx="4645152" cy="384048"/>
-          </a:xfrm>
-          <a:prstGeom prst="rect">
-            <a:avLst/>
-          </a:prstGeom>
-          <a:noFill/>
-          <a:ln/>
-        </p:spPr>
-        <p:txBody>
-          <a:bodyPr wrap="square" lIns="0" tIns="25400" rIns="25400" bIns="0" rtlCol="0" anchor="ctr"/>
-          <a:lstStyle/>
-          <a:p>
-            <a:pPr algn="ctr" indent="0" marL="0">
-              <a:lnSpc>
-                <a:spcPct val="120000"/>
-              </a:lnSpc>
-              <a:buNone/>
-            </a:pPr>
-            <a:r>
-              <a:rPr lang="en-US" sz="1800" dirty="0">
-                <a:solidFill>
-                  <a:srgbClr val="111111"/>
-                </a:solidFill>
-                <a:latin typeface="Pretendard" pitchFamily="34" charset="0"/>
-                <a:ea typeface="Pretendard" pitchFamily="34" charset="-122"/>
-                <a:cs typeface="Pretendard" pitchFamily="34" charset="-120"/>
-              </a:rPr>
-              <a:t>12  Overflow Guard</a:t>
-            </a:r>
-            <a:endParaRPr lang="en-US" sz="1800" dirty="0"/>
-          </a:p>
-        </p:txBody>
-      </p:sp>
-      <p:sp>
-        <p:nvSpPr>
-          <p:cNvPr id="38" name="mdpr:1-2-0772f8:toc-item-13:toc-item-13"/>
-          <p:cNvSpPr txBox="1"/>
-          <p:nvPr/>
-        </p:nvSpPr>
-        <p:spPr>
-          <a:xfrm>
-            <a:off x="6492240" y="5047488"/>
-            <a:ext cx="4645152" cy="384048"/>
-          </a:xfrm>
-          <a:prstGeom prst="rect">
-            <a:avLst/>
-          </a:prstGeom>
-          <a:noFill/>
-          <a:ln/>
-        </p:spPr>
-        <p:txBody>
-          <a:bodyPr wrap="square" lIns="0" tIns="25400" rIns="25400" bIns="0" rtlCol="0" anchor="ctr"/>
-          <a:lstStyle/>
-          <a:p>
-            <a:pPr algn="ctr" indent="0" marL="0">
-              <a:lnSpc>
-                <a:spcPct val="120000"/>
-              </a:lnSpc>
-              <a:buNone/>
-            </a:pPr>
-            <a:r>
-              <a:rPr lang="en-US" sz="1800" dirty="0">
-                <a:solidFill>
-                  <a:srgbClr val="111111"/>
-                </a:solidFill>
-                <a:latin typeface="Pretendard" pitchFamily="34" charset="0"/>
-                <a:ea typeface="Pretendard" pitchFamily="34" charset="-122"/>
-                <a:cs typeface="Pretendard" pitchFamily="34" charset="-120"/>
-              </a:rPr>
-              <a:t>13  Image Safe Frame</a:t>
-            </a:r>
-            <a:endParaRPr lang="en-US" sz="1800" dirty="0"/>
-          </a:p>
-        </p:txBody>
-      </p:sp>
-      <p:sp>
-        <p:nvSpPr>
-          <p:cNvPr id="39" name="mdpr:1-2-0772f8:toc-item-14:toc-item-14"/>
-          <p:cNvSpPr txBox="1"/>
-          <p:nvPr/>
-        </p:nvSpPr>
-        <p:spPr>
-          <a:xfrm>
-            <a:off x="6492240" y="5760720"/>
-            <a:ext cx="4645152" cy="384048"/>
-          </a:xfrm>
-          <a:prstGeom prst="rect">
-            <a:avLst/>
-          </a:prstGeom>
-          <a:noFill/>
-          <a:ln/>
-        </p:spPr>
-        <p:txBody>
-          <a:bodyPr wrap="square" lIns="0" tIns="25400" rIns="25400" bIns="0" rtlCol="0" anchor="ctr"/>
-          <a:lstStyle/>
-          <a:p>
-            <a:pPr algn="ctr" indent="0" marL="0">
-              <a:lnSpc>
-                <a:spcPct val="120000"/>
-              </a:lnSpc>
-              <a:buNone/>
-            </a:pPr>
-            <a:r>
-              <a:rPr lang="en-US" sz="1800" dirty="0">
-                <a:solidFill>
-                  <a:srgbClr val="111111"/>
-                </a:solidFill>
-                <a:latin typeface="Pretendard" pitchFamily="34" charset="0"/>
-                <a:ea typeface="Pretendard" pitchFamily="34" charset="-122"/>
-                <a:cs typeface="Pretendard" pitchFamily="34" charset="-120"/>
-              </a:rPr>
-              <a:t>14  Mixed Object Packing</a:t>
             </a:r>
             <a:endParaRPr lang="en-US" sz="1800" dirty="0"/>
           </a:p>
@@ -14512,8 +13456,8 @@
         </p:nvSpPr>
         <p:spPr>
           <a:xfrm>
-            <a:off x="731520" y="1207008"/>
-            <a:ext cx="1325880" cy="54864"/>
+            <a:off x="914400" y="1463040"/>
+            <a:ext cx="10241280" cy="73152"/>
           </a:xfrm>
           <a:prstGeom prst="rect">
             <a:avLst/>
@@ -14533,61 +13477,7 @@
       </p:sp>
       <p:sp>
         <p:nvSpPr>
-          <p:cNvPr id="8" name="Shape 6"/>
-          <p:cNvSpPr/>
-          <p:nvPr/>
-        </p:nvSpPr>
-        <p:spPr>
-          <a:xfrm>
-            <a:off x="822960" y="1554480"/>
-            <a:ext cx="4937760" cy="73152"/>
-          </a:xfrm>
-          <a:prstGeom prst="rect">
-            <a:avLst/>
-          </a:prstGeom>
-          <a:solidFill>
-            <a:srgbClr val="5D7FA4"/>
-          </a:solidFill>
-          <a:ln w="12700">
-            <a:solidFill>
-              <a:srgbClr val="5D7FA4">
-                <a:alpha val="0"/>
-              </a:srgbClr>
-            </a:solidFill>
-            <a:prstDash val="solid"/>
-          </a:ln>
-        </p:spPr>
-      </p:sp>
-      <p:sp>
-        <p:nvSpPr>
-          <p:cNvPr id="9" name="Shape 7"/>
-          <p:cNvSpPr/>
-          <p:nvPr/>
-        </p:nvSpPr>
-        <p:spPr>
-          <a:xfrm>
-            <a:off x="6400800" y="1554480"/>
-            <a:ext cx="4937760" cy="73152"/>
-          </a:xfrm>
-          <a:prstGeom prst="rect">
-            <a:avLst/>
-          </a:prstGeom>
-          <a:solidFill>
-            <a:srgbClr val="5D7FA4"/>
-          </a:solidFill>
-          <a:ln w="12700">
-            <a:solidFill>
-              <a:srgbClr val="5D7FA4">
-                <a:alpha val="0"/>
-              </a:srgbClr>
-            </a:solidFill>
-            <a:prstDash val="solid"/>
-          </a:ln>
-        </p:spPr>
-      </p:sp>
-      <p:sp>
-        <p:nvSpPr>
-          <p:cNvPr id="10" name="mdpr:2-2-4f71ba:title:__title:2-2-4f71ba"/>
+          <p:cNvPr id="8" name="mdpr:2-2-4f71ba:title:__title:2-2-4f71ba"/>
           <p:cNvSpPr txBox="1"/>
           <p:nvPr/>
         </p:nvSpPr>
@@ -14621,7 +13511,24 @@
                 <a:ea typeface="Pretendard" pitchFamily="34" charset="-122"/>
                 <a:cs typeface="Pretendard" pitchFamily="34" charset="-120"/>
               </a:rPr>
-              <a:t>Object Shape Grammar (Cont. 2/2)</a:t>
+              <a:t>Object Shape Grammar</a:t>
+            </a:r>
+            <a:pPr algn="ctr" indent="0" marL="0">
+              <a:lnSpc>
+                <a:spcPct val="120000"/>
+              </a:lnSpc>
+              <a:buNone/>
+            </a:pPr>
+            <a:r>
+              <a:rPr lang="en-US" sz="2000" dirty="0">
+                <a:solidFill>
+                  <a:srgbClr val="8C8C8C"/>
+                </a:solidFill>
+                <a:latin typeface="Pretendard" pitchFamily="34" charset="0"/>
+                <a:ea typeface="Pretendard" pitchFamily="34" charset="-122"/>
+                <a:cs typeface="Pretendard" pitchFamily="34" charset="-120"/>
+              </a:rPr>
+              <a:t> (Cont. 2/2)</a:t>
             </a:r>
             <a:endParaRPr lang="en-US" sz="3400" dirty="0"/>
           </a:p>
@@ -14629,14 +13536,14 @@
       </p:sp>
       <p:sp>
         <p:nvSpPr>
-          <p:cNvPr id="11" name="mdpr:2-2-4f71ba:left:block-27-chunk-2"/>
+          <p:cNvPr id="9" name="mdpr:2-2-4f71ba:body:block-27-chunk-2"/>
           <p:cNvSpPr txBox="1"/>
           <p:nvPr/>
         </p:nvSpPr>
         <p:spPr>
           <a:xfrm>
-            <a:off x="896112" y="1664208"/>
-            <a:ext cx="4791456" cy="4169664"/>
+            <a:off x="987552" y="1572768"/>
+            <a:ext cx="10094976" cy="4261104"/>
           </a:xfrm>
           <a:prstGeom prst="rect">
             <a:avLst/>
@@ -14684,28 +13591,6 @@
             </a:r>
             <a:endParaRPr lang="en-US" sz="2200" dirty="0"/>
           </a:p>
-        </p:txBody>
-      </p:sp>
-      <p:sp>
-        <p:nvSpPr>
-          <p:cNvPr id="12" name="mdpr:2-2-4f71ba:right:block-27-chunk-2"/>
-          <p:cNvSpPr txBox="1"/>
-          <p:nvPr/>
-        </p:nvSpPr>
-        <p:spPr>
-          <a:xfrm>
-            <a:off x="6473952" y="1664208"/>
-            <a:ext cx="4791456" cy="4169664"/>
-          </a:xfrm>
-          <a:prstGeom prst="rect">
-            <a:avLst/>
-          </a:prstGeom>
-          <a:noFill/>
-          <a:ln/>
-        </p:spPr>
-        <p:txBody>
-          <a:bodyPr wrap="square" lIns="0" tIns="25400" rIns="25400" bIns="0" rtlCol="0" anchor="t"/>
-          <a:lstStyle/>
           <a:p>
             <a:pPr algn="l" indent="0" marL="0">
               <a:lnSpc>
@@ -14724,6 +13609,9 @@
               </a:rPr>
               <a:t>- Rounded panel</a:t>
             </a:r>
+            <a:endParaRPr lang="en-US" sz="2200" dirty="0"/>
+          </a:p>
+          <a:p>
             <a:pPr algn="l" indent="0" marL="0">
               <a:lnSpc>
                 <a:spcPct val="120000"/>
@@ -14940,33 +13828,6 @@
         </p:nvSpPr>
         <p:spPr>
           <a:xfrm>
-            <a:off x="731520" y="1207008"/>
-            <a:ext cx="1325880" cy="54864"/>
-          </a:xfrm>
-          <a:prstGeom prst="rect">
-            <a:avLst/>
-          </a:prstGeom>
-          <a:solidFill>
-            <a:srgbClr val="5D7FA4"/>
-          </a:solidFill>
-          <a:ln w="12700">
-            <a:solidFill>
-              <a:srgbClr val="5D7FA4">
-                <a:alpha val="0"/>
-              </a:srgbClr>
-            </a:solidFill>
-            <a:prstDash val="solid"/>
-          </a:ln>
-        </p:spPr>
-      </p:sp>
-      <p:sp>
-        <p:nvSpPr>
-          <p:cNvPr id="8" name="Shape 6"/>
-          <p:cNvSpPr/>
-          <p:nvPr/>
-        </p:nvSpPr>
-        <p:spPr>
-          <a:xfrm>
             <a:off x="864108" y="1513332"/>
             <a:ext cx="5029200" cy="1920240"/>
           </a:xfrm>
@@ -14999,7 +13860,7 @@
       </p:sp>
       <p:sp>
         <p:nvSpPr>
-          <p:cNvPr id="9" name="Shape 7"/>
+          <p:cNvPr id="8" name="Shape 6"/>
           <p:cNvSpPr/>
           <p:nvPr/>
         </p:nvSpPr>
@@ -15037,7 +13898,7 @@
       </p:sp>
       <p:sp>
         <p:nvSpPr>
-          <p:cNvPr id="10" name="Shape 8"/>
+          <p:cNvPr id="9" name="Shape 7"/>
           <p:cNvSpPr/>
           <p:nvPr/>
         </p:nvSpPr>
@@ -15068,7 +13929,7 @@
       </p:sp>
       <p:pic>
         <p:nvPicPr>
-          <p:cNvPr id="11" name="Image 0" descr="preencoded.png">    </p:cNvPr>
+          <p:cNvPr id="10" name="Image 0" descr="preencoded.png">    </p:cNvPr>
           <p:cNvPicPr>
             <a:picLocks noChangeAspect="1"/>
           </p:cNvPicPr>
@@ -15098,7 +13959,7 @@
       </p:pic>
       <p:sp>
         <p:nvSpPr>
-          <p:cNvPr id="12" name="Shape 9"/>
+          <p:cNvPr id="11" name="Shape 8"/>
           <p:cNvSpPr/>
           <p:nvPr/>
         </p:nvSpPr>
@@ -15136,7 +13997,7 @@
       </p:sp>
       <p:sp>
         <p:nvSpPr>
-          <p:cNvPr id="13" name="Shape 10"/>
+          <p:cNvPr id="12" name="Shape 9"/>
           <p:cNvSpPr/>
           <p:nvPr/>
         </p:nvSpPr>
@@ -15174,7 +14035,7 @@
       </p:sp>
       <p:sp>
         <p:nvSpPr>
-          <p:cNvPr id="14" name="Shape 11"/>
+          <p:cNvPr id="13" name="Shape 10"/>
           <p:cNvSpPr/>
           <p:nvPr/>
         </p:nvSpPr>
@@ -15205,7 +14066,7 @@
       </p:sp>
       <p:pic>
         <p:nvPicPr>
-          <p:cNvPr id="15" name="Image 1" descr="preencoded.png">    </p:cNvPr>
+          <p:cNvPr id="14" name="Image 1" descr="preencoded.png">    </p:cNvPr>
           <p:cNvPicPr>
             <a:picLocks noChangeAspect="1"/>
           </p:cNvPicPr>
@@ -15235,7 +14096,7 @@
       </p:pic>
       <p:sp>
         <p:nvSpPr>
-          <p:cNvPr id="16" name="Shape 12"/>
+          <p:cNvPr id="15" name="Shape 11"/>
           <p:cNvSpPr/>
           <p:nvPr/>
         </p:nvSpPr>
@@ -15273,7 +14134,7 @@
       </p:sp>
       <p:sp>
         <p:nvSpPr>
-          <p:cNvPr id="17" name="Shape 13"/>
+          <p:cNvPr id="16" name="Shape 12"/>
           <p:cNvSpPr/>
           <p:nvPr/>
         </p:nvSpPr>
@@ -15311,7 +14172,7 @@
       </p:sp>
       <p:sp>
         <p:nvSpPr>
-          <p:cNvPr id="18" name="Shape 14"/>
+          <p:cNvPr id="17" name="Shape 13"/>
           <p:cNvSpPr/>
           <p:nvPr/>
         </p:nvSpPr>
@@ -15342,7 +14203,7 @@
       </p:sp>
       <p:pic>
         <p:nvPicPr>
-          <p:cNvPr id="19" name="Image 2" descr="preencoded.png">    </p:cNvPr>
+          <p:cNvPr id="18" name="Image 2" descr="preencoded.png">    </p:cNvPr>
           <p:cNvPicPr>
             <a:picLocks noChangeAspect="1"/>
           </p:cNvPicPr>
@@ -15372,7 +14233,7 @@
       </p:pic>
       <p:sp>
         <p:nvSpPr>
-          <p:cNvPr id="20" name="Shape 15"/>
+          <p:cNvPr id="19" name="Shape 14"/>
           <p:cNvSpPr/>
           <p:nvPr/>
         </p:nvSpPr>
@@ -15410,7 +14271,7 @@
       </p:sp>
       <p:sp>
         <p:nvSpPr>
-          <p:cNvPr id="21" name="Shape 16"/>
+          <p:cNvPr id="20" name="Shape 15"/>
           <p:cNvSpPr/>
           <p:nvPr/>
         </p:nvSpPr>
@@ -15448,7 +14309,7 @@
       </p:sp>
       <p:sp>
         <p:nvSpPr>
-          <p:cNvPr id="22" name="Shape 17"/>
+          <p:cNvPr id="21" name="Shape 16"/>
           <p:cNvSpPr/>
           <p:nvPr/>
         </p:nvSpPr>
@@ -15479,7 +14340,7 @@
       </p:sp>
       <p:pic>
         <p:nvPicPr>
-          <p:cNvPr id="23" name="Image 3" descr="preencoded.png">    </p:cNvPr>
+          <p:cNvPr id="22" name="Image 3" descr="preencoded.png">    </p:cNvPr>
           <p:cNvPicPr>
             <a:picLocks noChangeAspect="1"/>
           </p:cNvPicPr>
@@ -15509,7 +14370,7 @@
       </p:pic>
       <p:sp>
         <p:nvSpPr>
-          <p:cNvPr id="24" name="Shape 18"/>
+          <p:cNvPr id="23" name="Shape 17"/>
           <p:cNvSpPr/>
           <p:nvPr/>
         </p:nvSpPr>
@@ -15536,7 +14397,7 @@
       </p:sp>
       <p:sp>
         <p:nvSpPr>
-          <p:cNvPr id="25" name="Shape 19"/>
+          <p:cNvPr id="24" name="Shape 18"/>
           <p:cNvSpPr/>
           <p:nvPr/>
         </p:nvSpPr>
@@ -15563,7 +14424,7 @@
       </p:sp>
       <p:sp>
         <p:nvSpPr>
-          <p:cNvPr id="26" name="Shape 20"/>
+          <p:cNvPr id="25" name="Shape 19"/>
           <p:cNvSpPr/>
           <p:nvPr/>
         </p:nvSpPr>
@@ -15590,7 +14451,7 @@
       </p:sp>
       <p:sp>
         <p:nvSpPr>
-          <p:cNvPr id="27" name="Shape 21"/>
+          <p:cNvPr id="26" name="Shape 20"/>
           <p:cNvSpPr/>
           <p:nvPr/>
         </p:nvSpPr>
@@ -15617,7 +14478,7 @@
       </p:sp>
       <p:sp>
         <p:nvSpPr>
-          <p:cNvPr id="28" name="mdpr:icon-and-text-aside-8429fc:title:__title:icon-and-text-aside-8429fc"/>
+          <p:cNvPr id="27" name="mdpr:icon-and-text-aside-8429fc:title:__title:icon-and-text-aside-8429fc"/>
           <p:cNvSpPr txBox="1"/>
           <p:nvPr/>
         </p:nvSpPr>
@@ -15659,7 +14520,7 @@
       </p:sp>
       <p:sp>
         <p:nvSpPr>
-          <p:cNvPr id="29" name="mdpr:icon-and-text-aside-8429fc:item-1:block-29"/>
+          <p:cNvPr id="28" name="mdpr:icon-and-text-aside-8429fc:item-1:block-29"/>
           <p:cNvSpPr txBox="1"/>
           <p:nvPr/>
         </p:nvSpPr>
@@ -15718,7 +14579,7 @@
       </p:sp>
       <p:sp>
         <p:nvSpPr>
-          <p:cNvPr id="30" name="mdpr:icon-and-text-aside-8429fc:item-2:block-29"/>
+          <p:cNvPr id="29" name="mdpr:icon-and-text-aside-8429fc:item-2:block-29"/>
           <p:cNvSpPr txBox="1"/>
           <p:nvPr/>
         </p:nvSpPr>
@@ -15777,7 +14638,7 @@
       </p:sp>
       <p:sp>
         <p:nvSpPr>
-          <p:cNvPr id="31" name="mdpr:icon-and-text-aside-8429fc:item-3:block-29"/>
+          <p:cNvPr id="30" name="mdpr:icon-and-text-aside-8429fc:item-3:block-29"/>
           <p:cNvSpPr txBox="1"/>
           <p:nvPr/>
         </p:nvSpPr>
@@ -15836,7 +14697,7 @@
       </p:sp>
       <p:sp>
         <p:nvSpPr>
-          <p:cNvPr id="32" name="mdpr:icon-and-text-aside-8429fc:item-4:block-29"/>
+          <p:cNvPr id="31" name="mdpr:icon-and-text-aside-8429fc:item-4:block-29"/>
           <p:cNvSpPr txBox="1"/>
           <p:nvPr/>
         </p:nvSpPr>
@@ -16088,33 +14949,6 @@
         </p:nvSpPr>
         <p:spPr>
           <a:xfrm>
-            <a:off x="731520" y="1207008"/>
-            <a:ext cx="1325880" cy="54864"/>
-          </a:xfrm>
-          <a:prstGeom prst="rect">
-            <a:avLst/>
-          </a:prstGeom>
-          <a:solidFill>
-            <a:srgbClr val="5D7FA4"/>
-          </a:solidFill>
-          <a:ln w="12700">
-            <a:solidFill>
-              <a:srgbClr val="5D7FA4">
-                <a:alpha val="0"/>
-              </a:srgbClr>
-            </a:solidFill>
-            <a:prstDash val="solid"/>
-          </a:ln>
-        </p:spPr>
-      </p:sp>
-      <p:sp>
-        <p:nvSpPr>
-          <p:cNvPr id="8" name="Shape 6"/>
-          <p:cNvSpPr/>
-          <p:nvPr/>
-        </p:nvSpPr>
-        <p:spPr>
-          <a:xfrm>
             <a:off x="864108" y="1513332"/>
             <a:ext cx="5029200" cy="1920240"/>
           </a:xfrm>
@@ -16147,7 +14981,7 @@
       </p:sp>
       <p:sp>
         <p:nvSpPr>
-          <p:cNvPr id="9" name="Shape 7"/>
+          <p:cNvPr id="8" name="Shape 6"/>
           <p:cNvSpPr/>
           <p:nvPr/>
         </p:nvSpPr>
@@ -16185,7 +15019,7 @@
       </p:sp>
       <p:sp>
         <p:nvSpPr>
-          <p:cNvPr id="10" name="Shape 8"/>
+          <p:cNvPr id="9" name="Shape 7"/>
           <p:cNvSpPr/>
           <p:nvPr/>
         </p:nvSpPr>
@@ -16216,7 +15050,7 @@
       </p:sp>
       <p:pic>
         <p:nvPicPr>
-          <p:cNvPr id="11" name="Image 0" descr="preencoded.png">    </p:cNvPr>
+          <p:cNvPr id="10" name="Image 0" descr="preencoded.png">    </p:cNvPr>
           <p:cNvPicPr>
             <a:picLocks noChangeAspect="1"/>
           </p:cNvPicPr>
@@ -16246,7 +15080,7 @@
       </p:pic>
       <p:sp>
         <p:nvSpPr>
-          <p:cNvPr id="12" name="Shape 9"/>
+          <p:cNvPr id="11" name="Shape 8"/>
           <p:cNvSpPr/>
           <p:nvPr/>
         </p:nvSpPr>
@@ -16284,7 +15118,7 @@
       </p:sp>
       <p:sp>
         <p:nvSpPr>
-          <p:cNvPr id="13" name="Shape 10"/>
+          <p:cNvPr id="12" name="Shape 9"/>
           <p:cNvSpPr/>
           <p:nvPr/>
         </p:nvSpPr>
@@ -16322,7 +15156,7 @@
       </p:sp>
       <p:sp>
         <p:nvSpPr>
-          <p:cNvPr id="14" name="Shape 11"/>
+          <p:cNvPr id="13" name="Shape 10"/>
           <p:cNvSpPr/>
           <p:nvPr/>
         </p:nvSpPr>
@@ -16353,7 +15187,7 @@
       </p:sp>
       <p:pic>
         <p:nvPicPr>
-          <p:cNvPr id="15" name="Image 1" descr="preencoded.png">    </p:cNvPr>
+          <p:cNvPr id="14" name="Image 1" descr="preencoded.png">    </p:cNvPr>
           <p:cNvPicPr>
             <a:picLocks noChangeAspect="1"/>
           </p:cNvPicPr>
@@ -16383,7 +15217,7 @@
       </p:pic>
       <p:sp>
         <p:nvSpPr>
-          <p:cNvPr id="16" name="Shape 12"/>
+          <p:cNvPr id="15" name="Shape 11"/>
           <p:cNvSpPr/>
           <p:nvPr/>
         </p:nvSpPr>
@@ -16421,7 +15255,7 @@
       </p:sp>
       <p:sp>
         <p:nvSpPr>
-          <p:cNvPr id="17" name="Shape 13"/>
+          <p:cNvPr id="16" name="Shape 12"/>
           <p:cNvSpPr/>
           <p:nvPr/>
         </p:nvSpPr>
@@ -16459,7 +15293,7 @@
       </p:sp>
       <p:sp>
         <p:nvSpPr>
-          <p:cNvPr id="18" name="Shape 14"/>
+          <p:cNvPr id="17" name="Shape 13"/>
           <p:cNvSpPr/>
           <p:nvPr/>
         </p:nvSpPr>
@@ -16490,7 +15324,7 @@
       </p:sp>
       <p:pic>
         <p:nvPicPr>
-          <p:cNvPr id="19" name="Image 2" descr="preencoded.png">    </p:cNvPr>
+          <p:cNvPr id="18" name="Image 2" descr="preencoded.png">    </p:cNvPr>
           <p:cNvPicPr>
             <a:picLocks noChangeAspect="1"/>
           </p:cNvPicPr>
@@ -16520,7 +15354,7 @@
       </p:pic>
       <p:sp>
         <p:nvSpPr>
-          <p:cNvPr id="20" name="Shape 15"/>
+          <p:cNvPr id="19" name="Shape 14"/>
           <p:cNvSpPr/>
           <p:nvPr/>
         </p:nvSpPr>
@@ -16558,7 +15392,7 @@
       </p:sp>
       <p:sp>
         <p:nvSpPr>
-          <p:cNvPr id="21" name="Shape 16"/>
+          <p:cNvPr id="20" name="Shape 15"/>
           <p:cNvSpPr/>
           <p:nvPr/>
         </p:nvSpPr>
@@ -16596,7 +15430,7 @@
       </p:sp>
       <p:sp>
         <p:nvSpPr>
-          <p:cNvPr id="22" name="Shape 17"/>
+          <p:cNvPr id="21" name="Shape 16"/>
           <p:cNvSpPr/>
           <p:nvPr/>
         </p:nvSpPr>
@@ -16627,7 +15461,7 @@
       </p:sp>
       <p:pic>
         <p:nvPicPr>
-          <p:cNvPr id="23" name="Image 3" descr="preencoded.png">    </p:cNvPr>
+          <p:cNvPr id="22" name="Image 3" descr="preencoded.png">    </p:cNvPr>
           <p:cNvPicPr>
             <a:picLocks noChangeAspect="1"/>
           </p:cNvPicPr>
@@ -16657,7 +15491,7 @@
       </p:pic>
       <p:sp>
         <p:nvSpPr>
-          <p:cNvPr id="24" name="Shape 18"/>
+          <p:cNvPr id="23" name="Shape 17"/>
           <p:cNvSpPr/>
           <p:nvPr/>
         </p:nvSpPr>
@@ -16684,7 +15518,7 @@
       </p:sp>
       <p:sp>
         <p:nvSpPr>
-          <p:cNvPr id="25" name="Shape 19"/>
+          <p:cNvPr id="24" name="Shape 18"/>
           <p:cNvSpPr/>
           <p:nvPr/>
         </p:nvSpPr>
@@ -16711,7 +15545,7 @@
       </p:sp>
       <p:sp>
         <p:nvSpPr>
-          <p:cNvPr id="26" name="Shape 20"/>
+          <p:cNvPr id="25" name="Shape 19"/>
           <p:cNvSpPr/>
           <p:nvPr/>
         </p:nvSpPr>
@@ -16738,7 +15572,7 @@
       </p:sp>
       <p:sp>
         <p:nvSpPr>
-          <p:cNvPr id="27" name="Shape 21"/>
+          <p:cNvPr id="26" name="Shape 20"/>
           <p:cNvSpPr/>
           <p:nvPr/>
         </p:nvSpPr>
@@ -16765,7 +15599,7 @@
       </p:sp>
       <p:sp>
         <p:nvSpPr>
-          <p:cNvPr id="28" name="mdpr:overflow-guard-f8d03e:title:__title:overflow-guard-f8d03e"/>
+          <p:cNvPr id="27" name="mdpr:overflow-guard-f8d03e:title:__title:overflow-guard-f8d03e"/>
           <p:cNvSpPr txBox="1"/>
           <p:nvPr/>
         </p:nvSpPr>
@@ -16807,7 +15641,7 @@
       </p:sp>
       <p:sp>
         <p:nvSpPr>
-          <p:cNvPr id="29" name="mdpr:overflow-guard-f8d03e:item-1:block-31"/>
+          <p:cNvPr id="28" name="mdpr:overflow-guard-f8d03e:item-1:block-31"/>
           <p:cNvSpPr txBox="1"/>
           <p:nvPr/>
         </p:nvSpPr>
@@ -16866,7 +15700,7 @@
       </p:sp>
       <p:sp>
         <p:nvSpPr>
-          <p:cNvPr id="30" name="mdpr:overflow-guard-f8d03e:item-2:block-31"/>
+          <p:cNvPr id="29" name="mdpr:overflow-guard-f8d03e:item-2:block-31"/>
           <p:cNvSpPr txBox="1"/>
           <p:nvPr/>
         </p:nvSpPr>
@@ -16925,7 +15759,7 @@
       </p:sp>
       <p:sp>
         <p:nvSpPr>
-          <p:cNvPr id="31" name="mdpr:overflow-guard-f8d03e:item-3:block-31"/>
+          <p:cNvPr id="30" name="mdpr:overflow-guard-f8d03e:item-3:block-31"/>
           <p:cNvSpPr txBox="1"/>
           <p:nvPr/>
         </p:nvSpPr>
@@ -16984,7 +15818,7 @@
       </p:sp>
       <p:sp>
         <p:nvSpPr>
-          <p:cNvPr id="32" name="mdpr:overflow-guard-f8d03e:item-4:block-31"/>
+          <p:cNvPr id="31" name="mdpr:overflow-guard-f8d03e:item-4:block-31"/>
           <p:cNvSpPr txBox="1"/>
           <p:nvPr/>
         </p:nvSpPr>
@@ -17236,33 +16070,6 @@
         </p:nvSpPr>
         <p:spPr>
           <a:xfrm>
-            <a:off x="731520" y="1207008"/>
-            <a:ext cx="1325880" cy="54864"/>
-          </a:xfrm>
-          <a:prstGeom prst="rect">
-            <a:avLst/>
-          </a:prstGeom>
-          <a:solidFill>
-            <a:srgbClr val="5D7FA4"/>
-          </a:solidFill>
-          <a:ln w="12700">
-            <a:solidFill>
-              <a:srgbClr val="5D7FA4">
-                <a:alpha val="0"/>
-              </a:srgbClr>
-            </a:solidFill>
-            <a:prstDash val="solid"/>
-          </a:ln>
-        </p:spPr>
-      </p:sp>
-      <p:sp>
-        <p:nvSpPr>
-          <p:cNvPr id="8" name="Shape 6"/>
-          <p:cNvSpPr/>
-          <p:nvPr/>
-        </p:nvSpPr>
-        <p:spPr>
-          <a:xfrm>
             <a:off x="6853428" y="1513332"/>
             <a:ext cx="4434840" cy="4526280"/>
           </a:xfrm>
@@ -17295,7 +16102,7 @@
       </p:sp>
       <p:sp>
         <p:nvSpPr>
-          <p:cNvPr id="9" name="Shape 7"/>
+          <p:cNvPr id="8" name="Shape 6"/>
           <p:cNvSpPr/>
           <p:nvPr/>
         </p:nvSpPr>
@@ -17333,7 +16140,7 @@
       </p:sp>
       <p:sp>
         <p:nvSpPr>
-          <p:cNvPr id="10" name="Shape 8"/>
+          <p:cNvPr id="9" name="Shape 7"/>
           <p:cNvSpPr/>
           <p:nvPr/>
         </p:nvSpPr>
@@ -17364,7 +16171,7 @@
       </p:sp>
       <p:pic>
         <p:nvPicPr>
-          <p:cNvPr id="11" name="Image 0" descr="preencoded.png">    </p:cNvPr>
+          <p:cNvPr id="10" name="Image 0" descr="preencoded.png">    </p:cNvPr>
           <p:cNvPicPr>
             <a:picLocks noChangeAspect="1"/>
           </p:cNvPicPr>
@@ -17394,7 +16201,7 @@
       </p:pic>
       <p:sp>
         <p:nvSpPr>
-          <p:cNvPr id="12" name="Shape 9"/>
+          <p:cNvPr id="11" name="Shape 8"/>
           <p:cNvSpPr/>
           <p:nvPr/>
         </p:nvSpPr>
@@ -17421,7 +16228,7 @@
       </p:sp>
       <p:sp>
         <p:nvSpPr>
-          <p:cNvPr id="13" name="mdpr:image-safe-frame-d4d6a4:title:__title:image-safe-frame-d4d6a4"/>
+          <p:cNvPr id="12" name="mdpr:image-safe-frame-d4d6a4:title:__title:image-safe-frame-d4d6a4"/>
           <p:cNvSpPr txBox="1"/>
           <p:nvPr/>
         </p:nvSpPr>
@@ -17463,7 +16270,7 @@
       </p:sp>
       <p:sp>
         <p:nvSpPr>
-          <p:cNvPr id="14" name="mdpr:image-safe-frame-d4d6a4:body:block-33-block-33-block-33"/>
+          <p:cNvPr id="13" name="mdpr:image-safe-frame-d4d6a4:body:block-33-block-33-block-33"/>
           <p:cNvSpPr txBox="1"/>
           <p:nvPr/>
         </p:nvSpPr>
@@ -17602,7 +16409,7 @@
       </p:sp>
       <p:pic>
         <p:nvPicPr>
-          <p:cNvPr id="15" name="mdpr:image-safe-frame-d4d6a4:image-1:block-34" descr="{&quot;mdpr&quot;:{&quot;slideId&quot;:&quot;image-safe-frame-d4d6a4&quot;,&quot;layoutSlideId&quot;:&quot;layout-image-safe-frame-d4d6a4&quot;,&quot;regionId&quot;:&quot;image-1&quot;,&quot;blockIds&quot;:[&quot;block-34&quot;],&quot;objectKind&quot;:&quot;native-image&quot;,&quot;role&quot;:&quot;image&quot;,&quot;editable&quot;:false}}">    </p:cNvPr>
+          <p:cNvPr id="14" name="mdpr:image-safe-frame-d4d6a4:image-1:block-34" descr="{&quot;mdpr&quot;:{&quot;slideId&quot;:&quot;image-safe-frame-d4d6a4&quot;,&quot;layoutSlideId&quot;:&quot;layout-image-safe-frame-d4d6a4&quot;,&quot;regionId&quot;:&quot;image-1&quot;,&quot;blockIds&quot;:[&quot;block-34&quot;],&quot;objectKind&quot;:&quot;native-image&quot;,&quot;role&quot;:&quot;image&quot;,&quot;editable&quot;:false}}">    </p:cNvPr>
           <p:cNvPicPr>
             <a:picLocks noChangeAspect="1"/>
           </p:cNvPicPr>
@@ -17825,33 +16632,6 @@
         </p:nvSpPr>
         <p:spPr>
           <a:xfrm>
-            <a:off x="731520" y="1207008"/>
-            <a:ext cx="1325880" cy="54864"/>
-          </a:xfrm>
-          <a:prstGeom prst="rect">
-            <a:avLst/>
-          </a:prstGeom>
-          <a:solidFill>
-            <a:srgbClr val="5D7FA4"/>
-          </a:solidFill>
-          <a:ln w="12700">
-            <a:solidFill>
-              <a:srgbClr val="5D7FA4">
-                <a:alpha val="0"/>
-              </a:srgbClr>
-            </a:solidFill>
-            <a:prstDash val="solid"/>
-          </a:ln>
-        </p:spPr>
-      </p:sp>
-      <p:sp>
-        <p:nvSpPr>
-          <p:cNvPr id="8" name="Shape 6"/>
-          <p:cNvSpPr/>
-          <p:nvPr/>
-        </p:nvSpPr>
-        <p:spPr>
-          <a:xfrm>
             <a:off x="790956" y="1495044"/>
             <a:ext cx="4617720" cy="2359152"/>
           </a:xfrm>
@@ -17884,7 +16664,7 @@
       </p:sp>
       <p:sp>
         <p:nvSpPr>
-          <p:cNvPr id="9" name="Shape 7"/>
+          <p:cNvPr id="8" name="Shape 6"/>
           <p:cNvSpPr/>
           <p:nvPr/>
         </p:nvSpPr>
@@ -17922,7 +16702,7 @@
       </p:sp>
       <p:sp>
         <p:nvSpPr>
-          <p:cNvPr id="10" name="Shape 8"/>
+          <p:cNvPr id="9" name="Shape 7"/>
           <p:cNvSpPr/>
           <p:nvPr/>
         </p:nvSpPr>
@@ -17953,7 +16733,7 @@
       </p:sp>
       <p:pic>
         <p:nvPicPr>
-          <p:cNvPr id="11" name="Image 0" descr="preencoded.png">    </p:cNvPr>
+          <p:cNvPr id="10" name="Image 0" descr="preencoded.png">    </p:cNvPr>
           <p:cNvPicPr>
             <a:picLocks noChangeAspect="1"/>
           </p:cNvPicPr>
@@ -17983,7 +16763,7 @@
       </p:pic>
       <p:sp>
         <p:nvSpPr>
-          <p:cNvPr id="12" name="Shape 9"/>
+          <p:cNvPr id="11" name="Shape 8"/>
           <p:cNvSpPr/>
           <p:nvPr/>
         </p:nvSpPr>
@@ -18021,7 +16801,7 @@
       </p:sp>
       <p:sp>
         <p:nvSpPr>
-          <p:cNvPr id="13" name="Shape 10"/>
+          <p:cNvPr id="12" name="Shape 9"/>
           <p:cNvSpPr/>
           <p:nvPr/>
         </p:nvSpPr>
@@ -18059,7 +16839,7 @@
       </p:sp>
       <p:sp>
         <p:nvSpPr>
-          <p:cNvPr id="14" name="Shape 11"/>
+          <p:cNvPr id="13" name="Shape 10"/>
           <p:cNvSpPr/>
           <p:nvPr/>
         </p:nvSpPr>
@@ -18090,7 +16870,7 @@
       </p:sp>
       <p:pic>
         <p:nvPicPr>
-          <p:cNvPr id="15" name="Image 1" descr="preencoded.png">    </p:cNvPr>
+          <p:cNvPr id="14" name="Image 1" descr="preencoded.png">    </p:cNvPr>
           <p:cNvPicPr>
             <a:picLocks noChangeAspect="1"/>
           </p:cNvPicPr>
@@ -18120,7 +16900,7 @@
       </p:pic>
       <p:sp>
         <p:nvSpPr>
-          <p:cNvPr id="16" name="Shape 12"/>
+          <p:cNvPr id="15" name="Shape 11"/>
           <p:cNvSpPr/>
           <p:nvPr/>
         </p:nvSpPr>
@@ -18158,7 +16938,7 @@
       </p:sp>
       <p:sp>
         <p:nvSpPr>
-          <p:cNvPr id="17" name="Shape 13"/>
+          <p:cNvPr id="16" name="Shape 12"/>
           <p:cNvSpPr/>
           <p:nvPr/>
         </p:nvSpPr>
@@ -18196,7 +16976,7 @@
       </p:sp>
       <p:sp>
         <p:nvSpPr>
-          <p:cNvPr id="18" name="Shape 14"/>
+          <p:cNvPr id="17" name="Shape 13"/>
           <p:cNvSpPr/>
           <p:nvPr/>
         </p:nvSpPr>
@@ -18227,7 +17007,7 @@
       </p:sp>
       <p:pic>
         <p:nvPicPr>
-          <p:cNvPr id="19" name="Image 2" descr="preencoded.png">    </p:cNvPr>
+          <p:cNvPr id="18" name="Image 2" descr="preencoded.png">    </p:cNvPr>
           <p:cNvPicPr>
             <a:picLocks noChangeAspect="1"/>
           </p:cNvPicPr>
@@ -18257,7 +17037,7 @@
       </p:pic>
       <p:sp>
         <p:nvSpPr>
-          <p:cNvPr id="20" name="Shape 15"/>
+          <p:cNvPr id="19" name="Shape 14"/>
           <p:cNvSpPr/>
           <p:nvPr/>
         </p:nvSpPr>
@@ -18284,7 +17064,7 @@
       </p:sp>
       <p:sp>
         <p:nvSpPr>
-          <p:cNvPr id="21" name="mdpr:mixed-object-packing-438299:title:__title:mixed-object-packing-438299"/>
+          <p:cNvPr id="20" name="mdpr:mixed-object-packing-438299:title:__title:mixed-object-packing-438299"/>
           <p:cNvSpPr txBox="1"/>
           <p:nvPr/>
         </p:nvSpPr>
@@ -18326,7 +17106,7 @@
       </p:sp>
       <p:graphicFrame>
         <p:nvGraphicFramePr>
-          <p:cNvPr id="22" name="Chart 0" descr=""/>
+          <p:cNvPr id="21" name="Chart 0" descr=""/>
           <p:cNvGraphicFramePr/>
           <p:nvPr/>
         </p:nvGraphicFramePr>
@@ -18784,7 +17564,7 @@
       </p:graphicFrame>
       <p:sp>
         <p:nvSpPr>
-          <p:cNvPr id="24" name="mdpr:mixed-object-packing-438299:body:block-36"/>
+          <p:cNvPr id="23" name="mdpr:mixed-object-packing-438299:body:block-36"/>
           <p:cNvSpPr txBox="1"/>
           <p:nvPr/>
         </p:nvSpPr>
@@ -18883,7 +17663,7 @@
       </p:sp>
       <p:pic>
         <p:nvPicPr>
-          <p:cNvPr id="25" name="mdpr:mixed-object-packing-438299:image-1:block-39" descr="{&quot;mdpr&quot;:{&quot;slideId&quot;:&quot;mixed-object-packing-438299&quot;,&quot;layoutSlideId&quot;:&quot;layout-mixed-object-packing-438299&quot;,&quot;regionId&quot;:&quot;image-1&quot;,&quot;blockIds&quot;:[&quot;block-39&quot;],&quot;objectKind&quot;:&quot;native-image&quot;,&quot;role&quot;:&quot;image&quot;,&quot;editable&quot;:false}}">    </p:cNvPr>
+          <p:cNvPr id="24" name="mdpr:mixed-object-packing-438299:image-1:block-39" descr="{&quot;mdpr&quot;:{&quot;slideId&quot;:&quot;mixed-object-packing-438299&quot;,&quot;layoutSlideId&quot;:&quot;layout-mixed-object-packing-438299&quot;,&quot;regionId&quot;:&quot;image-1&quot;,&quot;blockIds&quot;:[&quot;block-39&quot;],&quot;objectKind&quot;:&quot;native-image&quot;,&quot;role&quot;:&quot;image&quot;,&quot;editable&quot;:false}}">    </p:cNvPr>
           <p:cNvPicPr>
             <a:picLocks noChangeAspect="1"/>
           </p:cNvPicPr>
@@ -19106,8 +17886,8 @@
         </p:nvSpPr>
         <p:spPr>
           <a:xfrm>
-            <a:off x="731520" y="1207008"/>
-            <a:ext cx="1325880" cy="54864"/>
+            <a:off x="822960" y="1938528"/>
+            <a:ext cx="73152" cy="2514600"/>
           </a:xfrm>
           <a:prstGeom prst="rect">
             <a:avLst/>
@@ -19133,427 +17913,14 @@
         </p:nvSpPr>
         <p:spPr>
           <a:xfrm>
-            <a:off x="955548" y="1915668"/>
-            <a:ext cx="10241280" cy="1024128"/>
-          </a:xfrm>
-          <a:prstGeom prst="roundRect">
-            <a:avLst>
-              <a:gd name="adj" fmla="val 5357"/>
-            </a:avLst>
-          </a:prstGeom>
-          <a:solidFill>
-            <a:srgbClr val="B8C3D2">
-              <a:alpha val="26000"/>
-            </a:srgbClr>
-          </a:solidFill>
-          <a:ln w="12700">
-            <a:solidFill>
-              <a:srgbClr val="D1DAE7">
-                <a:alpha val="0"/>
-              </a:srgbClr>
-            </a:solidFill>
-            <a:prstDash val="solid"/>
-          </a:ln>
-          <a:effectLst>
-            <a:outerShdw sx="100000" sy="100000" kx="0" ky="0" algn="bl" rotWithShape="0" blurRad="13970" dist="50800" dir="2700000">
-              <a:srgbClr val="AAB5C4">
-                <a:alpha val="20000"/>
-              </a:srgbClr>
-            </a:outerShdw>
-          </a:effectLst>
-        </p:spPr>
-      </p:sp>
-      <p:sp>
-        <p:nvSpPr>
-          <p:cNvPr id="9" name="Shape 7"/>
-          <p:cNvSpPr/>
-          <p:nvPr/>
-        </p:nvSpPr>
-        <p:spPr>
-          <a:xfrm>
-            <a:off x="882396" y="1833372"/>
-            <a:ext cx="10241280" cy="1024128"/>
-          </a:xfrm>
-          <a:prstGeom prst="roundRect">
-            <a:avLst>
-              <a:gd name="adj" fmla="val 5357"/>
-            </a:avLst>
-          </a:prstGeom>
-          <a:solidFill>
-            <a:srgbClr val="FFFFFF">
-              <a:alpha val="42000"/>
-            </a:srgbClr>
-          </a:solidFill>
-          <a:ln w="12700">
-            <a:solidFill>
-              <a:srgbClr val="FFFFFF">
-                <a:alpha val="0"/>
-              </a:srgbClr>
-            </a:solidFill>
-            <a:prstDash val="solid"/>
-          </a:ln>
-          <a:effectLst>
-            <a:outerShdw sx="100000" sy="100000" kx="0" ky="0" algn="bl" rotWithShape="0" blurRad="10160" dist="50800" dir="13500000">
-              <a:srgbClr val="FFFFFF">
-                <a:alpha val="36000"/>
-              </a:srgbClr>
-            </a:outerShdw>
-          </a:effectLst>
-        </p:spPr>
-      </p:sp>
-      <p:sp>
-        <p:nvSpPr>
-          <p:cNvPr id="10" name="Shape 8"/>
-          <p:cNvSpPr/>
-          <p:nvPr/>
-        </p:nvSpPr>
-        <p:spPr>
-          <a:xfrm>
-            <a:off x="914400" y="1865376"/>
-            <a:ext cx="10241280" cy="1024128"/>
-          </a:xfrm>
-          <a:prstGeom prst="roundRect">
-            <a:avLst>
-              <a:gd name="adj" fmla="val 5357"/>
-            </a:avLst>
-          </a:prstGeom>
-          <a:solidFill>
-            <a:srgbClr val="EEF3F8">
-              <a:alpha val="6000"/>
-            </a:srgbClr>
-          </a:solidFill>
-          <a:ln w="12700">
-            <a:solidFill>
-              <a:srgbClr val="FFFFFF">
-                <a:alpha val="28000"/>
-              </a:srgbClr>
-            </a:solidFill>
-            <a:prstDash val="solid"/>
-          </a:ln>
-        </p:spPr>
-      </p:sp>
-      <p:pic>
-        <p:nvPicPr>
-          <p:cNvPr id="11" name="Image 0" descr="preencoded.png">    </p:cNvPr>
-          <p:cNvPicPr>
-            <a:picLocks noChangeAspect="1"/>
-          </p:cNvPicPr>
-          <p:nvPr/>
-        </p:nvPicPr>
-        <p:blipFill>
-          <a:blip r:embed="rId1">
-            <a:extLst>
-              <a:ext uri="{96DAC541-7B7A-43D3-8B79-37D633B846F1}">
-                <asvg:svgBlip xmlns:asvg="http://schemas.microsoft.com/office/drawing/2016/SVG/main" r:embed="rId2"/>
-              </a:ext>
-            </a:extLst>
-          </a:blip>
-          <a:stretch>
-            <a:fillRect/>
-          </a:stretch>
-        </p:blipFill>
-        <p:spPr>
-          <a:xfrm>
-            <a:off x="914400" y="1865376"/>
-            <a:ext cx="10241280" cy="1024128"/>
+            <a:off x="4343400" y="1938528"/>
+            <a:ext cx="73152" cy="2514600"/>
           </a:xfrm>
           <a:prstGeom prst="rect">
             <a:avLst/>
           </a:prstGeom>
-        </p:spPr>
-      </p:pic>
-      <p:sp>
-        <p:nvSpPr>
-          <p:cNvPr id="12" name="Shape 9"/>
-          <p:cNvSpPr/>
-          <p:nvPr/>
-        </p:nvSpPr>
-        <p:spPr>
-          <a:xfrm>
-            <a:off x="955548" y="3241548"/>
-            <a:ext cx="10241280" cy="1024128"/>
-          </a:xfrm>
-          <a:prstGeom prst="roundRect">
-            <a:avLst>
-              <a:gd name="adj" fmla="val 5357"/>
-            </a:avLst>
-          </a:prstGeom>
-          <a:solidFill>
-            <a:srgbClr val="B8C3D2">
-              <a:alpha val="26000"/>
-            </a:srgbClr>
-          </a:solidFill>
-          <a:ln w="12700">
-            <a:solidFill>
-              <a:srgbClr val="D1DAE7">
-                <a:alpha val="0"/>
-              </a:srgbClr>
-            </a:solidFill>
-            <a:prstDash val="solid"/>
-          </a:ln>
-          <a:effectLst>
-            <a:outerShdw sx="100000" sy="100000" kx="0" ky="0" algn="bl" rotWithShape="0" blurRad="13970" dist="50800" dir="2700000">
-              <a:srgbClr val="AAB5C4">
-                <a:alpha val="20000"/>
-              </a:srgbClr>
-            </a:outerShdw>
-          </a:effectLst>
-        </p:spPr>
-      </p:sp>
-      <p:sp>
-        <p:nvSpPr>
-          <p:cNvPr id="13" name="Shape 10"/>
-          <p:cNvSpPr/>
-          <p:nvPr/>
-        </p:nvSpPr>
-        <p:spPr>
-          <a:xfrm>
-            <a:off x="882396" y="3159252"/>
-            <a:ext cx="10241280" cy="1024128"/>
-          </a:xfrm>
-          <a:prstGeom prst="roundRect">
-            <a:avLst>
-              <a:gd name="adj" fmla="val 5357"/>
-            </a:avLst>
-          </a:prstGeom>
-          <a:solidFill>
-            <a:srgbClr val="FFFFFF">
-              <a:alpha val="42000"/>
-            </a:srgbClr>
-          </a:solidFill>
-          <a:ln w="12700">
-            <a:solidFill>
-              <a:srgbClr val="FFFFFF">
-                <a:alpha val="0"/>
-              </a:srgbClr>
-            </a:solidFill>
-            <a:prstDash val="solid"/>
-          </a:ln>
-          <a:effectLst>
-            <a:outerShdw sx="100000" sy="100000" kx="0" ky="0" algn="bl" rotWithShape="0" blurRad="10160" dist="50800" dir="13500000">
-              <a:srgbClr val="FFFFFF">
-                <a:alpha val="36000"/>
-              </a:srgbClr>
-            </a:outerShdw>
-          </a:effectLst>
-        </p:spPr>
-      </p:sp>
-      <p:sp>
-        <p:nvSpPr>
-          <p:cNvPr id="14" name="Shape 11"/>
-          <p:cNvSpPr/>
-          <p:nvPr/>
-        </p:nvSpPr>
-        <p:spPr>
-          <a:xfrm>
-            <a:off x="914400" y="3191256"/>
-            <a:ext cx="10241280" cy="1024128"/>
-          </a:xfrm>
-          <a:prstGeom prst="roundRect">
-            <a:avLst>
-              <a:gd name="adj" fmla="val 5357"/>
-            </a:avLst>
-          </a:prstGeom>
-          <a:solidFill>
-            <a:srgbClr val="EEF3F8">
-              <a:alpha val="6000"/>
-            </a:srgbClr>
-          </a:solidFill>
-          <a:ln w="12700">
-            <a:solidFill>
-              <a:srgbClr val="FFFFFF">
-                <a:alpha val="28000"/>
-              </a:srgbClr>
-            </a:solidFill>
-            <a:prstDash val="solid"/>
-          </a:ln>
-        </p:spPr>
-      </p:sp>
-      <p:pic>
-        <p:nvPicPr>
-          <p:cNvPr id="15" name="Image 1" descr="preencoded.png">    </p:cNvPr>
-          <p:cNvPicPr>
-            <a:picLocks noChangeAspect="1"/>
-          </p:cNvPicPr>
-          <p:nvPr/>
-        </p:nvPicPr>
-        <p:blipFill>
-          <a:blip r:embed="rId3">
-            <a:extLst>
-              <a:ext uri="{96DAC541-7B7A-43D3-8B79-37D633B846F1}">
-                <asvg:svgBlip xmlns:asvg="http://schemas.microsoft.com/office/drawing/2016/SVG/main" r:embed="rId4"/>
-              </a:ext>
-            </a:extLst>
-          </a:blip>
-          <a:stretch>
-            <a:fillRect/>
-          </a:stretch>
-        </p:blipFill>
-        <p:spPr>
-          <a:xfrm>
-            <a:off x="914400" y="3191256"/>
-            <a:ext cx="10241280" cy="1024128"/>
-          </a:xfrm>
-          <a:prstGeom prst="rect">
-            <a:avLst/>
-          </a:prstGeom>
-        </p:spPr>
-      </p:pic>
-      <p:sp>
-        <p:nvSpPr>
-          <p:cNvPr id="16" name="Shape 12"/>
-          <p:cNvSpPr/>
-          <p:nvPr/>
-        </p:nvSpPr>
-        <p:spPr>
-          <a:xfrm>
-            <a:off x="955548" y="4558284"/>
-            <a:ext cx="10241280" cy="1024128"/>
-          </a:xfrm>
-          <a:prstGeom prst="roundRect">
-            <a:avLst>
-              <a:gd name="adj" fmla="val 5357"/>
-            </a:avLst>
-          </a:prstGeom>
-          <a:solidFill>
-            <a:srgbClr val="B8C3D2">
-              <a:alpha val="26000"/>
-            </a:srgbClr>
-          </a:solidFill>
-          <a:ln w="12700">
-            <a:solidFill>
-              <a:srgbClr val="D1DAE7">
-                <a:alpha val="0"/>
-              </a:srgbClr>
-            </a:solidFill>
-            <a:prstDash val="solid"/>
-          </a:ln>
-          <a:effectLst>
-            <a:outerShdw sx="100000" sy="100000" kx="0" ky="0" algn="bl" rotWithShape="0" blurRad="13970" dist="50800" dir="2700000">
-              <a:srgbClr val="AAB5C4">
-                <a:alpha val="20000"/>
-              </a:srgbClr>
-            </a:outerShdw>
-          </a:effectLst>
-        </p:spPr>
-      </p:sp>
-      <p:sp>
-        <p:nvSpPr>
-          <p:cNvPr id="17" name="Shape 13"/>
-          <p:cNvSpPr/>
-          <p:nvPr/>
-        </p:nvSpPr>
-        <p:spPr>
-          <a:xfrm>
-            <a:off x="882396" y="4475988"/>
-            <a:ext cx="10241280" cy="1024128"/>
-          </a:xfrm>
-          <a:prstGeom prst="roundRect">
-            <a:avLst>
-              <a:gd name="adj" fmla="val 5357"/>
-            </a:avLst>
-          </a:prstGeom>
-          <a:solidFill>
-            <a:srgbClr val="FFFFFF">
-              <a:alpha val="42000"/>
-            </a:srgbClr>
-          </a:solidFill>
-          <a:ln w="12700">
-            <a:solidFill>
-              <a:srgbClr val="FFFFFF">
-                <a:alpha val="0"/>
-              </a:srgbClr>
-            </a:solidFill>
-            <a:prstDash val="solid"/>
-          </a:ln>
-          <a:effectLst>
-            <a:outerShdw sx="100000" sy="100000" kx="0" ky="0" algn="bl" rotWithShape="0" blurRad="10160" dist="50800" dir="13500000">
-              <a:srgbClr val="FFFFFF">
-                <a:alpha val="36000"/>
-              </a:srgbClr>
-            </a:outerShdw>
-          </a:effectLst>
-        </p:spPr>
-      </p:sp>
-      <p:sp>
-        <p:nvSpPr>
-          <p:cNvPr id="18" name="Shape 14"/>
-          <p:cNvSpPr/>
-          <p:nvPr/>
-        </p:nvSpPr>
-        <p:spPr>
-          <a:xfrm>
-            <a:off x="914400" y="4507992"/>
-            <a:ext cx="10241280" cy="1024128"/>
-          </a:xfrm>
-          <a:prstGeom prst="roundRect">
-            <a:avLst>
-              <a:gd name="adj" fmla="val 5357"/>
-            </a:avLst>
-          </a:prstGeom>
-          <a:solidFill>
-            <a:srgbClr val="EEF3F8">
-              <a:alpha val="6000"/>
-            </a:srgbClr>
-          </a:solidFill>
-          <a:ln w="12700">
-            <a:solidFill>
-              <a:srgbClr val="FFFFFF">
-                <a:alpha val="28000"/>
-              </a:srgbClr>
-            </a:solidFill>
-            <a:prstDash val="solid"/>
-          </a:ln>
-        </p:spPr>
-      </p:sp>
-      <p:pic>
-        <p:nvPicPr>
-          <p:cNvPr id="19" name="Image 2" descr="preencoded.png">    </p:cNvPr>
-          <p:cNvPicPr>
-            <a:picLocks noChangeAspect="1"/>
-          </p:cNvPicPr>
-          <p:nvPr/>
-        </p:nvPicPr>
-        <p:blipFill>
-          <a:blip r:embed="rId5">
-            <a:extLst>
-              <a:ext uri="{96DAC541-7B7A-43D3-8B79-37D633B846F1}">
-                <asvg:svgBlip xmlns:asvg="http://schemas.microsoft.com/office/drawing/2016/SVG/main" r:embed="rId6"/>
-              </a:ext>
-            </a:extLst>
-          </a:blip>
-          <a:stretch>
-            <a:fillRect/>
-          </a:stretch>
-        </p:blipFill>
-        <p:spPr>
-          <a:xfrm>
-            <a:off x="914400" y="4507992"/>
-            <a:ext cx="10241280" cy="1024128"/>
-          </a:xfrm>
-          <a:prstGeom prst="rect">
-            <a:avLst/>
-          </a:prstGeom>
-        </p:spPr>
-      </p:pic>
-      <p:sp>
-        <p:nvSpPr>
-          <p:cNvPr id="20" name="Shape 15"/>
-          <p:cNvSpPr/>
-          <p:nvPr/>
-        </p:nvSpPr>
-        <p:spPr>
-          <a:xfrm>
-            <a:off x="786384" y="1956816"/>
-            <a:ext cx="32004" cy="3483864"/>
-          </a:xfrm>
-          <a:prstGeom prst="rect">
-            <a:avLst/>
-          </a:prstGeom>
-          <a:solidFill>
-            <a:srgbClr val="D8E2EE">
-              <a:alpha val="80000"/>
-            </a:srgbClr>
+          <a:solidFill>
+            <a:srgbClr val="D8E2EE"/>
           </a:solidFill>
           <a:ln w="12700">
             <a:solidFill>
@@ -19567,14 +17934,14 @@
       </p:sp>
       <p:sp>
         <p:nvSpPr>
-          <p:cNvPr id="21" name="Shape 16"/>
-          <p:cNvSpPr/>
-          <p:nvPr/>
-        </p:nvSpPr>
-        <p:spPr>
-          <a:xfrm>
-            <a:off x="914400" y="1865376"/>
-            <a:ext cx="73152" cy="1024128"/>
+          <p:cNvPr id="9" name="Shape 7"/>
+          <p:cNvSpPr/>
+          <p:nvPr/>
+        </p:nvSpPr>
+        <p:spPr>
+          <a:xfrm>
+            <a:off x="7863840" y="1938528"/>
+            <a:ext cx="73152" cy="2514600"/>
           </a:xfrm>
           <a:prstGeom prst="rect">
             <a:avLst/>
@@ -19594,61 +17961,7 @@
       </p:sp>
       <p:sp>
         <p:nvSpPr>
-          <p:cNvPr id="22" name="Shape 17"/>
-          <p:cNvSpPr/>
-          <p:nvPr/>
-        </p:nvSpPr>
-        <p:spPr>
-          <a:xfrm>
-            <a:off x="914400" y="3191256"/>
-            <a:ext cx="73152" cy="1024128"/>
-          </a:xfrm>
-          <a:prstGeom prst="rect">
-            <a:avLst/>
-          </a:prstGeom>
-          <a:solidFill>
-            <a:srgbClr val="D8E2EE"/>
-          </a:solidFill>
-          <a:ln w="12700">
-            <a:solidFill>
-              <a:srgbClr val="D8E2EE">
-                <a:alpha val="0"/>
-              </a:srgbClr>
-            </a:solidFill>
-            <a:prstDash val="solid"/>
-          </a:ln>
-        </p:spPr>
-      </p:sp>
-      <p:sp>
-        <p:nvSpPr>
-          <p:cNvPr id="23" name="Shape 18"/>
-          <p:cNvSpPr/>
-          <p:nvPr/>
-        </p:nvSpPr>
-        <p:spPr>
-          <a:xfrm>
-            <a:off x="914400" y="4507992"/>
-            <a:ext cx="73152" cy="1024128"/>
-          </a:xfrm>
-          <a:prstGeom prst="rect">
-            <a:avLst/>
-          </a:prstGeom>
-          <a:solidFill>
-            <a:srgbClr val="5D7FA4"/>
-          </a:solidFill>
-          <a:ln w="12700">
-            <a:solidFill>
-              <a:srgbClr val="5D7FA4">
-                <a:alpha val="0"/>
-              </a:srgbClr>
-            </a:solidFill>
-            <a:prstDash val="solid"/>
-          </a:ln>
-        </p:spPr>
-      </p:sp>
-      <p:sp>
-        <p:nvSpPr>
-          <p:cNvPr id="24" name="mdpr:actions-output-review-326e07:title:__title:actions-output-review-326e07"/>
+          <p:cNvPr id="10" name="mdpr:actions-output-review-326e07:title:__title:actions-output-review-326e07"/>
           <p:cNvSpPr txBox="1"/>
           <p:nvPr/>
         </p:nvSpPr>
@@ -19690,14 +18003,14 @@
       </p:sp>
       <p:sp>
         <p:nvSpPr>
-          <p:cNvPr id="25" name="mdpr:actions-output-review-326e07:item-1:block-41"/>
+          <p:cNvPr id="11" name="mdpr:actions-output-review-326e07:item-1:block-41"/>
           <p:cNvSpPr txBox="1"/>
           <p:nvPr/>
         </p:nvSpPr>
         <p:spPr>
           <a:xfrm>
-            <a:off x="1133856" y="1957548"/>
-            <a:ext cx="9820656" cy="839785"/>
+            <a:off x="1042416" y="2103120"/>
+            <a:ext cx="2825496" cy="2185416"/>
           </a:xfrm>
           <a:prstGeom prst="rect">
             <a:avLst/>
@@ -19749,14 +18062,14 @@
       </p:sp>
       <p:sp>
         <p:nvSpPr>
-          <p:cNvPr id="26" name="mdpr:actions-output-review-326e07:item-2:block-41"/>
+          <p:cNvPr id="12" name="mdpr:actions-output-review-326e07:item-2:block-41"/>
           <p:cNvSpPr txBox="1"/>
           <p:nvPr/>
         </p:nvSpPr>
         <p:spPr>
           <a:xfrm>
-            <a:off x="1133856" y="3283428"/>
-            <a:ext cx="9820656" cy="839785"/>
+            <a:off x="4562856" y="2103120"/>
+            <a:ext cx="2825496" cy="2185416"/>
           </a:xfrm>
           <a:prstGeom prst="rect">
             <a:avLst/>
@@ -19808,14 +18121,14 @@
       </p:sp>
       <p:sp>
         <p:nvSpPr>
-          <p:cNvPr id="27" name="mdpr:actions-output-review-326e07:item-3:block-41"/>
+          <p:cNvPr id="13" name="mdpr:actions-output-review-326e07:item-3:block-41"/>
           <p:cNvSpPr txBox="1"/>
           <p:nvPr/>
         </p:nvSpPr>
         <p:spPr>
           <a:xfrm>
-            <a:off x="1133856" y="4600164"/>
-            <a:ext cx="9820656" cy="839785"/>
+            <a:off x="8083296" y="2103120"/>
+            <a:ext cx="2825496" cy="2185416"/>
           </a:xfrm>
           <a:prstGeom prst="rect">
             <a:avLst/>
@@ -20060,8 +18373,8 @@
         </p:nvSpPr>
         <p:spPr>
           <a:xfrm>
-            <a:off x="731520" y="1207008"/>
-            <a:ext cx="1325880" cy="54864"/>
+            <a:off x="822960" y="1737360"/>
+            <a:ext cx="73152" cy="841248"/>
           </a:xfrm>
           <a:prstGeom prst="rect">
             <a:avLst/>
@@ -20087,8 +18400,35 @@
         </p:nvSpPr>
         <p:spPr>
           <a:xfrm>
-            <a:off x="822960" y="3099816"/>
-            <a:ext cx="10515600" cy="45720"/>
+            <a:off x="822960" y="2779776"/>
+            <a:ext cx="73152" cy="841248"/>
+          </a:xfrm>
+          <a:prstGeom prst="rect">
+            <a:avLst/>
+          </a:prstGeom>
+          <a:solidFill>
+            <a:srgbClr val="D8E2EE"/>
+          </a:solidFill>
+          <a:ln w="12700">
+            <a:solidFill>
+              <a:srgbClr val="D8E2EE">
+                <a:alpha val="0"/>
+              </a:srgbClr>
+            </a:solidFill>
+            <a:prstDash val="solid"/>
+          </a:ln>
+        </p:spPr>
+      </p:sp>
+      <p:sp>
+        <p:nvSpPr>
+          <p:cNvPr id="9" name="Shape 7"/>
+          <p:cNvSpPr/>
+          <p:nvPr/>
+        </p:nvSpPr>
+        <p:spPr>
+          <a:xfrm>
+            <a:off x="822960" y="3822192"/>
+            <a:ext cx="73152" cy="841248"/>
           </a:xfrm>
           <a:prstGeom prst="rect">
             <a:avLst/>
@@ -20108,14 +18448,14 @@
       </p:sp>
       <p:sp>
         <p:nvSpPr>
-          <p:cNvPr id="9" name="Shape 7"/>
-          <p:cNvSpPr/>
-          <p:nvPr/>
-        </p:nvSpPr>
-        <p:spPr>
-          <a:xfrm>
-            <a:off x="822960" y="4288536"/>
-            <a:ext cx="2011680" cy="45720"/>
+          <p:cNvPr id="10" name="Shape 8"/>
+          <p:cNvSpPr/>
+          <p:nvPr/>
+        </p:nvSpPr>
+        <p:spPr>
+          <a:xfrm>
+            <a:off x="822960" y="4864608"/>
+            <a:ext cx="73152" cy="841248"/>
           </a:xfrm>
           <a:prstGeom prst="rect">
             <a:avLst/>
@@ -20135,13 +18475,13 @@
       </p:sp>
       <p:sp>
         <p:nvSpPr>
-          <p:cNvPr id="10" name="Shape 8"/>
-          <p:cNvSpPr/>
-          <p:nvPr/>
-        </p:nvSpPr>
-        <p:spPr>
-          <a:xfrm>
-            <a:off x="822960" y="3300984"/>
+          <p:cNvPr id="11" name="Shape 9"/>
+          <p:cNvSpPr/>
+          <p:nvPr/>
+        </p:nvSpPr>
+        <p:spPr>
+          <a:xfrm>
+            <a:off x="6272784" y="1737360"/>
             <a:ext cx="73152" cy="841248"/>
           </a:xfrm>
           <a:prstGeom prst="rect">
@@ -20162,7 +18502,61 @@
       </p:sp>
       <p:sp>
         <p:nvSpPr>
-          <p:cNvPr id="11" name="mdpr:2-2-7bfb60:title:__title:2-2-7bfb60"/>
+          <p:cNvPr id="12" name="Shape 10"/>
+          <p:cNvSpPr/>
+          <p:nvPr/>
+        </p:nvSpPr>
+        <p:spPr>
+          <a:xfrm>
+            <a:off x="6272784" y="2779776"/>
+            <a:ext cx="73152" cy="841248"/>
+          </a:xfrm>
+          <a:prstGeom prst="rect">
+            <a:avLst/>
+          </a:prstGeom>
+          <a:solidFill>
+            <a:srgbClr val="D8E2EE"/>
+          </a:solidFill>
+          <a:ln w="12700">
+            <a:solidFill>
+              <a:srgbClr val="D8E2EE">
+                <a:alpha val="0"/>
+              </a:srgbClr>
+            </a:solidFill>
+            <a:prstDash val="solid"/>
+          </a:ln>
+        </p:spPr>
+      </p:sp>
+      <p:sp>
+        <p:nvSpPr>
+          <p:cNvPr id="13" name="Shape 11"/>
+          <p:cNvSpPr/>
+          <p:nvPr/>
+        </p:nvSpPr>
+        <p:spPr>
+          <a:xfrm>
+            <a:off x="6272784" y="3822192"/>
+            <a:ext cx="73152" cy="841248"/>
+          </a:xfrm>
+          <a:prstGeom prst="rect">
+            <a:avLst/>
+          </a:prstGeom>
+          <a:solidFill>
+            <a:srgbClr val="5D7FA4"/>
+          </a:solidFill>
+          <a:ln w="12700">
+            <a:solidFill>
+              <a:srgbClr val="5D7FA4">
+                <a:alpha val="0"/>
+              </a:srgbClr>
+            </a:solidFill>
+            <a:prstDash val="solid"/>
+          </a:ln>
+        </p:spPr>
+      </p:sp>
+      <p:sp>
+        <p:nvSpPr>
+          <p:cNvPr id="14" name="mdpr:2-2-7bfb60:title:__title:2-2-7bfb60"/>
           <p:cNvSpPr txBox="1"/>
           <p:nvPr/>
         </p:nvSpPr>
@@ -20196,7 +18590,24 @@
                 <a:ea typeface="Pretendard" pitchFamily="34" charset="-122"/>
                 <a:cs typeface="Pretendard" pitchFamily="34" charset="-120"/>
               </a:rPr>
-              <a:t>Agenda (Cont. 2/2)</a:t>
+              <a:t>Agenda</a:t>
+            </a:r>
+            <a:pPr algn="ctr" indent="0" marL="0">
+              <a:lnSpc>
+                <a:spcPct val="120000"/>
+              </a:lnSpc>
+              <a:buNone/>
+            </a:pPr>
+            <a:r>
+              <a:rPr lang="en-US" sz="2300" dirty="0">
+                <a:solidFill>
+                  <a:srgbClr val="8C8C8C"/>
+                </a:solidFill>
+                <a:latin typeface="Pretendard" pitchFamily="34" charset="0"/>
+                <a:ea typeface="Pretendard" pitchFamily="34" charset="-122"/>
+                <a:cs typeface="Pretendard" pitchFamily="34" charset="-120"/>
+              </a:rPr>
+              <a:t> (Cont. 2/2)</a:t>
             </a:r>
             <a:endParaRPr lang="en-US" sz="3800" dirty="0"/>
           </a:p>
@@ -20204,14 +18615,14 @@
       </p:sp>
       <p:sp>
         <p:nvSpPr>
-          <p:cNvPr id="12" name="mdpr:2-2-7bfb60:toc-item-1:toc-item-15"/>
+          <p:cNvPr id="15" name="mdpr:2-2-7bfb60:toc-item-1:toc-item-9"/>
           <p:cNvSpPr txBox="1"/>
           <p:nvPr/>
         </p:nvSpPr>
         <p:spPr>
           <a:xfrm>
-            <a:off x="1042416" y="3392424"/>
-            <a:ext cx="10094976" cy="658368"/>
+            <a:off x="1042416" y="1828800"/>
+            <a:ext cx="4645152" cy="658368"/>
           </a:xfrm>
           <a:prstGeom prst="rect">
             <a:avLst/>
@@ -20230,7 +18641,7 @@
               <a:buNone/>
             </a:pPr>
             <a:r>
-              <a:rPr lang="en-US" sz="2200" dirty="0">
+              <a:rPr lang="en-US" sz="1800" dirty="0">
                 <a:solidFill>
                   <a:srgbClr val="111111"/>
                 </a:solidFill>
@@ -20238,9 +18649,261 @@
                 <a:ea typeface="Pretendard" pitchFamily="34" charset="-122"/>
                 <a:cs typeface="Pretendard" pitchFamily="34" charset="-120"/>
               </a:rPr>
-              <a:t>01  Actions Output Review</a:t>
+              <a:t>09  Editable Proof Objects</a:t>
             </a:r>
-            <a:endParaRPr lang="en-US" sz="2200" dirty="0"/>
+            <a:endParaRPr lang="en-US" sz="1800" dirty="0"/>
+          </a:p>
+        </p:txBody>
+      </p:sp>
+      <p:sp>
+        <p:nvSpPr>
+          <p:cNvPr id="16" name="mdpr:2-2-7bfb60:toc-item-2:toc-item-10"/>
+          <p:cNvSpPr txBox="1"/>
+          <p:nvPr/>
+        </p:nvSpPr>
+        <p:spPr>
+          <a:xfrm>
+            <a:off x="1042416" y="2871216"/>
+            <a:ext cx="4645152" cy="658368"/>
+          </a:xfrm>
+          <a:prstGeom prst="rect">
+            <a:avLst/>
+          </a:prstGeom>
+          <a:noFill/>
+          <a:ln/>
+        </p:spPr>
+        <p:txBody>
+          <a:bodyPr wrap="square" lIns="0" tIns="25400" rIns="25400" bIns="0" rtlCol="0" anchor="ctr"/>
+          <a:lstStyle/>
+          <a:p>
+            <a:pPr algn="ctr" indent="0" marL="0">
+              <a:lnSpc>
+                <a:spcPct val="120000"/>
+              </a:lnSpc>
+              <a:buNone/>
+            </a:pPr>
+            <a:r>
+              <a:rPr lang="en-US" sz="1800" dirty="0">
+                <a:solidFill>
+                  <a:srgbClr val="111111"/>
+                </a:solidFill>
+                <a:latin typeface="Pretendard" pitchFamily="34" charset="0"/>
+                <a:ea typeface="Pretendard" pitchFamily="34" charset="-122"/>
+                <a:cs typeface="Pretendard" pitchFamily="34" charset="-120"/>
+              </a:rPr>
+              <a:t>10  Object Shape Grammar</a:t>
+            </a:r>
+            <a:endParaRPr lang="en-US" sz="1800" dirty="0"/>
+          </a:p>
+        </p:txBody>
+      </p:sp>
+      <p:sp>
+        <p:nvSpPr>
+          <p:cNvPr id="17" name="mdpr:2-2-7bfb60:toc-item-3:toc-item-11"/>
+          <p:cNvSpPr txBox="1"/>
+          <p:nvPr/>
+        </p:nvSpPr>
+        <p:spPr>
+          <a:xfrm>
+            <a:off x="1042416" y="3913632"/>
+            <a:ext cx="4645152" cy="658368"/>
+          </a:xfrm>
+          <a:prstGeom prst="rect">
+            <a:avLst/>
+          </a:prstGeom>
+          <a:noFill/>
+          <a:ln/>
+        </p:spPr>
+        <p:txBody>
+          <a:bodyPr wrap="square" lIns="0" tIns="25400" rIns="25400" bIns="0" rtlCol="0" anchor="ctr"/>
+          <a:lstStyle/>
+          <a:p>
+            <a:pPr algn="ctr" indent="0" marL="0">
+              <a:lnSpc>
+                <a:spcPct val="120000"/>
+              </a:lnSpc>
+              <a:buNone/>
+            </a:pPr>
+            <a:r>
+              <a:rPr lang="en-US" sz="1800" dirty="0">
+                <a:solidFill>
+                  <a:srgbClr val="111111"/>
+                </a:solidFill>
+                <a:latin typeface="Pretendard" pitchFamily="34" charset="0"/>
+                <a:ea typeface="Pretendard" pitchFamily="34" charset="-122"/>
+                <a:cs typeface="Pretendard" pitchFamily="34" charset="-120"/>
+              </a:rPr>
+              <a:t>11  Icon and Text Aside</a:t>
+            </a:r>
+            <a:endParaRPr lang="en-US" sz="1800" dirty="0"/>
+          </a:p>
+        </p:txBody>
+      </p:sp>
+      <p:sp>
+        <p:nvSpPr>
+          <p:cNvPr id="18" name="mdpr:2-2-7bfb60:toc-item-4:toc-item-12"/>
+          <p:cNvSpPr txBox="1"/>
+          <p:nvPr/>
+        </p:nvSpPr>
+        <p:spPr>
+          <a:xfrm>
+            <a:off x="1042416" y="4956048"/>
+            <a:ext cx="4645152" cy="658368"/>
+          </a:xfrm>
+          <a:prstGeom prst="rect">
+            <a:avLst/>
+          </a:prstGeom>
+          <a:noFill/>
+          <a:ln/>
+        </p:spPr>
+        <p:txBody>
+          <a:bodyPr wrap="square" lIns="0" tIns="25400" rIns="25400" bIns="0" rtlCol="0" anchor="ctr"/>
+          <a:lstStyle/>
+          <a:p>
+            <a:pPr algn="ctr" indent="0" marL="0">
+              <a:lnSpc>
+                <a:spcPct val="120000"/>
+              </a:lnSpc>
+              <a:buNone/>
+            </a:pPr>
+            <a:r>
+              <a:rPr lang="en-US" sz="1800" dirty="0">
+                <a:solidFill>
+                  <a:srgbClr val="111111"/>
+                </a:solidFill>
+                <a:latin typeface="Pretendard" pitchFamily="34" charset="0"/>
+                <a:ea typeface="Pretendard" pitchFamily="34" charset="-122"/>
+                <a:cs typeface="Pretendard" pitchFamily="34" charset="-120"/>
+              </a:rPr>
+              <a:t>12  Overflow Guard</a:t>
+            </a:r>
+            <a:endParaRPr lang="en-US" sz="1800" dirty="0"/>
+          </a:p>
+        </p:txBody>
+      </p:sp>
+      <p:sp>
+        <p:nvSpPr>
+          <p:cNvPr id="19" name="mdpr:2-2-7bfb60:toc-item-5:toc-item-13"/>
+          <p:cNvSpPr txBox="1"/>
+          <p:nvPr/>
+        </p:nvSpPr>
+        <p:spPr>
+          <a:xfrm>
+            <a:off x="6492240" y="1828800"/>
+            <a:ext cx="4645152" cy="658368"/>
+          </a:xfrm>
+          <a:prstGeom prst="rect">
+            <a:avLst/>
+          </a:prstGeom>
+          <a:noFill/>
+          <a:ln/>
+        </p:spPr>
+        <p:txBody>
+          <a:bodyPr wrap="square" lIns="0" tIns="25400" rIns="25400" bIns="0" rtlCol="0" anchor="ctr"/>
+          <a:lstStyle/>
+          <a:p>
+            <a:pPr algn="ctr" indent="0" marL="0">
+              <a:lnSpc>
+                <a:spcPct val="120000"/>
+              </a:lnSpc>
+              <a:buNone/>
+            </a:pPr>
+            <a:r>
+              <a:rPr lang="en-US" sz="1800" dirty="0">
+                <a:solidFill>
+                  <a:srgbClr val="111111"/>
+                </a:solidFill>
+                <a:latin typeface="Pretendard" pitchFamily="34" charset="0"/>
+                <a:ea typeface="Pretendard" pitchFamily="34" charset="-122"/>
+                <a:cs typeface="Pretendard" pitchFamily="34" charset="-120"/>
+              </a:rPr>
+              <a:t>13  Image Safe Frame</a:t>
+            </a:r>
+            <a:endParaRPr lang="en-US" sz="1800" dirty="0"/>
+          </a:p>
+        </p:txBody>
+      </p:sp>
+      <p:sp>
+        <p:nvSpPr>
+          <p:cNvPr id="20" name="mdpr:2-2-7bfb60:toc-item-6:toc-item-14"/>
+          <p:cNvSpPr txBox="1"/>
+          <p:nvPr/>
+        </p:nvSpPr>
+        <p:spPr>
+          <a:xfrm>
+            <a:off x="6492240" y="2871216"/>
+            <a:ext cx="4645152" cy="658368"/>
+          </a:xfrm>
+          <a:prstGeom prst="rect">
+            <a:avLst/>
+          </a:prstGeom>
+          <a:noFill/>
+          <a:ln/>
+        </p:spPr>
+        <p:txBody>
+          <a:bodyPr wrap="square" lIns="0" tIns="25400" rIns="25400" bIns="0" rtlCol="0" anchor="ctr"/>
+          <a:lstStyle/>
+          <a:p>
+            <a:pPr algn="ctr" indent="0" marL="0">
+              <a:lnSpc>
+                <a:spcPct val="120000"/>
+              </a:lnSpc>
+              <a:buNone/>
+            </a:pPr>
+            <a:r>
+              <a:rPr lang="en-US" sz="1800" dirty="0">
+                <a:solidFill>
+                  <a:srgbClr val="111111"/>
+                </a:solidFill>
+                <a:latin typeface="Pretendard" pitchFamily="34" charset="0"/>
+                <a:ea typeface="Pretendard" pitchFamily="34" charset="-122"/>
+                <a:cs typeface="Pretendard" pitchFamily="34" charset="-120"/>
+              </a:rPr>
+              <a:t>14  Mixed Object Packing</a:t>
+            </a:r>
+            <a:endParaRPr lang="en-US" sz="1800" dirty="0"/>
+          </a:p>
+        </p:txBody>
+      </p:sp>
+      <p:sp>
+        <p:nvSpPr>
+          <p:cNvPr id="21" name="mdpr:2-2-7bfb60:toc-item-7:toc-item-15"/>
+          <p:cNvSpPr txBox="1"/>
+          <p:nvPr/>
+        </p:nvSpPr>
+        <p:spPr>
+          <a:xfrm>
+            <a:off x="6492240" y="3913632"/>
+            <a:ext cx="4645152" cy="658368"/>
+          </a:xfrm>
+          <a:prstGeom prst="rect">
+            <a:avLst/>
+          </a:prstGeom>
+          <a:noFill/>
+          <a:ln/>
+        </p:spPr>
+        <p:txBody>
+          <a:bodyPr wrap="square" lIns="0" tIns="25400" rIns="25400" bIns="0" rtlCol="0" anchor="ctr"/>
+          <a:lstStyle/>
+          <a:p>
+            <a:pPr algn="ctr" indent="0" marL="0">
+              <a:lnSpc>
+                <a:spcPct val="120000"/>
+              </a:lnSpc>
+              <a:buNone/>
+            </a:pPr>
+            <a:r>
+              <a:rPr lang="en-US" sz="1800" dirty="0">
+                <a:solidFill>
+                  <a:srgbClr val="111111"/>
+                </a:solidFill>
+                <a:latin typeface="Pretendard" pitchFamily="34" charset="0"/>
+                <a:ea typeface="Pretendard" pitchFamily="34" charset="-122"/>
+                <a:cs typeface="Pretendard" pitchFamily="34" charset="-120"/>
+              </a:rPr>
+              <a:t>15  Actions Output Review</a:t>
+            </a:r>
+            <a:endParaRPr lang="en-US" sz="1800" dirty="0"/>
           </a:p>
         </p:txBody>
       </p:sp>
@@ -20439,33 +19102,6 @@
         </p:nvSpPr>
         <p:spPr>
           <a:xfrm>
-            <a:off x="731520" y="1207008"/>
-            <a:ext cx="1325880" cy="54864"/>
-          </a:xfrm>
-          <a:prstGeom prst="rect">
-            <a:avLst/>
-          </a:prstGeom>
-          <a:solidFill>
-            <a:srgbClr val="5D7FA4"/>
-          </a:solidFill>
-          <a:ln w="12700">
-            <a:solidFill>
-              <a:srgbClr val="5D7FA4">
-                <a:alpha val="0"/>
-              </a:srgbClr>
-            </a:solidFill>
-            <a:prstDash val="solid"/>
-          </a:ln>
-        </p:spPr>
-      </p:sp>
-      <p:sp>
-        <p:nvSpPr>
-          <p:cNvPr id="8" name="Shape 6"/>
-          <p:cNvSpPr/>
-          <p:nvPr/>
-        </p:nvSpPr>
-        <p:spPr>
-          <a:xfrm>
             <a:off x="955548" y="1467612"/>
             <a:ext cx="10241280" cy="1325880"/>
           </a:xfrm>
@@ -20498,7 +19134,7 @@
       </p:sp>
       <p:sp>
         <p:nvSpPr>
-          <p:cNvPr id="9" name="Shape 7"/>
+          <p:cNvPr id="8" name="Shape 6"/>
           <p:cNvSpPr/>
           <p:nvPr/>
         </p:nvSpPr>
@@ -20536,7 +19172,7 @@
       </p:sp>
       <p:sp>
         <p:nvSpPr>
-          <p:cNvPr id="10" name="Shape 8"/>
+          <p:cNvPr id="9" name="Shape 7"/>
           <p:cNvSpPr/>
           <p:nvPr/>
         </p:nvSpPr>
@@ -20567,7 +19203,7 @@
       </p:sp>
       <p:pic>
         <p:nvPicPr>
-          <p:cNvPr id="11" name="Image 0" descr="preencoded.png">    </p:cNvPr>
+          <p:cNvPr id="10" name="Image 0" descr="preencoded.png">    </p:cNvPr>
           <p:cNvPicPr>
             <a:picLocks noChangeAspect="1"/>
           </p:cNvPicPr>
@@ -20597,7 +19233,7 @@
       </p:pic>
       <p:sp>
         <p:nvSpPr>
-          <p:cNvPr id="12" name="Shape 9"/>
+          <p:cNvPr id="11" name="Shape 8"/>
           <p:cNvSpPr/>
           <p:nvPr/>
         </p:nvSpPr>
@@ -20626,7 +19262,7 @@
       </p:sp>
       <p:sp>
         <p:nvSpPr>
-          <p:cNvPr id="13" name="Shape 10"/>
+          <p:cNvPr id="12" name="Shape 9"/>
           <p:cNvSpPr/>
           <p:nvPr/>
         </p:nvSpPr>
@@ -20653,7 +19289,7 @@
       </p:sp>
       <p:sp>
         <p:nvSpPr>
-          <p:cNvPr id="14" name="mdpr:teaser-summary-7731dc:title:__title:teaser-summary-7731dc"/>
+          <p:cNvPr id="13" name="mdpr:teaser-summary-7731dc:title:__title:teaser-summary-7731dc"/>
           <p:cNvSpPr txBox="1"/>
           <p:nvPr/>
         </p:nvSpPr>
@@ -20695,7 +19331,7 @@
       </p:sp>
       <p:sp>
         <p:nvSpPr>
-          <p:cNvPr id="15" name="mdpr:teaser-summary-7731dc:key-message:block-3"/>
+          <p:cNvPr id="14" name="mdpr:teaser-summary-7731dc:key-message:block-3"/>
           <p:cNvSpPr txBox="1"/>
           <p:nvPr/>
         </p:nvSpPr>
@@ -20737,7 +19373,7 @@
       </p:sp>
       <p:sp>
         <p:nvSpPr>
-          <p:cNvPr id="16" name="mdpr:teaser-summary-7731dc:body:block-4"/>
+          <p:cNvPr id="15" name="mdpr:teaser-summary-7731dc:body:block-4"/>
           <p:cNvSpPr txBox="1"/>
           <p:nvPr/>
         </p:nvSpPr>
@@ -21109,8 +19745,8 @@
         </p:nvSpPr>
         <p:spPr>
           <a:xfrm>
-            <a:off x="731520" y="1207008"/>
-            <a:ext cx="1325880" cy="54864"/>
+            <a:off x="822960" y="1938528"/>
+            <a:ext cx="73152" cy="2514600"/>
           </a:xfrm>
           <a:prstGeom prst="rect">
             <a:avLst/>
@@ -21136,427 +19772,14 @@
         </p:nvSpPr>
         <p:spPr>
           <a:xfrm>
-            <a:off x="955548" y="1915668"/>
-            <a:ext cx="10241280" cy="1024128"/>
-          </a:xfrm>
-          <a:prstGeom prst="roundRect">
-            <a:avLst>
-              <a:gd name="adj" fmla="val 5357"/>
-            </a:avLst>
-          </a:prstGeom>
-          <a:solidFill>
-            <a:srgbClr val="B8C3D2">
-              <a:alpha val="26000"/>
-            </a:srgbClr>
-          </a:solidFill>
-          <a:ln w="12700">
-            <a:solidFill>
-              <a:srgbClr val="D1DAE7">
-                <a:alpha val="0"/>
-              </a:srgbClr>
-            </a:solidFill>
-            <a:prstDash val="solid"/>
-          </a:ln>
-          <a:effectLst>
-            <a:outerShdw sx="100000" sy="100000" kx="0" ky="0" algn="bl" rotWithShape="0" blurRad="13970" dist="50800" dir="2700000">
-              <a:srgbClr val="AAB5C4">
-                <a:alpha val="20000"/>
-              </a:srgbClr>
-            </a:outerShdw>
-          </a:effectLst>
-        </p:spPr>
-      </p:sp>
-      <p:sp>
-        <p:nvSpPr>
-          <p:cNvPr id="9" name="Shape 7"/>
-          <p:cNvSpPr/>
-          <p:nvPr/>
-        </p:nvSpPr>
-        <p:spPr>
-          <a:xfrm>
-            <a:off x="882396" y="1833372"/>
-            <a:ext cx="10241280" cy="1024128"/>
-          </a:xfrm>
-          <a:prstGeom prst="roundRect">
-            <a:avLst>
-              <a:gd name="adj" fmla="val 5357"/>
-            </a:avLst>
-          </a:prstGeom>
-          <a:solidFill>
-            <a:srgbClr val="FFFFFF">
-              <a:alpha val="42000"/>
-            </a:srgbClr>
-          </a:solidFill>
-          <a:ln w="12700">
-            <a:solidFill>
-              <a:srgbClr val="FFFFFF">
-                <a:alpha val="0"/>
-              </a:srgbClr>
-            </a:solidFill>
-            <a:prstDash val="solid"/>
-          </a:ln>
-          <a:effectLst>
-            <a:outerShdw sx="100000" sy="100000" kx="0" ky="0" algn="bl" rotWithShape="0" blurRad="10160" dist="50800" dir="13500000">
-              <a:srgbClr val="FFFFFF">
-                <a:alpha val="36000"/>
-              </a:srgbClr>
-            </a:outerShdw>
-          </a:effectLst>
-        </p:spPr>
-      </p:sp>
-      <p:sp>
-        <p:nvSpPr>
-          <p:cNvPr id="10" name="Shape 8"/>
-          <p:cNvSpPr/>
-          <p:nvPr/>
-        </p:nvSpPr>
-        <p:spPr>
-          <a:xfrm>
-            <a:off x="914400" y="1865376"/>
-            <a:ext cx="10241280" cy="1024128"/>
-          </a:xfrm>
-          <a:prstGeom prst="roundRect">
-            <a:avLst>
-              <a:gd name="adj" fmla="val 5357"/>
-            </a:avLst>
-          </a:prstGeom>
-          <a:solidFill>
-            <a:srgbClr val="EEF3F8">
-              <a:alpha val="6000"/>
-            </a:srgbClr>
-          </a:solidFill>
-          <a:ln w="12700">
-            <a:solidFill>
-              <a:srgbClr val="FFFFFF">
-                <a:alpha val="28000"/>
-              </a:srgbClr>
-            </a:solidFill>
-            <a:prstDash val="solid"/>
-          </a:ln>
-        </p:spPr>
-      </p:sp>
-      <p:pic>
-        <p:nvPicPr>
-          <p:cNvPr id="11" name="Image 0" descr="preencoded.png">    </p:cNvPr>
-          <p:cNvPicPr>
-            <a:picLocks noChangeAspect="1"/>
-          </p:cNvPicPr>
-          <p:nvPr/>
-        </p:nvPicPr>
-        <p:blipFill>
-          <a:blip r:embed="rId1">
-            <a:extLst>
-              <a:ext uri="{96DAC541-7B7A-43D3-8B79-37D633B846F1}">
-                <asvg:svgBlip xmlns:asvg="http://schemas.microsoft.com/office/drawing/2016/SVG/main" r:embed="rId2"/>
-              </a:ext>
-            </a:extLst>
-          </a:blip>
-          <a:stretch>
-            <a:fillRect/>
-          </a:stretch>
-        </p:blipFill>
-        <p:spPr>
-          <a:xfrm>
-            <a:off x="914400" y="1865376"/>
-            <a:ext cx="10241280" cy="1024128"/>
+            <a:off x="4343400" y="1938528"/>
+            <a:ext cx="73152" cy="2514600"/>
           </a:xfrm>
           <a:prstGeom prst="rect">
             <a:avLst/>
           </a:prstGeom>
-        </p:spPr>
-      </p:pic>
-      <p:sp>
-        <p:nvSpPr>
-          <p:cNvPr id="12" name="Shape 9"/>
-          <p:cNvSpPr/>
-          <p:nvPr/>
-        </p:nvSpPr>
-        <p:spPr>
-          <a:xfrm>
-            <a:off x="955548" y="3241548"/>
-            <a:ext cx="10241280" cy="1024128"/>
-          </a:xfrm>
-          <a:prstGeom prst="roundRect">
-            <a:avLst>
-              <a:gd name="adj" fmla="val 5357"/>
-            </a:avLst>
-          </a:prstGeom>
-          <a:solidFill>
-            <a:srgbClr val="B8C3D2">
-              <a:alpha val="26000"/>
-            </a:srgbClr>
-          </a:solidFill>
-          <a:ln w="12700">
-            <a:solidFill>
-              <a:srgbClr val="D1DAE7">
-                <a:alpha val="0"/>
-              </a:srgbClr>
-            </a:solidFill>
-            <a:prstDash val="solid"/>
-          </a:ln>
-          <a:effectLst>
-            <a:outerShdw sx="100000" sy="100000" kx="0" ky="0" algn="bl" rotWithShape="0" blurRad="13970" dist="50800" dir="2700000">
-              <a:srgbClr val="AAB5C4">
-                <a:alpha val="20000"/>
-              </a:srgbClr>
-            </a:outerShdw>
-          </a:effectLst>
-        </p:spPr>
-      </p:sp>
-      <p:sp>
-        <p:nvSpPr>
-          <p:cNvPr id="13" name="Shape 10"/>
-          <p:cNvSpPr/>
-          <p:nvPr/>
-        </p:nvSpPr>
-        <p:spPr>
-          <a:xfrm>
-            <a:off x="882396" y="3159252"/>
-            <a:ext cx="10241280" cy="1024128"/>
-          </a:xfrm>
-          <a:prstGeom prst="roundRect">
-            <a:avLst>
-              <a:gd name="adj" fmla="val 5357"/>
-            </a:avLst>
-          </a:prstGeom>
-          <a:solidFill>
-            <a:srgbClr val="FFFFFF">
-              <a:alpha val="42000"/>
-            </a:srgbClr>
-          </a:solidFill>
-          <a:ln w="12700">
-            <a:solidFill>
-              <a:srgbClr val="FFFFFF">
-                <a:alpha val="0"/>
-              </a:srgbClr>
-            </a:solidFill>
-            <a:prstDash val="solid"/>
-          </a:ln>
-          <a:effectLst>
-            <a:outerShdw sx="100000" sy="100000" kx="0" ky="0" algn="bl" rotWithShape="0" blurRad="10160" dist="50800" dir="13500000">
-              <a:srgbClr val="FFFFFF">
-                <a:alpha val="36000"/>
-              </a:srgbClr>
-            </a:outerShdw>
-          </a:effectLst>
-        </p:spPr>
-      </p:sp>
-      <p:sp>
-        <p:nvSpPr>
-          <p:cNvPr id="14" name="Shape 11"/>
-          <p:cNvSpPr/>
-          <p:nvPr/>
-        </p:nvSpPr>
-        <p:spPr>
-          <a:xfrm>
-            <a:off x="914400" y="3191256"/>
-            <a:ext cx="10241280" cy="1024128"/>
-          </a:xfrm>
-          <a:prstGeom prst="roundRect">
-            <a:avLst>
-              <a:gd name="adj" fmla="val 5357"/>
-            </a:avLst>
-          </a:prstGeom>
-          <a:solidFill>
-            <a:srgbClr val="EEF3F8">
-              <a:alpha val="6000"/>
-            </a:srgbClr>
-          </a:solidFill>
-          <a:ln w="12700">
-            <a:solidFill>
-              <a:srgbClr val="FFFFFF">
-                <a:alpha val="28000"/>
-              </a:srgbClr>
-            </a:solidFill>
-            <a:prstDash val="solid"/>
-          </a:ln>
-        </p:spPr>
-      </p:sp>
-      <p:pic>
-        <p:nvPicPr>
-          <p:cNvPr id="15" name="Image 1" descr="preencoded.png">    </p:cNvPr>
-          <p:cNvPicPr>
-            <a:picLocks noChangeAspect="1"/>
-          </p:cNvPicPr>
-          <p:nvPr/>
-        </p:nvPicPr>
-        <p:blipFill>
-          <a:blip r:embed="rId3">
-            <a:extLst>
-              <a:ext uri="{96DAC541-7B7A-43D3-8B79-37D633B846F1}">
-                <asvg:svgBlip xmlns:asvg="http://schemas.microsoft.com/office/drawing/2016/SVG/main" r:embed="rId4"/>
-              </a:ext>
-            </a:extLst>
-          </a:blip>
-          <a:stretch>
-            <a:fillRect/>
-          </a:stretch>
-        </p:blipFill>
-        <p:spPr>
-          <a:xfrm>
-            <a:off x="914400" y="3191256"/>
-            <a:ext cx="10241280" cy="1024128"/>
-          </a:xfrm>
-          <a:prstGeom prst="rect">
-            <a:avLst/>
-          </a:prstGeom>
-        </p:spPr>
-      </p:pic>
-      <p:sp>
-        <p:nvSpPr>
-          <p:cNvPr id="16" name="Shape 12"/>
-          <p:cNvSpPr/>
-          <p:nvPr/>
-        </p:nvSpPr>
-        <p:spPr>
-          <a:xfrm>
-            <a:off x="955548" y="4558284"/>
-            <a:ext cx="10241280" cy="1024128"/>
-          </a:xfrm>
-          <a:prstGeom prst="roundRect">
-            <a:avLst>
-              <a:gd name="adj" fmla="val 5357"/>
-            </a:avLst>
-          </a:prstGeom>
-          <a:solidFill>
-            <a:srgbClr val="B8C3D2">
-              <a:alpha val="26000"/>
-            </a:srgbClr>
-          </a:solidFill>
-          <a:ln w="12700">
-            <a:solidFill>
-              <a:srgbClr val="D1DAE7">
-                <a:alpha val="0"/>
-              </a:srgbClr>
-            </a:solidFill>
-            <a:prstDash val="solid"/>
-          </a:ln>
-          <a:effectLst>
-            <a:outerShdw sx="100000" sy="100000" kx="0" ky="0" algn="bl" rotWithShape="0" blurRad="13970" dist="50800" dir="2700000">
-              <a:srgbClr val="AAB5C4">
-                <a:alpha val="20000"/>
-              </a:srgbClr>
-            </a:outerShdw>
-          </a:effectLst>
-        </p:spPr>
-      </p:sp>
-      <p:sp>
-        <p:nvSpPr>
-          <p:cNvPr id="17" name="Shape 13"/>
-          <p:cNvSpPr/>
-          <p:nvPr/>
-        </p:nvSpPr>
-        <p:spPr>
-          <a:xfrm>
-            <a:off x="882396" y="4475988"/>
-            <a:ext cx="10241280" cy="1024128"/>
-          </a:xfrm>
-          <a:prstGeom prst="roundRect">
-            <a:avLst>
-              <a:gd name="adj" fmla="val 5357"/>
-            </a:avLst>
-          </a:prstGeom>
-          <a:solidFill>
-            <a:srgbClr val="FFFFFF">
-              <a:alpha val="42000"/>
-            </a:srgbClr>
-          </a:solidFill>
-          <a:ln w="12700">
-            <a:solidFill>
-              <a:srgbClr val="FFFFFF">
-                <a:alpha val="0"/>
-              </a:srgbClr>
-            </a:solidFill>
-            <a:prstDash val="solid"/>
-          </a:ln>
-          <a:effectLst>
-            <a:outerShdw sx="100000" sy="100000" kx="0" ky="0" algn="bl" rotWithShape="0" blurRad="10160" dist="50800" dir="13500000">
-              <a:srgbClr val="FFFFFF">
-                <a:alpha val="36000"/>
-              </a:srgbClr>
-            </a:outerShdw>
-          </a:effectLst>
-        </p:spPr>
-      </p:sp>
-      <p:sp>
-        <p:nvSpPr>
-          <p:cNvPr id="18" name="Shape 14"/>
-          <p:cNvSpPr/>
-          <p:nvPr/>
-        </p:nvSpPr>
-        <p:spPr>
-          <a:xfrm>
-            <a:off x="914400" y="4507992"/>
-            <a:ext cx="10241280" cy="1024128"/>
-          </a:xfrm>
-          <a:prstGeom prst="roundRect">
-            <a:avLst>
-              <a:gd name="adj" fmla="val 5357"/>
-            </a:avLst>
-          </a:prstGeom>
-          <a:solidFill>
-            <a:srgbClr val="EEF3F8">
-              <a:alpha val="6000"/>
-            </a:srgbClr>
-          </a:solidFill>
-          <a:ln w="12700">
-            <a:solidFill>
-              <a:srgbClr val="FFFFFF">
-                <a:alpha val="28000"/>
-              </a:srgbClr>
-            </a:solidFill>
-            <a:prstDash val="solid"/>
-          </a:ln>
-        </p:spPr>
-      </p:sp>
-      <p:pic>
-        <p:nvPicPr>
-          <p:cNvPr id="19" name="Image 2" descr="preencoded.png">    </p:cNvPr>
-          <p:cNvPicPr>
-            <a:picLocks noChangeAspect="1"/>
-          </p:cNvPicPr>
-          <p:nvPr/>
-        </p:nvPicPr>
-        <p:blipFill>
-          <a:blip r:embed="rId5">
-            <a:extLst>
-              <a:ext uri="{96DAC541-7B7A-43D3-8B79-37D633B846F1}">
-                <asvg:svgBlip xmlns:asvg="http://schemas.microsoft.com/office/drawing/2016/SVG/main" r:embed="rId6"/>
-              </a:ext>
-            </a:extLst>
-          </a:blip>
-          <a:stretch>
-            <a:fillRect/>
-          </a:stretch>
-        </p:blipFill>
-        <p:spPr>
-          <a:xfrm>
-            <a:off x="914400" y="4507992"/>
-            <a:ext cx="10241280" cy="1024128"/>
-          </a:xfrm>
-          <a:prstGeom prst="rect">
-            <a:avLst/>
-          </a:prstGeom>
-        </p:spPr>
-      </p:pic>
-      <p:sp>
-        <p:nvSpPr>
-          <p:cNvPr id="20" name="Shape 15"/>
-          <p:cNvSpPr/>
-          <p:nvPr/>
-        </p:nvSpPr>
-        <p:spPr>
-          <a:xfrm>
-            <a:off x="786384" y="1956816"/>
-            <a:ext cx="32004" cy="3483864"/>
-          </a:xfrm>
-          <a:prstGeom prst="rect">
-            <a:avLst/>
-          </a:prstGeom>
-          <a:solidFill>
-            <a:srgbClr val="D8E2EE">
-              <a:alpha val="80000"/>
-            </a:srgbClr>
+          <a:solidFill>
+            <a:srgbClr val="D8E2EE"/>
           </a:solidFill>
           <a:ln w="12700">
             <a:solidFill>
@@ -21570,14 +19793,14 @@
       </p:sp>
       <p:sp>
         <p:nvSpPr>
-          <p:cNvPr id="21" name="Shape 16"/>
-          <p:cNvSpPr/>
-          <p:nvPr/>
-        </p:nvSpPr>
-        <p:spPr>
-          <a:xfrm>
-            <a:off x="914400" y="1865376"/>
-            <a:ext cx="73152" cy="1024128"/>
+          <p:cNvPr id="9" name="Shape 7"/>
+          <p:cNvSpPr/>
+          <p:nvPr/>
+        </p:nvSpPr>
+        <p:spPr>
+          <a:xfrm>
+            <a:off x="7863840" y="1938528"/>
+            <a:ext cx="73152" cy="2514600"/>
           </a:xfrm>
           <a:prstGeom prst="rect">
             <a:avLst/>
@@ -21597,61 +19820,7 @@
       </p:sp>
       <p:sp>
         <p:nvSpPr>
-          <p:cNvPr id="22" name="Shape 17"/>
-          <p:cNvSpPr/>
-          <p:nvPr/>
-        </p:nvSpPr>
-        <p:spPr>
-          <a:xfrm>
-            <a:off x="914400" y="3191256"/>
-            <a:ext cx="73152" cy="1024128"/>
-          </a:xfrm>
-          <a:prstGeom prst="rect">
-            <a:avLst/>
-          </a:prstGeom>
-          <a:solidFill>
-            <a:srgbClr val="D8E2EE"/>
-          </a:solidFill>
-          <a:ln w="12700">
-            <a:solidFill>
-              <a:srgbClr val="D8E2EE">
-                <a:alpha val="0"/>
-              </a:srgbClr>
-            </a:solidFill>
-            <a:prstDash val="solid"/>
-          </a:ln>
-        </p:spPr>
-      </p:sp>
-      <p:sp>
-        <p:nvSpPr>
-          <p:cNvPr id="23" name="Shape 18"/>
-          <p:cNvSpPr/>
-          <p:nvPr/>
-        </p:nvSpPr>
-        <p:spPr>
-          <a:xfrm>
-            <a:off x="914400" y="4507992"/>
-            <a:ext cx="73152" cy="1024128"/>
-          </a:xfrm>
-          <a:prstGeom prst="rect">
-            <a:avLst/>
-          </a:prstGeom>
-          <a:solidFill>
-            <a:srgbClr val="5D7FA4"/>
-          </a:solidFill>
-          <a:ln w="12700">
-            <a:solidFill>
-              <a:srgbClr val="5D7FA4">
-                <a:alpha val="0"/>
-              </a:srgbClr>
-            </a:solidFill>
-            <a:prstDash val="solid"/>
-          </a:ln>
-        </p:spPr>
-      </p:sp>
-      <p:sp>
-        <p:nvSpPr>
-          <p:cNvPr id="24" name="mdpr:1-2-32ac08:title:__title:1-2-32ac08"/>
+          <p:cNvPr id="10" name="mdpr:1-2-32ac08:title:__title:1-2-32ac08"/>
           <p:cNvSpPr txBox="1"/>
           <p:nvPr/>
         </p:nvSpPr>
@@ -21693,14 +19862,14 @@
       </p:sp>
       <p:sp>
         <p:nvSpPr>
-          <p:cNvPr id="25" name="mdpr:1-2-32ac08:item-1:block-6-chunk-1"/>
+          <p:cNvPr id="11" name="mdpr:1-2-32ac08:item-1:block-6-chunk-1"/>
           <p:cNvSpPr txBox="1"/>
           <p:nvPr/>
         </p:nvSpPr>
         <p:spPr>
           <a:xfrm>
-            <a:off x="1133856" y="1957548"/>
-            <a:ext cx="9820656" cy="839785"/>
+            <a:off x="1042416" y="2103120"/>
+            <a:ext cx="2825496" cy="2185416"/>
           </a:xfrm>
           <a:prstGeom prst="rect">
             <a:avLst/>
@@ -21752,14 +19921,14 @@
       </p:sp>
       <p:sp>
         <p:nvSpPr>
-          <p:cNvPr id="26" name="mdpr:1-2-32ac08:item-2:block-6-chunk-1"/>
+          <p:cNvPr id="12" name="mdpr:1-2-32ac08:item-2:block-6-chunk-1"/>
           <p:cNvSpPr txBox="1"/>
           <p:nvPr/>
         </p:nvSpPr>
         <p:spPr>
           <a:xfrm>
-            <a:off x="1133856" y="3283428"/>
-            <a:ext cx="9820656" cy="839785"/>
+            <a:off x="4562856" y="2103120"/>
+            <a:ext cx="2825496" cy="2185416"/>
           </a:xfrm>
           <a:prstGeom prst="rect">
             <a:avLst/>
@@ -21811,14 +19980,14 @@
       </p:sp>
       <p:sp>
         <p:nvSpPr>
-          <p:cNvPr id="27" name="mdpr:1-2-32ac08:item-3:block-6-chunk-1"/>
+          <p:cNvPr id="13" name="mdpr:1-2-32ac08:item-3:block-6-chunk-1"/>
           <p:cNvSpPr txBox="1"/>
           <p:nvPr/>
         </p:nvSpPr>
         <p:spPr>
           <a:xfrm>
-            <a:off x="1133856" y="4600164"/>
-            <a:ext cx="9820656" cy="839785"/>
+            <a:off x="8083296" y="2103120"/>
+            <a:ext cx="2825496" cy="2185416"/>
           </a:xfrm>
           <a:prstGeom prst="rect">
             <a:avLst/>
@@ -22057,88 +20226,7 @@
       </p:sp>
       <p:sp>
         <p:nvSpPr>
-          <p:cNvPr id="7" name="Shape 5"/>
-          <p:cNvSpPr/>
-          <p:nvPr/>
-        </p:nvSpPr>
-        <p:spPr>
-          <a:xfrm>
-            <a:off x="731520" y="1207008"/>
-            <a:ext cx="1325880" cy="54864"/>
-          </a:xfrm>
-          <a:prstGeom prst="rect">
-            <a:avLst/>
-          </a:prstGeom>
-          <a:solidFill>
-            <a:srgbClr val="5D7FA4"/>
-          </a:solidFill>
-          <a:ln w="12700">
-            <a:solidFill>
-              <a:srgbClr val="5D7FA4">
-                <a:alpha val="0"/>
-              </a:srgbClr>
-            </a:solidFill>
-            <a:prstDash val="solid"/>
-          </a:ln>
-        </p:spPr>
-      </p:sp>
-      <p:sp>
-        <p:nvSpPr>
-          <p:cNvPr id="8" name="Shape 6"/>
-          <p:cNvSpPr/>
-          <p:nvPr/>
-        </p:nvSpPr>
-        <p:spPr>
-          <a:xfrm>
-            <a:off x="822960" y="1554480"/>
-            <a:ext cx="4937760" cy="73152"/>
-          </a:xfrm>
-          <a:prstGeom prst="rect">
-            <a:avLst/>
-          </a:prstGeom>
-          <a:solidFill>
-            <a:srgbClr val="5D7FA4"/>
-          </a:solidFill>
-          <a:ln w="12700">
-            <a:solidFill>
-              <a:srgbClr val="5D7FA4">
-                <a:alpha val="0"/>
-              </a:srgbClr>
-            </a:solidFill>
-            <a:prstDash val="solid"/>
-          </a:ln>
-        </p:spPr>
-      </p:sp>
-      <p:sp>
-        <p:nvSpPr>
-          <p:cNvPr id="9" name="Shape 7"/>
-          <p:cNvSpPr/>
-          <p:nvPr/>
-        </p:nvSpPr>
-        <p:spPr>
-          <a:xfrm>
-            <a:off x="6400800" y="1554480"/>
-            <a:ext cx="4937760" cy="73152"/>
-          </a:xfrm>
-          <a:prstGeom prst="rect">
-            <a:avLst/>
-          </a:prstGeom>
-          <a:solidFill>
-            <a:srgbClr val="5D7FA4"/>
-          </a:solidFill>
-          <a:ln w="12700">
-            <a:solidFill>
-              <a:srgbClr val="5D7FA4">
-                <a:alpha val="0"/>
-              </a:srgbClr>
-            </a:solidFill>
-            <a:prstDash val="solid"/>
-          </a:ln>
-        </p:spPr>
-      </p:sp>
-      <p:sp>
-        <p:nvSpPr>
-          <p:cNvPr id="10" name="mdpr:2-2-14f8eb:title:__title:2-2-14f8eb"/>
+          <p:cNvPr id="7" name="mdpr:2-2-14f8eb:title:__title:2-2-14f8eb"/>
           <p:cNvSpPr txBox="1"/>
           <p:nvPr/>
         </p:nvSpPr>
@@ -22172,7 +20260,24 @@
                 <a:ea typeface="Pretendard" pitchFamily="34" charset="-122"/>
                 <a:cs typeface="Pretendard" pitchFamily="34" charset="-120"/>
               </a:rPr>
-              <a:t>Composition Contract (Cont. 2/2)</a:t>
+              <a:t>Composition Contract</a:t>
+            </a:r>
+            <a:pPr algn="ctr" indent="0" marL="0">
+              <a:lnSpc>
+                <a:spcPct val="120000"/>
+              </a:lnSpc>
+              <a:buNone/>
+            </a:pPr>
+            <a:r>
+              <a:rPr lang="en-US" sz="2000" dirty="0">
+                <a:solidFill>
+                  <a:srgbClr val="8C8C8C"/>
+                </a:solidFill>
+                <a:latin typeface="Pretendard" pitchFamily="34" charset="0"/>
+                <a:ea typeface="Pretendard" pitchFamily="34" charset="-122"/>
+                <a:cs typeface="Pretendard" pitchFamily="34" charset="-120"/>
+              </a:rPr>
+              <a:t> (Cont. 2/2)</a:t>
             </a:r>
             <a:endParaRPr lang="en-US" sz="3400" dirty="0"/>
           </a:p>
@@ -22180,14 +20285,14 @@
       </p:sp>
       <p:sp>
         <p:nvSpPr>
-          <p:cNvPr id="11" name="mdpr:2-2-14f8eb:left:block-6-chunk-2"/>
+          <p:cNvPr id="8" name="mdpr:2-2-14f8eb:left:block-6-chunk-2"/>
           <p:cNvSpPr txBox="1"/>
           <p:nvPr/>
         </p:nvSpPr>
         <p:spPr>
           <a:xfrm>
-            <a:off x="896112" y="1664208"/>
-            <a:ext cx="4791456" cy="4169664"/>
+            <a:off x="896112" y="1463040"/>
+            <a:ext cx="4791456" cy="4261104"/>
           </a:xfrm>
           <a:prstGeom prst="rect">
             <a:avLst/>
@@ -22239,14 +20344,14 @@
       </p:sp>
       <p:sp>
         <p:nvSpPr>
-          <p:cNvPr id="12" name="mdpr:2-2-14f8eb:right:block-6-chunk-2"/>
+          <p:cNvPr id="9" name="mdpr:2-2-14f8eb:right:block-6-chunk-2"/>
           <p:cNvSpPr txBox="1"/>
           <p:nvPr/>
         </p:nvSpPr>
         <p:spPr>
           <a:xfrm>
-            <a:off x="6473952" y="1664208"/>
-            <a:ext cx="4791456" cy="4169664"/>
+            <a:off x="6473952" y="1463040"/>
+            <a:ext cx="4791456" cy="4261104"/>
           </a:xfrm>
           <a:prstGeom prst="rect">
             <a:avLst/>
@@ -22491,8 +20596,8 @@
         </p:nvSpPr>
         <p:spPr>
           <a:xfrm>
-            <a:off x="731520" y="1207008"/>
-            <a:ext cx="1325880" cy="54864"/>
+            <a:off x="822960" y="1938528"/>
+            <a:ext cx="73152" cy="2514600"/>
           </a:xfrm>
           <a:prstGeom prst="rect">
             <a:avLst/>
@@ -22518,427 +20623,14 @@
         </p:nvSpPr>
         <p:spPr>
           <a:xfrm>
-            <a:off x="955548" y="1915668"/>
-            <a:ext cx="10241280" cy="1024128"/>
-          </a:xfrm>
-          <a:prstGeom prst="roundRect">
-            <a:avLst>
-              <a:gd name="adj" fmla="val 5357"/>
-            </a:avLst>
-          </a:prstGeom>
-          <a:solidFill>
-            <a:srgbClr val="B8C3D2">
-              <a:alpha val="26000"/>
-            </a:srgbClr>
-          </a:solidFill>
-          <a:ln w="12700">
-            <a:solidFill>
-              <a:srgbClr val="D1DAE7">
-                <a:alpha val="0"/>
-              </a:srgbClr>
-            </a:solidFill>
-            <a:prstDash val="solid"/>
-          </a:ln>
-          <a:effectLst>
-            <a:outerShdw sx="100000" sy="100000" kx="0" ky="0" algn="bl" rotWithShape="0" blurRad="13970" dist="50800" dir="2700000">
-              <a:srgbClr val="AAB5C4">
-                <a:alpha val="20000"/>
-              </a:srgbClr>
-            </a:outerShdw>
-          </a:effectLst>
-        </p:spPr>
-      </p:sp>
-      <p:sp>
-        <p:nvSpPr>
-          <p:cNvPr id="9" name="Shape 7"/>
-          <p:cNvSpPr/>
-          <p:nvPr/>
-        </p:nvSpPr>
-        <p:spPr>
-          <a:xfrm>
-            <a:off x="882396" y="1833372"/>
-            <a:ext cx="10241280" cy="1024128"/>
-          </a:xfrm>
-          <a:prstGeom prst="roundRect">
-            <a:avLst>
-              <a:gd name="adj" fmla="val 5357"/>
-            </a:avLst>
-          </a:prstGeom>
-          <a:solidFill>
-            <a:srgbClr val="FFFFFF">
-              <a:alpha val="42000"/>
-            </a:srgbClr>
-          </a:solidFill>
-          <a:ln w="12700">
-            <a:solidFill>
-              <a:srgbClr val="FFFFFF">
-                <a:alpha val="0"/>
-              </a:srgbClr>
-            </a:solidFill>
-            <a:prstDash val="solid"/>
-          </a:ln>
-          <a:effectLst>
-            <a:outerShdw sx="100000" sy="100000" kx="0" ky="0" algn="bl" rotWithShape="0" blurRad="10160" dist="50800" dir="13500000">
-              <a:srgbClr val="FFFFFF">
-                <a:alpha val="36000"/>
-              </a:srgbClr>
-            </a:outerShdw>
-          </a:effectLst>
-        </p:spPr>
-      </p:sp>
-      <p:sp>
-        <p:nvSpPr>
-          <p:cNvPr id="10" name="Shape 8"/>
-          <p:cNvSpPr/>
-          <p:nvPr/>
-        </p:nvSpPr>
-        <p:spPr>
-          <a:xfrm>
-            <a:off x="914400" y="1865376"/>
-            <a:ext cx="10241280" cy="1024128"/>
-          </a:xfrm>
-          <a:prstGeom prst="roundRect">
-            <a:avLst>
-              <a:gd name="adj" fmla="val 5357"/>
-            </a:avLst>
-          </a:prstGeom>
-          <a:solidFill>
-            <a:srgbClr val="EEF3F8">
-              <a:alpha val="6000"/>
-            </a:srgbClr>
-          </a:solidFill>
-          <a:ln w="12700">
-            <a:solidFill>
-              <a:srgbClr val="FFFFFF">
-                <a:alpha val="28000"/>
-              </a:srgbClr>
-            </a:solidFill>
-            <a:prstDash val="solid"/>
-          </a:ln>
-        </p:spPr>
-      </p:sp>
-      <p:pic>
-        <p:nvPicPr>
-          <p:cNvPr id="11" name="Image 0" descr="preencoded.png">    </p:cNvPr>
-          <p:cNvPicPr>
-            <a:picLocks noChangeAspect="1"/>
-          </p:cNvPicPr>
-          <p:nvPr/>
-        </p:nvPicPr>
-        <p:blipFill>
-          <a:blip r:embed="rId1">
-            <a:extLst>
-              <a:ext uri="{96DAC541-7B7A-43D3-8B79-37D633B846F1}">
-                <asvg:svgBlip xmlns:asvg="http://schemas.microsoft.com/office/drawing/2016/SVG/main" r:embed="rId2"/>
-              </a:ext>
-            </a:extLst>
-          </a:blip>
-          <a:stretch>
-            <a:fillRect/>
-          </a:stretch>
-        </p:blipFill>
-        <p:spPr>
-          <a:xfrm>
-            <a:off x="914400" y="1865376"/>
-            <a:ext cx="10241280" cy="1024128"/>
+            <a:off x="4343400" y="1938528"/>
+            <a:ext cx="73152" cy="2514600"/>
           </a:xfrm>
           <a:prstGeom prst="rect">
             <a:avLst/>
           </a:prstGeom>
-        </p:spPr>
-      </p:pic>
-      <p:sp>
-        <p:nvSpPr>
-          <p:cNvPr id="12" name="Shape 9"/>
-          <p:cNvSpPr/>
-          <p:nvPr/>
-        </p:nvSpPr>
-        <p:spPr>
-          <a:xfrm>
-            <a:off x="955548" y="3241548"/>
-            <a:ext cx="10241280" cy="1024128"/>
-          </a:xfrm>
-          <a:prstGeom prst="roundRect">
-            <a:avLst>
-              <a:gd name="adj" fmla="val 5357"/>
-            </a:avLst>
-          </a:prstGeom>
-          <a:solidFill>
-            <a:srgbClr val="B8C3D2">
-              <a:alpha val="26000"/>
-            </a:srgbClr>
-          </a:solidFill>
-          <a:ln w="12700">
-            <a:solidFill>
-              <a:srgbClr val="D1DAE7">
-                <a:alpha val="0"/>
-              </a:srgbClr>
-            </a:solidFill>
-            <a:prstDash val="solid"/>
-          </a:ln>
-          <a:effectLst>
-            <a:outerShdw sx="100000" sy="100000" kx="0" ky="0" algn="bl" rotWithShape="0" blurRad="13970" dist="50800" dir="2700000">
-              <a:srgbClr val="AAB5C4">
-                <a:alpha val="20000"/>
-              </a:srgbClr>
-            </a:outerShdw>
-          </a:effectLst>
-        </p:spPr>
-      </p:sp>
-      <p:sp>
-        <p:nvSpPr>
-          <p:cNvPr id="13" name="Shape 10"/>
-          <p:cNvSpPr/>
-          <p:nvPr/>
-        </p:nvSpPr>
-        <p:spPr>
-          <a:xfrm>
-            <a:off x="882396" y="3159252"/>
-            <a:ext cx="10241280" cy="1024128"/>
-          </a:xfrm>
-          <a:prstGeom prst="roundRect">
-            <a:avLst>
-              <a:gd name="adj" fmla="val 5357"/>
-            </a:avLst>
-          </a:prstGeom>
-          <a:solidFill>
-            <a:srgbClr val="FFFFFF">
-              <a:alpha val="42000"/>
-            </a:srgbClr>
-          </a:solidFill>
-          <a:ln w="12700">
-            <a:solidFill>
-              <a:srgbClr val="FFFFFF">
-                <a:alpha val="0"/>
-              </a:srgbClr>
-            </a:solidFill>
-            <a:prstDash val="solid"/>
-          </a:ln>
-          <a:effectLst>
-            <a:outerShdw sx="100000" sy="100000" kx="0" ky="0" algn="bl" rotWithShape="0" blurRad="10160" dist="50800" dir="13500000">
-              <a:srgbClr val="FFFFFF">
-                <a:alpha val="36000"/>
-              </a:srgbClr>
-            </a:outerShdw>
-          </a:effectLst>
-        </p:spPr>
-      </p:sp>
-      <p:sp>
-        <p:nvSpPr>
-          <p:cNvPr id="14" name="Shape 11"/>
-          <p:cNvSpPr/>
-          <p:nvPr/>
-        </p:nvSpPr>
-        <p:spPr>
-          <a:xfrm>
-            <a:off x="914400" y="3191256"/>
-            <a:ext cx="10241280" cy="1024128"/>
-          </a:xfrm>
-          <a:prstGeom prst="roundRect">
-            <a:avLst>
-              <a:gd name="adj" fmla="val 5357"/>
-            </a:avLst>
-          </a:prstGeom>
-          <a:solidFill>
-            <a:srgbClr val="EEF3F8">
-              <a:alpha val="6000"/>
-            </a:srgbClr>
-          </a:solidFill>
-          <a:ln w="12700">
-            <a:solidFill>
-              <a:srgbClr val="FFFFFF">
-                <a:alpha val="28000"/>
-              </a:srgbClr>
-            </a:solidFill>
-            <a:prstDash val="solid"/>
-          </a:ln>
-        </p:spPr>
-      </p:sp>
-      <p:pic>
-        <p:nvPicPr>
-          <p:cNvPr id="15" name="Image 1" descr="preencoded.png">    </p:cNvPr>
-          <p:cNvPicPr>
-            <a:picLocks noChangeAspect="1"/>
-          </p:cNvPicPr>
-          <p:nvPr/>
-        </p:nvPicPr>
-        <p:blipFill>
-          <a:blip r:embed="rId3">
-            <a:extLst>
-              <a:ext uri="{96DAC541-7B7A-43D3-8B79-37D633B846F1}">
-                <asvg:svgBlip xmlns:asvg="http://schemas.microsoft.com/office/drawing/2016/SVG/main" r:embed="rId4"/>
-              </a:ext>
-            </a:extLst>
-          </a:blip>
-          <a:stretch>
-            <a:fillRect/>
-          </a:stretch>
-        </p:blipFill>
-        <p:spPr>
-          <a:xfrm>
-            <a:off x="914400" y="3191256"/>
-            <a:ext cx="10241280" cy="1024128"/>
-          </a:xfrm>
-          <a:prstGeom prst="rect">
-            <a:avLst/>
-          </a:prstGeom>
-        </p:spPr>
-      </p:pic>
-      <p:sp>
-        <p:nvSpPr>
-          <p:cNvPr id="16" name="Shape 12"/>
-          <p:cNvSpPr/>
-          <p:nvPr/>
-        </p:nvSpPr>
-        <p:spPr>
-          <a:xfrm>
-            <a:off x="955548" y="4558284"/>
-            <a:ext cx="10241280" cy="1024128"/>
-          </a:xfrm>
-          <a:prstGeom prst="roundRect">
-            <a:avLst>
-              <a:gd name="adj" fmla="val 5357"/>
-            </a:avLst>
-          </a:prstGeom>
-          <a:solidFill>
-            <a:srgbClr val="B8C3D2">
-              <a:alpha val="26000"/>
-            </a:srgbClr>
-          </a:solidFill>
-          <a:ln w="12700">
-            <a:solidFill>
-              <a:srgbClr val="D1DAE7">
-                <a:alpha val="0"/>
-              </a:srgbClr>
-            </a:solidFill>
-            <a:prstDash val="solid"/>
-          </a:ln>
-          <a:effectLst>
-            <a:outerShdw sx="100000" sy="100000" kx="0" ky="0" algn="bl" rotWithShape="0" blurRad="13970" dist="50800" dir="2700000">
-              <a:srgbClr val="AAB5C4">
-                <a:alpha val="20000"/>
-              </a:srgbClr>
-            </a:outerShdw>
-          </a:effectLst>
-        </p:spPr>
-      </p:sp>
-      <p:sp>
-        <p:nvSpPr>
-          <p:cNvPr id="17" name="Shape 13"/>
-          <p:cNvSpPr/>
-          <p:nvPr/>
-        </p:nvSpPr>
-        <p:spPr>
-          <a:xfrm>
-            <a:off x="882396" y="4475988"/>
-            <a:ext cx="10241280" cy="1024128"/>
-          </a:xfrm>
-          <a:prstGeom prst="roundRect">
-            <a:avLst>
-              <a:gd name="adj" fmla="val 5357"/>
-            </a:avLst>
-          </a:prstGeom>
-          <a:solidFill>
-            <a:srgbClr val="FFFFFF">
-              <a:alpha val="42000"/>
-            </a:srgbClr>
-          </a:solidFill>
-          <a:ln w="12700">
-            <a:solidFill>
-              <a:srgbClr val="FFFFFF">
-                <a:alpha val="0"/>
-              </a:srgbClr>
-            </a:solidFill>
-            <a:prstDash val="solid"/>
-          </a:ln>
-          <a:effectLst>
-            <a:outerShdw sx="100000" sy="100000" kx="0" ky="0" algn="bl" rotWithShape="0" blurRad="10160" dist="50800" dir="13500000">
-              <a:srgbClr val="FFFFFF">
-                <a:alpha val="36000"/>
-              </a:srgbClr>
-            </a:outerShdw>
-          </a:effectLst>
-        </p:spPr>
-      </p:sp>
-      <p:sp>
-        <p:nvSpPr>
-          <p:cNvPr id="18" name="Shape 14"/>
-          <p:cNvSpPr/>
-          <p:nvPr/>
-        </p:nvSpPr>
-        <p:spPr>
-          <a:xfrm>
-            <a:off x="914400" y="4507992"/>
-            <a:ext cx="10241280" cy="1024128"/>
-          </a:xfrm>
-          <a:prstGeom prst="roundRect">
-            <a:avLst>
-              <a:gd name="adj" fmla="val 5357"/>
-            </a:avLst>
-          </a:prstGeom>
-          <a:solidFill>
-            <a:srgbClr val="EEF3F8">
-              <a:alpha val="6000"/>
-            </a:srgbClr>
-          </a:solidFill>
-          <a:ln w="12700">
-            <a:solidFill>
-              <a:srgbClr val="FFFFFF">
-                <a:alpha val="28000"/>
-              </a:srgbClr>
-            </a:solidFill>
-            <a:prstDash val="solid"/>
-          </a:ln>
-        </p:spPr>
-      </p:sp>
-      <p:pic>
-        <p:nvPicPr>
-          <p:cNvPr id="19" name="Image 2" descr="preencoded.png">    </p:cNvPr>
-          <p:cNvPicPr>
-            <a:picLocks noChangeAspect="1"/>
-          </p:cNvPicPr>
-          <p:nvPr/>
-        </p:nvPicPr>
-        <p:blipFill>
-          <a:blip r:embed="rId5">
-            <a:extLst>
-              <a:ext uri="{96DAC541-7B7A-43D3-8B79-37D633B846F1}">
-                <asvg:svgBlip xmlns:asvg="http://schemas.microsoft.com/office/drawing/2016/SVG/main" r:embed="rId6"/>
-              </a:ext>
-            </a:extLst>
-          </a:blip>
-          <a:stretch>
-            <a:fillRect/>
-          </a:stretch>
-        </p:blipFill>
-        <p:spPr>
-          <a:xfrm>
-            <a:off x="914400" y="4507992"/>
-            <a:ext cx="10241280" cy="1024128"/>
-          </a:xfrm>
-          <a:prstGeom prst="rect">
-            <a:avLst/>
-          </a:prstGeom>
-        </p:spPr>
-      </p:pic>
-      <p:sp>
-        <p:nvSpPr>
-          <p:cNvPr id="20" name="Shape 15"/>
-          <p:cNvSpPr/>
-          <p:nvPr/>
-        </p:nvSpPr>
-        <p:spPr>
-          <a:xfrm>
-            <a:off x="786384" y="1956816"/>
-            <a:ext cx="32004" cy="3483864"/>
-          </a:xfrm>
-          <a:prstGeom prst="rect">
-            <a:avLst/>
-          </a:prstGeom>
-          <a:solidFill>
-            <a:srgbClr val="D8E2EE">
-              <a:alpha val="80000"/>
-            </a:srgbClr>
+          <a:solidFill>
+            <a:srgbClr val="D8E2EE"/>
           </a:solidFill>
           <a:ln w="12700">
             <a:solidFill>
@@ -22952,14 +20644,14 @@
       </p:sp>
       <p:sp>
         <p:nvSpPr>
-          <p:cNvPr id="21" name="Shape 16"/>
-          <p:cNvSpPr/>
-          <p:nvPr/>
-        </p:nvSpPr>
-        <p:spPr>
-          <a:xfrm>
-            <a:off x="914400" y="1865376"/>
-            <a:ext cx="73152" cy="1024128"/>
+          <p:cNvPr id="9" name="Shape 7"/>
+          <p:cNvSpPr/>
+          <p:nvPr/>
+        </p:nvSpPr>
+        <p:spPr>
+          <a:xfrm>
+            <a:off x="7863840" y="1938528"/>
+            <a:ext cx="73152" cy="2514600"/>
           </a:xfrm>
           <a:prstGeom prst="rect">
             <a:avLst/>
@@ -22979,61 +20671,7 @@
       </p:sp>
       <p:sp>
         <p:nvSpPr>
-          <p:cNvPr id="22" name="Shape 17"/>
-          <p:cNvSpPr/>
-          <p:nvPr/>
-        </p:nvSpPr>
-        <p:spPr>
-          <a:xfrm>
-            <a:off x="914400" y="3191256"/>
-            <a:ext cx="73152" cy="1024128"/>
-          </a:xfrm>
-          <a:prstGeom prst="rect">
-            <a:avLst/>
-          </a:prstGeom>
-          <a:solidFill>
-            <a:srgbClr val="D8E2EE"/>
-          </a:solidFill>
-          <a:ln w="12700">
-            <a:solidFill>
-              <a:srgbClr val="D8E2EE">
-                <a:alpha val="0"/>
-              </a:srgbClr>
-            </a:solidFill>
-            <a:prstDash val="solid"/>
-          </a:ln>
-        </p:spPr>
-      </p:sp>
-      <p:sp>
-        <p:nvSpPr>
-          <p:cNvPr id="23" name="Shape 18"/>
-          <p:cNvSpPr/>
-          <p:nvPr/>
-        </p:nvSpPr>
-        <p:spPr>
-          <a:xfrm>
-            <a:off x="914400" y="4507992"/>
-            <a:ext cx="73152" cy="1024128"/>
-          </a:xfrm>
-          <a:prstGeom prst="rect">
-            <a:avLst/>
-          </a:prstGeom>
-          <a:solidFill>
-            <a:srgbClr val="5D7FA4"/>
-          </a:solidFill>
-          <a:ln w="12700">
-            <a:solidFill>
-              <a:srgbClr val="5D7FA4">
-                <a:alpha val="0"/>
-              </a:srgbClr>
-            </a:solidFill>
-            <a:prstDash val="solid"/>
-          </a:ln>
-        </p:spPr>
-      </p:sp>
-      <p:sp>
-        <p:nvSpPr>
-          <p:cNvPr id="24" name="mdpr:1-2-dfa474:title:__title:1-2-dfa474"/>
+          <p:cNvPr id="10" name="mdpr:1-2-dfa474:title:__title:1-2-dfa474"/>
           <p:cNvSpPr txBox="1"/>
           <p:nvPr/>
         </p:nvSpPr>
@@ -23075,14 +20713,14 @@
       </p:sp>
       <p:sp>
         <p:nvSpPr>
-          <p:cNvPr id="25" name="mdpr:1-2-dfa474:item-1:block-8-chunk-1"/>
+          <p:cNvPr id="11" name="mdpr:1-2-dfa474:item-1:block-8-chunk-1"/>
           <p:cNvSpPr txBox="1"/>
           <p:nvPr/>
         </p:nvSpPr>
         <p:spPr>
           <a:xfrm>
-            <a:off x="1133856" y="1957548"/>
-            <a:ext cx="9820656" cy="839785"/>
+            <a:off x="1042416" y="2103120"/>
+            <a:ext cx="2825496" cy="2185416"/>
           </a:xfrm>
           <a:prstGeom prst="rect">
             <a:avLst/>
@@ -23134,14 +20772,14 @@
       </p:sp>
       <p:sp>
         <p:nvSpPr>
-          <p:cNvPr id="26" name="mdpr:1-2-dfa474:item-2:block-8-chunk-1"/>
+          <p:cNvPr id="12" name="mdpr:1-2-dfa474:item-2:block-8-chunk-1"/>
           <p:cNvSpPr txBox="1"/>
           <p:nvPr/>
         </p:nvSpPr>
         <p:spPr>
           <a:xfrm>
-            <a:off x="1133856" y="3283428"/>
-            <a:ext cx="9820656" cy="839785"/>
+            <a:off x="4562856" y="2103120"/>
+            <a:ext cx="2825496" cy="2185416"/>
           </a:xfrm>
           <a:prstGeom prst="rect">
             <a:avLst/>
@@ -23193,14 +20831,14 @@
       </p:sp>
       <p:sp>
         <p:nvSpPr>
-          <p:cNvPr id="27" name="mdpr:1-2-dfa474:item-3:block-8-chunk-1"/>
+          <p:cNvPr id="13" name="mdpr:1-2-dfa474:item-3:block-8-chunk-1"/>
           <p:cNvSpPr txBox="1"/>
           <p:nvPr/>
         </p:nvSpPr>
         <p:spPr>
           <a:xfrm>
-            <a:off x="1133856" y="4600164"/>
-            <a:ext cx="9820656" cy="839785"/>
+            <a:off x="8083296" y="2103120"/>
+            <a:ext cx="2825496" cy="2185416"/>
           </a:xfrm>
           <a:prstGeom prst="rect">
             <a:avLst/>
@@ -23439,88 +21077,7 @@
       </p:sp>
       <p:sp>
         <p:nvSpPr>
-          <p:cNvPr id="7" name="Shape 5"/>
-          <p:cNvSpPr/>
-          <p:nvPr/>
-        </p:nvSpPr>
-        <p:spPr>
-          <a:xfrm>
-            <a:off x="731520" y="1207008"/>
-            <a:ext cx="1325880" cy="54864"/>
-          </a:xfrm>
-          <a:prstGeom prst="rect">
-            <a:avLst/>
-          </a:prstGeom>
-          <a:solidFill>
-            <a:srgbClr val="5D7FA4"/>
-          </a:solidFill>
-          <a:ln w="12700">
-            <a:solidFill>
-              <a:srgbClr val="5D7FA4">
-                <a:alpha val="0"/>
-              </a:srgbClr>
-            </a:solidFill>
-            <a:prstDash val="solid"/>
-          </a:ln>
-        </p:spPr>
-      </p:sp>
-      <p:sp>
-        <p:nvSpPr>
-          <p:cNvPr id="8" name="Shape 6"/>
-          <p:cNvSpPr/>
-          <p:nvPr/>
-        </p:nvSpPr>
-        <p:spPr>
-          <a:xfrm>
-            <a:off x="822960" y="1554480"/>
-            <a:ext cx="4937760" cy="73152"/>
-          </a:xfrm>
-          <a:prstGeom prst="rect">
-            <a:avLst/>
-          </a:prstGeom>
-          <a:solidFill>
-            <a:srgbClr val="5D7FA4"/>
-          </a:solidFill>
-          <a:ln w="12700">
-            <a:solidFill>
-              <a:srgbClr val="5D7FA4">
-                <a:alpha val="0"/>
-              </a:srgbClr>
-            </a:solidFill>
-            <a:prstDash val="solid"/>
-          </a:ln>
-        </p:spPr>
-      </p:sp>
-      <p:sp>
-        <p:nvSpPr>
-          <p:cNvPr id="9" name="Shape 7"/>
-          <p:cNvSpPr/>
-          <p:nvPr/>
-        </p:nvSpPr>
-        <p:spPr>
-          <a:xfrm>
-            <a:off x="6400800" y="1554480"/>
-            <a:ext cx="4937760" cy="73152"/>
-          </a:xfrm>
-          <a:prstGeom prst="rect">
-            <a:avLst/>
-          </a:prstGeom>
-          <a:solidFill>
-            <a:srgbClr val="5D7FA4"/>
-          </a:solidFill>
-          <a:ln w="12700">
-            <a:solidFill>
-              <a:srgbClr val="5D7FA4">
-                <a:alpha val="0"/>
-              </a:srgbClr>
-            </a:solidFill>
-            <a:prstDash val="solid"/>
-          </a:ln>
-        </p:spPr>
-      </p:sp>
-      <p:sp>
-        <p:nvSpPr>
-          <p:cNvPr id="10" name="mdpr:2-2-149bde:title:__title:2-2-149bde"/>
+          <p:cNvPr id="7" name="mdpr:2-2-149bde:title:__title:2-2-149bde"/>
           <p:cNvSpPr txBox="1"/>
           <p:nvPr/>
         </p:nvSpPr>
@@ -23554,7 +21111,24 @@
                 <a:ea typeface="Pretendard" pitchFamily="34" charset="-122"/>
                 <a:cs typeface="Pretendard" pitchFamily="34" charset="-120"/>
               </a:rPr>
-              <a:t>Pruned Style Families (Cont. 2/2)</a:t>
+              <a:t>Pruned Style Families</a:t>
+            </a:r>
+            <a:pPr algn="ctr" indent="0" marL="0">
+              <a:lnSpc>
+                <a:spcPct val="120000"/>
+              </a:lnSpc>
+              <a:buNone/>
+            </a:pPr>
+            <a:r>
+              <a:rPr lang="en-US" sz="2000" dirty="0">
+                <a:solidFill>
+                  <a:srgbClr val="8C8C8C"/>
+                </a:solidFill>
+                <a:latin typeface="Pretendard" pitchFamily="34" charset="0"/>
+                <a:ea typeface="Pretendard" pitchFamily="34" charset="-122"/>
+                <a:cs typeface="Pretendard" pitchFamily="34" charset="-120"/>
+              </a:rPr>
+              <a:t> (Cont. 2/2)</a:t>
             </a:r>
             <a:endParaRPr lang="en-US" sz="3400" dirty="0"/>
           </a:p>
@@ -23562,14 +21136,14 @@
       </p:sp>
       <p:sp>
         <p:nvSpPr>
-          <p:cNvPr id="11" name="mdpr:2-2-149bde:left:block-8-chunk-2"/>
+          <p:cNvPr id="8" name="mdpr:2-2-149bde:left:block-8-chunk-2"/>
           <p:cNvSpPr txBox="1"/>
           <p:nvPr/>
         </p:nvSpPr>
         <p:spPr>
           <a:xfrm>
-            <a:off x="896112" y="1664208"/>
-            <a:ext cx="4791456" cy="4169664"/>
+            <a:off x="896112" y="1463040"/>
+            <a:ext cx="4791456" cy="4261104"/>
           </a:xfrm>
           <a:prstGeom prst="rect">
             <a:avLst/>
@@ -23621,14 +21195,14 @@
       </p:sp>
       <p:sp>
         <p:nvSpPr>
-          <p:cNvPr id="12" name="mdpr:2-2-149bde:right:block-8-chunk-2"/>
+          <p:cNvPr id="9" name="mdpr:2-2-149bde:right:block-8-chunk-2"/>
           <p:cNvSpPr txBox="1"/>
           <p:nvPr/>
         </p:nvSpPr>
         <p:spPr>
           <a:xfrm>
-            <a:off x="6473952" y="1664208"/>
-            <a:ext cx="4791456" cy="4169664"/>
+            <a:off x="6473952" y="1463040"/>
+            <a:ext cx="4791456" cy="4261104"/>
           </a:xfrm>
           <a:prstGeom prst="rect">
             <a:avLst/>
@@ -23873,8 +21447,282 @@
         </p:nvSpPr>
         <p:spPr>
           <a:xfrm>
-            <a:off x="731520" y="1207008"/>
-            <a:ext cx="1325880" cy="54864"/>
+            <a:off x="955548" y="2574036"/>
+            <a:ext cx="10241280" cy="1024128"/>
+          </a:xfrm>
+          <a:prstGeom prst="roundRect">
+            <a:avLst>
+              <a:gd name="adj" fmla="val 5357"/>
+            </a:avLst>
+          </a:prstGeom>
+          <a:solidFill>
+            <a:srgbClr val="B8C3D2">
+              <a:alpha val="26000"/>
+            </a:srgbClr>
+          </a:solidFill>
+          <a:ln w="12700">
+            <a:solidFill>
+              <a:srgbClr val="D1DAE7">
+                <a:alpha val="0"/>
+              </a:srgbClr>
+            </a:solidFill>
+            <a:prstDash val="solid"/>
+          </a:ln>
+          <a:effectLst>
+            <a:outerShdw sx="100000" sy="100000" kx="0" ky="0" algn="bl" rotWithShape="0" blurRad="13970" dist="50800" dir="2700000">
+              <a:srgbClr val="AAB5C4">
+                <a:alpha val="20000"/>
+              </a:srgbClr>
+            </a:outerShdw>
+          </a:effectLst>
+        </p:spPr>
+      </p:sp>
+      <p:sp>
+        <p:nvSpPr>
+          <p:cNvPr id="8" name="Shape 6"/>
+          <p:cNvSpPr/>
+          <p:nvPr/>
+        </p:nvSpPr>
+        <p:spPr>
+          <a:xfrm>
+            <a:off x="882396" y="2491740"/>
+            <a:ext cx="10241280" cy="1024128"/>
+          </a:xfrm>
+          <a:prstGeom prst="roundRect">
+            <a:avLst>
+              <a:gd name="adj" fmla="val 5357"/>
+            </a:avLst>
+          </a:prstGeom>
+          <a:solidFill>
+            <a:srgbClr val="FFFFFF">
+              <a:alpha val="42000"/>
+            </a:srgbClr>
+          </a:solidFill>
+          <a:ln w="12700">
+            <a:solidFill>
+              <a:srgbClr val="FFFFFF">
+                <a:alpha val="0"/>
+              </a:srgbClr>
+            </a:solidFill>
+            <a:prstDash val="solid"/>
+          </a:ln>
+          <a:effectLst>
+            <a:outerShdw sx="100000" sy="100000" kx="0" ky="0" algn="bl" rotWithShape="0" blurRad="10160" dist="50800" dir="13500000">
+              <a:srgbClr val="FFFFFF">
+                <a:alpha val="36000"/>
+              </a:srgbClr>
+            </a:outerShdw>
+          </a:effectLst>
+        </p:spPr>
+      </p:sp>
+      <p:sp>
+        <p:nvSpPr>
+          <p:cNvPr id="9" name="Shape 7"/>
+          <p:cNvSpPr/>
+          <p:nvPr/>
+        </p:nvSpPr>
+        <p:spPr>
+          <a:xfrm>
+            <a:off x="914400" y="2523744"/>
+            <a:ext cx="10241280" cy="1024128"/>
+          </a:xfrm>
+          <a:prstGeom prst="roundRect">
+            <a:avLst>
+              <a:gd name="adj" fmla="val 5357"/>
+            </a:avLst>
+          </a:prstGeom>
+          <a:solidFill>
+            <a:srgbClr val="EEF3F8">
+              <a:alpha val="6000"/>
+            </a:srgbClr>
+          </a:solidFill>
+          <a:ln w="12700">
+            <a:solidFill>
+              <a:srgbClr val="FFFFFF">
+                <a:alpha val="28000"/>
+              </a:srgbClr>
+            </a:solidFill>
+            <a:prstDash val="solid"/>
+          </a:ln>
+        </p:spPr>
+      </p:sp>
+      <p:pic>
+        <p:nvPicPr>
+          <p:cNvPr id="10" name="Image 0" descr="preencoded.png">    </p:cNvPr>
+          <p:cNvPicPr>
+            <a:picLocks noChangeAspect="1"/>
+          </p:cNvPicPr>
+          <p:nvPr/>
+        </p:nvPicPr>
+        <p:blipFill>
+          <a:blip r:embed="rId1">
+            <a:extLst>
+              <a:ext uri="{96DAC541-7B7A-43D3-8B79-37D633B846F1}">
+                <asvg:svgBlip xmlns:asvg="http://schemas.microsoft.com/office/drawing/2016/SVG/main" r:embed="rId2"/>
+              </a:ext>
+            </a:extLst>
+          </a:blip>
+          <a:stretch>
+            <a:fillRect/>
+          </a:stretch>
+        </p:blipFill>
+        <p:spPr>
+          <a:xfrm>
+            <a:off x="914400" y="2523744"/>
+            <a:ext cx="10241280" cy="1024128"/>
+          </a:xfrm>
+          <a:prstGeom prst="rect">
+            <a:avLst/>
+          </a:prstGeom>
+        </p:spPr>
+      </p:pic>
+      <p:sp>
+        <p:nvSpPr>
+          <p:cNvPr id="11" name="Shape 8"/>
+          <p:cNvSpPr/>
+          <p:nvPr/>
+        </p:nvSpPr>
+        <p:spPr>
+          <a:xfrm>
+            <a:off x="955548" y="3899916"/>
+            <a:ext cx="10241280" cy="1024128"/>
+          </a:xfrm>
+          <a:prstGeom prst="roundRect">
+            <a:avLst>
+              <a:gd name="adj" fmla="val 5357"/>
+            </a:avLst>
+          </a:prstGeom>
+          <a:solidFill>
+            <a:srgbClr val="B8C3D2">
+              <a:alpha val="26000"/>
+            </a:srgbClr>
+          </a:solidFill>
+          <a:ln w="12700">
+            <a:solidFill>
+              <a:srgbClr val="D1DAE7">
+                <a:alpha val="0"/>
+              </a:srgbClr>
+            </a:solidFill>
+            <a:prstDash val="solid"/>
+          </a:ln>
+          <a:effectLst>
+            <a:outerShdw sx="100000" sy="100000" kx="0" ky="0" algn="bl" rotWithShape="0" blurRad="13970" dist="50800" dir="2700000">
+              <a:srgbClr val="AAB5C4">
+                <a:alpha val="20000"/>
+              </a:srgbClr>
+            </a:outerShdw>
+          </a:effectLst>
+        </p:spPr>
+      </p:sp>
+      <p:sp>
+        <p:nvSpPr>
+          <p:cNvPr id="12" name="Shape 9"/>
+          <p:cNvSpPr/>
+          <p:nvPr/>
+        </p:nvSpPr>
+        <p:spPr>
+          <a:xfrm>
+            <a:off x="882396" y="3817620"/>
+            <a:ext cx="10241280" cy="1024128"/>
+          </a:xfrm>
+          <a:prstGeom prst="roundRect">
+            <a:avLst>
+              <a:gd name="adj" fmla="val 5357"/>
+            </a:avLst>
+          </a:prstGeom>
+          <a:solidFill>
+            <a:srgbClr val="FFFFFF">
+              <a:alpha val="42000"/>
+            </a:srgbClr>
+          </a:solidFill>
+          <a:ln w="12700">
+            <a:solidFill>
+              <a:srgbClr val="FFFFFF">
+                <a:alpha val="0"/>
+              </a:srgbClr>
+            </a:solidFill>
+            <a:prstDash val="solid"/>
+          </a:ln>
+          <a:effectLst>
+            <a:outerShdw sx="100000" sy="100000" kx="0" ky="0" algn="bl" rotWithShape="0" blurRad="10160" dist="50800" dir="13500000">
+              <a:srgbClr val="FFFFFF">
+                <a:alpha val="36000"/>
+              </a:srgbClr>
+            </a:outerShdw>
+          </a:effectLst>
+        </p:spPr>
+      </p:sp>
+      <p:sp>
+        <p:nvSpPr>
+          <p:cNvPr id="13" name="Shape 10"/>
+          <p:cNvSpPr/>
+          <p:nvPr/>
+        </p:nvSpPr>
+        <p:spPr>
+          <a:xfrm>
+            <a:off x="914400" y="3849624"/>
+            <a:ext cx="10241280" cy="1024128"/>
+          </a:xfrm>
+          <a:prstGeom prst="roundRect">
+            <a:avLst>
+              <a:gd name="adj" fmla="val 5357"/>
+            </a:avLst>
+          </a:prstGeom>
+          <a:solidFill>
+            <a:srgbClr val="EEF3F8">
+              <a:alpha val="6000"/>
+            </a:srgbClr>
+          </a:solidFill>
+          <a:ln w="12700">
+            <a:solidFill>
+              <a:srgbClr val="FFFFFF">
+                <a:alpha val="28000"/>
+              </a:srgbClr>
+            </a:solidFill>
+            <a:prstDash val="solid"/>
+          </a:ln>
+        </p:spPr>
+      </p:sp>
+      <p:pic>
+        <p:nvPicPr>
+          <p:cNvPr id="14" name="Image 1" descr="preencoded.png">    </p:cNvPr>
+          <p:cNvPicPr>
+            <a:picLocks noChangeAspect="1"/>
+          </p:cNvPicPr>
+          <p:nvPr/>
+        </p:nvPicPr>
+        <p:blipFill>
+          <a:blip r:embed="rId3">
+            <a:extLst>
+              <a:ext uri="{96DAC541-7B7A-43D3-8B79-37D633B846F1}">
+                <asvg:svgBlip xmlns:asvg="http://schemas.microsoft.com/office/drawing/2016/SVG/main" r:embed="rId4"/>
+              </a:ext>
+            </a:extLst>
+          </a:blip>
+          <a:stretch>
+            <a:fillRect/>
+          </a:stretch>
+        </p:blipFill>
+        <p:spPr>
+          <a:xfrm>
+            <a:off x="914400" y="3849624"/>
+            <a:ext cx="10241280" cy="1024128"/>
+          </a:xfrm>
+          <a:prstGeom prst="rect">
+            <a:avLst/>
+          </a:prstGeom>
+        </p:spPr>
+      </p:pic>
+      <p:sp>
+        <p:nvSpPr>
+          <p:cNvPr id="15" name="Shape 11"/>
+          <p:cNvSpPr/>
+          <p:nvPr/>
+        </p:nvSpPr>
+        <p:spPr>
+          <a:xfrm>
+            <a:off x="914400" y="2523744"/>
+            <a:ext cx="73152" cy="1024128"/>
           </a:xfrm>
           <a:prstGeom prst="rect">
             <a:avLst/>
@@ -23894,24 +21742,24 @@
       </p:sp>
       <p:sp>
         <p:nvSpPr>
-          <p:cNvPr id="8" name="Shape 6"/>
-          <p:cNvSpPr/>
-          <p:nvPr/>
-        </p:nvSpPr>
-        <p:spPr>
-          <a:xfrm>
-            <a:off x="822960" y="1554480"/>
-            <a:ext cx="4937760" cy="73152"/>
+          <p:cNvPr id="16" name="Shape 12"/>
+          <p:cNvSpPr/>
+          <p:nvPr/>
+        </p:nvSpPr>
+        <p:spPr>
+          <a:xfrm>
+            <a:off x="914400" y="3849624"/>
+            <a:ext cx="73152" cy="1024128"/>
           </a:xfrm>
           <a:prstGeom prst="rect">
             <a:avLst/>
           </a:prstGeom>
           <a:solidFill>
-            <a:srgbClr val="5D7FA4"/>
-          </a:solidFill>
-          <a:ln w="12700">
-            <a:solidFill>
-              <a:srgbClr val="5D7FA4">
+            <a:srgbClr val="D8E2EE"/>
+          </a:solidFill>
+          <a:ln w="12700">
+            <a:solidFill>
+              <a:srgbClr val="D8E2EE">
                 <a:alpha val="0"/>
               </a:srgbClr>
             </a:solidFill>
@@ -23921,34 +21769,7 @@
       </p:sp>
       <p:sp>
         <p:nvSpPr>
-          <p:cNvPr id="9" name="Shape 7"/>
-          <p:cNvSpPr/>
-          <p:nvPr/>
-        </p:nvSpPr>
-        <p:spPr>
-          <a:xfrm>
-            <a:off x="6400800" y="1554480"/>
-            <a:ext cx="4937760" cy="73152"/>
-          </a:xfrm>
-          <a:prstGeom prst="rect">
-            <a:avLst/>
-          </a:prstGeom>
-          <a:solidFill>
-            <a:srgbClr val="5D7FA4"/>
-          </a:solidFill>
-          <a:ln w="12700">
-            <a:solidFill>
-              <a:srgbClr val="5D7FA4">
-                <a:alpha val="0"/>
-              </a:srgbClr>
-            </a:solidFill>
-            <a:prstDash val="solid"/>
-          </a:ln>
-        </p:spPr>
-      </p:sp>
-      <p:sp>
-        <p:nvSpPr>
-          <p:cNvPr id="10" name="mdpr:1-2-5a84f1:title:__title:1-2-5a84f1"/>
+          <p:cNvPr id="17" name="mdpr:1-2-5a84f1:title:__title:1-2-5a84f1"/>
           <p:cNvSpPr txBox="1"/>
           <p:nvPr/>
         </p:nvSpPr>
@@ -23990,14 +21811,14 @@
       </p:sp>
       <p:sp>
         <p:nvSpPr>
-          <p:cNvPr id="11" name="mdpr:1-2-5a84f1:left:block-10-chunk-1"/>
+          <p:cNvPr id="18" name="mdpr:1-2-5a84f1:item-1:block-10-chunk-1"/>
           <p:cNvSpPr txBox="1"/>
           <p:nvPr/>
         </p:nvSpPr>
         <p:spPr>
           <a:xfrm>
-            <a:off x="896112" y="1664208"/>
-            <a:ext cx="4791456" cy="4169664"/>
+            <a:off x="1133856" y="2615916"/>
+            <a:ext cx="9820656" cy="839785"/>
           </a:xfrm>
           <a:prstGeom prst="rect">
             <a:avLst/>
@@ -24006,7 +21827,7 @@
           <a:ln/>
         </p:spPr>
         <p:txBody>
-          <a:bodyPr wrap="square" lIns="0" tIns="25400" rIns="25400" bIns="0" rtlCol="0" anchor="t"/>
+          <a:bodyPr wrap="square" lIns="0" tIns="25400" rIns="25400" bIns="0" rtlCol="0" anchor="ctr"/>
           <a:lstStyle/>
           <a:p>
             <a:pPr algn="l" indent="0" marL="0">
@@ -24024,7 +21845,7 @@
                 <a:ea typeface="Pretendard" pitchFamily="34" charset="-122"/>
                 <a:cs typeface="Pretendard" pitchFamily="34" charset="-120"/>
               </a:rPr>
-              <a:t>- Headings</a:t>
+              <a:t>Headings</a:t>
             </a:r>
             <a:pPr algn="l" indent="0" marL="0">
               <a:lnSpc>
@@ -24049,14 +21870,14 @@
       </p:sp>
       <p:sp>
         <p:nvSpPr>
-          <p:cNvPr id="12" name="mdpr:1-2-5a84f1:right:block-10-chunk-1"/>
+          <p:cNvPr id="19" name="mdpr:1-2-5a84f1:item-2:block-10-chunk-1"/>
           <p:cNvSpPr txBox="1"/>
           <p:nvPr/>
         </p:nvSpPr>
         <p:spPr>
           <a:xfrm>
-            <a:off x="6473952" y="1664208"/>
-            <a:ext cx="4791456" cy="4169664"/>
+            <a:off x="1133856" y="3941796"/>
+            <a:ext cx="9820656" cy="839785"/>
           </a:xfrm>
           <a:prstGeom prst="rect">
             <a:avLst/>
@@ -24065,7 +21886,7 @@
           <a:ln/>
         </p:spPr>
         <p:txBody>
-          <a:bodyPr wrap="square" lIns="0" tIns="25400" rIns="25400" bIns="0" rtlCol="0" anchor="t"/>
+          <a:bodyPr wrap="square" lIns="0" tIns="25400" rIns="25400" bIns="0" rtlCol="0" anchor="ctr"/>
           <a:lstStyle/>
           <a:p>
             <a:pPr algn="l" indent="0" marL="0">
@@ -24083,7 +21904,7 @@
                 <a:ea typeface="Pretendard" pitchFamily="34" charset="-122"/>
                 <a:cs typeface="Pretendard" pitchFamily="34" charset="-120"/>
               </a:rPr>
-              <a:t>- Lists</a:t>
+              <a:t>Lists</a:t>
             </a:r>
             <a:pPr algn="l" indent="0" marL="0">
               <a:lnSpc>
